--- a/paxos.pptx
+++ b/paxos.pptx
@@ -387,7 +387,7 @@
             <a:pPr indent="0" algn="r">
               <a:buNone/>
             </a:pPr>
-            <a:fld id="{4160179C-ECEB-453A-9A46-CA63DC466548}" type="slidenum">
+            <a:fld id="{9AF8495C-D80D-4F38-A04A-D43F62F9FAA2}" type="slidenum">
               <a:rPr lang="fr-FR" sz="1400" b="0" u="none" strike="noStrike">
                 <a:solidFill>
                   <a:srgbClr val="000000"/>
@@ -445,7 +445,7 @@
         <p:spPr>
           <a:xfrm>
             <a:off x="685800" y="1143000"/>
-            <a:ext cx="5486040" cy="3085920"/>
+            <a:ext cx="5485680" cy="3085560"/>
           </a:xfrm>
           <a:prstGeom prst="rect">
             <a:avLst/>
@@ -468,7 +468,7 @@
         <p:spPr>
           <a:xfrm>
             <a:off x="685800" y="4400640"/>
-            <a:ext cx="5486040" cy="3600000"/>
+            <a:ext cx="5485680" cy="3599640"/>
           </a:xfrm>
           <a:prstGeom prst="rect">
             <a:avLst/>
@@ -510,7 +510,7 @@
         <p:spPr>
           <a:xfrm>
             <a:off x="3884760" y="8685360"/>
-            <a:ext cx="2971440" cy="458280"/>
+            <a:ext cx="2971080" cy="457920"/>
           </a:xfrm>
           <a:prstGeom prst="rect">
             <a:avLst/>
@@ -530,6 +530,9 @@
                 <a:spcPct val="100000"/>
               </a:lnSpc>
               <a:buNone/>
+              <a:tabLst>
+                <a:tab pos="0" algn="l"/>
+              </a:tabLst>
               <a:defRPr lang="en-US" sz="1200" b="0" u="none" strike="noStrike">
                 <a:solidFill>
                   <a:schemeClr val="dk1"/>
@@ -547,8 +550,11 @@
                 <a:spcPct val="100000"/>
               </a:lnSpc>
               <a:buNone/>
+              <a:tabLst>
+                <a:tab pos="0" algn="l"/>
+              </a:tabLst>
             </a:pPr>
-            <a:fld id="{D1E623C2-D6DB-4AFA-95C1-06B196195CFF}" type="slidenum">
+            <a:fld id="{8FAF017A-1B14-4017-81E8-B9BD758DAD5E}" type="slidenum">
               <a:rPr lang="en-US" sz="1200" b="0" u="none" strike="noStrike">
                 <a:solidFill>
                   <a:schemeClr val="dk1"/>
@@ -606,7 +612,7 @@
         <p:spPr>
           <a:xfrm>
             <a:off x="685800" y="1143000"/>
-            <a:ext cx="5486040" cy="3085920"/>
+            <a:ext cx="5485680" cy="3085560"/>
           </a:xfrm>
           <a:prstGeom prst="rect">
             <a:avLst/>
@@ -629,7 +635,7 @@
         <p:spPr>
           <a:xfrm>
             <a:off x="685800" y="4400640"/>
-            <a:ext cx="5486040" cy="3600000"/>
+            <a:ext cx="5485680" cy="3599640"/>
           </a:xfrm>
           <a:prstGeom prst="rect">
             <a:avLst/>
@@ -671,7 +677,7 @@
         <p:spPr>
           <a:xfrm>
             <a:off x="3884760" y="8685360"/>
-            <a:ext cx="2971440" cy="458280"/>
+            <a:ext cx="2971080" cy="457920"/>
           </a:xfrm>
           <a:prstGeom prst="rect">
             <a:avLst/>
@@ -691,6 +697,9 @@
                 <a:spcPct val="100000"/>
               </a:lnSpc>
               <a:buNone/>
+              <a:tabLst>
+                <a:tab pos="0" algn="l"/>
+              </a:tabLst>
               <a:defRPr lang="en-US" sz="1200" b="0" u="none" strike="noStrike">
                 <a:solidFill>
                   <a:schemeClr val="dk1"/>
@@ -708,8 +717,11 @@
                 <a:spcPct val="100000"/>
               </a:lnSpc>
               <a:buNone/>
+              <a:tabLst>
+                <a:tab pos="0" algn="l"/>
+              </a:tabLst>
             </a:pPr>
-            <a:fld id="{8F180623-1491-408B-B370-0D4013109746}" type="slidenum">
+            <a:fld id="{EC9FAC33-6ED8-408E-82B1-287A0528D320}" type="slidenum">
               <a:rPr lang="en-US" sz="1200" b="0" u="none" strike="noStrike">
                 <a:solidFill>
                   <a:schemeClr val="dk1"/>
@@ -719,7 +731,7 @@
                 <a:latin typeface="+mn-lt"/>
                 <a:ea typeface="+mn-ea"/>
               </a:rPr>
-              <a:t>1</a:t>
+              <a:t>&lt;numéro&gt;</a:t>
             </a:fld>
             <a:endParaRPr lang="fr-FR" sz="1200" b="0" u="none" strike="noStrike">
               <a:solidFill>
@@ -767,7 +779,7 @@
         <p:spPr>
           <a:xfrm>
             <a:off x="685800" y="1143000"/>
-            <a:ext cx="5486040" cy="3085920"/>
+            <a:ext cx="5485680" cy="3085560"/>
           </a:xfrm>
           <a:prstGeom prst="rect">
             <a:avLst/>
@@ -790,7 +802,7 @@
         <p:spPr>
           <a:xfrm>
             <a:off x="685800" y="4400640"/>
-            <a:ext cx="5486040" cy="3600000"/>
+            <a:ext cx="5485680" cy="3599640"/>
           </a:xfrm>
           <a:prstGeom prst="rect">
             <a:avLst/>
@@ -832,7 +844,7 @@
         <p:spPr>
           <a:xfrm>
             <a:off x="3884760" y="8685360"/>
-            <a:ext cx="2971440" cy="458280"/>
+            <a:ext cx="2971080" cy="457920"/>
           </a:xfrm>
           <a:prstGeom prst="rect">
             <a:avLst/>
@@ -852,6 +864,9 @@
                 <a:spcPct val="100000"/>
               </a:lnSpc>
               <a:buNone/>
+              <a:tabLst>
+                <a:tab pos="0" algn="l"/>
+              </a:tabLst>
               <a:defRPr lang="en-US" sz="1200" b="0" u="none" strike="noStrike">
                 <a:solidFill>
                   <a:schemeClr val="dk1"/>
@@ -869,8 +884,11 @@
                 <a:spcPct val="100000"/>
               </a:lnSpc>
               <a:buNone/>
+              <a:tabLst>
+                <a:tab pos="0" algn="l"/>
+              </a:tabLst>
             </a:pPr>
-            <a:fld id="{507B108F-28A2-4167-BC5F-12D17DFCCC03}" type="slidenum">
+            <a:fld id="{D187B97B-4FF2-4B58-B074-16D46A5B03D5}" type="slidenum">
               <a:rPr lang="en-US" sz="1200" b="0" u="none" strike="noStrike">
                 <a:solidFill>
                   <a:schemeClr val="dk1"/>
@@ -880,7 +898,7 @@
                 <a:latin typeface="+mn-lt"/>
                 <a:ea typeface="+mn-ea"/>
               </a:rPr>
-              <a:t>1</a:t>
+              <a:t>&lt;numéro&gt;</a:t>
             </a:fld>
             <a:endParaRPr lang="fr-FR" sz="1200" b="0" u="none" strike="noStrike">
               <a:solidFill>
@@ -928,7 +946,7 @@
         <p:spPr>
           <a:xfrm>
             <a:off x="685800" y="1143000"/>
-            <a:ext cx="5486040" cy="3085920"/>
+            <a:ext cx="5485680" cy="3085560"/>
           </a:xfrm>
           <a:prstGeom prst="rect">
             <a:avLst/>
@@ -951,7 +969,7 @@
         <p:spPr>
           <a:xfrm>
             <a:off x="685800" y="4400640"/>
-            <a:ext cx="5486040" cy="3600000"/>
+            <a:ext cx="5485680" cy="3599640"/>
           </a:xfrm>
           <a:prstGeom prst="rect">
             <a:avLst/>
@@ -993,7 +1011,7 @@
         <p:spPr>
           <a:xfrm>
             <a:off x="3884760" y="8685360"/>
-            <a:ext cx="2971440" cy="458280"/>
+            <a:ext cx="2971080" cy="457920"/>
           </a:xfrm>
           <a:prstGeom prst="rect">
             <a:avLst/>
@@ -1013,6 +1031,9 @@
                 <a:spcPct val="100000"/>
               </a:lnSpc>
               <a:buNone/>
+              <a:tabLst>
+                <a:tab pos="0" algn="l"/>
+              </a:tabLst>
               <a:defRPr lang="en-US" sz="1200" b="0" u="none" strike="noStrike">
                 <a:solidFill>
                   <a:schemeClr val="dk1"/>
@@ -1030,8 +1051,11 @@
                 <a:spcPct val="100000"/>
               </a:lnSpc>
               <a:buNone/>
+              <a:tabLst>
+                <a:tab pos="0" algn="l"/>
+              </a:tabLst>
             </a:pPr>
-            <a:fld id="{2E1F56A9-59FD-4713-8F3F-FABEB3193E5E}" type="slidenum">
+            <a:fld id="{305CEB14-7A65-4856-B182-3AB8BEC2ECC1}" type="slidenum">
               <a:rPr lang="en-US" sz="1200" b="0" u="none" strike="noStrike">
                 <a:solidFill>
                   <a:schemeClr val="dk1"/>
@@ -1041,7 +1065,7 @@
                 <a:latin typeface="+mn-lt"/>
                 <a:ea typeface="+mn-ea"/>
               </a:rPr>
-              <a:t>1</a:t>
+              <a:t>&lt;numéro&gt;</a:t>
             </a:fld>
             <a:endParaRPr lang="fr-FR" sz="1200" b="0" u="none" strike="noStrike">
               <a:solidFill>
@@ -1089,7 +1113,7 @@
         <p:spPr>
           <a:xfrm>
             <a:off x="685800" y="1143000"/>
-            <a:ext cx="5486040" cy="3085920"/>
+            <a:ext cx="5485680" cy="3085560"/>
           </a:xfrm>
           <a:prstGeom prst="rect">
             <a:avLst/>
@@ -1112,7 +1136,7 @@
         <p:spPr>
           <a:xfrm>
             <a:off x="685800" y="4400640"/>
-            <a:ext cx="5486040" cy="3600000"/>
+            <a:ext cx="5485680" cy="3599640"/>
           </a:xfrm>
           <a:prstGeom prst="rect">
             <a:avLst/>
@@ -1154,7 +1178,7 @@
         <p:spPr>
           <a:xfrm>
             <a:off x="3884760" y="8685360"/>
-            <a:ext cx="2971440" cy="458280"/>
+            <a:ext cx="2971080" cy="457920"/>
           </a:xfrm>
           <a:prstGeom prst="rect">
             <a:avLst/>
@@ -1174,6 +1198,9 @@
                 <a:spcPct val="100000"/>
               </a:lnSpc>
               <a:buNone/>
+              <a:tabLst>
+                <a:tab pos="0" algn="l"/>
+              </a:tabLst>
               <a:defRPr lang="en-US" sz="1200" b="0" u="none" strike="noStrike">
                 <a:solidFill>
                   <a:schemeClr val="dk1"/>
@@ -1191,8 +1218,11 @@
                 <a:spcPct val="100000"/>
               </a:lnSpc>
               <a:buNone/>
+              <a:tabLst>
+                <a:tab pos="0" algn="l"/>
+              </a:tabLst>
             </a:pPr>
-            <a:fld id="{F25349C1-45A6-4BB5-A1F8-922E819A8652}" type="slidenum">
+            <a:fld id="{D88F7BF0-BF25-4F0A-BD9D-30C94BFEBB29}" type="slidenum">
               <a:rPr lang="en-US" sz="1200" b="0" u="none" strike="noStrike">
                 <a:solidFill>
                   <a:schemeClr val="dk1"/>
@@ -1202,7 +1232,7 @@
                 <a:latin typeface="+mn-lt"/>
                 <a:ea typeface="+mn-ea"/>
               </a:rPr>
-              <a:t>1</a:t>
+              <a:t>&lt;numéro&gt;</a:t>
             </a:fld>
             <a:endParaRPr lang="fr-FR" sz="1200" b="0" u="none" strike="noStrike">
               <a:solidFill>
@@ -1250,7 +1280,7 @@
         <p:spPr>
           <a:xfrm>
             <a:off x="685800" y="1143000"/>
-            <a:ext cx="5486040" cy="3085920"/>
+            <a:ext cx="5485680" cy="3085560"/>
           </a:xfrm>
           <a:prstGeom prst="rect">
             <a:avLst/>
@@ -1273,7 +1303,7 @@
         <p:spPr>
           <a:xfrm>
             <a:off x="685800" y="4400640"/>
-            <a:ext cx="5486040" cy="3600000"/>
+            <a:ext cx="5485680" cy="3599640"/>
           </a:xfrm>
           <a:prstGeom prst="rect">
             <a:avLst/>
@@ -1315,7 +1345,7 @@
         <p:spPr>
           <a:xfrm>
             <a:off x="3884760" y="8685360"/>
-            <a:ext cx="2971440" cy="458280"/>
+            <a:ext cx="2971080" cy="457920"/>
           </a:xfrm>
           <a:prstGeom prst="rect">
             <a:avLst/>
@@ -1335,6 +1365,9 @@
                 <a:spcPct val="100000"/>
               </a:lnSpc>
               <a:buNone/>
+              <a:tabLst>
+                <a:tab pos="0" algn="l"/>
+              </a:tabLst>
               <a:defRPr lang="en-US" sz="1200" b="0" u="none" strike="noStrike">
                 <a:solidFill>
                   <a:schemeClr val="dk1"/>
@@ -1352,8 +1385,11 @@
                 <a:spcPct val="100000"/>
               </a:lnSpc>
               <a:buNone/>
+              <a:tabLst>
+                <a:tab pos="0" algn="l"/>
+              </a:tabLst>
             </a:pPr>
-            <a:fld id="{A28B0167-2356-4416-9E92-3B914B03A052}" type="slidenum">
+            <a:fld id="{E6A63D6E-5958-4AA9-A2E2-5C8D4F596E5E}" type="slidenum">
               <a:rPr lang="en-US" sz="1200" b="0" u="none" strike="noStrike">
                 <a:solidFill>
                   <a:schemeClr val="dk1"/>
@@ -1363,7 +1399,7 @@
                 <a:latin typeface="+mn-lt"/>
                 <a:ea typeface="+mn-ea"/>
               </a:rPr>
-              <a:t>1</a:t>
+              <a:t>&lt;numéro&gt;</a:t>
             </a:fld>
             <a:endParaRPr lang="fr-FR" sz="1200" b="0" u="none" strike="noStrike">
               <a:solidFill>
@@ -1411,7 +1447,7 @@
         <p:spPr>
           <a:xfrm>
             <a:off x="685800" y="1143000"/>
-            <a:ext cx="5486040" cy="3085920"/>
+            <a:ext cx="5485680" cy="3085560"/>
           </a:xfrm>
           <a:prstGeom prst="rect">
             <a:avLst/>
@@ -1434,7 +1470,7 @@
         <p:spPr>
           <a:xfrm>
             <a:off x="685800" y="4400640"/>
-            <a:ext cx="5486040" cy="3600000"/>
+            <a:ext cx="5485680" cy="3599640"/>
           </a:xfrm>
           <a:prstGeom prst="rect">
             <a:avLst/>
@@ -1476,7 +1512,7 @@
         <p:spPr>
           <a:xfrm>
             <a:off x="3884760" y="8685360"/>
-            <a:ext cx="2971440" cy="458280"/>
+            <a:ext cx="2971080" cy="457920"/>
           </a:xfrm>
           <a:prstGeom prst="rect">
             <a:avLst/>
@@ -1496,6 +1532,9 @@
                 <a:spcPct val="100000"/>
               </a:lnSpc>
               <a:buNone/>
+              <a:tabLst>
+                <a:tab pos="0" algn="l"/>
+              </a:tabLst>
               <a:defRPr lang="en-US" sz="1200" b="0" u="none" strike="noStrike">
                 <a:solidFill>
                   <a:schemeClr val="dk1"/>
@@ -1513,8 +1552,11 @@
                 <a:spcPct val="100000"/>
               </a:lnSpc>
               <a:buNone/>
+              <a:tabLst>
+                <a:tab pos="0" algn="l"/>
+              </a:tabLst>
             </a:pPr>
-            <a:fld id="{63066690-70E6-40A9-B130-D02D6A974DB6}" type="slidenum">
+            <a:fld id="{27169466-1359-49E8-BD1B-71A8F986F537}" type="slidenum">
               <a:rPr lang="en-US" sz="1200" b="0" u="none" strike="noStrike">
                 <a:solidFill>
                   <a:schemeClr val="dk1"/>
@@ -1524,7 +1566,7 @@
                 <a:latin typeface="+mn-lt"/>
                 <a:ea typeface="+mn-ea"/>
               </a:rPr>
-              <a:t>1</a:t>
+              <a:t>&lt;numéro&gt;</a:t>
             </a:fld>
             <a:endParaRPr lang="fr-FR" sz="1200" b="0" u="none" strike="noStrike">
               <a:solidFill>
@@ -1572,7 +1614,7 @@
         <p:spPr>
           <a:xfrm>
             <a:off x="685800" y="1143000"/>
-            <a:ext cx="5486040" cy="3085920"/>
+            <a:ext cx="5485680" cy="3085560"/>
           </a:xfrm>
           <a:prstGeom prst="rect">
             <a:avLst/>
@@ -1595,7 +1637,7 @@
         <p:spPr>
           <a:xfrm>
             <a:off x="685800" y="4400640"/>
-            <a:ext cx="5486040" cy="3600000"/>
+            <a:ext cx="5485680" cy="3599640"/>
           </a:xfrm>
           <a:prstGeom prst="rect">
             <a:avLst/>
@@ -1637,7 +1679,7 @@
         <p:spPr>
           <a:xfrm>
             <a:off x="3884760" y="8685360"/>
-            <a:ext cx="2971440" cy="458280"/>
+            <a:ext cx="2971080" cy="457920"/>
           </a:xfrm>
           <a:prstGeom prst="rect">
             <a:avLst/>
@@ -1657,6 +1699,9 @@
                 <a:spcPct val="100000"/>
               </a:lnSpc>
               <a:buNone/>
+              <a:tabLst>
+                <a:tab pos="0" algn="l"/>
+              </a:tabLst>
               <a:defRPr lang="en-US" sz="1200" b="0" u="none" strike="noStrike">
                 <a:solidFill>
                   <a:schemeClr val="dk1"/>
@@ -1674,8 +1719,11 @@
                 <a:spcPct val="100000"/>
               </a:lnSpc>
               <a:buNone/>
+              <a:tabLst>
+                <a:tab pos="0" algn="l"/>
+              </a:tabLst>
             </a:pPr>
-            <a:fld id="{1E5769E8-4E9D-41DF-9306-A7C1E405E16F}" type="slidenum">
+            <a:fld id="{30C18386-29F4-4C6F-B660-4C4AE6C6253B}" type="slidenum">
               <a:rPr lang="en-US" sz="1200" b="0" u="none" strike="noStrike">
                 <a:solidFill>
                   <a:schemeClr val="dk1"/>
@@ -1685,7 +1733,7 @@
                 <a:latin typeface="+mn-lt"/>
                 <a:ea typeface="+mn-ea"/>
               </a:rPr>
-              <a:t>1</a:t>
+              <a:t>&lt;numéro&gt;</a:t>
             </a:fld>
             <a:endParaRPr lang="fr-FR" sz="1200" b="0" u="none" strike="noStrike">
               <a:solidFill>
@@ -1733,7 +1781,7 @@
         <p:spPr>
           <a:xfrm>
             <a:off x="685800" y="1143000"/>
-            <a:ext cx="5486040" cy="3085920"/>
+            <a:ext cx="5485680" cy="3085560"/>
           </a:xfrm>
           <a:prstGeom prst="rect">
             <a:avLst/>
@@ -1756,7 +1804,7 @@
         <p:spPr>
           <a:xfrm>
             <a:off x="685800" y="4400640"/>
-            <a:ext cx="5486040" cy="3600000"/>
+            <a:ext cx="5485680" cy="3599640"/>
           </a:xfrm>
           <a:prstGeom prst="rect">
             <a:avLst/>
@@ -1798,7 +1846,7 @@
         <p:spPr>
           <a:xfrm>
             <a:off x="3884760" y="8685360"/>
-            <a:ext cx="2971440" cy="458280"/>
+            <a:ext cx="2971080" cy="457920"/>
           </a:xfrm>
           <a:prstGeom prst="rect">
             <a:avLst/>
@@ -1818,6 +1866,9 @@
                 <a:spcPct val="100000"/>
               </a:lnSpc>
               <a:buNone/>
+              <a:tabLst>
+                <a:tab pos="0" algn="l"/>
+              </a:tabLst>
               <a:defRPr lang="en-US" sz="1200" b="0" u="none" strike="noStrike">
                 <a:solidFill>
                   <a:schemeClr val="dk1"/>
@@ -1835,8 +1886,11 @@
                 <a:spcPct val="100000"/>
               </a:lnSpc>
               <a:buNone/>
+              <a:tabLst>
+                <a:tab pos="0" algn="l"/>
+              </a:tabLst>
             </a:pPr>
-            <a:fld id="{FF702CA7-D88E-4824-9E01-69DBDEF0F568}" type="slidenum">
+            <a:fld id="{F86467B3-E679-4182-ABD4-EAC531094D73}" type="slidenum">
               <a:rPr lang="en-US" sz="1200" b="0" u="none" strike="noStrike">
                 <a:solidFill>
                   <a:schemeClr val="dk1"/>
@@ -1846,7 +1900,7 @@
                 <a:latin typeface="+mn-lt"/>
                 <a:ea typeface="+mn-ea"/>
               </a:rPr>
-              <a:t>1</a:t>
+              <a:t>&lt;numéro&gt;</a:t>
             </a:fld>
             <a:endParaRPr lang="fr-FR" sz="1200" b="0" u="none" strike="noStrike">
               <a:solidFill>
@@ -1894,7 +1948,7 @@
         <p:spPr>
           <a:xfrm>
             <a:off x="685800" y="1143000"/>
-            <a:ext cx="5486040" cy="3085920"/>
+            <a:ext cx="5485680" cy="3085560"/>
           </a:xfrm>
           <a:prstGeom prst="rect">
             <a:avLst/>
@@ -1917,7 +1971,7 @@
         <p:spPr>
           <a:xfrm>
             <a:off x="685800" y="4400640"/>
-            <a:ext cx="5486040" cy="3600000"/>
+            <a:ext cx="5485680" cy="3599640"/>
           </a:xfrm>
           <a:prstGeom prst="rect">
             <a:avLst/>
@@ -1959,7 +2013,7 @@
         <p:spPr>
           <a:xfrm>
             <a:off x="3884760" y="8685360"/>
-            <a:ext cx="2971440" cy="458280"/>
+            <a:ext cx="2971080" cy="457920"/>
           </a:xfrm>
           <a:prstGeom prst="rect">
             <a:avLst/>
@@ -1979,6 +2033,9 @@
                 <a:spcPct val="100000"/>
               </a:lnSpc>
               <a:buNone/>
+              <a:tabLst>
+                <a:tab pos="0" algn="l"/>
+              </a:tabLst>
               <a:defRPr lang="en-US" sz="1200" b="0" u="none" strike="noStrike">
                 <a:solidFill>
                   <a:schemeClr val="dk1"/>
@@ -1996,8 +2053,11 @@
                 <a:spcPct val="100000"/>
               </a:lnSpc>
               <a:buNone/>
+              <a:tabLst>
+                <a:tab pos="0" algn="l"/>
+              </a:tabLst>
             </a:pPr>
-            <a:fld id="{59DAA35E-BD74-4967-B6C0-2AE5EB0E84EA}" type="slidenum">
+            <a:fld id="{2C4CB60E-8163-42B1-B458-9D5F5B965578}" type="slidenum">
               <a:rPr lang="en-US" sz="1200" b="0" u="none" strike="noStrike">
                 <a:solidFill>
                   <a:schemeClr val="dk1"/>
@@ -2007,7 +2067,7 @@
                 <a:latin typeface="+mn-lt"/>
                 <a:ea typeface="+mn-ea"/>
               </a:rPr>
-              <a:t>1</a:t>
+              <a:t>&lt;numéro&gt;</a:t>
             </a:fld>
             <a:endParaRPr lang="fr-FR" sz="1200" b="0" u="none" strike="noStrike">
               <a:solidFill>
@@ -2055,7 +2115,7 @@
         <p:spPr>
           <a:xfrm>
             <a:off x="685800" y="1143000"/>
-            <a:ext cx="5486040" cy="3085920"/>
+            <a:ext cx="5485680" cy="3085560"/>
           </a:xfrm>
           <a:prstGeom prst="rect">
             <a:avLst/>
@@ -2078,7 +2138,7 @@
         <p:spPr>
           <a:xfrm>
             <a:off x="685800" y="4400640"/>
-            <a:ext cx="5486040" cy="3600000"/>
+            <a:ext cx="5485680" cy="3599640"/>
           </a:xfrm>
           <a:prstGeom prst="rect">
             <a:avLst/>
@@ -2120,7 +2180,7 @@
         <p:spPr>
           <a:xfrm>
             <a:off x="3884760" y="8685360"/>
-            <a:ext cx="2971440" cy="458280"/>
+            <a:ext cx="2971080" cy="457920"/>
           </a:xfrm>
           <a:prstGeom prst="rect">
             <a:avLst/>
@@ -2140,6 +2200,9 @@
                 <a:spcPct val="100000"/>
               </a:lnSpc>
               <a:buNone/>
+              <a:tabLst>
+                <a:tab pos="0" algn="l"/>
+              </a:tabLst>
               <a:defRPr lang="en-US" sz="1200" b="0" u="none" strike="noStrike">
                 <a:solidFill>
                   <a:schemeClr val="dk1"/>
@@ -2157,8 +2220,11 @@
                 <a:spcPct val="100000"/>
               </a:lnSpc>
               <a:buNone/>
+              <a:tabLst>
+                <a:tab pos="0" algn="l"/>
+              </a:tabLst>
             </a:pPr>
-            <a:fld id="{63F014B2-6EEB-4FDA-8F78-45628E65B4C5}" type="slidenum">
+            <a:fld id="{CAE59E42-3905-440C-A024-E84453A55A17}" type="slidenum">
               <a:rPr lang="en-US" sz="1200" b="0" u="none" strike="noStrike">
                 <a:solidFill>
                   <a:schemeClr val="dk1"/>
@@ -2168,7 +2234,7 @@
                 <a:latin typeface="+mn-lt"/>
                 <a:ea typeface="+mn-ea"/>
               </a:rPr>
-              <a:t>1</a:t>
+              <a:t>&lt;numéro&gt;</a:t>
             </a:fld>
             <a:endParaRPr lang="fr-FR" sz="1200" b="0" u="none" strike="noStrike">
               <a:solidFill>
@@ -2216,7 +2282,7 @@
         <p:spPr>
           <a:xfrm>
             <a:off x="685800" y="1143000"/>
-            <a:ext cx="5486040" cy="3085920"/>
+            <a:ext cx="5485680" cy="3085560"/>
           </a:xfrm>
           <a:prstGeom prst="rect">
             <a:avLst/>
@@ -2239,7 +2305,7 @@
         <p:spPr>
           <a:xfrm>
             <a:off x="685800" y="4400640"/>
-            <a:ext cx="5486040" cy="3600000"/>
+            <a:ext cx="5485680" cy="3599640"/>
           </a:xfrm>
           <a:prstGeom prst="rect">
             <a:avLst/>
@@ -2281,7 +2347,7 @@
         <p:spPr>
           <a:xfrm>
             <a:off x="3884760" y="8685360"/>
-            <a:ext cx="2971440" cy="458280"/>
+            <a:ext cx="2971080" cy="457920"/>
           </a:xfrm>
           <a:prstGeom prst="rect">
             <a:avLst/>
@@ -2301,6 +2367,9 @@
                 <a:spcPct val="100000"/>
               </a:lnSpc>
               <a:buNone/>
+              <a:tabLst>
+                <a:tab pos="0" algn="l"/>
+              </a:tabLst>
               <a:defRPr lang="en-US" sz="1200" b="0" u="none" strike="noStrike">
                 <a:solidFill>
                   <a:schemeClr val="dk1"/>
@@ -2318,8 +2387,11 @@
                 <a:spcPct val="100000"/>
               </a:lnSpc>
               <a:buNone/>
+              <a:tabLst>
+                <a:tab pos="0" algn="l"/>
+              </a:tabLst>
             </a:pPr>
-            <a:fld id="{06ED81B9-7C0C-40F4-9424-484204F4AE57}" type="slidenum">
+            <a:fld id="{6C8196F5-C7E7-4C0A-B62F-56FEDCBC6B44}" type="slidenum">
               <a:rPr lang="en-US" sz="1200" b="0" u="none" strike="noStrike">
                 <a:solidFill>
                   <a:schemeClr val="dk1"/>
@@ -2377,7 +2449,7 @@
         <p:spPr>
           <a:xfrm>
             <a:off x="685800" y="1143000"/>
-            <a:ext cx="5486040" cy="3085920"/>
+            <a:ext cx="5485680" cy="3085560"/>
           </a:xfrm>
           <a:prstGeom prst="rect">
             <a:avLst/>
@@ -2400,7 +2472,7 @@
         <p:spPr>
           <a:xfrm>
             <a:off x="685800" y="4400640"/>
-            <a:ext cx="5486040" cy="3600000"/>
+            <a:ext cx="5485680" cy="3599640"/>
           </a:xfrm>
           <a:prstGeom prst="rect">
             <a:avLst/>
@@ -2442,7 +2514,7 @@
         <p:spPr>
           <a:xfrm>
             <a:off x="3884760" y="8685360"/>
-            <a:ext cx="2971440" cy="458280"/>
+            <a:ext cx="2971080" cy="457920"/>
           </a:xfrm>
           <a:prstGeom prst="rect">
             <a:avLst/>
@@ -2462,6 +2534,9 @@
                 <a:spcPct val="100000"/>
               </a:lnSpc>
               <a:buNone/>
+              <a:tabLst>
+                <a:tab pos="0" algn="l"/>
+              </a:tabLst>
               <a:defRPr lang="en-US" sz="1200" b="0" u="none" strike="noStrike">
                 <a:solidFill>
                   <a:schemeClr val="dk1"/>
@@ -2479,8 +2554,11 @@
                 <a:spcPct val="100000"/>
               </a:lnSpc>
               <a:buNone/>
+              <a:tabLst>
+                <a:tab pos="0" algn="l"/>
+              </a:tabLst>
             </a:pPr>
-            <a:fld id="{FADB27C8-3496-4EFA-92DE-F44920ED0C51}" type="slidenum">
+            <a:fld id="{52ED550E-C7F3-4244-A64D-784911EF0C61}" type="slidenum">
               <a:rPr lang="en-US" sz="1200" b="0" u="none" strike="noStrike">
                 <a:solidFill>
                   <a:schemeClr val="dk1"/>
@@ -2490,7 +2568,7 @@
                 <a:latin typeface="+mn-lt"/>
                 <a:ea typeface="+mn-ea"/>
               </a:rPr>
-              <a:t>1</a:t>
+              <a:t>&lt;numéro&gt;</a:t>
             </a:fld>
             <a:endParaRPr lang="fr-FR" sz="1200" b="0" u="none" strike="noStrike">
               <a:solidFill>
@@ -2538,7 +2616,7 @@
         <p:spPr>
           <a:xfrm>
             <a:off x="685800" y="1143000"/>
-            <a:ext cx="5486040" cy="3085920"/>
+            <a:ext cx="5485680" cy="3085560"/>
           </a:xfrm>
           <a:prstGeom prst="rect">
             <a:avLst/>
@@ -2561,7 +2639,7 @@
         <p:spPr>
           <a:xfrm>
             <a:off x="685800" y="4400640"/>
-            <a:ext cx="5486040" cy="3600000"/>
+            <a:ext cx="5485680" cy="3599640"/>
           </a:xfrm>
           <a:prstGeom prst="rect">
             <a:avLst/>
@@ -2603,7 +2681,7 @@
         <p:spPr>
           <a:xfrm>
             <a:off x="3884760" y="8685360"/>
-            <a:ext cx="2971440" cy="458280"/>
+            <a:ext cx="2971080" cy="457920"/>
           </a:xfrm>
           <a:prstGeom prst="rect">
             <a:avLst/>
@@ -2623,6 +2701,9 @@
                 <a:spcPct val="100000"/>
               </a:lnSpc>
               <a:buNone/>
+              <a:tabLst>
+                <a:tab pos="0" algn="l"/>
+              </a:tabLst>
               <a:defRPr lang="en-US" sz="1200" b="0" u="none" strike="noStrike">
                 <a:solidFill>
                   <a:schemeClr val="dk1"/>
@@ -2640,8 +2721,11 @@
                 <a:spcPct val="100000"/>
               </a:lnSpc>
               <a:buNone/>
+              <a:tabLst>
+                <a:tab pos="0" algn="l"/>
+              </a:tabLst>
             </a:pPr>
-            <a:fld id="{69E945A3-AF0A-4F56-AED9-1D5A74C4C0E4}" type="slidenum">
+            <a:fld id="{443C5A98-00C6-4672-B1AB-621A39B414D1}" type="slidenum">
               <a:rPr lang="en-US" sz="1200" b="0" u="none" strike="noStrike">
                 <a:solidFill>
                   <a:schemeClr val="dk1"/>
@@ -2651,7 +2735,7 @@
                 <a:latin typeface="+mn-lt"/>
                 <a:ea typeface="+mn-ea"/>
               </a:rPr>
-              <a:t>1</a:t>
+              <a:t>&lt;numéro&gt;</a:t>
             </a:fld>
             <a:endParaRPr lang="fr-FR" sz="1200" b="0" u="none" strike="noStrike">
               <a:solidFill>
@@ -2699,7 +2783,7 @@
         <p:spPr>
           <a:xfrm>
             <a:off x="685800" y="1143000"/>
-            <a:ext cx="5486040" cy="3085920"/>
+            <a:ext cx="5485680" cy="3085560"/>
           </a:xfrm>
           <a:prstGeom prst="rect">
             <a:avLst/>
@@ -2722,7 +2806,7 @@
         <p:spPr>
           <a:xfrm>
             <a:off x="685800" y="4400640"/>
-            <a:ext cx="5486040" cy="3600000"/>
+            <a:ext cx="5485680" cy="3599640"/>
           </a:xfrm>
           <a:prstGeom prst="rect">
             <a:avLst/>
@@ -2764,7 +2848,7 @@
         <p:spPr>
           <a:xfrm>
             <a:off x="3884760" y="8685360"/>
-            <a:ext cx="2971440" cy="458280"/>
+            <a:ext cx="2971080" cy="457920"/>
           </a:xfrm>
           <a:prstGeom prst="rect">
             <a:avLst/>
@@ -2784,6 +2868,9 @@
                 <a:spcPct val="100000"/>
               </a:lnSpc>
               <a:buNone/>
+              <a:tabLst>
+                <a:tab pos="0" algn="l"/>
+              </a:tabLst>
               <a:defRPr lang="en-US" sz="1200" b="0" u="none" strike="noStrike">
                 <a:solidFill>
                   <a:schemeClr val="dk1"/>
@@ -2801,8 +2888,11 @@
                 <a:spcPct val="100000"/>
               </a:lnSpc>
               <a:buNone/>
+              <a:tabLst>
+                <a:tab pos="0" algn="l"/>
+              </a:tabLst>
             </a:pPr>
-            <a:fld id="{44D193CE-BDFB-4369-99D3-C80E37491CA8}" type="slidenum">
+            <a:fld id="{53808BAC-E8B4-408C-B1D9-498A54A8DC1B}" type="slidenum">
               <a:rPr lang="en-US" sz="1200" b="0" u="none" strike="noStrike">
                 <a:solidFill>
                   <a:schemeClr val="dk1"/>
@@ -2812,7 +2902,7 @@
                 <a:latin typeface="+mn-lt"/>
                 <a:ea typeface="+mn-ea"/>
               </a:rPr>
-              <a:t>1</a:t>
+              <a:t>&lt;numéro&gt;</a:t>
             </a:fld>
             <a:endParaRPr lang="fr-FR" sz="1200" b="0" u="none" strike="noStrike">
               <a:solidFill>
@@ -2860,7 +2950,7 @@
         <p:spPr>
           <a:xfrm>
             <a:off x="685800" y="1143000"/>
-            <a:ext cx="5486040" cy="3085920"/>
+            <a:ext cx="5485680" cy="3085560"/>
           </a:xfrm>
           <a:prstGeom prst="rect">
             <a:avLst/>
@@ -2883,7 +2973,7 @@
         <p:spPr>
           <a:xfrm>
             <a:off x="685800" y="4400640"/>
-            <a:ext cx="5486040" cy="3600000"/>
+            <a:ext cx="5485680" cy="3599640"/>
           </a:xfrm>
           <a:prstGeom prst="rect">
             <a:avLst/>
@@ -2925,7 +3015,7 @@
         <p:spPr>
           <a:xfrm>
             <a:off x="3884760" y="8685360"/>
-            <a:ext cx="2971440" cy="458280"/>
+            <a:ext cx="2971080" cy="457920"/>
           </a:xfrm>
           <a:prstGeom prst="rect">
             <a:avLst/>
@@ -2945,6 +3035,9 @@
                 <a:spcPct val="100000"/>
               </a:lnSpc>
               <a:buNone/>
+              <a:tabLst>
+                <a:tab pos="0" algn="l"/>
+              </a:tabLst>
               <a:defRPr lang="en-US" sz="1200" b="0" u="none" strike="noStrike">
                 <a:solidFill>
                   <a:schemeClr val="dk1"/>
@@ -2962,8 +3055,11 @@
                 <a:spcPct val="100000"/>
               </a:lnSpc>
               <a:buNone/>
+              <a:tabLst>
+                <a:tab pos="0" algn="l"/>
+              </a:tabLst>
             </a:pPr>
-            <a:fld id="{E9B2AFD0-968D-4FB8-8A5B-644534BFC734}" type="slidenum">
+            <a:fld id="{7A82E6A6-C5D5-4C10-979B-1F0462DD6211}" type="slidenum">
               <a:rPr lang="en-US" sz="1200" b="0" u="none" strike="noStrike">
                 <a:solidFill>
                   <a:schemeClr val="dk1"/>
@@ -2973,7 +3069,7 @@
                 <a:latin typeface="+mn-lt"/>
                 <a:ea typeface="+mn-ea"/>
               </a:rPr>
-              <a:t>1</a:t>
+              <a:t>&lt;numéro&gt;</a:t>
             </a:fld>
             <a:endParaRPr lang="fr-FR" sz="1200" b="0" u="none" strike="noStrike">
               <a:solidFill>
@@ -3021,7 +3117,7 @@
         <p:spPr>
           <a:xfrm>
             <a:off x="685800" y="1143000"/>
-            <a:ext cx="5486040" cy="3085920"/>
+            <a:ext cx="5485680" cy="3085560"/>
           </a:xfrm>
           <a:prstGeom prst="rect">
             <a:avLst/>
@@ -3044,7 +3140,7 @@
         <p:spPr>
           <a:xfrm>
             <a:off x="685800" y="4400640"/>
-            <a:ext cx="5486040" cy="3600000"/>
+            <a:ext cx="5485680" cy="3599640"/>
           </a:xfrm>
           <a:prstGeom prst="rect">
             <a:avLst/>
@@ -3086,7 +3182,7 @@
         <p:spPr>
           <a:xfrm>
             <a:off x="3884760" y="8685360"/>
-            <a:ext cx="2971440" cy="458280"/>
+            <a:ext cx="2971080" cy="457920"/>
           </a:xfrm>
           <a:prstGeom prst="rect">
             <a:avLst/>
@@ -3106,6 +3202,9 @@
                 <a:spcPct val="100000"/>
               </a:lnSpc>
               <a:buNone/>
+              <a:tabLst>
+                <a:tab pos="0" algn="l"/>
+              </a:tabLst>
               <a:defRPr lang="en-US" sz="1200" b="0" u="none" strike="noStrike">
                 <a:solidFill>
                   <a:schemeClr val="dk1"/>
@@ -3123,8 +3222,11 @@
                 <a:spcPct val="100000"/>
               </a:lnSpc>
               <a:buNone/>
+              <a:tabLst>
+                <a:tab pos="0" algn="l"/>
+              </a:tabLst>
             </a:pPr>
-            <a:fld id="{38C00BED-7AF0-40DC-B9DD-6CA2FA71BC7E}" type="slidenum">
+            <a:fld id="{6001CACE-53D2-430D-AB55-1432B3B77F53}" type="slidenum">
               <a:rPr lang="en-US" sz="1200" b="0" u="none" strike="noStrike">
                 <a:solidFill>
                   <a:schemeClr val="dk1"/>
@@ -3134,7 +3236,7 @@
                 <a:latin typeface="+mn-lt"/>
                 <a:ea typeface="+mn-ea"/>
               </a:rPr>
-              <a:t>1</a:t>
+              <a:t>&lt;numéro&gt;</a:t>
             </a:fld>
             <a:endParaRPr lang="fr-FR" sz="1200" b="0" u="none" strike="noStrike">
               <a:solidFill>
@@ -3182,7 +3284,7 @@
         <p:spPr>
           <a:xfrm>
             <a:off x="685800" y="1143000"/>
-            <a:ext cx="5486040" cy="3085920"/>
+            <a:ext cx="5485680" cy="3085560"/>
           </a:xfrm>
           <a:prstGeom prst="rect">
             <a:avLst/>
@@ -3205,7 +3307,7 @@
         <p:spPr>
           <a:xfrm>
             <a:off x="685800" y="4400640"/>
-            <a:ext cx="5486040" cy="3600000"/>
+            <a:ext cx="5485680" cy="3599640"/>
           </a:xfrm>
           <a:prstGeom prst="rect">
             <a:avLst/>
@@ -3247,7 +3349,7 @@
         <p:spPr>
           <a:xfrm>
             <a:off x="3884760" y="8685360"/>
-            <a:ext cx="2971440" cy="458280"/>
+            <a:ext cx="2971080" cy="457920"/>
           </a:xfrm>
           <a:prstGeom prst="rect">
             <a:avLst/>
@@ -3267,6 +3369,9 @@
                 <a:spcPct val="100000"/>
               </a:lnSpc>
               <a:buNone/>
+              <a:tabLst>
+                <a:tab pos="0" algn="l"/>
+              </a:tabLst>
               <a:defRPr lang="en-US" sz="1200" b="0" u="none" strike="noStrike">
                 <a:solidFill>
                   <a:schemeClr val="dk1"/>
@@ -3284,8 +3389,11 @@
                 <a:spcPct val="100000"/>
               </a:lnSpc>
               <a:buNone/>
+              <a:tabLst>
+                <a:tab pos="0" algn="l"/>
+              </a:tabLst>
             </a:pPr>
-            <a:fld id="{C0DB8ABD-9168-4CDC-973C-F40C50873277}" type="slidenum">
+            <a:fld id="{DFBB2698-35B5-4C10-9859-DDAFEFEC7BB8}" type="slidenum">
               <a:rPr lang="en-US" sz="1200" b="0" u="none" strike="noStrike">
                 <a:solidFill>
                   <a:schemeClr val="dk1"/>
@@ -3343,7 +3451,7 @@
         <p:spPr>
           <a:xfrm>
             <a:off x="685800" y="1143000"/>
-            <a:ext cx="5486040" cy="3085920"/>
+            <a:ext cx="5485680" cy="3085560"/>
           </a:xfrm>
           <a:prstGeom prst="rect">
             <a:avLst/>
@@ -3366,7 +3474,7 @@
         <p:spPr>
           <a:xfrm>
             <a:off x="685800" y="4400640"/>
-            <a:ext cx="5486040" cy="3600000"/>
+            <a:ext cx="5485680" cy="3599640"/>
           </a:xfrm>
           <a:prstGeom prst="rect">
             <a:avLst/>
@@ -3408,7 +3516,7 @@
         <p:spPr>
           <a:xfrm>
             <a:off x="3884760" y="8685360"/>
-            <a:ext cx="2971440" cy="458280"/>
+            <a:ext cx="2971080" cy="457920"/>
           </a:xfrm>
           <a:prstGeom prst="rect">
             <a:avLst/>
@@ -3428,6 +3536,9 @@
                 <a:spcPct val="100000"/>
               </a:lnSpc>
               <a:buNone/>
+              <a:tabLst>
+                <a:tab pos="0" algn="l"/>
+              </a:tabLst>
               <a:defRPr lang="en-US" sz="1200" b="0" u="none" strike="noStrike">
                 <a:solidFill>
                   <a:schemeClr val="dk1"/>
@@ -3445,8 +3556,11 @@
                 <a:spcPct val="100000"/>
               </a:lnSpc>
               <a:buNone/>
+              <a:tabLst>
+                <a:tab pos="0" algn="l"/>
+              </a:tabLst>
             </a:pPr>
-            <a:fld id="{8796EBAB-2654-42B7-868E-CDA01A2C8E54}" type="slidenum">
+            <a:fld id="{18637419-2581-451B-BF2C-CE486361277E}" type="slidenum">
               <a:rPr lang="en-US" sz="1200" b="0" u="none" strike="noStrike">
                 <a:solidFill>
                   <a:schemeClr val="dk1"/>
@@ -3504,7 +3618,7 @@
         <p:spPr>
           <a:xfrm>
             <a:off x="685800" y="1143000"/>
-            <a:ext cx="5486040" cy="3085920"/>
+            <a:ext cx="5485680" cy="3085560"/>
           </a:xfrm>
           <a:prstGeom prst="rect">
             <a:avLst/>
@@ -3527,7 +3641,7 @@
         <p:spPr>
           <a:xfrm>
             <a:off x="685800" y="4400640"/>
-            <a:ext cx="5486040" cy="3600000"/>
+            <a:ext cx="5485680" cy="3599640"/>
           </a:xfrm>
           <a:prstGeom prst="rect">
             <a:avLst/>
@@ -3569,7 +3683,7 @@
         <p:spPr>
           <a:xfrm>
             <a:off x="3884760" y="8685360"/>
-            <a:ext cx="2971440" cy="458280"/>
+            <a:ext cx="2971080" cy="457920"/>
           </a:xfrm>
           <a:prstGeom prst="rect">
             <a:avLst/>
@@ -3589,6 +3703,9 @@
                 <a:spcPct val="100000"/>
               </a:lnSpc>
               <a:buNone/>
+              <a:tabLst>
+                <a:tab pos="0" algn="l"/>
+              </a:tabLst>
               <a:defRPr lang="en-US" sz="1200" b="0" u="none" strike="noStrike">
                 <a:solidFill>
                   <a:schemeClr val="dk1"/>
@@ -3606,8 +3723,11 @@
                 <a:spcPct val="100000"/>
               </a:lnSpc>
               <a:buNone/>
+              <a:tabLst>
+                <a:tab pos="0" algn="l"/>
+              </a:tabLst>
             </a:pPr>
-            <a:fld id="{D90CDC3E-D53F-45EF-9585-2883E728522F}" type="slidenum">
+            <a:fld id="{54C188F0-02C8-4753-8576-C16532A567E5}" type="slidenum">
               <a:rPr lang="en-US" sz="1200" b="0" u="none" strike="noStrike">
                 <a:solidFill>
                   <a:schemeClr val="dk1"/>
@@ -3665,7 +3785,7 @@
         <p:spPr>
           <a:xfrm>
             <a:off x="685800" y="1143000"/>
-            <a:ext cx="5486040" cy="3085920"/>
+            <a:ext cx="5485680" cy="3085560"/>
           </a:xfrm>
           <a:prstGeom prst="rect">
             <a:avLst/>
@@ -3688,7 +3808,7 @@
         <p:spPr>
           <a:xfrm>
             <a:off x="685800" y="4400640"/>
-            <a:ext cx="5486040" cy="3600000"/>
+            <a:ext cx="5485680" cy="3599640"/>
           </a:xfrm>
           <a:prstGeom prst="rect">
             <a:avLst/>
@@ -3730,7 +3850,7 @@
         <p:spPr>
           <a:xfrm>
             <a:off x="3884760" y="8685360"/>
-            <a:ext cx="2971440" cy="458280"/>
+            <a:ext cx="2971080" cy="457920"/>
           </a:xfrm>
           <a:prstGeom prst="rect">
             <a:avLst/>
@@ -3750,6 +3870,9 @@
                 <a:spcPct val="100000"/>
               </a:lnSpc>
               <a:buNone/>
+              <a:tabLst>
+                <a:tab pos="0" algn="l"/>
+              </a:tabLst>
               <a:defRPr lang="en-US" sz="1200" b="0" u="none" strike="noStrike">
                 <a:solidFill>
                   <a:schemeClr val="dk1"/>
@@ -3767,8 +3890,11 @@
                 <a:spcPct val="100000"/>
               </a:lnSpc>
               <a:buNone/>
+              <a:tabLst>
+                <a:tab pos="0" algn="l"/>
+              </a:tabLst>
             </a:pPr>
-            <a:fld id="{2AE8FEFE-8A62-4FC0-8C95-5080120686D0}" type="slidenum">
+            <a:fld id="{98C72D56-4D69-4422-8A14-B2146437332C}" type="slidenum">
               <a:rPr lang="en-US" sz="1200" b="0" u="none" strike="noStrike">
                 <a:solidFill>
                   <a:schemeClr val="dk1"/>
@@ -3826,7 +3952,7 @@
         <p:spPr>
           <a:xfrm>
             <a:off x="685800" y="1143000"/>
-            <a:ext cx="5486040" cy="3085920"/>
+            <a:ext cx="5485680" cy="3085560"/>
           </a:xfrm>
           <a:prstGeom prst="rect">
             <a:avLst/>
@@ -3849,7 +3975,7 @@
         <p:spPr>
           <a:xfrm>
             <a:off x="685800" y="4400640"/>
-            <a:ext cx="5486040" cy="3600000"/>
+            <a:ext cx="5485680" cy="3599640"/>
           </a:xfrm>
           <a:prstGeom prst="rect">
             <a:avLst/>
@@ -3891,7 +4017,7 @@
         <p:spPr>
           <a:xfrm>
             <a:off x="3884760" y="8685360"/>
-            <a:ext cx="2971440" cy="458280"/>
+            <a:ext cx="2971080" cy="457920"/>
           </a:xfrm>
           <a:prstGeom prst="rect">
             <a:avLst/>
@@ -3911,6 +4037,9 @@
                 <a:spcPct val="100000"/>
               </a:lnSpc>
               <a:buNone/>
+              <a:tabLst>
+                <a:tab pos="0" algn="l"/>
+              </a:tabLst>
               <a:defRPr lang="en-US" sz="1200" b="0" u="none" strike="noStrike">
                 <a:solidFill>
                   <a:schemeClr val="dk1"/>
@@ -3928,8 +4057,11 @@
                 <a:spcPct val="100000"/>
               </a:lnSpc>
               <a:buNone/>
+              <a:tabLst>
+                <a:tab pos="0" algn="l"/>
+              </a:tabLst>
             </a:pPr>
-            <a:fld id="{F1202952-463B-407F-8926-3281D128D336}" type="slidenum">
+            <a:fld id="{32912E28-DA29-4992-B2A5-04A909785AE8}" type="slidenum">
               <a:rPr lang="en-US" sz="1200" b="0" u="none" strike="noStrike">
                 <a:solidFill>
                   <a:schemeClr val="dk1"/>
@@ -3987,7 +4119,7 @@
         <p:spPr>
           <a:xfrm>
             <a:off x="685800" y="1143000"/>
-            <a:ext cx="5486040" cy="3085920"/>
+            <a:ext cx="5485680" cy="3085560"/>
           </a:xfrm>
           <a:prstGeom prst="rect">
             <a:avLst/>
@@ -4010,7 +4142,7 @@
         <p:spPr>
           <a:xfrm>
             <a:off x="685800" y="4400640"/>
-            <a:ext cx="5486040" cy="3600000"/>
+            <a:ext cx="5485680" cy="3599640"/>
           </a:xfrm>
           <a:prstGeom prst="rect">
             <a:avLst/>
@@ -4052,7 +4184,7 @@
         <p:spPr>
           <a:xfrm>
             <a:off x="3884760" y="8685360"/>
-            <a:ext cx="2971440" cy="458280"/>
+            <a:ext cx="2971080" cy="457920"/>
           </a:xfrm>
           <a:prstGeom prst="rect">
             <a:avLst/>
@@ -4072,6 +4204,9 @@
                 <a:spcPct val="100000"/>
               </a:lnSpc>
               <a:buNone/>
+              <a:tabLst>
+                <a:tab pos="0" algn="l"/>
+              </a:tabLst>
               <a:defRPr lang="en-US" sz="1200" b="0" u="none" strike="noStrike">
                 <a:solidFill>
                   <a:schemeClr val="dk1"/>
@@ -4089,8 +4224,11 @@
                 <a:spcPct val="100000"/>
               </a:lnSpc>
               <a:buNone/>
+              <a:tabLst>
+                <a:tab pos="0" algn="l"/>
+              </a:tabLst>
             </a:pPr>
-            <a:fld id="{EB72C766-C1BE-42E4-832B-4C1EB78AA08D}" type="slidenum">
+            <a:fld id="{5EFCAEF7-B631-4F8C-AC95-7876D4892E8C}" type="slidenum">
               <a:rPr lang="en-US" sz="1200" b="0" u="none" strike="noStrike">
                 <a:solidFill>
                   <a:schemeClr val="dk1"/>
@@ -4148,7 +4286,7 @@
         <p:spPr>
           <a:xfrm>
             <a:off x="685800" y="1143000"/>
-            <a:ext cx="5486040" cy="3085920"/>
+            <a:ext cx="5485680" cy="3085560"/>
           </a:xfrm>
           <a:prstGeom prst="rect">
             <a:avLst/>
@@ -4171,7 +4309,7 @@
         <p:spPr>
           <a:xfrm>
             <a:off x="685800" y="4400640"/>
-            <a:ext cx="5486040" cy="3600000"/>
+            <a:ext cx="5485680" cy="3599640"/>
           </a:xfrm>
           <a:prstGeom prst="rect">
             <a:avLst/>
@@ -4213,7 +4351,7 @@
         <p:spPr>
           <a:xfrm>
             <a:off x="3884760" y="8685360"/>
-            <a:ext cx="2971440" cy="458280"/>
+            <a:ext cx="2971080" cy="457920"/>
           </a:xfrm>
           <a:prstGeom prst="rect">
             <a:avLst/>
@@ -4233,6 +4371,9 @@
                 <a:spcPct val="100000"/>
               </a:lnSpc>
               <a:buNone/>
+              <a:tabLst>
+                <a:tab pos="0" algn="l"/>
+              </a:tabLst>
               <a:defRPr lang="en-US" sz="1200" b="0" u="none" strike="noStrike">
                 <a:solidFill>
                   <a:schemeClr val="dk1"/>
@@ -4250,8 +4391,11 @@
                 <a:spcPct val="100000"/>
               </a:lnSpc>
               <a:buNone/>
+              <a:tabLst>
+                <a:tab pos="0" algn="l"/>
+              </a:tabLst>
             </a:pPr>
-            <a:fld id="{E3374352-5276-49D9-8472-5336A2F72932}" type="slidenum">
+            <a:fld id="{D433CBF9-9DF1-4775-8670-93A3E5D3EB77}" type="slidenum">
               <a:rPr lang="en-US" sz="1200" b="0" u="none" strike="noStrike">
                 <a:solidFill>
                   <a:schemeClr val="dk1"/>
@@ -4261,7 +4405,7 @@
                 <a:latin typeface="+mn-lt"/>
                 <a:ea typeface="+mn-ea"/>
               </a:rPr>
-              <a:t>1</a:t>
+              <a:t>&lt;numéro&gt;</a:t>
             </a:fld>
             <a:endParaRPr lang="fr-FR" sz="1200" b="0" u="none" strike="noStrike">
               <a:solidFill>
@@ -4355,6 +4499,9 @@
           <a:lstStyle>
             <a:lvl1pPr indent="0" algn="l">
               <a:buNone/>
+              <a:tabLst>
+                <a:tab pos="0" algn="l"/>
+              </a:tabLst>
               <a:defRPr lang="fr-FR" sz="1800" b="0" u="none" strike="noStrike">
                 <a:solidFill>
                   <a:schemeClr val="dk1"/>
@@ -4368,6 +4515,9 @@
           <a:p>
             <a:pPr indent="0" algn="l">
               <a:buNone/>
+              <a:tabLst>
+                <a:tab pos="0" algn="l"/>
+              </a:tabLst>
             </a:pPr>
             <a:r>
               <a:rPr lang="fr-FR" sz="1800" b="0" u="none" strike="noStrike">
@@ -4554,7 +4704,7 @@
             </a:lvl7pPr>
           </a:lstStyle>
           <a:p>
-            <a:pPr marL="432000" indent="-324000" algn="l">
+            <a:pPr indent="-324000" algn="l">
               <a:spcBef>
                 <a:spcPts val="1417"/>
               </a:spcBef>
@@ -4821,7 +4971,7 @@
         <p:spPr>
           <a:xfrm>
             <a:off x="0" y="0"/>
-            <a:ext cx="136800" cy="5143320"/>
+            <a:ext cx="136440" cy="5142960"/>
           </a:xfrm>
           <a:prstGeom prst="rect">
             <a:avLst/>
@@ -4840,7 +4990,7 @@
           <a:fontRef idx="minor"/>
         </p:style>
         <p:txBody>
-          <a:bodyPr lIns="90000" tIns="45000" rIns="90000" bIns="45000" anchor="t">
+          <a:bodyPr lIns="68400" tIns="45000" rIns="68400" bIns="45000" anchor="t">
             <a:noAutofit/>
           </a:bodyPr>
           <a:p>
@@ -4864,7 +5014,7 @@
         <p:spPr>
           <a:xfrm>
             <a:off x="137160" y="2240280"/>
-            <a:ext cx="9006480" cy="54360"/>
+            <a:ext cx="9006120" cy="54000"/>
           </a:xfrm>
           <a:prstGeom prst="rect">
             <a:avLst/>
@@ -4907,7 +5057,7 @@
         <p:spPr>
           <a:xfrm>
             <a:off x="457200" y="1097280"/>
-            <a:ext cx="8412120" cy="1279800"/>
+            <a:ext cx="8411760" cy="1279440"/>
           </a:xfrm>
           <a:prstGeom prst="rect">
             <a:avLst/>
@@ -4968,7 +5118,7 @@
         <p:spPr>
           <a:xfrm>
             <a:off x="457200" y="2514600"/>
-            <a:ext cx="8412120" cy="731160"/>
+            <a:ext cx="8411760" cy="730800"/>
           </a:xfrm>
           <a:prstGeom prst="rect">
             <a:avLst/>
@@ -5029,7 +5179,7 @@
         <p:spPr>
           <a:xfrm>
             <a:off x="457200" y="3383280"/>
-            <a:ext cx="8412120" cy="456840"/>
+            <a:ext cx="8411760" cy="456480"/>
           </a:xfrm>
           <a:prstGeom prst="rect">
             <a:avLst/>
@@ -5050,14 +5200,6 @@
             <a:noAutofit/>
           </a:bodyPr>
           <a:p>
-            <a:pPr defTabSz="914400">
-              <a:lnSpc>
-                <a:spcPct val="100000"/>
-              </a:lnSpc>
-              <a:tabLst>
-                <a:tab pos="0" algn="l"/>
-              </a:tabLst>
-            </a:pPr>
             <a:endParaRPr lang="fr-FR" sz="1800" b="0" u="none" strike="noStrike">
               <a:solidFill>
                 <a:srgbClr val="FFFFFF"/>
@@ -5115,7 +5257,7 @@
         <p:spPr>
           <a:xfrm>
             <a:off x="0" y="0"/>
-            <a:ext cx="9143640" cy="685440"/>
+            <a:ext cx="9143280" cy="685080"/>
           </a:xfrm>
           <a:prstGeom prst="rect">
             <a:avLst/>
@@ -5158,7 +5300,7 @@
         <p:spPr>
           <a:xfrm>
             <a:off x="274320" y="45720"/>
-            <a:ext cx="8595000" cy="594000"/>
+            <a:ext cx="8594640" cy="593640"/>
           </a:xfrm>
           <a:prstGeom prst="rect">
             <a:avLst/>
@@ -5219,7 +5361,7 @@
         <p:spPr>
           <a:xfrm>
             <a:off x="0" y="685800"/>
-            <a:ext cx="72720" cy="4457520"/>
+            <a:ext cx="72360" cy="4457160"/>
           </a:xfrm>
           <a:prstGeom prst="rect">
             <a:avLst/>
@@ -5238,7 +5380,7 @@
           <a:fontRef idx="minor"/>
         </p:style>
         <p:txBody>
-          <a:bodyPr lIns="90000" tIns="45000" rIns="90000" bIns="45000" anchor="t">
+          <a:bodyPr lIns="36360" tIns="45000" rIns="36360" bIns="45000" anchor="t">
             <a:noAutofit/>
           </a:bodyPr>
           <a:p>
@@ -5262,7 +5404,7 @@
         <p:spPr>
           <a:xfrm>
             <a:off x="201240" y="822960"/>
-            <a:ext cx="2742840" cy="456840"/>
+            <a:ext cx="2742480" cy="456480"/>
           </a:xfrm>
           <a:prstGeom prst="rect">
             <a:avLst/>
@@ -5305,7 +5447,7 @@
         <p:spPr>
           <a:xfrm>
             <a:off x="201240" y="822960"/>
-            <a:ext cx="2742840" cy="456840"/>
+            <a:ext cx="2742480" cy="456480"/>
           </a:xfrm>
           <a:prstGeom prst="rect">
             <a:avLst/>
@@ -5366,7 +5508,7 @@
         <p:spPr>
           <a:xfrm>
             <a:off x="292680" y="1325880"/>
-            <a:ext cx="2559960" cy="2285640"/>
+            <a:ext cx="2559600" cy="2285280"/>
           </a:xfrm>
           <a:prstGeom prst="rect">
             <a:avLst/>
@@ -5502,7 +5644,7 @@
         <p:spPr>
           <a:xfrm>
             <a:off x="3173040" y="822960"/>
-            <a:ext cx="2742840" cy="456840"/>
+            <a:ext cx="2742480" cy="456480"/>
           </a:xfrm>
           <a:prstGeom prst="rect">
             <a:avLst/>
@@ -5545,7 +5687,7 @@
         <p:spPr>
           <a:xfrm>
             <a:off x="3173040" y="822960"/>
-            <a:ext cx="2742840" cy="456840"/>
+            <a:ext cx="2742480" cy="456480"/>
           </a:xfrm>
           <a:prstGeom prst="rect">
             <a:avLst/>
@@ -5606,7 +5748,7 @@
         <p:spPr>
           <a:xfrm>
             <a:off x="3264480" y="1325880"/>
-            <a:ext cx="2559960" cy="2285640"/>
+            <a:ext cx="2559600" cy="2285280"/>
           </a:xfrm>
           <a:prstGeom prst="rect">
             <a:avLst/>
@@ -5742,7 +5884,7 @@
         <p:spPr>
           <a:xfrm>
             <a:off x="6144840" y="822960"/>
-            <a:ext cx="2742840" cy="456840"/>
+            <a:ext cx="2742480" cy="456480"/>
           </a:xfrm>
           <a:prstGeom prst="rect">
             <a:avLst/>
@@ -5785,7 +5927,7 @@
         <p:spPr>
           <a:xfrm>
             <a:off x="6144840" y="822960"/>
-            <a:ext cx="2742840" cy="456840"/>
+            <a:ext cx="2742480" cy="456480"/>
           </a:xfrm>
           <a:prstGeom prst="rect">
             <a:avLst/>
@@ -5846,7 +5988,7 @@
         <p:spPr>
           <a:xfrm>
             <a:off x="6236280" y="1325880"/>
-            <a:ext cx="2559960" cy="2285640"/>
+            <a:ext cx="2559600" cy="2285280"/>
           </a:xfrm>
           <a:prstGeom prst="rect">
             <a:avLst/>
@@ -5982,7 +6124,7 @@
         <p:spPr>
           <a:xfrm>
             <a:off x="274320" y="4389120"/>
-            <a:ext cx="8595000" cy="456840"/>
+            <a:ext cx="8594640" cy="456480"/>
           </a:xfrm>
           <a:prstGeom prst="rect">
             <a:avLst/>
@@ -6080,7 +6222,7 @@
         <p:spPr>
           <a:xfrm>
             <a:off x="0" y="0"/>
-            <a:ext cx="9143640" cy="91080"/>
+            <a:ext cx="9143280" cy="90720"/>
           </a:xfrm>
           <a:prstGeom prst="rect">
             <a:avLst/>
@@ -6123,7 +6265,7 @@
         <p:spPr>
           <a:xfrm>
             <a:off x="0" y="5052240"/>
-            <a:ext cx="9143640" cy="91080"/>
+            <a:ext cx="9143280" cy="90720"/>
           </a:xfrm>
           <a:prstGeom prst="rect">
             <a:avLst/>
@@ -6166,7 +6308,7 @@
         <p:spPr>
           <a:xfrm>
             <a:off x="457200" y="1645920"/>
-            <a:ext cx="8229240" cy="1828440"/>
+            <a:ext cx="8228880" cy="1828080"/>
           </a:xfrm>
           <a:prstGeom prst="rect">
             <a:avLst/>
@@ -6264,7 +6406,7 @@
         <p:spPr>
           <a:xfrm>
             <a:off x="0" y="0"/>
-            <a:ext cx="9143640" cy="685440"/>
+            <a:ext cx="9143280" cy="685080"/>
           </a:xfrm>
           <a:prstGeom prst="rect">
             <a:avLst/>
@@ -6307,7 +6449,7 @@
         <p:spPr>
           <a:xfrm>
             <a:off x="274320" y="45720"/>
-            <a:ext cx="8595000" cy="594000"/>
+            <a:ext cx="8594640" cy="593640"/>
           </a:xfrm>
           <a:prstGeom prst="rect">
             <a:avLst/>
@@ -6368,7 +6510,7 @@
         <p:spPr>
           <a:xfrm>
             <a:off x="0" y="685800"/>
-            <a:ext cx="72720" cy="4457520"/>
+            <a:ext cx="72360" cy="4457160"/>
           </a:xfrm>
           <a:prstGeom prst="rect">
             <a:avLst/>
@@ -6387,7 +6529,7 @@
           <a:fontRef idx="minor"/>
         </p:style>
         <p:txBody>
-          <a:bodyPr lIns="90000" tIns="45000" rIns="90000" bIns="45000" anchor="t">
+          <a:bodyPr lIns="36360" tIns="45000" rIns="36360" bIns="45000" anchor="t">
             <a:noAutofit/>
           </a:bodyPr>
           <a:p>
@@ -6411,7 +6553,7 @@
         <p:spPr>
           <a:xfrm>
             <a:off x="228600" y="777240"/>
-            <a:ext cx="4114440" cy="411120"/>
+            <a:ext cx="4114080" cy="410760"/>
           </a:xfrm>
           <a:prstGeom prst="rect">
             <a:avLst/>
@@ -6454,7 +6596,7 @@
         <p:spPr>
           <a:xfrm>
             <a:off x="228600" y="777240"/>
-            <a:ext cx="4114440" cy="411120"/>
+            <a:ext cx="4114080" cy="410760"/>
           </a:xfrm>
           <a:prstGeom prst="rect">
             <a:avLst/>
@@ -6515,7 +6657,7 @@
         <p:spPr>
           <a:xfrm>
             <a:off x="228600" y="1234440"/>
-            <a:ext cx="4114440" cy="2011320"/>
+            <a:ext cx="4114080" cy="2010960"/>
           </a:xfrm>
           <a:prstGeom prst="rect">
             <a:avLst/>
@@ -6651,7 +6793,7 @@
         <p:spPr>
           <a:xfrm>
             <a:off x="4800600" y="777240"/>
-            <a:ext cx="4114440" cy="411120"/>
+            <a:ext cx="4114080" cy="410760"/>
           </a:xfrm>
           <a:prstGeom prst="rect">
             <a:avLst/>
@@ -6694,7 +6836,7 @@
         <p:spPr>
           <a:xfrm>
             <a:off x="4800600" y="777240"/>
-            <a:ext cx="4114440" cy="411120"/>
+            <a:ext cx="4114080" cy="410760"/>
           </a:xfrm>
           <a:prstGeom prst="rect">
             <a:avLst/>
@@ -6755,7 +6897,7 @@
         <p:spPr>
           <a:xfrm>
             <a:off x="4800600" y="1234440"/>
-            <a:ext cx="4114440" cy="2011320"/>
+            <a:ext cx="4114080" cy="2010960"/>
           </a:xfrm>
           <a:prstGeom prst="rect">
             <a:avLst/>
@@ -6891,7 +7033,7 @@
         <p:spPr>
           <a:xfrm>
             <a:off x="228600" y="3429000"/>
-            <a:ext cx="8686440" cy="1371240"/>
+            <a:ext cx="8686080" cy="1370880"/>
           </a:xfrm>
           <a:prstGeom prst="rect">
             <a:avLst/>
@@ -6934,7 +7076,7 @@
         <p:spPr>
           <a:xfrm>
             <a:off x="365760" y="3493080"/>
-            <a:ext cx="8412120" cy="1234080"/>
+            <a:ext cx="8411760" cy="1233720"/>
           </a:xfrm>
           <a:prstGeom prst="rect">
             <a:avLst/>
@@ -7062,7 +7204,7 @@
         <p:spPr>
           <a:xfrm>
             <a:off x="0" y="0"/>
-            <a:ext cx="9143640" cy="685440"/>
+            <a:ext cx="9143280" cy="685080"/>
           </a:xfrm>
           <a:prstGeom prst="rect">
             <a:avLst/>
@@ -7105,7 +7247,7 @@
         <p:spPr>
           <a:xfrm>
             <a:off x="274320" y="45720"/>
-            <a:ext cx="8595000" cy="594000"/>
+            <a:ext cx="8594640" cy="593640"/>
           </a:xfrm>
           <a:prstGeom prst="rect">
             <a:avLst/>
@@ -7166,7 +7308,7 @@
         <p:spPr>
           <a:xfrm>
             <a:off x="0" y="685800"/>
-            <a:ext cx="72720" cy="4457520"/>
+            <a:ext cx="72360" cy="4457160"/>
           </a:xfrm>
           <a:prstGeom prst="rect">
             <a:avLst/>
@@ -7185,7 +7327,7 @@
           <a:fontRef idx="minor"/>
         </p:style>
         <p:txBody>
-          <a:bodyPr lIns="90000" tIns="45000" rIns="90000" bIns="45000" anchor="t">
+          <a:bodyPr lIns="36360" tIns="45000" rIns="36360" bIns="45000" anchor="t">
             <a:noAutofit/>
           </a:bodyPr>
           <a:p>
@@ -7209,7 +7351,7 @@
         <p:spPr>
           <a:xfrm>
             <a:off x="228600" y="777240"/>
-            <a:ext cx="4114440" cy="411120"/>
+            <a:ext cx="4114080" cy="410760"/>
           </a:xfrm>
           <a:prstGeom prst="rect">
             <a:avLst/>
@@ -7252,7 +7394,7 @@
         <p:spPr>
           <a:xfrm>
             <a:off x="228600" y="777240"/>
-            <a:ext cx="4114440" cy="411120"/>
+            <a:ext cx="4114080" cy="410760"/>
           </a:xfrm>
           <a:prstGeom prst="rect">
             <a:avLst/>
@@ -7313,7 +7455,7 @@
         <p:spPr>
           <a:xfrm>
             <a:off x="228600" y="1234440"/>
-            <a:ext cx="4114440" cy="2011320"/>
+            <a:ext cx="4114080" cy="2010960"/>
           </a:xfrm>
           <a:prstGeom prst="rect">
             <a:avLst/>
@@ -7484,7 +7626,7 @@
         <p:spPr>
           <a:xfrm>
             <a:off x="4800600" y="777240"/>
-            <a:ext cx="4114440" cy="411120"/>
+            <a:ext cx="4114080" cy="410760"/>
           </a:xfrm>
           <a:prstGeom prst="rect">
             <a:avLst/>
@@ -7527,7 +7669,7 @@
         <p:spPr>
           <a:xfrm>
             <a:off x="4800600" y="777240"/>
-            <a:ext cx="4114440" cy="411120"/>
+            <a:ext cx="4114080" cy="410760"/>
           </a:xfrm>
           <a:prstGeom prst="rect">
             <a:avLst/>
@@ -7588,7 +7730,7 @@
         <p:spPr>
           <a:xfrm>
             <a:off x="4800600" y="1234440"/>
-            <a:ext cx="4114440" cy="2011320"/>
+            <a:ext cx="4114080" cy="2010960"/>
           </a:xfrm>
           <a:prstGeom prst="rect">
             <a:avLst/>
@@ -7724,7 +7866,7 @@
         <p:spPr>
           <a:xfrm>
             <a:off x="228600" y="3429000"/>
-            <a:ext cx="8686440" cy="1371240"/>
+            <a:ext cx="8686080" cy="1370880"/>
           </a:xfrm>
           <a:prstGeom prst="rect">
             <a:avLst/>
@@ -7767,7 +7909,7 @@
         <p:spPr>
           <a:xfrm>
             <a:off x="365760" y="3493080"/>
-            <a:ext cx="8412120" cy="1234080"/>
+            <a:ext cx="8411760" cy="1233720"/>
           </a:xfrm>
           <a:prstGeom prst="rect">
             <a:avLst/>
@@ -7895,7 +8037,7 @@
         <p:spPr>
           <a:xfrm>
             <a:off x="0" y="0"/>
-            <a:ext cx="9143640" cy="685440"/>
+            <a:ext cx="9143280" cy="685080"/>
           </a:xfrm>
           <a:prstGeom prst="rect">
             <a:avLst/>
@@ -7938,7 +8080,7 @@
         <p:spPr>
           <a:xfrm>
             <a:off x="274320" y="45720"/>
-            <a:ext cx="8595000" cy="594000"/>
+            <a:ext cx="8594640" cy="593640"/>
           </a:xfrm>
           <a:prstGeom prst="rect">
             <a:avLst/>
@@ -7999,7 +8141,7 @@
         <p:spPr>
           <a:xfrm>
             <a:off x="0" y="685800"/>
-            <a:ext cx="72720" cy="4457520"/>
+            <a:ext cx="72360" cy="4457160"/>
           </a:xfrm>
           <a:prstGeom prst="rect">
             <a:avLst/>
@@ -8018,7 +8160,7 @@
           <a:fontRef idx="minor"/>
         </p:style>
         <p:txBody>
-          <a:bodyPr lIns="90000" tIns="45000" rIns="90000" bIns="45000" anchor="t">
+          <a:bodyPr lIns="36360" tIns="45000" rIns="36360" bIns="45000" anchor="t">
             <a:noAutofit/>
           </a:bodyPr>
           <a:p>
@@ -8042,7 +8184,7 @@
         <p:spPr>
           <a:xfrm>
             <a:off x="274320" y="777240"/>
-            <a:ext cx="1279800" cy="365400"/>
+            <a:ext cx="1279440" cy="365040"/>
           </a:xfrm>
           <a:prstGeom prst="rect">
             <a:avLst/>
@@ -8085,7 +8227,7 @@
         <p:spPr>
           <a:xfrm>
             <a:off x="274320" y="777240"/>
-            <a:ext cx="1279800" cy="365400"/>
+            <a:ext cx="1279440" cy="365040"/>
           </a:xfrm>
           <a:prstGeom prst="rect">
             <a:avLst/>
@@ -8166,7 +8308,7 @@
           <a:fontRef idx="minor"/>
         </p:style>
         <p:txBody>
-          <a:bodyPr lIns="90000" tIns="45000" rIns="90000" bIns="45000" anchor="t" anchorCtr="1">
+          <a:bodyPr lIns="0" tIns="45000" rIns="0" bIns="45000" anchor="t" anchorCtr="1">
             <a:noAutofit/>
           </a:bodyPr>
           <a:p>
@@ -8190,7 +8332,7 @@
         <p:spPr>
           <a:xfrm>
             <a:off x="2103120" y="777240"/>
-            <a:ext cx="1279800" cy="365400"/>
+            <a:ext cx="1279440" cy="365040"/>
           </a:xfrm>
           <a:prstGeom prst="rect">
             <a:avLst/>
@@ -8233,7 +8375,7 @@
         <p:spPr>
           <a:xfrm>
             <a:off x="2103120" y="777240"/>
-            <a:ext cx="1279800" cy="365400"/>
+            <a:ext cx="1279440" cy="365040"/>
           </a:xfrm>
           <a:prstGeom prst="rect">
             <a:avLst/>
@@ -8314,7 +8456,7 @@
           <a:fontRef idx="minor"/>
         </p:style>
         <p:txBody>
-          <a:bodyPr lIns="90000" tIns="45000" rIns="90000" bIns="45000" anchor="t" anchorCtr="1">
+          <a:bodyPr lIns="0" tIns="45000" rIns="0" bIns="45000" anchor="t" anchorCtr="1">
             <a:noAutofit/>
           </a:bodyPr>
           <a:p>
@@ -8338,7 +8480,7 @@
         <p:spPr>
           <a:xfrm>
             <a:off x="3931920" y="777240"/>
-            <a:ext cx="1279800" cy="365400"/>
+            <a:ext cx="1279440" cy="365040"/>
           </a:xfrm>
           <a:prstGeom prst="rect">
             <a:avLst/>
@@ -8381,7 +8523,7 @@
         <p:spPr>
           <a:xfrm>
             <a:off x="3931920" y="777240"/>
-            <a:ext cx="1279800" cy="365400"/>
+            <a:ext cx="1279440" cy="365040"/>
           </a:xfrm>
           <a:prstGeom prst="rect">
             <a:avLst/>
@@ -8462,7 +8604,7 @@
           <a:fontRef idx="minor"/>
         </p:style>
         <p:txBody>
-          <a:bodyPr lIns="90000" tIns="45000" rIns="90000" bIns="45000" anchor="t" anchorCtr="1">
+          <a:bodyPr lIns="0" tIns="45000" rIns="0" bIns="45000" anchor="t" anchorCtr="1">
             <a:noAutofit/>
           </a:bodyPr>
           <a:p>
@@ -8486,7 +8628,7 @@
         <p:spPr>
           <a:xfrm>
             <a:off x="5760720" y="777240"/>
-            <a:ext cx="1279800" cy="365400"/>
+            <a:ext cx="1279440" cy="365040"/>
           </a:xfrm>
           <a:prstGeom prst="rect">
             <a:avLst/>
@@ -8529,7 +8671,7 @@
         <p:spPr>
           <a:xfrm>
             <a:off x="5760720" y="777240"/>
-            <a:ext cx="1279800" cy="365400"/>
+            <a:ext cx="1279440" cy="365040"/>
           </a:xfrm>
           <a:prstGeom prst="rect">
             <a:avLst/>
@@ -8610,7 +8752,7 @@
           <a:fontRef idx="minor"/>
         </p:style>
         <p:txBody>
-          <a:bodyPr lIns="90000" tIns="45000" rIns="90000" bIns="45000" anchor="t" anchorCtr="1">
+          <a:bodyPr lIns="0" tIns="45000" rIns="0" bIns="45000" anchor="t" anchorCtr="1">
             <a:noAutofit/>
           </a:bodyPr>
           <a:p>
@@ -8634,7 +8776,7 @@
         <p:spPr>
           <a:xfrm>
             <a:off x="7589520" y="777240"/>
-            <a:ext cx="1279800" cy="365400"/>
+            <a:ext cx="1279440" cy="365040"/>
           </a:xfrm>
           <a:prstGeom prst="rect">
             <a:avLst/>
@@ -8677,7 +8819,7 @@
         <p:spPr>
           <a:xfrm>
             <a:off x="7589520" y="777240"/>
-            <a:ext cx="1279800" cy="365400"/>
+            <a:ext cx="1279440" cy="365040"/>
           </a:xfrm>
           <a:prstGeom prst="rect">
             <a:avLst/>
@@ -8758,7 +8900,7 @@
           <a:fontRef idx="minor"/>
         </p:style>
         <p:txBody>
-          <a:bodyPr lIns="90000" tIns="45000" rIns="90000" bIns="45000" anchor="t" anchorCtr="1">
+          <a:bodyPr lIns="0" tIns="45000" rIns="0" bIns="45000" anchor="t" anchorCtr="1">
             <a:noAutofit/>
           </a:bodyPr>
           <a:p>
@@ -8782,7 +8924,7 @@
         <p:spPr>
           <a:xfrm>
             <a:off x="45720" y="1234440"/>
-            <a:ext cx="639720" cy="639720"/>
+            <a:ext cx="639360" cy="639360"/>
           </a:xfrm>
           <a:prstGeom prst="rect">
             <a:avLst/>
@@ -8905,7 +9047,7 @@
           <a:fontRef idx="minor"/>
         </p:style>
         <p:txBody>
-          <a:bodyPr lIns="90000" tIns="28440" rIns="90000" bIns="28440" anchor="t" anchorCtr="1">
+          <a:bodyPr lIns="68400" tIns="28440" rIns="68400" bIns="28440" anchor="t" anchorCtr="1">
             <a:noAutofit/>
           </a:bodyPr>
           <a:p>
@@ -8948,7 +9090,7 @@
           <a:fontRef idx="minor"/>
         </p:style>
         <p:txBody>
-          <a:bodyPr lIns="90000" tIns="28080" rIns="90000" bIns="28080" anchor="t" anchorCtr="1">
+          <a:bodyPr lIns="68400" tIns="28080" rIns="68400" bIns="28080" anchor="t" anchorCtr="1">
             <a:noAutofit/>
           </a:bodyPr>
           <a:p>
@@ -8972,7 +9114,7 @@
         <p:spPr>
           <a:xfrm>
             <a:off x="1280160" y="1161360"/>
-            <a:ext cx="1096920" cy="228240"/>
+            <a:ext cx="1096560" cy="227880"/>
           </a:xfrm>
           <a:prstGeom prst="rect">
             <a:avLst/>
@@ -9095,7 +9237,7 @@
           <a:fontRef idx="minor"/>
         </p:style>
         <p:txBody>
-          <a:bodyPr lIns="90000" tIns="28440" rIns="90000" bIns="28440" anchor="t" anchorCtr="1">
+          <a:bodyPr lIns="68400" tIns="28440" rIns="68400" bIns="28440" anchor="t" anchorCtr="1">
             <a:noAutofit/>
           </a:bodyPr>
           <a:p>
@@ -9138,7 +9280,7 @@
           <a:fontRef idx="minor"/>
         </p:style>
         <p:txBody>
-          <a:bodyPr lIns="90000" tIns="28080" rIns="90000" bIns="28080" anchor="t" anchorCtr="1">
+          <a:bodyPr lIns="68400" tIns="28080" rIns="68400" bIns="28080" anchor="t" anchorCtr="1">
             <a:noAutofit/>
           </a:bodyPr>
           <a:p>
@@ -9162,7 +9304,7 @@
         <p:spPr>
           <a:xfrm>
             <a:off x="2194560" y="1389960"/>
-            <a:ext cx="1096920" cy="228240"/>
+            <a:ext cx="1096560" cy="227880"/>
           </a:xfrm>
           <a:prstGeom prst="rect">
             <a:avLst/>
@@ -9285,7 +9427,7 @@
           <a:fontRef idx="minor"/>
         </p:style>
         <p:txBody>
-          <a:bodyPr lIns="90000" tIns="28440" rIns="90000" bIns="28440" anchor="t" anchorCtr="1">
+          <a:bodyPr lIns="68400" tIns="28440" rIns="68400" bIns="28440" anchor="t" anchorCtr="1">
             <a:noAutofit/>
           </a:bodyPr>
           <a:p>
@@ -9328,7 +9470,7 @@
           <a:fontRef idx="minor"/>
         </p:style>
         <p:txBody>
-          <a:bodyPr lIns="90000" tIns="28080" rIns="90000" bIns="28080" anchor="t" anchorCtr="1">
+          <a:bodyPr lIns="68400" tIns="28080" rIns="68400" bIns="28080" anchor="t" anchorCtr="1">
             <a:noAutofit/>
           </a:bodyPr>
           <a:p>
@@ -9352,7 +9494,7 @@
         <p:spPr>
           <a:xfrm>
             <a:off x="3108960" y="1618560"/>
-            <a:ext cx="1096920" cy="228240"/>
+            <a:ext cx="1096560" cy="227880"/>
           </a:xfrm>
           <a:prstGeom prst="rect">
             <a:avLst/>
@@ -9475,7 +9617,7 @@
           <a:fontRef idx="minor"/>
         </p:style>
         <p:txBody>
-          <a:bodyPr lIns="90000" tIns="28440" rIns="90000" bIns="28440" anchor="t" anchorCtr="1">
+          <a:bodyPr lIns="68400" tIns="28440" rIns="68400" bIns="28440" anchor="t" anchorCtr="1">
             <a:noAutofit/>
           </a:bodyPr>
           <a:p>
@@ -9518,7 +9660,7 @@
           <a:fontRef idx="minor"/>
         </p:style>
         <p:txBody>
-          <a:bodyPr lIns="90000" tIns="28080" rIns="90000" bIns="28080" anchor="t" anchorCtr="1">
+          <a:bodyPr lIns="68400" tIns="28080" rIns="68400" bIns="28080" anchor="t" anchorCtr="1">
             <a:noAutofit/>
           </a:bodyPr>
           <a:p>
@@ -9542,7 +9684,7 @@
         <p:spPr>
           <a:xfrm>
             <a:off x="1280160" y="1984320"/>
-            <a:ext cx="1096920" cy="228240"/>
+            <a:ext cx="1096560" cy="227880"/>
           </a:xfrm>
           <a:prstGeom prst="rect">
             <a:avLst/>
@@ -9665,7 +9807,7 @@
           <a:fontRef idx="minor"/>
         </p:style>
         <p:txBody>
-          <a:bodyPr lIns="90000" tIns="28440" rIns="90000" bIns="28440" anchor="t" anchorCtr="1">
+          <a:bodyPr lIns="68400" tIns="28440" rIns="68400" bIns="28440" anchor="t" anchorCtr="1">
             <a:noAutofit/>
           </a:bodyPr>
           <a:p>
@@ -9708,7 +9850,7 @@
           <a:fontRef idx="minor"/>
         </p:style>
         <p:txBody>
-          <a:bodyPr lIns="90000" tIns="28080" rIns="90000" bIns="28080" anchor="t" anchorCtr="1">
+          <a:bodyPr lIns="68400" tIns="28080" rIns="68400" bIns="28080" anchor="t" anchorCtr="1">
             <a:noAutofit/>
           </a:bodyPr>
           <a:p>
@@ -9732,7 +9874,7 @@
         <p:spPr>
           <a:xfrm>
             <a:off x="2194560" y="2212920"/>
-            <a:ext cx="1096920" cy="228240"/>
+            <a:ext cx="1096560" cy="227880"/>
           </a:xfrm>
           <a:prstGeom prst="rect">
             <a:avLst/>
@@ -9855,7 +9997,7 @@
           <a:fontRef idx="minor"/>
         </p:style>
         <p:txBody>
-          <a:bodyPr lIns="90000" tIns="28440" rIns="90000" bIns="28440" anchor="t" anchorCtr="1">
+          <a:bodyPr lIns="68400" tIns="28440" rIns="68400" bIns="28440" anchor="t" anchorCtr="1">
             <a:noAutofit/>
           </a:bodyPr>
           <a:p>
@@ -9898,7 +10040,7 @@
           <a:fontRef idx="minor"/>
         </p:style>
         <p:txBody>
-          <a:bodyPr lIns="90000" tIns="28080" rIns="90000" bIns="28080" anchor="t" anchorCtr="1">
+          <a:bodyPr lIns="68400" tIns="28080" rIns="68400" bIns="28080" anchor="t" anchorCtr="1">
             <a:noAutofit/>
           </a:bodyPr>
           <a:p>
@@ -9922,7 +10064,7 @@
         <p:spPr>
           <a:xfrm>
             <a:off x="3108960" y="2441520"/>
-            <a:ext cx="1096920" cy="228240"/>
+            <a:ext cx="1096560" cy="227880"/>
           </a:xfrm>
           <a:prstGeom prst="rect">
             <a:avLst/>
@@ -9983,7 +10125,7 @@
         <p:spPr>
           <a:xfrm>
             <a:off x="45720" y="2834640"/>
-            <a:ext cx="639720" cy="639720"/>
+            <a:ext cx="639360" cy="639360"/>
           </a:xfrm>
           <a:prstGeom prst="rect">
             <a:avLst/>
@@ -10106,7 +10248,7 @@
           <a:fontRef idx="minor"/>
         </p:style>
         <p:txBody>
-          <a:bodyPr lIns="90000" tIns="28440" rIns="90000" bIns="28440" anchor="t" anchorCtr="1">
+          <a:bodyPr lIns="68400" tIns="28440" rIns="68400" bIns="28440" anchor="t" anchorCtr="1">
             <a:noAutofit/>
           </a:bodyPr>
           <a:p>
@@ -10149,7 +10291,7 @@
           <a:fontRef idx="minor"/>
         </p:style>
         <p:txBody>
-          <a:bodyPr lIns="90000" tIns="28080" rIns="90000" bIns="28080" anchor="t" anchorCtr="1">
+          <a:bodyPr lIns="68400" tIns="28080" rIns="68400" bIns="28080" anchor="t" anchorCtr="1">
             <a:noAutofit/>
           </a:bodyPr>
           <a:p>
@@ -10173,7 +10315,7 @@
         <p:spPr>
           <a:xfrm>
             <a:off x="1280160" y="2807280"/>
-            <a:ext cx="1096920" cy="228240"/>
+            <a:ext cx="1096560" cy="227880"/>
           </a:xfrm>
           <a:prstGeom prst="rect">
             <a:avLst/>
@@ -10296,7 +10438,7 @@
           <a:fontRef idx="minor"/>
         </p:style>
         <p:txBody>
-          <a:bodyPr lIns="90000" tIns="28440" rIns="90000" bIns="28440" anchor="t" anchorCtr="1">
+          <a:bodyPr lIns="68400" tIns="28440" rIns="68400" bIns="28440" anchor="t" anchorCtr="1">
             <a:noAutofit/>
           </a:bodyPr>
           <a:p>
@@ -10339,7 +10481,7 @@
           <a:fontRef idx="minor"/>
         </p:style>
         <p:txBody>
-          <a:bodyPr lIns="90000" tIns="28080" rIns="90000" bIns="28080" anchor="t" anchorCtr="1">
+          <a:bodyPr lIns="68400" tIns="28080" rIns="68400" bIns="28080" anchor="t" anchorCtr="1">
             <a:noAutofit/>
           </a:bodyPr>
           <a:p>
@@ -10363,7 +10505,7 @@
         <p:spPr>
           <a:xfrm>
             <a:off x="2194560" y="3035880"/>
-            <a:ext cx="1096920" cy="228240"/>
+            <a:ext cx="1096560" cy="227880"/>
           </a:xfrm>
           <a:prstGeom prst="rect">
             <a:avLst/>
@@ -10486,7 +10628,7 @@
           <a:fontRef idx="minor"/>
         </p:style>
         <p:txBody>
-          <a:bodyPr lIns="90000" tIns="28440" rIns="90000" bIns="28440" anchor="t" anchorCtr="1">
+          <a:bodyPr lIns="68400" tIns="28440" rIns="68400" bIns="28440" anchor="t" anchorCtr="1">
             <a:noAutofit/>
           </a:bodyPr>
           <a:p>
@@ -10529,7 +10671,7 @@
           <a:fontRef idx="minor"/>
         </p:style>
         <p:txBody>
-          <a:bodyPr lIns="90000" tIns="28080" rIns="90000" bIns="28080" anchor="t" anchorCtr="1">
+          <a:bodyPr lIns="68400" tIns="28080" rIns="68400" bIns="28080" anchor="t" anchorCtr="1">
             <a:noAutofit/>
           </a:bodyPr>
           <a:p>
@@ -10553,7 +10695,7 @@
         <p:spPr>
           <a:xfrm>
             <a:off x="3108960" y="3264480"/>
-            <a:ext cx="1096920" cy="228240"/>
+            <a:ext cx="1096560" cy="227880"/>
           </a:xfrm>
           <a:prstGeom prst="rect">
             <a:avLst/>
@@ -10614,7 +10756,7 @@
         <p:spPr>
           <a:xfrm>
             <a:off x="45720" y="3840480"/>
-            <a:ext cx="639720" cy="456840"/>
+            <a:ext cx="639360" cy="456480"/>
           </a:xfrm>
           <a:prstGeom prst="rect">
             <a:avLst/>
@@ -10737,7 +10879,7 @@
           <a:fontRef idx="minor"/>
         </p:style>
         <p:txBody>
-          <a:bodyPr lIns="90000" tIns="28440" rIns="90000" bIns="28440" anchor="t" anchorCtr="1">
+          <a:bodyPr lIns="68400" tIns="28440" rIns="68400" bIns="28440" anchor="t" anchorCtr="1">
             <a:noAutofit/>
           </a:bodyPr>
           <a:p>
@@ -10780,7 +10922,7 @@
           <a:fontRef idx="minor"/>
         </p:style>
         <p:txBody>
-          <a:bodyPr lIns="90000" tIns="28080" rIns="90000" bIns="28080" anchor="t" anchorCtr="1">
+          <a:bodyPr lIns="68400" tIns="28080" rIns="68400" bIns="28080" anchor="t" anchorCtr="1">
             <a:noAutofit/>
           </a:bodyPr>
           <a:p>
@@ -10804,7 +10946,7 @@
         <p:spPr>
           <a:xfrm>
             <a:off x="4937760" y="3767400"/>
-            <a:ext cx="1096920" cy="228240"/>
+            <a:ext cx="1096560" cy="227880"/>
           </a:xfrm>
           <a:prstGeom prst="rect">
             <a:avLst/>
@@ -10927,7 +11069,7 @@
           <a:fontRef idx="minor"/>
         </p:style>
         <p:txBody>
-          <a:bodyPr lIns="90000" tIns="28440" rIns="90000" bIns="28440" anchor="t" anchorCtr="1">
+          <a:bodyPr lIns="68400" tIns="28440" rIns="68400" bIns="28440" anchor="t" anchorCtr="1">
             <a:noAutofit/>
           </a:bodyPr>
           <a:p>
@@ -10970,7 +11112,7 @@
           <a:fontRef idx="minor"/>
         </p:style>
         <p:txBody>
-          <a:bodyPr lIns="90000" tIns="28080" rIns="90000" bIns="28080" anchor="t" anchorCtr="1">
+          <a:bodyPr lIns="68400" tIns="28080" rIns="68400" bIns="28080" anchor="t" anchorCtr="1">
             <a:noAutofit/>
           </a:bodyPr>
           <a:p>
@@ -10994,7 +11136,7 @@
         <p:spPr>
           <a:xfrm>
             <a:off x="5852160" y="3950280"/>
-            <a:ext cx="1096920" cy="228240"/>
+            <a:ext cx="1096560" cy="227880"/>
           </a:xfrm>
           <a:prstGeom prst="rect">
             <a:avLst/>
@@ -11092,7 +11234,7 @@
         <p:spPr>
           <a:xfrm>
             <a:off x="0" y="0"/>
-            <a:ext cx="9143640" cy="91080"/>
+            <a:ext cx="9143280" cy="90720"/>
           </a:xfrm>
           <a:prstGeom prst="rect">
             <a:avLst/>
@@ -11135,7 +11277,7 @@
         <p:spPr>
           <a:xfrm>
             <a:off x="0" y="5052240"/>
-            <a:ext cx="9143640" cy="91080"/>
+            <a:ext cx="9143280" cy="90720"/>
           </a:xfrm>
           <a:prstGeom prst="rect">
             <a:avLst/>
@@ -11178,7 +11320,7 @@
         <p:spPr>
           <a:xfrm>
             <a:off x="457200" y="1645920"/>
-            <a:ext cx="8229240" cy="1828440"/>
+            <a:ext cx="8228880" cy="1828080"/>
           </a:xfrm>
           <a:prstGeom prst="rect">
             <a:avLst/>
@@ -11276,7 +11418,7 @@
         <p:spPr>
           <a:xfrm>
             <a:off x="0" y="0"/>
-            <a:ext cx="9143640" cy="685440"/>
+            <a:ext cx="9143280" cy="685080"/>
           </a:xfrm>
           <a:prstGeom prst="rect">
             <a:avLst/>
@@ -11319,7 +11461,7 @@
         <p:spPr>
           <a:xfrm>
             <a:off x="274320" y="45720"/>
-            <a:ext cx="8595000" cy="594000"/>
+            <a:ext cx="8594640" cy="593640"/>
           </a:xfrm>
           <a:prstGeom prst="rect">
             <a:avLst/>
@@ -11380,7 +11522,7 @@
         <p:spPr>
           <a:xfrm>
             <a:off x="0" y="685800"/>
-            <a:ext cx="72720" cy="4457520"/>
+            <a:ext cx="72360" cy="4457160"/>
           </a:xfrm>
           <a:prstGeom prst="rect">
             <a:avLst/>
@@ -11399,7 +11541,7 @@
           <a:fontRef idx="minor"/>
         </p:style>
         <p:txBody>
-          <a:bodyPr lIns="90000" tIns="45000" rIns="90000" bIns="45000" anchor="t">
+          <a:bodyPr lIns="36360" tIns="45000" rIns="36360" bIns="45000" anchor="t">
             <a:noAutofit/>
           </a:bodyPr>
           <a:p>
@@ -11423,7 +11565,7 @@
         <p:spPr>
           <a:xfrm>
             <a:off x="274320" y="822960"/>
-            <a:ext cx="3840120" cy="2742840"/>
+            <a:ext cx="3839760" cy="2742480"/>
           </a:xfrm>
           <a:prstGeom prst="rect">
             <a:avLst/>
@@ -11466,7 +11608,7 @@
         <p:spPr>
           <a:xfrm>
             <a:off x="274320" y="868680"/>
-            <a:ext cx="3840120" cy="502560"/>
+            <a:ext cx="3839760" cy="502200"/>
           </a:xfrm>
           <a:prstGeom prst="rect">
             <a:avLst/>
@@ -11527,7 +11669,7 @@
         <p:spPr>
           <a:xfrm>
             <a:off x="411480" y="1463040"/>
-            <a:ext cx="3565800" cy="1919880"/>
+            <a:ext cx="3565440" cy="1919520"/>
           </a:xfrm>
           <a:prstGeom prst="rect">
             <a:avLst/>
@@ -11663,7 +11805,7 @@
         <p:spPr>
           <a:xfrm>
             <a:off x="5029200" y="822960"/>
-            <a:ext cx="3840120" cy="2742840"/>
+            <a:ext cx="3839760" cy="2742480"/>
           </a:xfrm>
           <a:prstGeom prst="rect">
             <a:avLst/>
@@ -11706,7 +11848,7 @@
         <p:spPr>
           <a:xfrm>
             <a:off x="5029200" y="868680"/>
-            <a:ext cx="3840120" cy="502560"/>
+            <a:ext cx="3839760" cy="502200"/>
           </a:xfrm>
           <a:prstGeom prst="rect">
             <a:avLst/>
@@ -11767,7 +11909,7 @@
         <p:spPr>
           <a:xfrm>
             <a:off x="5166360" y="1463040"/>
-            <a:ext cx="3565800" cy="1919880"/>
+            <a:ext cx="3565440" cy="1919520"/>
           </a:xfrm>
           <a:prstGeom prst="rect">
             <a:avLst/>
@@ -11903,7 +12045,7 @@
         <p:spPr>
           <a:xfrm>
             <a:off x="274320" y="3794760"/>
-            <a:ext cx="8595000" cy="1096920"/>
+            <a:ext cx="8594640" cy="1096560"/>
           </a:xfrm>
           <a:prstGeom prst="rect">
             <a:avLst/>
@@ -11946,7 +12088,7 @@
         <p:spPr>
           <a:xfrm>
             <a:off x="411480" y="3858840"/>
-            <a:ext cx="8320680" cy="959760"/>
+            <a:ext cx="8320320" cy="959400"/>
           </a:xfrm>
           <a:prstGeom prst="rect">
             <a:avLst/>
@@ -12074,7 +12216,7 @@
         <p:spPr>
           <a:xfrm>
             <a:off x="0" y="0"/>
-            <a:ext cx="9143640" cy="91080"/>
+            <a:ext cx="9143280" cy="90720"/>
           </a:xfrm>
           <a:prstGeom prst="rect">
             <a:avLst/>
@@ -12117,7 +12259,7 @@
         <p:spPr>
           <a:xfrm>
             <a:off x="0" y="5052240"/>
-            <a:ext cx="9143640" cy="91080"/>
+            <a:ext cx="9143280" cy="90720"/>
           </a:xfrm>
           <a:prstGeom prst="rect">
             <a:avLst/>
@@ -12160,7 +12302,7 @@
         <p:spPr>
           <a:xfrm>
             <a:off x="457200" y="1645920"/>
-            <a:ext cx="8229240" cy="1828440"/>
+            <a:ext cx="8228880" cy="1828080"/>
           </a:xfrm>
           <a:prstGeom prst="rect">
             <a:avLst/>
@@ -12258,7 +12400,7 @@
         <p:spPr>
           <a:xfrm>
             <a:off x="0" y="0"/>
-            <a:ext cx="9143640" cy="685440"/>
+            <a:ext cx="9143280" cy="685080"/>
           </a:xfrm>
           <a:prstGeom prst="rect">
             <a:avLst/>
@@ -12301,7 +12443,7 @@
         <p:spPr>
           <a:xfrm>
             <a:off x="274320" y="45720"/>
-            <a:ext cx="8595000" cy="594000"/>
+            <a:ext cx="8594640" cy="593640"/>
           </a:xfrm>
           <a:prstGeom prst="rect">
             <a:avLst/>
@@ -12362,7 +12504,7 @@
         <p:spPr>
           <a:xfrm>
             <a:off x="0" y="685800"/>
-            <a:ext cx="72720" cy="4457520"/>
+            <a:ext cx="72360" cy="4457160"/>
           </a:xfrm>
           <a:prstGeom prst="rect">
             <a:avLst/>
@@ -12381,7 +12523,7 @@
           <a:fontRef idx="minor"/>
         </p:style>
         <p:txBody>
-          <a:bodyPr lIns="90000" tIns="45000" rIns="90000" bIns="45000" anchor="t">
+          <a:bodyPr lIns="36360" tIns="45000" rIns="36360" bIns="45000" anchor="t">
             <a:noAutofit/>
           </a:bodyPr>
           <a:p>
@@ -12405,7 +12547,7 @@
         <p:spPr>
           <a:xfrm>
             <a:off x="228600" y="914400"/>
-            <a:ext cx="4205880" cy="1142640"/>
+            <a:ext cx="4205520" cy="1142280"/>
           </a:xfrm>
           <a:prstGeom prst="rect">
             <a:avLst/>
@@ -12448,7 +12590,7 @@
         <p:spPr>
           <a:xfrm>
             <a:off x="228600" y="914400"/>
-            <a:ext cx="72720" cy="1142640"/>
+            <a:ext cx="72360" cy="1142280"/>
           </a:xfrm>
           <a:prstGeom prst="rect">
             <a:avLst/>
@@ -12467,7 +12609,7 @@
           <a:fontRef idx="minor"/>
         </p:style>
         <p:txBody>
-          <a:bodyPr lIns="90000" tIns="45000" rIns="90000" bIns="45000" anchor="t">
+          <a:bodyPr lIns="36360" tIns="45000" rIns="36360" bIns="45000" anchor="t">
             <a:noAutofit/>
           </a:bodyPr>
           <a:p>
@@ -12491,7 +12633,7 @@
         <p:spPr>
           <a:xfrm>
             <a:off x="411480" y="987480"/>
-            <a:ext cx="3931560" cy="347040"/>
+            <a:ext cx="3931200" cy="346680"/>
           </a:xfrm>
           <a:prstGeom prst="rect">
             <a:avLst/>
@@ -12552,7 +12694,7 @@
         <p:spPr>
           <a:xfrm>
             <a:off x="411480" y="1371600"/>
-            <a:ext cx="3931560" cy="594000"/>
+            <a:ext cx="3931200" cy="593640"/>
           </a:xfrm>
           <a:prstGeom prst="rect">
             <a:avLst/>
@@ -12613,7 +12755,7 @@
         <p:spPr>
           <a:xfrm>
             <a:off x="4663440" y="914400"/>
-            <a:ext cx="4205880" cy="1142640"/>
+            <a:ext cx="4205520" cy="1142280"/>
           </a:xfrm>
           <a:prstGeom prst="rect">
             <a:avLst/>
@@ -12656,7 +12798,7 @@
         <p:spPr>
           <a:xfrm>
             <a:off x="4663440" y="914400"/>
-            <a:ext cx="72720" cy="1142640"/>
+            <a:ext cx="72360" cy="1142280"/>
           </a:xfrm>
           <a:prstGeom prst="rect">
             <a:avLst/>
@@ -12675,7 +12817,7 @@
           <a:fontRef idx="minor"/>
         </p:style>
         <p:txBody>
-          <a:bodyPr lIns="90000" tIns="45000" rIns="90000" bIns="45000" anchor="t">
+          <a:bodyPr lIns="36360" tIns="45000" rIns="36360" bIns="45000" anchor="t">
             <a:noAutofit/>
           </a:bodyPr>
           <a:p>
@@ -12699,7 +12841,7 @@
         <p:spPr>
           <a:xfrm>
             <a:off x="4846320" y="987480"/>
-            <a:ext cx="3931560" cy="347040"/>
+            <a:ext cx="3931200" cy="346680"/>
           </a:xfrm>
           <a:prstGeom prst="rect">
             <a:avLst/>
@@ -12760,7 +12902,7 @@
         <p:spPr>
           <a:xfrm>
             <a:off x="4846320" y="1371600"/>
-            <a:ext cx="3931560" cy="594000"/>
+            <a:ext cx="3931200" cy="593640"/>
           </a:xfrm>
           <a:prstGeom prst="rect">
             <a:avLst/>
@@ -12821,7 +12963,7 @@
         <p:spPr>
           <a:xfrm>
             <a:off x="228600" y="2194560"/>
-            <a:ext cx="4205880" cy="1142640"/>
+            <a:ext cx="4205520" cy="1142280"/>
           </a:xfrm>
           <a:prstGeom prst="rect">
             <a:avLst/>
@@ -12864,7 +13006,7 @@
         <p:spPr>
           <a:xfrm>
             <a:off x="228600" y="2194560"/>
-            <a:ext cx="72720" cy="1142640"/>
+            <a:ext cx="72360" cy="1142280"/>
           </a:xfrm>
           <a:prstGeom prst="rect">
             <a:avLst/>
@@ -12883,7 +13025,7 @@
           <a:fontRef idx="minor"/>
         </p:style>
         <p:txBody>
-          <a:bodyPr lIns="90000" tIns="45000" rIns="90000" bIns="45000" anchor="t">
+          <a:bodyPr lIns="36360" tIns="45000" rIns="36360" bIns="45000" anchor="t">
             <a:noAutofit/>
           </a:bodyPr>
           <a:p>
@@ -12907,7 +13049,7 @@
         <p:spPr>
           <a:xfrm>
             <a:off x="411480" y="2267640"/>
-            <a:ext cx="3931560" cy="347040"/>
+            <a:ext cx="3931200" cy="346680"/>
           </a:xfrm>
           <a:prstGeom prst="rect">
             <a:avLst/>
@@ -12968,7 +13110,7 @@
         <p:spPr>
           <a:xfrm>
             <a:off x="411480" y="2651760"/>
-            <a:ext cx="3931560" cy="594000"/>
+            <a:ext cx="3931200" cy="593640"/>
           </a:xfrm>
           <a:prstGeom prst="rect">
             <a:avLst/>
@@ -13029,7 +13171,7 @@
         <p:spPr>
           <a:xfrm>
             <a:off x="4663440" y="2194560"/>
-            <a:ext cx="4205880" cy="1142640"/>
+            <a:ext cx="4205520" cy="1142280"/>
           </a:xfrm>
           <a:prstGeom prst="rect">
             <a:avLst/>
@@ -13072,7 +13214,7 @@
         <p:spPr>
           <a:xfrm>
             <a:off x="4663440" y="2194560"/>
-            <a:ext cx="72720" cy="1142640"/>
+            <a:ext cx="72360" cy="1142280"/>
           </a:xfrm>
           <a:prstGeom prst="rect">
             <a:avLst/>
@@ -13091,7 +13233,7 @@
           <a:fontRef idx="minor"/>
         </p:style>
         <p:txBody>
-          <a:bodyPr lIns="90000" tIns="45000" rIns="90000" bIns="45000" anchor="t">
+          <a:bodyPr lIns="36360" tIns="45000" rIns="36360" bIns="45000" anchor="t">
             <a:noAutofit/>
           </a:bodyPr>
           <a:p>
@@ -13115,7 +13257,7 @@
         <p:spPr>
           <a:xfrm>
             <a:off x="4846320" y="2267640"/>
-            <a:ext cx="3931560" cy="347040"/>
+            <a:ext cx="3931200" cy="346680"/>
           </a:xfrm>
           <a:prstGeom prst="rect">
             <a:avLst/>
@@ -13176,7 +13318,7 @@
         <p:spPr>
           <a:xfrm>
             <a:off x="4846320" y="2651760"/>
-            <a:ext cx="3931560" cy="594000"/>
+            <a:ext cx="3931200" cy="593640"/>
           </a:xfrm>
           <a:prstGeom prst="rect">
             <a:avLst/>
@@ -13237,7 +13379,7 @@
         <p:spPr>
           <a:xfrm>
             <a:off x="228600" y="3474720"/>
-            <a:ext cx="4205880" cy="1142640"/>
+            <a:ext cx="4205520" cy="1142280"/>
           </a:xfrm>
           <a:prstGeom prst="rect">
             <a:avLst/>
@@ -13280,7 +13422,7 @@
         <p:spPr>
           <a:xfrm>
             <a:off x="228600" y="3474720"/>
-            <a:ext cx="72720" cy="1142640"/>
+            <a:ext cx="72360" cy="1142280"/>
           </a:xfrm>
           <a:prstGeom prst="rect">
             <a:avLst/>
@@ -13299,7 +13441,7 @@
           <a:fontRef idx="minor"/>
         </p:style>
         <p:txBody>
-          <a:bodyPr lIns="90000" tIns="45000" rIns="90000" bIns="45000" anchor="t">
+          <a:bodyPr lIns="36360" tIns="45000" rIns="36360" bIns="45000" anchor="t">
             <a:noAutofit/>
           </a:bodyPr>
           <a:p>
@@ -13323,7 +13465,7 @@
         <p:spPr>
           <a:xfrm>
             <a:off x="411480" y="3547800"/>
-            <a:ext cx="3931560" cy="347040"/>
+            <a:ext cx="3931200" cy="346680"/>
           </a:xfrm>
           <a:prstGeom prst="rect">
             <a:avLst/>
@@ -13384,7 +13526,7 @@
         <p:spPr>
           <a:xfrm>
             <a:off x="411480" y="3931920"/>
-            <a:ext cx="3931560" cy="594000"/>
+            <a:ext cx="3931200" cy="593640"/>
           </a:xfrm>
           <a:prstGeom prst="rect">
             <a:avLst/>
@@ -13445,7 +13587,7 @@
         <p:spPr>
           <a:xfrm>
             <a:off x="4663440" y="3474720"/>
-            <a:ext cx="4205880" cy="1142640"/>
+            <a:ext cx="4205520" cy="1142280"/>
           </a:xfrm>
           <a:prstGeom prst="rect">
             <a:avLst/>
@@ -13488,7 +13630,7 @@
         <p:spPr>
           <a:xfrm>
             <a:off x="4663440" y="3474720"/>
-            <a:ext cx="72720" cy="1142640"/>
+            <a:ext cx="72360" cy="1142280"/>
           </a:xfrm>
           <a:prstGeom prst="rect">
             <a:avLst/>
@@ -13507,7 +13649,7 @@
           <a:fontRef idx="minor"/>
         </p:style>
         <p:txBody>
-          <a:bodyPr lIns="90000" tIns="45000" rIns="90000" bIns="45000" anchor="t">
+          <a:bodyPr lIns="36360" tIns="45000" rIns="36360" bIns="45000" anchor="t">
             <a:noAutofit/>
           </a:bodyPr>
           <a:p>
@@ -13531,7 +13673,7 @@
         <p:spPr>
           <a:xfrm>
             <a:off x="4846320" y="3547800"/>
-            <a:ext cx="3931560" cy="347040"/>
+            <a:ext cx="3931200" cy="346680"/>
           </a:xfrm>
           <a:prstGeom prst="rect">
             <a:avLst/>
@@ -13592,7 +13734,7 @@
         <p:spPr>
           <a:xfrm>
             <a:off x="4846320" y="3931920"/>
-            <a:ext cx="3931560" cy="594000"/>
+            <a:ext cx="3931200" cy="593640"/>
           </a:xfrm>
           <a:prstGeom prst="rect">
             <a:avLst/>
@@ -13690,7 +13832,7 @@
         <p:spPr>
           <a:xfrm>
             <a:off x="0" y="0"/>
-            <a:ext cx="9143640" cy="685440"/>
+            <a:ext cx="9143280" cy="685080"/>
           </a:xfrm>
           <a:prstGeom prst="rect">
             <a:avLst/>
@@ -13733,7 +13875,7 @@
         <p:spPr>
           <a:xfrm>
             <a:off x="274320" y="45720"/>
-            <a:ext cx="8595000" cy="594000"/>
+            <a:ext cx="8594640" cy="593640"/>
           </a:xfrm>
           <a:prstGeom prst="rect">
             <a:avLst/>
@@ -13794,7 +13936,7 @@
         <p:spPr>
           <a:xfrm>
             <a:off x="0" y="685800"/>
-            <a:ext cx="72720" cy="4457520"/>
+            <a:ext cx="72360" cy="4457160"/>
           </a:xfrm>
           <a:prstGeom prst="rect">
             <a:avLst/>
@@ -13813,7 +13955,7 @@
           <a:fontRef idx="minor"/>
         </p:style>
         <p:txBody>
-          <a:bodyPr lIns="90000" tIns="45000" rIns="90000" bIns="45000" anchor="t">
+          <a:bodyPr lIns="36360" tIns="45000" rIns="36360" bIns="45000" anchor="t">
             <a:noAutofit/>
           </a:bodyPr>
           <a:p>
@@ -13836,7 +13978,7 @@
         </p:nvGraphicFramePr>
         <p:xfrm>
           <a:off x="274320" y="822960"/>
-          <a:ext cx="8595000" cy="4114440"/>
+          <a:ext cx="8595000" cy="4112640"/>
         </p:xfrm>
         <a:graphic>
           <a:graphicData uri="http://schemas.openxmlformats.org/drawingml/2006/table">
@@ -14834,7 +14976,7 @@
         <p:spPr>
           <a:xfrm>
             <a:off x="0" y="0"/>
-            <a:ext cx="9143640" cy="685440"/>
+            <a:ext cx="9143280" cy="685080"/>
           </a:xfrm>
           <a:prstGeom prst="rect">
             <a:avLst/>
@@ -14877,7 +15019,7 @@
         <p:spPr>
           <a:xfrm>
             <a:off x="274320" y="45720"/>
-            <a:ext cx="8595000" cy="594000"/>
+            <a:ext cx="8594640" cy="593640"/>
           </a:xfrm>
           <a:prstGeom prst="rect">
             <a:avLst/>
@@ -14938,7 +15080,7 @@
         <p:spPr>
           <a:xfrm>
             <a:off x="0" y="685800"/>
-            <a:ext cx="72720" cy="4457520"/>
+            <a:ext cx="72360" cy="4457160"/>
           </a:xfrm>
           <a:prstGeom prst="rect">
             <a:avLst/>
@@ -14957,7 +15099,7 @@
           <a:fontRef idx="minor"/>
         </p:style>
         <p:txBody>
-          <a:bodyPr lIns="90000" tIns="45000" rIns="90000" bIns="45000" anchor="t">
+          <a:bodyPr lIns="36360" tIns="45000" rIns="36360" bIns="45000" anchor="t">
             <a:noAutofit/>
           </a:bodyPr>
           <a:p>
@@ -14981,7 +15123,7 @@
         <p:spPr>
           <a:xfrm>
             <a:off x="320040" y="868680"/>
-            <a:ext cx="8503560" cy="4023000"/>
+            <a:ext cx="8503200" cy="4022640"/>
           </a:xfrm>
           <a:prstGeom prst="rect">
             <a:avLst/>
@@ -15305,7 +15447,7 @@
                 <a:latin typeface="Calibri"/>
                 <a:ea typeface="Calibri"/>
               </a:rPr>
-              <a:t>9.  Exercice + Glossaire</a:t>
+              <a:t>9.  Exercice</a:t>
             </a:r>
             <a:endParaRPr lang="fr-FR" sz="1600" b="0" u="none" strike="noStrike">
               <a:solidFill>
@@ -15364,7 +15506,7 @@
         <p:spPr>
           <a:xfrm>
             <a:off x="0" y="0"/>
-            <a:ext cx="9143640" cy="91080"/>
+            <a:ext cx="9143280" cy="90720"/>
           </a:xfrm>
           <a:prstGeom prst="rect">
             <a:avLst/>
@@ -15407,7 +15549,7 @@
         <p:spPr>
           <a:xfrm>
             <a:off x="0" y="5052240"/>
-            <a:ext cx="9143640" cy="91080"/>
+            <a:ext cx="9143280" cy="90720"/>
           </a:xfrm>
           <a:prstGeom prst="rect">
             <a:avLst/>
@@ -15450,7 +15592,7 @@
         <p:spPr>
           <a:xfrm>
             <a:off x="457200" y="1645920"/>
-            <a:ext cx="8229240" cy="1828440"/>
+            <a:ext cx="8228880" cy="1828080"/>
           </a:xfrm>
           <a:prstGeom prst="rect">
             <a:avLst/>
@@ -15548,7 +15690,7 @@
         <p:spPr>
           <a:xfrm>
             <a:off x="0" y="0"/>
-            <a:ext cx="9143640" cy="685440"/>
+            <a:ext cx="9143280" cy="685080"/>
           </a:xfrm>
           <a:prstGeom prst="rect">
             <a:avLst/>
@@ -15591,7 +15733,7 @@
         <p:spPr>
           <a:xfrm>
             <a:off x="274320" y="45720"/>
-            <a:ext cx="8595000" cy="594000"/>
+            <a:ext cx="8594640" cy="593640"/>
           </a:xfrm>
           <a:prstGeom prst="rect">
             <a:avLst/>
@@ -15652,7 +15794,7 @@
         <p:spPr>
           <a:xfrm>
             <a:off x="0" y="685800"/>
-            <a:ext cx="72720" cy="4457520"/>
+            <a:ext cx="72360" cy="4457160"/>
           </a:xfrm>
           <a:prstGeom prst="rect">
             <a:avLst/>
@@ -15671,7 +15813,7 @@
           <a:fontRef idx="minor"/>
         </p:style>
         <p:txBody>
-          <a:bodyPr lIns="90000" tIns="45000" rIns="90000" bIns="45000" anchor="t">
+          <a:bodyPr lIns="36360" tIns="45000" rIns="36360" bIns="45000" anchor="t">
             <a:noAutofit/>
           </a:bodyPr>
           <a:p>
@@ -15694,7 +15836,7 @@
         </p:nvGraphicFramePr>
         <p:xfrm>
           <a:off x="274320" y="822960"/>
-          <a:ext cx="8595000" cy="3748680"/>
+          <a:ext cx="8595000" cy="3747600"/>
         </p:xfrm>
         <a:graphic>
           <a:graphicData uri="http://schemas.openxmlformats.org/drawingml/2006/table">
@@ -16918,7 +17060,7 @@
         <p:spPr>
           <a:xfrm>
             <a:off x="274320" y="4663440"/>
-            <a:ext cx="8595000" cy="319680"/>
+            <a:ext cx="8594640" cy="319320"/>
           </a:xfrm>
           <a:prstGeom prst="rect">
             <a:avLst/>
@@ -17016,7 +17158,7 @@
         <p:spPr>
           <a:xfrm>
             <a:off x="0" y="0"/>
-            <a:ext cx="9143640" cy="91080"/>
+            <a:ext cx="9143280" cy="90720"/>
           </a:xfrm>
           <a:prstGeom prst="rect">
             <a:avLst/>
@@ -17059,7 +17201,7 @@
         <p:spPr>
           <a:xfrm>
             <a:off x="0" y="5052240"/>
-            <a:ext cx="9143640" cy="91080"/>
+            <a:ext cx="9143280" cy="90720"/>
           </a:xfrm>
           <a:prstGeom prst="rect">
             <a:avLst/>
@@ -17102,7 +17244,7 @@
         <p:spPr>
           <a:xfrm>
             <a:off x="457200" y="1645920"/>
-            <a:ext cx="8229240" cy="1828440"/>
+            <a:ext cx="8228880" cy="1828080"/>
           </a:xfrm>
           <a:prstGeom prst="rect">
             <a:avLst/>
@@ -17141,7 +17283,7 @@
                 <a:latin typeface="Calibri"/>
                 <a:ea typeface="Calibri"/>
               </a:rPr>
-              <a:t>9. Exercice &amp; Glossaire</a:t>
+              <a:t>9. Exercice</a:t>
             </a:r>
             <a:endParaRPr lang="fr-FR" sz="3600" b="0" u="none" strike="noStrike">
               <a:solidFill>
@@ -17200,7 +17342,7 @@
         <p:spPr>
           <a:xfrm>
             <a:off x="0" y="0"/>
-            <a:ext cx="9143640" cy="685440"/>
+            <a:ext cx="9143280" cy="685080"/>
           </a:xfrm>
           <a:prstGeom prst="rect">
             <a:avLst/>
@@ -17243,7 +17385,7 @@
         <p:spPr>
           <a:xfrm>
             <a:off x="274320" y="45720"/>
-            <a:ext cx="8595000" cy="594000"/>
+            <a:ext cx="8594640" cy="593640"/>
           </a:xfrm>
           <a:prstGeom prst="rect">
             <a:avLst/>
@@ -17304,7 +17446,7 @@
         <p:spPr>
           <a:xfrm>
             <a:off x="0" y="685800"/>
-            <a:ext cx="72720" cy="4457520"/>
+            <a:ext cx="72360" cy="4457160"/>
           </a:xfrm>
           <a:prstGeom prst="rect">
             <a:avLst/>
@@ -17323,7 +17465,7 @@
           <a:fontRef idx="minor"/>
         </p:style>
         <p:txBody>
-          <a:bodyPr lIns="90000" tIns="45000" rIns="90000" bIns="45000" anchor="t">
+          <a:bodyPr lIns="36360" tIns="45000" rIns="36360" bIns="45000" anchor="t">
             <a:noAutofit/>
           </a:bodyPr>
           <a:p>
@@ -17347,7 +17489,7 @@
         <p:spPr>
           <a:xfrm>
             <a:off x="274320" y="914400"/>
-            <a:ext cx="5486040" cy="365400"/>
+            <a:ext cx="5485680" cy="365040"/>
           </a:xfrm>
           <a:prstGeom prst="rect">
             <a:avLst/>
@@ -17408,7 +17550,7 @@
         <p:spPr>
           <a:xfrm>
             <a:off x="5943600" y="914400"/>
-            <a:ext cx="2925720" cy="365400"/>
+            <a:ext cx="2925360" cy="365040"/>
           </a:xfrm>
           <a:prstGeom prst="rect">
             <a:avLst/>
@@ -17431,6 +17573,11 @@
             <a:noAutofit/>
           </a:bodyPr>
           <a:p>
+            <a:pPr>
+              <a:lnSpc>
+                <a:spcPct val="100000"/>
+              </a:lnSpc>
+            </a:pPr>
             <a:endParaRPr lang="fr-FR" sz="1800" b="0" u="none" strike="noStrike">
               <a:solidFill>
                 <a:srgbClr val="FFFFFF"/>
@@ -17451,7 +17598,7 @@
         <p:spPr>
           <a:xfrm>
             <a:off x="5989320" y="914400"/>
-            <a:ext cx="2834280" cy="365400"/>
+            <a:ext cx="2833920" cy="365040"/>
           </a:xfrm>
           <a:prstGeom prst="rect">
             <a:avLst/>
@@ -17512,7 +17659,7 @@
         <p:spPr>
           <a:xfrm>
             <a:off x="274320" y="1737360"/>
-            <a:ext cx="5486040" cy="365400"/>
+            <a:ext cx="5485680" cy="365040"/>
           </a:xfrm>
           <a:prstGeom prst="rect">
             <a:avLst/>
@@ -17573,7 +17720,7 @@
         <p:spPr>
           <a:xfrm>
             <a:off x="5943600" y="1737360"/>
-            <a:ext cx="2925720" cy="365400"/>
+            <a:ext cx="2925360" cy="365040"/>
           </a:xfrm>
           <a:prstGeom prst="rect">
             <a:avLst/>
@@ -17596,6 +17743,11 @@
             <a:noAutofit/>
           </a:bodyPr>
           <a:p>
+            <a:pPr>
+              <a:lnSpc>
+                <a:spcPct val="100000"/>
+              </a:lnSpc>
+            </a:pPr>
             <a:endParaRPr lang="fr-FR" sz="1800" b="0" u="none" strike="noStrike">
               <a:solidFill>
                 <a:srgbClr val="FFFFFF"/>
@@ -17616,7 +17768,7 @@
         <p:spPr>
           <a:xfrm>
             <a:off x="5989320" y="1737360"/>
-            <a:ext cx="2834280" cy="365400"/>
+            <a:ext cx="2833920" cy="365040"/>
           </a:xfrm>
           <a:prstGeom prst="rect">
             <a:avLst/>
@@ -17677,7 +17829,7 @@
         <p:spPr>
           <a:xfrm>
             <a:off x="274320" y="2560320"/>
-            <a:ext cx="5486040" cy="365400"/>
+            <a:ext cx="5485680" cy="365040"/>
           </a:xfrm>
           <a:prstGeom prst="rect">
             <a:avLst/>
@@ -17738,7 +17890,7 @@
         <p:spPr>
           <a:xfrm>
             <a:off x="5943600" y="2488320"/>
-            <a:ext cx="2925720" cy="499680"/>
+            <a:ext cx="2925360" cy="499320"/>
           </a:xfrm>
           <a:prstGeom prst="rect">
             <a:avLst/>
@@ -17761,6 +17913,11 @@
             <a:noAutofit/>
           </a:bodyPr>
           <a:p>
+            <a:pPr>
+              <a:lnSpc>
+                <a:spcPct val="100000"/>
+              </a:lnSpc>
+            </a:pPr>
             <a:endParaRPr lang="fr-FR" sz="1800" b="0" u="none" strike="noStrike">
               <a:solidFill>
                 <a:srgbClr val="FFFFFF"/>
@@ -17781,7 +17938,7 @@
         <p:spPr>
           <a:xfrm>
             <a:off x="5989320" y="2560320"/>
-            <a:ext cx="2834280" cy="365400"/>
+            <a:ext cx="2833920" cy="365040"/>
           </a:xfrm>
           <a:prstGeom prst="rect">
             <a:avLst/>
@@ -17842,7 +17999,7 @@
         <p:spPr>
           <a:xfrm>
             <a:off x="274320" y="3383280"/>
-            <a:ext cx="5486040" cy="365400"/>
+            <a:ext cx="5485680" cy="365040"/>
           </a:xfrm>
           <a:prstGeom prst="rect">
             <a:avLst/>
@@ -17903,7 +18060,7 @@
         <p:spPr>
           <a:xfrm>
             <a:off x="5943600" y="3383280"/>
-            <a:ext cx="2925720" cy="365400"/>
+            <a:ext cx="2925360" cy="365040"/>
           </a:xfrm>
           <a:prstGeom prst="rect">
             <a:avLst/>
@@ -17926,6 +18083,11 @@
             <a:noAutofit/>
           </a:bodyPr>
           <a:p>
+            <a:pPr>
+              <a:lnSpc>
+                <a:spcPct val="100000"/>
+              </a:lnSpc>
+            </a:pPr>
             <a:endParaRPr lang="fr-FR" sz="1800" b="0" u="none" strike="noStrike">
               <a:solidFill>
                 <a:srgbClr val="FFFFFF"/>
@@ -17946,7 +18108,7 @@
         <p:spPr>
           <a:xfrm>
             <a:off x="5989320" y="3383280"/>
-            <a:ext cx="2834280" cy="365400"/>
+            <a:ext cx="2833920" cy="365040"/>
           </a:xfrm>
           <a:prstGeom prst="rect">
             <a:avLst/>
@@ -18007,7 +18169,7 @@
         <p:spPr>
           <a:xfrm>
             <a:off x="274320" y="4206240"/>
-            <a:ext cx="5486040" cy="365400"/>
+            <a:ext cx="5485680" cy="365040"/>
           </a:xfrm>
           <a:prstGeom prst="rect">
             <a:avLst/>
@@ -18068,7 +18230,7 @@
         <p:spPr>
           <a:xfrm>
             <a:off x="5943600" y="4206240"/>
-            <a:ext cx="2925720" cy="365400"/>
+            <a:ext cx="2925360" cy="365040"/>
           </a:xfrm>
           <a:prstGeom prst="rect">
             <a:avLst/>
@@ -18091,6 +18253,11 @@
             <a:noAutofit/>
           </a:bodyPr>
           <a:p>
+            <a:pPr>
+              <a:lnSpc>
+                <a:spcPct val="100000"/>
+              </a:lnSpc>
+            </a:pPr>
             <a:endParaRPr lang="fr-FR" sz="1800" b="0" u="none" strike="noStrike">
               <a:solidFill>
                 <a:srgbClr val="FFFFFF"/>
@@ -18111,7 +18278,7 @@
         <p:spPr>
           <a:xfrm>
             <a:off x="5989320" y="4206240"/>
-            <a:ext cx="2834280" cy="365400"/>
+            <a:ext cx="2833920" cy="365040"/>
           </a:xfrm>
           <a:prstGeom prst="rect">
             <a:avLst/>
@@ -21109,7 +21276,7 @@
         <p:spPr>
           <a:xfrm>
             <a:off x="0" y="0"/>
-            <a:ext cx="136800" cy="5143320"/>
+            <a:ext cx="136440" cy="5142960"/>
           </a:xfrm>
           <a:prstGeom prst="rect">
             <a:avLst/>
@@ -21128,7 +21295,7 @@
           <a:fontRef idx="minor"/>
         </p:style>
         <p:txBody>
-          <a:bodyPr lIns="90000" tIns="45000" rIns="90000" bIns="45000" anchor="t">
+          <a:bodyPr lIns="68400" tIns="45000" rIns="68400" bIns="45000" anchor="t">
             <a:noAutofit/>
           </a:bodyPr>
           <a:p>
@@ -21152,7 +21319,7 @@
         <p:spPr>
           <a:xfrm>
             <a:off x="137160" y="2240280"/>
-            <a:ext cx="9006480" cy="54360"/>
+            <a:ext cx="9006120" cy="54000"/>
           </a:xfrm>
           <a:prstGeom prst="rect">
             <a:avLst/>
@@ -21195,7 +21362,7 @@
         <p:spPr>
           <a:xfrm>
             <a:off x="457200" y="-126720"/>
-            <a:ext cx="8412120" cy="1279800"/>
+            <a:ext cx="8411760" cy="1279440"/>
           </a:xfrm>
           <a:prstGeom prst="rect">
             <a:avLst/>
@@ -21256,7 +21423,7 @@
         <p:spPr>
           <a:xfrm>
             <a:off x="457200" y="1371600"/>
-            <a:ext cx="8229240" cy="3200040"/>
+            <a:ext cx="8228880" cy="3199680"/>
           </a:xfrm>
           <a:prstGeom prst="rect">
             <a:avLst/>
@@ -21455,7 +21622,7 @@
         <p:spPr>
           <a:xfrm>
             <a:off x="457200" y="4206240"/>
-            <a:ext cx="8229240" cy="639720"/>
+            <a:ext cx="8228880" cy="639360"/>
           </a:xfrm>
           <a:prstGeom prst="rect">
             <a:avLst/>
@@ -21498,7 +21665,7 @@
         <p:spPr>
           <a:xfrm>
             <a:off x="548640" y="4251960"/>
-            <a:ext cx="8046360" cy="548280"/>
+            <a:ext cx="8046000" cy="547920"/>
           </a:xfrm>
           <a:prstGeom prst="rect">
             <a:avLst/>
@@ -21596,7 +21763,7 @@
         <p:spPr>
           <a:xfrm>
             <a:off x="0" y="0"/>
-            <a:ext cx="9143640" cy="91080"/>
+            <a:ext cx="9143280" cy="90720"/>
           </a:xfrm>
           <a:prstGeom prst="rect">
             <a:avLst/>
@@ -21639,7 +21806,7 @@
         <p:spPr>
           <a:xfrm>
             <a:off x="0" y="5052240"/>
-            <a:ext cx="9143640" cy="91080"/>
+            <a:ext cx="9143280" cy="90720"/>
           </a:xfrm>
           <a:prstGeom prst="rect">
             <a:avLst/>
@@ -21682,7 +21849,7 @@
         <p:spPr>
           <a:xfrm>
             <a:off x="457200" y="1645920"/>
-            <a:ext cx="8229240" cy="1828440"/>
+            <a:ext cx="8228880" cy="1828080"/>
           </a:xfrm>
           <a:prstGeom prst="rect">
             <a:avLst/>
@@ -21780,7 +21947,7 @@
         <p:spPr>
           <a:xfrm>
             <a:off x="0" y="0"/>
-            <a:ext cx="9143640" cy="685440"/>
+            <a:ext cx="9143280" cy="685080"/>
           </a:xfrm>
           <a:prstGeom prst="rect">
             <a:avLst/>
@@ -21823,7 +21990,7 @@
         <p:spPr>
           <a:xfrm>
             <a:off x="274320" y="45720"/>
-            <a:ext cx="8595000" cy="594000"/>
+            <a:ext cx="8594640" cy="593640"/>
           </a:xfrm>
           <a:prstGeom prst="rect">
             <a:avLst/>
@@ -21884,7 +22051,7 @@
         <p:spPr>
           <a:xfrm>
             <a:off x="0" y="685800"/>
-            <a:ext cx="72720" cy="4457520"/>
+            <a:ext cx="72360" cy="4457160"/>
           </a:xfrm>
           <a:prstGeom prst="rect">
             <a:avLst/>
@@ -21903,7 +22070,7 @@
           <a:fontRef idx="minor"/>
         </p:style>
         <p:txBody>
-          <a:bodyPr lIns="90000" tIns="45000" rIns="90000" bIns="45000" anchor="t">
+          <a:bodyPr lIns="36360" tIns="45000" rIns="36360" bIns="45000" anchor="t">
             <a:noAutofit/>
           </a:bodyPr>
           <a:p>
@@ -21927,7 +22094,7 @@
         <p:spPr>
           <a:xfrm>
             <a:off x="274320" y="914400"/>
-            <a:ext cx="4114440" cy="365400"/>
+            <a:ext cx="4114080" cy="365040"/>
           </a:xfrm>
           <a:prstGeom prst="rect">
             <a:avLst/>
@@ -21988,7 +22155,7 @@
         <p:spPr>
           <a:xfrm>
             <a:off x="274320" y="1280160"/>
-            <a:ext cx="4114440" cy="2742840"/>
+            <a:ext cx="4114080" cy="2742480"/>
           </a:xfrm>
           <a:prstGeom prst="rect">
             <a:avLst/>
@@ -22159,7 +22326,7 @@
         <p:spPr>
           <a:xfrm>
             <a:off x="4754880" y="914400"/>
-            <a:ext cx="4114440" cy="3474360"/>
+            <a:ext cx="4114080" cy="3474000"/>
           </a:xfrm>
           <a:prstGeom prst="rect">
             <a:avLst/>
@@ -22209,7 +22376,7 @@
         <p:spPr>
           <a:xfrm>
             <a:off x="4846320" y="1005840"/>
-            <a:ext cx="3931560" cy="2559960"/>
+            <a:ext cx="3931200" cy="2559600"/>
           </a:xfrm>
           <a:prstGeom prst="rect">
             <a:avLst/>
@@ -22360,7 +22527,7 @@
         <p:spPr>
           <a:xfrm>
             <a:off x="4846320" y="3657600"/>
-            <a:ext cx="3931560" cy="548280"/>
+            <a:ext cx="3931200" cy="547920"/>
           </a:xfrm>
           <a:prstGeom prst="rect">
             <a:avLst/>
@@ -22458,7 +22625,7 @@
         <p:spPr>
           <a:xfrm>
             <a:off x="0" y="0"/>
-            <a:ext cx="9143640" cy="91080"/>
+            <a:ext cx="9143280" cy="90720"/>
           </a:xfrm>
           <a:prstGeom prst="rect">
             <a:avLst/>
@@ -22501,7 +22668,7 @@
         <p:spPr>
           <a:xfrm>
             <a:off x="0" y="5052240"/>
-            <a:ext cx="9143640" cy="91080"/>
+            <a:ext cx="9143280" cy="90720"/>
           </a:xfrm>
           <a:prstGeom prst="rect">
             <a:avLst/>
@@ -22544,7 +22711,7 @@
         <p:spPr>
           <a:xfrm>
             <a:off x="457200" y="1645920"/>
-            <a:ext cx="8229240" cy="1828440"/>
+            <a:ext cx="8228880" cy="1828080"/>
           </a:xfrm>
           <a:prstGeom prst="rect">
             <a:avLst/>
@@ -22642,7 +22809,7 @@
         <p:spPr>
           <a:xfrm>
             <a:off x="0" y="0"/>
-            <a:ext cx="9143640" cy="685440"/>
+            <a:ext cx="9143280" cy="685080"/>
           </a:xfrm>
           <a:prstGeom prst="rect">
             <a:avLst/>
@@ -22685,7 +22852,7 @@
         <p:spPr>
           <a:xfrm>
             <a:off x="274320" y="45720"/>
-            <a:ext cx="8595000" cy="594000"/>
+            <a:ext cx="8594640" cy="593640"/>
           </a:xfrm>
           <a:prstGeom prst="rect">
             <a:avLst/>
@@ -22746,7 +22913,7 @@
         <p:spPr>
           <a:xfrm>
             <a:off x="0" y="685800"/>
-            <a:ext cx="72720" cy="4457520"/>
+            <a:ext cx="72360" cy="4457160"/>
           </a:xfrm>
           <a:prstGeom prst="rect">
             <a:avLst/>
@@ -22765,7 +22932,7 @@
           <a:fontRef idx="minor"/>
         </p:style>
         <p:txBody>
-          <a:bodyPr lIns="90000" tIns="45000" rIns="90000" bIns="45000" anchor="t">
+          <a:bodyPr lIns="36360" tIns="45000" rIns="36360" bIns="45000" anchor="t">
             <a:noAutofit/>
           </a:bodyPr>
           <a:p>
@@ -22789,7 +22956,7 @@
         <p:spPr>
           <a:xfrm>
             <a:off x="1002960" y="2377440"/>
-            <a:ext cx="7846920" cy="45360"/>
+            <a:ext cx="7846560" cy="45000"/>
           </a:xfrm>
           <a:prstGeom prst="rect">
             <a:avLst/>
@@ -22832,7 +22999,7 @@
         <p:spPr>
           <a:xfrm>
             <a:off x="966960" y="2258640"/>
-            <a:ext cx="237240" cy="237240"/>
+            <a:ext cx="236880" cy="236880"/>
           </a:xfrm>
           <a:prstGeom prst="ellipse">
             <a:avLst/>
@@ -22875,7 +23042,7 @@
         <p:spPr>
           <a:xfrm>
             <a:off x="609120" y="1828800"/>
-            <a:ext cx="1096920" cy="319680"/>
+            <a:ext cx="1096560" cy="319320"/>
           </a:xfrm>
           <a:prstGeom prst="rect">
             <a:avLst/>
@@ -22936,7 +23103,7 @@
         <p:spPr>
           <a:xfrm>
             <a:off x="380520" y="2596320"/>
-            <a:ext cx="1554120" cy="2102760"/>
+            <a:ext cx="1553760" cy="2102400"/>
           </a:xfrm>
           <a:prstGeom prst="rect">
             <a:avLst/>
@@ -22997,7 +23164,7 @@
         <p:spPr>
           <a:xfrm>
             <a:off x="2730600" y="2258640"/>
-            <a:ext cx="237240" cy="237240"/>
+            <a:ext cx="236880" cy="236880"/>
           </a:xfrm>
           <a:prstGeom prst="ellipse">
             <a:avLst/>
@@ -23040,7 +23207,7 @@
         <p:spPr>
           <a:xfrm>
             <a:off x="2300760" y="1828800"/>
-            <a:ext cx="1096920" cy="319680"/>
+            <a:ext cx="1096560" cy="319320"/>
           </a:xfrm>
           <a:prstGeom prst="rect">
             <a:avLst/>
@@ -23101,7 +23268,7 @@
         <p:spPr>
           <a:xfrm>
             <a:off x="2144160" y="2632320"/>
-            <a:ext cx="1554120" cy="2102760"/>
+            <a:ext cx="1553760" cy="2102400"/>
           </a:xfrm>
           <a:prstGeom prst="rect">
             <a:avLst/>
@@ -23162,7 +23329,7 @@
         <p:spPr>
           <a:xfrm>
             <a:off x="4206240" y="2258640"/>
-            <a:ext cx="237240" cy="237240"/>
+            <a:ext cx="236880" cy="236880"/>
           </a:xfrm>
           <a:prstGeom prst="ellipse">
             <a:avLst/>
@@ -23205,7 +23372,7 @@
         <p:spPr>
           <a:xfrm>
             <a:off x="3776400" y="1828800"/>
-            <a:ext cx="1096920" cy="319680"/>
+            <a:ext cx="1096560" cy="319320"/>
           </a:xfrm>
           <a:prstGeom prst="rect">
             <a:avLst/>
@@ -23266,7 +23433,7 @@
         <p:spPr>
           <a:xfrm>
             <a:off x="3655800" y="2632320"/>
-            <a:ext cx="1554120" cy="2102760"/>
+            <a:ext cx="1553760" cy="2102400"/>
           </a:xfrm>
           <a:prstGeom prst="rect">
             <a:avLst/>
@@ -23327,7 +23494,7 @@
         <p:spPr>
           <a:xfrm>
             <a:off x="5789880" y="2258640"/>
-            <a:ext cx="237240" cy="237240"/>
+            <a:ext cx="236880" cy="236880"/>
           </a:xfrm>
           <a:prstGeom prst="ellipse">
             <a:avLst/>
@@ -23370,7 +23537,7 @@
         <p:spPr>
           <a:xfrm>
             <a:off x="5360040" y="1828800"/>
-            <a:ext cx="1096920" cy="319680"/>
+            <a:ext cx="1096560" cy="319320"/>
           </a:xfrm>
           <a:prstGeom prst="rect">
             <a:avLst/>
@@ -23431,7 +23598,7 @@
         <p:spPr>
           <a:xfrm>
             <a:off x="5203440" y="2560320"/>
-            <a:ext cx="1554120" cy="2102760"/>
+            <a:ext cx="1553760" cy="2102400"/>
           </a:xfrm>
           <a:prstGeom prst="rect">
             <a:avLst/>
@@ -23492,7 +23659,7 @@
         <p:spPr>
           <a:xfrm>
             <a:off x="7625520" y="2258640"/>
-            <a:ext cx="237240" cy="237240"/>
+            <a:ext cx="236880" cy="236880"/>
           </a:xfrm>
           <a:prstGeom prst="ellipse">
             <a:avLst/>
@@ -23535,7 +23702,7 @@
         <p:spPr>
           <a:xfrm>
             <a:off x="7231680" y="1828800"/>
-            <a:ext cx="1096920" cy="319680"/>
+            <a:ext cx="1096560" cy="319320"/>
           </a:xfrm>
           <a:prstGeom prst="rect">
             <a:avLst/>
@@ -23596,7 +23763,7 @@
         <p:spPr>
           <a:xfrm>
             <a:off x="6921720" y="2659680"/>
-            <a:ext cx="1554120" cy="2102760"/>
+            <a:ext cx="1553760" cy="2102400"/>
           </a:xfrm>
           <a:prstGeom prst="rect">
             <a:avLst/>
@@ -23694,7 +23861,7 @@
         <p:spPr>
           <a:xfrm>
             <a:off x="0" y="0"/>
-            <a:ext cx="9143640" cy="91080"/>
+            <a:ext cx="9143280" cy="90720"/>
           </a:xfrm>
           <a:prstGeom prst="rect">
             <a:avLst/>
@@ -23737,7 +23904,7 @@
         <p:spPr>
           <a:xfrm>
             <a:off x="0" y="5052240"/>
-            <a:ext cx="9143640" cy="91080"/>
+            <a:ext cx="9143280" cy="90720"/>
           </a:xfrm>
           <a:prstGeom prst="rect">
             <a:avLst/>
@@ -23780,7 +23947,7 @@
         <p:spPr>
           <a:xfrm>
             <a:off x="457200" y="1645920"/>
-            <a:ext cx="8229240" cy="1828440"/>
+            <a:ext cx="8228880" cy="1828080"/>
           </a:xfrm>
           <a:prstGeom prst="rect">
             <a:avLst/>
@@ -23878,7 +24045,7 @@
         <p:spPr>
           <a:xfrm>
             <a:off x="0" y="0"/>
-            <a:ext cx="9143640" cy="685440"/>
+            <a:ext cx="9143280" cy="685080"/>
           </a:xfrm>
           <a:prstGeom prst="rect">
             <a:avLst/>
@@ -23921,7 +24088,7 @@
         <p:spPr>
           <a:xfrm>
             <a:off x="274320" y="45720"/>
-            <a:ext cx="8595000" cy="594000"/>
+            <a:ext cx="8594640" cy="593640"/>
           </a:xfrm>
           <a:prstGeom prst="rect">
             <a:avLst/>
@@ -23982,7 +24149,7 @@
         <p:spPr>
           <a:xfrm>
             <a:off x="0" y="685800"/>
-            <a:ext cx="72720" cy="4457520"/>
+            <a:ext cx="72360" cy="4457160"/>
           </a:xfrm>
           <a:prstGeom prst="rect">
             <a:avLst/>
@@ -24001,7 +24168,7 @@
           <a:fontRef idx="minor"/>
         </p:style>
         <p:txBody>
-          <a:bodyPr lIns="90000" tIns="45000" rIns="90000" bIns="45000" anchor="t">
+          <a:bodyPr lIns="36360" tIns="45000" rIns="36360" bIns="45000" anchor="t">
             <a:noAutofit/>
           </a:bodyPr>
           <a:p>
@@ -24025,7 +24192,7 @@
         <p:spPr>
           <a:xfrm>
             <a:off x="228600" y="914400"/>
-            <a:ext cx="2742840" cy="3474360"/>
+            <a:ext cx="2742480" cy="3474000"/>
           </a:xfrm>
           <a:prstGeom prst="rect">
             <a:avLst/>
@@ -24075,7 +24242,7 @@
         <p:spPr>
           <a:xfrm>
             <a:off x="228600" y="1005840"/>
-            <a:ext cx="2742840" cy="639720"/>
+            <a:ext cx="2742480" cy="639360"/>
           </a:xfrm>
           <a:prstGeom prst="rect">
             <a:avLst/>
@@ -24136,7 +24303,7 @@
         <p:spPr>
           <a:xfrm>
             <a:off x="228600" y="1691640"/>
-            <a:ext cx="2742840" cy="456840"/>
+            <a:ext cx="2742480" cy="456480"/>
           </a:xfrm>
           <a:prstGeom prst="rect">
             <a:avLst/>
@@ -24197,7 +24364,7 @@
         <p:spPr>
           <a:xfrm>
             <a:off x="365760" y="2194560"/>
-            <a:ext cx="2468520" cy="2011320"/>
+            <a:ext cx="2468160" cy="2010960"/>
           </a:xfrm>
           <a:prstGeom prst="rect">
             <a:avLst/>
@@ -24258,7 +24425,7 @@
         <p:spPr>
           <a:xfrm>
             <a:off x="3200400" y="914400"/>
-            <a:ext cx="2742840" cy="3474360"/>
+            <a:ext cx="2742480" cy="3474000"/>
           </a:xfrm>
           <a:prstGeom prst="rect">
             <a:avLst/>
@@ -24308,7 +24475,7 @@
         <p:spPr>
           <a:xfrm>
             <a:off x="3200400" y="1005840"/>
-            <a:ext cx="2742840" cy="639720"/>
+            <a:ext cx="2742480" cy="639360"/>
           </a:xfrm>
           <a:prstGeom prst="rect">
             <a:avLst/>
@@ -24369,7 +24536,7 @@
         <p:spPr>
           <a:xfrm>
             <a:off x="3200400" y="1691640"/>
-            <a:ext cx="2742840" cy="456840"/>
+            <a:ext cx="2742480" cy="456480"/>
           </a:xfrm>
           <a:prstGeom prst="rect">
             <a:avLst/>
@@ -24430,7 +24597,7 @@
         <p:spPr>
           <a:xfrm>
             <a:off x="3337560" y="2194560"/>
-            <a:ext cx="2468520" cy="2011320"/>
+            <a:ext cx="2468160" cy="2010960"/>
           </a:xfrm>
           <a:prstGeom prst="rect">
             <a:avLst/>
@@ -24491,7 +24658,7 @@
         <p:spPr>
           <a:xfrm>
             <a:off x="6172200" y="914400"/>
-            <a:ext cx="2742840" cy="3474360"/>
+            <a:ext cx="2742480" cy="3474000"/>
           </a:xfrm>
           <a:prstGeom prst="rect">
             <a:avLst/>
@@ -24541,7 +24708,7 @@
         <p:spPr>
           <a:xfrm>
             <a:off x="6172200" y="1005840"/>
-            <a:ext cx="2742840" cy="639720"/>
+            <a:ext cx="2742480" cy="639360"/>
           </a:xfrm>
           <a:prstGeom prst="rect">
             <a:avLst/>
@@ -24602,7 +24769,7 @@
         <p:spPr>
           <a:xfrm>
             <a:off x="6172200" y="1691640"/>
-            <a:ext cx="2742840" cy="456840"/>
+            <a:ext cx="2742480" cy="456480"/>
           </a:xfrm>
           <a:prstGeom prst="rect">
             <a:avLst/>
@@ -24663,7 +24830,7 @@
         <p:spPr>
           <a:xfrm>
             <a:off x="6309360" y="2194560"/>
-            <a:ext cx="2468520" cy="2011320"/>
+            <a:ext cx="2468160" cy="2010960"/>
           </a:xfrm>
           <a:prstGeom prst="rect">
             <a:avLst/>
@@ -24724,7 +24891,7 @@
         <p:spPr>
           <a:xfrm>
             <a:off x="182880" y="4663440"/>
-            <a:ext cx="8777880" cy="319680"/>
+            <a:ext cx="8777520" cy="319320"/>
           </a:xfrm>
           <a:prstGeom prst="rect">
             <a:avLst/>
@@ -24822,7 +24989,7 @@
         <p:spPr>
           <a:xfrm>
             <a:off x="0" y="0"/>
-            <a:ext cx="9143640" cy="91080"/>
+            <a:ext cx="9143280" cy="90720"/>
           </a:xfrm>
           <a:prstGeom prst="rect">
             <a:avLst/>
@@ -24865,7 +25032,7 @@
         <p:spPr>
           <a:xfrm>
             <a:off x="0" y="5052240"/>
-            <a:ext cx="9143640" cy="91080"/>
+            <a:ext cx="9143280" cy="90720"/>
           </a:xfrm>
           <a:prstGeom prst="rect">
             <a:avLst/>
@@ -24908,7 +25075,7 @@
         <p:spPr>
           <a:xfrm>
             <a:off x="457200" y="1645920"/>
-            <a:ext cx="8229240" cy="1828440"/>
+            <a:ext cx="8228880" cy="1828080"/>
           </a:xfrm>
           <a:prstGeom prst="rect">
             <a:avLst/>

--- a/paxos.pptx
+++ b/paxos.pptx
@@ -32,6 +32,8 @@
     <p:sldId id="277" r:id="rId25"/>
     <p:sldId id="278" r:id="rId26"/>
     <p:sldId id="279" r:id="rId27"/>
+    <p:sldId id="280" r:id="rId28"/>
+    <p:sldId id="281" r:id="rId29"/>
   </p:sldIdLst>
   <p:sldSz cx="9144000" cy="5143500"/>
   <p:notesSz cx="5143500" cy="9144000"/>
@@ -92,7 +94,18 @@
                 <a:uFillTx/>
                 <a:latin typeface="Calibri"/>
               </a:rPr>
-              <a:t>Cliquez pour déplacer la diapo</a:t>
+              <a:t>Cliquez pour déplacer la </a:t>
+            </a:r>
+            <a:r>
+              <a:rPr lang="fr-FR" sz="1800" b="0" u="none" strike="noStrike">
+                <a:solidFill>
+                  <a:schemeClr val="dk1"/>
+                </a:solidFill>
+                <a:effectLst/>
+                <a:uFillTx/>
+                <a:latin typeface="Calibri"/>
+              </a:rPr>
+              <a:t>diapo</a:t>
             </a:r>
             <a:endParaRPr lang="fr-FR" sz="1800" b="0" u="none" strike="noStrike">
               <a:solidFill>
@@ -145,7 +158,18 @@
                 <a:uFillTx/>
                 <a:latin typeface="Arial"/>
               </a:rPr>
-              <a:t>Cliquez pour modifier le format des notes</a:t>
+              <a:t>Cliquez pour modifier </a:t>
+            </a:r>
+            <a:r>
+              <a:rPr lang="fr-FR" sz="2000" b="0" u="none" strike="noStrike">
+                <a:solidFill>
+                  <a:srgbClr val="000000"/>
+                </a:solidFill>
+                <a:effectLst/>
+                <a:uFillTx/>
+                <a:latin typeface="Arial"/>
+              </a:rPr>
+              <a:t>le format des notes</a:t>
             </a:r>
             <a:endParaRPr lang="fr-FR" sz="2000" b="0" u="none" strike="noStrike">
               <a:solidFill>
@@ -387,7 +411,7 @@
             <a:pPr indent="0" algn="r">
               <a:buNone/>
             </a:pPr>
-            <a:fld id="{9AF8495C-D80D-4F38-A04A-D43F62F9FAA2}" type="slidenum">
+            <a:fld id="{50929804-8C44-4EDC-A3BB-E5D8131048EC}" type="slidenum">
               <a:rPr lang="fr-FR" sz="1400" b="0" u="none" strike="noStrike">
                 <a:solidFill>
                   <a:srgbClr val="000000"/>
@@ -434,7 +458,7 @@
       </p:grpSpPr>
       <p:sp>
         <p:nvSpPr>
-          <p:cNvPr id="260" name="PlaceHolder 1"/>
+          <p:cNvPr id="286" name="PlaceHolder 1"/>
           <p:cNvSpPr>
             <a:spLocks noGrp="1"/>
           </p:cNvSpPr>
@@ -445,19 +469,19 @@
         <p:spPr>
           <a:xfrm>
             <a:off x="685800" y="1143000"/>
-            <a:ext cx="5485680" cy="3085560"/>
-          </a:xfrm>
-          <a:prstGeom prst="rect">
-            <a:avLst/>
-          </a:prstGeom>
-          <a:ln w="0">
-            <a:noFill/>
-          </a:ln>
-        </p:spPr>
-      </p:sp>
-      <p:sp>
-        <p:nvSpPr>
-          <p:cNvPr id="261" name="PlaceHolder 2"/>
+            <a:ext cx="5484960" cy="3084840"/>
+          </a:xfrm>
+          <a:prstGeom prst="rect">
+            <a:avLst/>
+          </a:prstGeom>
+          <a:ln w="0">
+            <a:noFill/>
+          </a:ln>
+        </p:spPr>
+      </p:sp>
+      <p:sp>
+        <p:nvSpPr>
+          <p:cNvPr id="287" name="PlaceHolder 2"/>
           <p:cNvSpPr>
             <a:spLocks noGrp="1"/>
           </p:cNvSpPr>
@@ -468,7 +492,7 @@
         <p:spPr>
           <a:xfrm>
             <a:off x="685800" y="4400640"/>
-            <a:ext cx="5485680" cy="3599640"/>
+            <a:ext cx="5484960" cy="3598920"/>
           </a:xfrm>
           <a:prstGeom prst="rect">
             <a:avLst/>
@@ -499,7 +523,7 @@
       </p:sp>
       <p:sp>
         <p:nvSpPr>
-          <p:cNvPr id="262" name="PlaceHolder 3"/>
+          <p:cNvPr id="288" name="PlaceHolder 3"/>
           <p:cNvSpPr>
             <a:spLocks noGrp="1"/>
           </p:cNvSpPr>
@@ -510,7 +534,7 @@
         <p:spPr>
           <a:xfrm>
             <a:off x="3884760" y="8685360"/>
-            <a:ext cx="2971080" cy="457920"/>
+            <a:ext cx="2970360" cy="457200"/>
           </a:xfrm>
           <a:prstGeom prst="rect">
             <a:avLst/>
@@ -554,7 +578,7 @@
                 <a:tab pos="0" algn="l"/>
               </a:tabLst>
             </a:pPr>
-            <a:fld id="{8FAF017A-1B14-4017-81E8-B9BD758DAD5E}" type="slidenum">
+            <a:fld id="{C0831E76-6353-41B1-9548-84EBEED4EC6F}" type="slidenum">
               <a:rPr lang="en-US" sz="1200" b="0" u="none" strike="noStrike">
                 <a:solidFill>
                   <a:schemeClr val="dk1"/>
@@ -564,7 +588,7 @@
                 <a:latin typeface="+mn-lt"/>
                 <a:ea typeface="+mn-ea"/>
               </a:rPr>
-              <a:t>1</a:t>
+              <a:t>&lt;numéro&gt;</a:t>
             </a:fld>
             <a:endParaRPr lang="fr-FR" sz="1200" b="0" u="none" strike="noStrike">
               <a:solidFill>
@@ -601,7 +625,7 @@
       </p:grpSpPr>
       <p:sp>
         <p:nvSpPr>
-          <p:cNvPr id="287" name="PlaceHolder 1"/>
+          <p:cNvPr id="313" name="PlaceHolder 1"/>
           <p:cNvSpPr>
             <a:spLocks noGrp="1"/>
           </p:cNvSpPr>
@@ -612,19 +636,19 @@
         <p:spPr>
           <a:xfrm>
             <a:off x="685800" y="1143000"/>
-            <a:ext cx="5485680" cy="3085560"/>
-          </a:xfrm>
-          <a:prstGeom prst="rect">
-            <a:avLst/>
-          </a:prstGeom>
-          <a:ln w="0">
-            <a:noFill/>
-          </a:ln>
-        </p:spPr>
-      </p:sp>
-      <p:sp>
-        <p:nvSpPr>
-          <p:cNvPr id="288" name="PlaceHolder 2"/>
+            <a:ext cx="5484960" cy="3084840"/>
+          </a:xfrm>
+          <a:prstGeom prst="rect">
+            <a:avLst/>
+          </a:prstGeom>
+          <a:ln w="0">
+            <a:noFill/>
+          </a:ln>
+        </p:spPr>
+      </p:sp>
+      <p:sp>
+        <p:nvSpPr>
+          <p:cNvPr id="314" name="PlaceHolder 2"/>
           <p:cNvSpPr>
             <a:spLocks noGrp="1"/>
           </p:cNvSpPr>
@@ -635,7 +659,7 @@
         <p:spPr>
           <a:xfrm>
             <a:off x="685800" y="4400640"/>
-            <a:ext cx="5485680" cy="3599640"/>
+            <a:ext cx="5484960" cy="3598920"/>
           </a:xfrm>
           <a:prstGeom prst="rect">
             <a:avLst/>
@@ -666,7 +690,7 @@
       </p:sp>
       <p:sp>
         <p:nvSpPr>
-          <p:cNvPr id="289" name="PlaceHolder 3"/>
+          <p:cNvPr id="315" name="PlaceHolder 3"/>
           <p:cNvSpPr>
             <a:spLocks noGrp="1"/>
           </p:cNvSpPr>
@@ -677,7 +701,7 @@
         <p:spPr>
           <a:xfrm>
             <a:off x="3884760" y="8685360"/>
-            <a:ext cx="2971080" cy="457920"/>
+            <a:ext cx="2970360" cy="457200"/>
           </a:xfrm>
           <a:prstGeom prst="rect">
             <a:avLst/>
@@ -721,7 +745,7 @@
                 <a:tab pos="0" algn="l"/>
               </a:tabLst>
             </a:pPr>
-            <a:fld id="{EC9FAC33-6ED8-408E-82B1-287A0528D320}" type="slidenum">
+            <a:fld id="{D0671849-29B3-4FDF-A7F1-6D95FB121058}" type="slidenum">
               <a:rPr lang="en-US" sz="1200" b="0" u="none" strike="noStrike">
                 <a:solidFill>
                   <a:schemeClr val="dk1"/>
@@ -768,7 +792,7 @@
       </p:grpSpPr>
       <p:sp>
         <p:nvSpPr>
-          <p:cNvPr id="290" name="PlaceHolder 1"/>
+          <p:cNvPr id="316" name="PlaceHolder 1"/>
           <p:cNvSpPr>
             <a:spLocks noGrp="1"/>
           </p:cNvSpPr>
@@ -779,19 +803,19 @@
         <p:spPr>
           <a:xfrm>
             <a:off x="685800" y="1143000"/>
-            <a:ext cx="5485680" cy="3085560"/>
-          </a:xfrm>
-          <a:prstGeom prst="rect">
-            <a:avLst/>
-          </a:prstGeom>
-          <a:ln w="0">
-            <a:noFill/>
-          </a:ln>
-        </p:spPr>
-      </p:sp>
-      <p:sp>
-        <p:nvSpPr>
-          <p:cNvPr id="291" name="PlaceHolder 2"/>
+            <a:ext cx="5484960" cy="3084840"/>
+          </a:xfrm>
+          <a:prstGeom prst="rect">
+            <a:avLst/>
+          </a:prstGeom>
+          <a:ln w="0">
+            <a:noFill/>
+          </a:ln>
+        </p:spPr>
+      </p:sp>
+      <p:sp>
+        <p:nvSpPr>
+          <p:cNvPr id="317" name="PlaceHolder 2"/>
           <p:cNvSpPr>
             <a:spLocks noGrp="1"/>
           </p:cNvSpPr>
@@ -802,7 +826,7 @@
         <p:spPr>
           <a:xfrm>
             <a:off x="685800" y="4400640"/>
-            <a:ext cx="5485680" cy="3599640"/>
+            <a:ext cx="5484960" cy="3598920"/>
           </a:xfrm>
           <a:prstGeom prst="rect">
             <a:avLst/>
@@ -833,7 +857,7 @@
       </p:sp>
       <p:sp>
         <p:nvSpPr>
-          <p:cNvPr id="292" name="PlaceHolder 3"/>
+          <p:cNvPr id="318" name="PlaceHolder 3"/>
           <p:cNvSpPr>
             <a:spLocks noGrp="1"/>
           </p:cNvSpPr>
@@ -844,7 +868,7 @@
         <p:spPr>
           <a:xfrm>
             <a:off x="3884760" y="8685360"/>
-            <a:ext cx="2971080" cy="457920"/>
+            <a:ext cx="2970360" cy="457200"/>
           </a:xfrm>
           <a:prstGeom prst="rect">
             <a:avLst/>
@@ -888,7 +912,7 @@
                 <a:tab pos="0" algn="l"/>
               </a:tabLst>
             </a:pPr>
-            <a:fld id="{D187B97B-4FF2-4B58-B074-16D46A5B03D5}" type="slidenum">
+            <a:fld id="{8F2BDD92-2660-4C5B-B755-DC145B8D78E7}" type="slidenum">
               <a:rPr lang="en-US" sz="1200" b="0" u="none" strike="noStrike">
                 <a:solidFill>
                   <a:schemeClr val="dk1"/>
@@ -935,7 +959,7 @@
       </p:grpSpPr>
       <p:sp>
         <p:nvSpPr>
-          <p:cNvPr id="293" name="PlaceHolder 1"/>
+          <p:cNvPr id="319" name="PlaceHolder 1"/>
           <p:cNvSpPr>
             <a:spLocks noGrp="1"/>
           </p:cNvSpPr>
@@ -946,19 +970,19 @@
         <p:spPr>
           <a:xfrm>
             <a:off x="685800" y="1143000"/>
-            <a:ext cx="5485680" cy="3085560"/>
-          </a:xfrm>
-          <a:prstGeom prst="rect">
-            <a:avLst/>
-          </a:prstGeom>
-          <a:ln w="0">
-            <a:noFill/>
-          </a:ln>
-        </p:spPr>
-      </p:sp>
-      <p:sp>
-        <p:nvSpPr>
-          <p:cNvPr id="294" name="PlaceHolder 2"/>
+            <a:ext cx="5484960" cy="3084840"/>
+          </a:xfrm>
+          <a:prstGeom prst="rect">
+            <a:avLst/>
+          </a:prstGeom>
+          <a:ln w="0">
+            <a:noFill/>
+          </a:ln>
+        </p:spPr>
+      </p:sp>
+      <p:sp>
+        <p:nvSpPr>
+          <p:cNvPr id="320" name="PlaceHolder 2"/>
           <p:cNvSpPr>
             <a:spLocks noGrp="1"/>
           </p:cNvSpPr>
@@ -969,7 +993,7 @@
         <p:spPr>
           <a:xfrm>
             <a:off x="685800" y="4400640"/>
-            <a:ext cx="5485680" cy="3599640"/>
+            <a:ext cx="5484960" cy="3598920"/>
           </a:xfrm>
           <a:prstGeom prst="rect">
             <a:avLst/>
@@ -1000,7 +1024,7 @@
       </p:sp>
       <p:sp>
         <p:nvSpPr>
-          <p:cNvPr id="295" name="PlaceHolder 3"/>
+          <p:cNvPr id="321" name="PlaceHolder 3"/>
           <p:cNvSpPr>
             <a:spLocks noGrp="1"/>
           </p:cNvSpPr>
@@ -1011,7 +1035,7 @@
         <p:spPr>
           <a:xfrm>
             <a:off x="3884760" y="8685360"/>
-            <a:ext cx="2971080" cy="457920"/>
+            <a:ext cx="2970360" cy="457200"/>
           </a:xfrm>
           <a:prstGeom prst="rect">
             <a:avLst/>
@@ -1055,7 +1079,7 @@
                 <a:tab pos="0" algn="l"/>
               </a:tabLst>
             </a:pPr>
-            <a:fld id="{305CEB14-7A65-4856-B182-3AB8BEC2ECC1}" type="slidenum">
+            <a:fld id="{A12309CD-4931-4C79-924A-9C21B7062C82}" type="slidenum">
               <a:rPr lang="en-US" sz="1200" b="0" u="none" strike="noStrike">
                 <a:solidFill>
                   <a:schemeClr val="dk1"/>
@@ -1102,7 +1126,7 @@
       </p:grpSpPr>
       <p:sp>
         <p:nvSpPr>
-          <p:cNvPr id="296" name="PlaceHolder 1"/>
+          <p:cNvPr id="322" name="PlaceHolder 1"/>
           <p:cNvSpPr>
             <a:spLocks noGrp="1"/>
           </p:cNvSpPr>
@@ -1113,19 +1137,19 @@
         <p:spPr>
           <a:xfrm>
             <a:off x="685800" y="1143000"/>
-            <a:ext cx="5485680" cy="3085560"/>
-          </a:xfrm>
-          <a:prstGeom prst="rect">
-            <a:avLst/>
-          </a:prstGeom>
-          <a:ln w="0">
-            <a:noFill/>
-          </a:ln>
-        </p:spPr>
-      </p:sp>
-      <p:sp>
-        <p:nvSpPr>
-          <p:cNvPr id="297" name="PlaceHolder 2"/>
+            <a:ext cx="5484960" cy="3084840"/>
+          </a:xfrm>
+          <a:prstGeom prst="rect">
+            <a:avLst/>
+          </a:prstGeom>
+          <a:ln w="0">
+            <a:noFill/>
+          </a:ln>
+        </p:spPr>
+      </p:sp>
+      <p:sp>
+        <p:nvSpPr>
+          <p:cNvPr id="323" name="PlaceHolder 2"/>
           <p:cNvSpPr>
             <a:spLocks noGrp="1"/>
           </p:cNvSpPr>
@@ -1136,7 +1160,7 @@
         <p:spPr>
           <a:xfrm>
             <a:off x="685800" y="4400640"/>
-            <a:ext cx="5485680" cy="3599640"/>
+            <a:ext cx="5484960" cy="3598920"/>
           </a:xfrm>
           <a:prstGeom prst="rect">
             <a:avLst/>
@@ -1167,7 +1191,7 @@
       </p:sp>
       <p:sp>
         <p:nvSpPr>
-          <p:cNvPr id="298" name="PlaceHolder 3"/>
+          <p:cNvPr id="324" name="PlaceHolder 3"/>
           <p:cNvSpPr>
             <a:spLocks noGrp="1"/>
           </p:cNvSpPr>
@@ -1178,7 +1202,7 @@
         <p:spPr>
           <a:xfrm>
             <a:off x="3884760" y="8685360"/>
-            <a:ext cx="2971080" cy="457920"/>
+            <a:ext cx="2970360" cy="457200"/>
           </a:xfrm>
           <a:prstGeom prst="rect">
             <a:avLst/>
@@ -1222,7 +1246,7 @@
                 <a:tab pos="0" algn="l"/>
               </a:tabLst>
             </a:pPr>
-            <a:fld id="{D88F7BF0-BF25-4F0A-BD9D-30C94BFEBB29}" type="slidenum">
+            <a:fld id="{2AB8DEDB-D142-4B56-9391-B856328EB4BC}" type="slidenum">
               <a:rPr lang="en-US" sz="1200" b="0" u="none" strike="noStrike">
                 <a:solidFill>
                   <a:schemeClr val="dk1"/>
@@ -1269,7 +1293,7 @@
       </p:grpSpPr>
       <p:sp>
         <p:nvSpPr>
-          <p:cNvPr id="299" name="PlaceHolder 1"/>
+          <p:cNvPr id="325" name="PlaceHolder 1"/>
           <p:cNvSpPr>
             <a:spLocks noGrp="1"/>
           </p:cNvSpPr>
@@ -1280,19 +1304,19 @@
         <p:spPr>
           <a:xfrm>
             <a:off x="685800" y="1143000"/>
-            <a:ext cx="5485680" cy="3085560"/>
-          </a:xfrm>
-          <a:prstGeom prst="rect">
-            <a:avLst/>
-          </a:prstGeom>
-          <a:ln w="0">
-            <a:noFill/>
-          </a:ln>
-        </p:spPr>
-      </p:sp>
-      <p:sp>
-        <p:nvSpPr>
-          <p:cNvPr id="300" name="PlaceHolder 2"/>
+            <a:ext cx="5484960" cy="3084840"/>
+          </a:xfrm>
+          <a:prstGeom prst="rect">
+            <a:avLst/>
+          </a:prstGeom>
+          <a:ln w="0">
+            <a:noFill/>
+          </a:ln>
+        </p:spPr>
+      </p:sp>
+      <p:sp>
+        <p:nvSpPr>
+          <p:cNvPr id="326" name="PlaceHolder 2"/>
           <p:cNvSpPr>
             <a:spLocks noGrp="1"/>
           </p:cNvSpPr>
@@ -1303,7 +1327,7 @@
         <p:spPr>
           <a:xfrm>
             <a:off x="685800" y="4400640"/>
-            <a:ext cx="5485680" cy="3599640"/>
+            <a:ext cx="5484960" cy="3598920"/>
           </a:xfrm>
           <a:prstGeom prst="rect">
             <a:avLst/>
@@ -1334,7 +1358,7 @@
       </p:sp>
       <p:sp>
         <p:nvSpPr>
-          <p:cNvPr id="301" name="PlaceHolder 3"/>
+          <p:cNvPr id="327" name="PlaceHolder 3"/>
           <p:cNvSpPr>
             <a:spLocks noGrp="1"/>
           </p:cNvSpPr>
@@ -1345,7 +1369,7 @@
         <p:spPr>
           <a:xfrm>
             <a:off x="3884760" y="8685360"/>
-            <a:ext cx="2971080" cy="457920"/>
+            <a:ext cx="2970360" cy="457200"/>
           </a:xfrm>
           <a:prstGeom prst="rect">
             <a:avLst/>
@@ -1389,7 +1413,7 @@
                 <a:tab pos="0" algn="l"/>
               </a:tabLst>
             </a:pPr>
-            <a:fld id="{E6A63D6E-5958-4AA9-A2E2-5C8D4F596E5E}" type="slidenum">
+            <a:fld id="{43E97317-A6E0-49B2-9598-02D3DFA4D544}" type="slidenum">
               <a:rPr lang="en-US" sz="1200" b="0" u="none" strike="noStrike">
                 <a:solidFill>
                   <a:schemeClr val="dk1"/>
@@ -1436,7 +1460,7 @@
       </p:grpSpPr>
       <p:sp>
         <p:nvSpPr>
-          <p:cNvPr id="302" name="PlaceHolder 1"/>
+          <p:cNvPr id="328" name="PlaceHolder 1"/>
           <p:cNvSpPr>
             <a:spLocks noGrp="1"/>
           </p:cNvSpPr>
@@ -1447,19 +1471,19 @@
         <p:spPr>
           <a:xfrm>
             <a:off x="685800" y="1143000"/>
-            <a:ext cx="5485680" cy="3085560"/>
-          </a:xfrm>
-          <a:prstGeom prst="rect">
-            <a:avLst/>
-          </a:prstGeom>
-          <a:ln w="0">
-            <a:noFill/>
-          </a:ln>
-        </p:spPr>
-      </p:sp>
-      <p:sp>
-        <p:nvSpPr>
-          <p:cNvPr id="303" name="PlaceHolder 2"/>
+            <a:ext cx="5484960" cy="3084840"/>
+          </a:xfrm>
+          <a:prstGeom prst="rect">
+            <a:avLst/>
+          </a:prstGeom>
+          <a:ln w="0">
+            <a:noFill/>
+          </a:ln>
+        </p:spPr>
+      </p:sp>
+      <p:sp>
+        <p:nvSpPr>
+          <p:cNvPr id="329" name="PlaceHolder 2"/>
           <p:cNvSpPr>
             <a:spLocks noGrp="1"/>
           </p:cNvSpPr>
@@ -1470,7 +1494,7 @@
         <p:spPr>
           <a:xfrm>
             <a:off x="685800" y="4400640"/>
-            <a:ext cx="5485680" cy="3599640"/>
+            <a:ext cx="5484960" cy="3598920"/>
           </a:xfrm>
           <a:prstGeom prst="rect">
             <a:avLst/>
@@ -1501,7 +1525,7 @@
       </p:sp>
       <p:sp>
         <p:nvSpPr>
-          <p:cNvPr id="304" name="PlaceHolder 3"/>
+          <p:cNvPr id="330" name="PlaceHolder 3"/>
           <p:cNvSpPr>
             <a:spLocks noGrp="1"/>
           </p:cNvSpPr>
@@ -1512,7 +1536,7 @@
         <p:spPr>
           <a:xfrm>
             <a:off x="3884760" y="8685360"/>
-            <a:ext cx="2971080" cy="457920"/>
+            <a:ext cx="2970360" cy="457200"/>
           </a:xfrm>
           <a:prstGeom prst="rect">
             <a:avLst/>
@@ -1556,7 +1580,7 @@
                 <a:tab pos="0" algn="l"/>
               </a:tabLst>
             </a:pPr>
-            <a:fld id="{27169466-1359-49E8-BD1B-71A8F986F537}" type="slidenum">
+            <a:fld id="{DF49B1E8-709F-4972-85CC-B54D0E59E952}" type="slidenum">
               <a:rPr lang="en-US" sz="1200" b="0" u="none" strike="noStrike">
                 <a:solidFill>
                   <a:schemeClr val="dk1"/>
@@ -1603,7 +1627,7 @@
       </p:grpSpPr>
       <p:sp>
         <p:nvSpPr>
-          <p:cNvPr id="305" name="PlaceHolder 1"/>
+          <p:cNvPr id="331" name="PlaceHolder 1"/>
           <p:cNvSpPr>
             <a:spLocks noGrp="1"/>
           </p:cNvSpPr>
@@ -1614,19 +1638,19 @@
         <p:spPr>
           <a:xfrm>
             <a:off x="685800" y="1143000"/>
-            <a:ext cx="5485680" cy="3085560"/>
-          </a:xfrm>
-          <a:prstGeom prst="rect">
-            <a:avLst/>
-          </a:prstGeom>
-          <a:ln w="0">
-            <a:noFill/>
-          </a:ln>
-        </p:spPr>
-      </p:sp>
-      <p:sp>
-        <p:nvSpPr>
-          <p:cNvPr id="306" name="PlaceHolder 2"/>
+            <a:ext cx="5484960" cy="3084840"/>
+          </a:xfrm>
+          <a:prstGeom prst="rect">
+            <a:avLst/>
+          </a:prstGeom>
+          <a:ln w="0">
+            <a:noFill/>
+          </a:ln>
+        </p:spPr>
+      </p:sp>
+      <p:sp>
+        <p:nvSpPr>
+          <p:cNvPr id="332" name="PlaceHolder 2"/>
           <p:cNvSpPr>
             <a:spLocks noGrp="1"/>
           </p:cNvSpPr>
@@ -1637,7 +1661,7 @@
         <p:spPr>
           <a:xfrm>
             <a:off x="685800" y="4400640"/>
-            <a:ext cx="5485680" cy="3599640"/>
+            <a:ext cx="5484960" cy="3598920"/>
           </a:xfrm>
           <a:prstGeom prst="rect">
             <a:avLst/>
@@ -1668,7 +1692,7 @@
       </p:sp>
       <p:sp>
         <p:nvSpPr>
-          <p:cNvPr id="307" name="PlaceHolder 3"/>
+          <p:cNvPr id="333" name="PlaceHolder 3"/>
           <p:cNvSpPr>
             <a:spLocks noGrp="1"/>
           </p:cNvSpPr>
@@ -1679,7 +1703,7 @@
         <p:spPr>
           <a:xfrm>
             <a:off x="3884760" y="8685360"/>
-            <a:ext cx="2971080" cy="457920"/>
+            <a:ext cx="2970360" cy="457200"/>
           </a:xfrm>
           <a:prstGeom prst="rect">
             <a:avLst/>
@@ -1723,7 +1747,7 @@
                 <a:tab pos="0" algn="l"/>
               </a:tabLst>
             </a:pPr>
-            <a:fld id="{30C18386-29F4-4C6F-B660-4C4AE6C6253B}" type="slidenum">
+            <a:fld id="{EBD35FC3-3C76-4E97-9241-AF4D9597354E}" type="slidenum">
               <a:rPr lang="en-US" sz="1200" b="0" u="none" strike="noStrike">
                 <a:solidFill>
                   <a:schemeClr val="dk1"/>
@@ -1770,7 +1794,7 @@
       </p:grpSpPr>
       <p:sp>
         <p:nvSpPr>
-          <p:cNvPr id="308" name="PlaceHolder 1"/>
+          <p:cNvPr id="334" name="PlaceHolder 1"/>
           <p:cNvSpPr>
             <a:spLocks noGrp="1"/>
           </p:cNvSpPr>
@@ -1781,19 +1805,19 @@
         <p:spPr>
           <a:xfrm>
             <a:off x="685800" y="1143000"/>
-            <a:ext cx="5485680" cy="3085560"/>
-          </a:xfrm>
-          <a:prstGeom prst="rect">
-            <a:avLst/>
-          </a:prstGeom>
-          <a:ln w="0">
-            <a:noFill/>
-          </a:ln>
-        </p:spPr>
-      </p:sp>
-      <p:sp>
-        <p:nvSpPr>
-          <p:cNvPr id="309" name="PlaceHolder 2"/>
+            <a:ext cx="5484960" cy="3084840"/>
+          </a:xfrm>
+          <a:prstGeom prst="rect">
+            <a:avLst/>
+          </a:prstGeom>
+          <a:ln w="0">
+            <a:noFill/>
+          </a:ln>
+        </p:spPr>
+      </p:sp>
+      <p:sp>
+        <p:nvSpPr>
+          <p:cNvPr id="335" name="PlaceHolder 2"/>
           <p:cNvSpPr>
             <a:spLocks noGrp="1"/>
           </p:cNvSpPr>
@@ -1804,7 +1828,7 @@
         <p:spPr>
           <a:xfrm>
             <a:off x="685800" y="4400640"/>
-            <a:ext cx="5485680" cy="3599640"/>
+            <a:ext cx="5484960" cy="3598920"/>
           </a:xfrm>
           <a:prstGeom prst="rect">
             <a:avLst/>
@@ -1835,7 +1859,7 @@
       </p:sp>
       <p:sp>
         <p:nvSpPr>
-          <p:cNvPr id="310" name="PlaceHolder 3"/>
+          <p:cNvPr id="336" name="PlaceHolder 3"/>
           <p:cNvSpPr>
             <a:spLocks noGrp="1"/>
           </p:cNvSpPr>
@@ -1846,7 +1870,7 @@
         <p:spPr>
           <a:xfrm>
             <a:off x="3884760" y="8685360"/>
-            <a:ext cx="2971080" cy="457920"/>
+            <a:ext cx="2970360" cy="457200"/>
           </a:xfrm>
           <a:prstGeom prst="rect">
             <a:avLst/>
@@ -1890,7 +1914,7 @@
                 <a:tab pos="0" algn="l"/>
               </a:tabLst>
             </a:pPr>
-            <a:fld id="{F86467B3-E679-4182-ABD4-EAC531094D73}" type="slidenum">
+            <a:fld id="{B5EAE43A-C7C0-4520-8C96-AEEDC6821B89}" type="slidenum">
               <a:rPr lang="en-US" sz="1200" b="0" u="none" strike="noStrike">
                 <a:solidFill>
                   <a:schemeClr val="dk1"/>
@@ -1937,7 +1961,7 @@
       </p:grpSpPr>
       <p:sp>
         <p:nvSpPr>
-          <p:cNvPr id="311" name="PlaceHolder 1"/>
+          <p:cNvPr id="337" name="PlaceHolder 1"/>
           <p:cNvSpPr>
             <a:spLocks noGrp="1"/>
           </p:cNvSpPr>
@@ -1948,19 +1972,19 @@
         <p:spPr>
           <a:xfrm>
             <a:off x="685800" y="1143000"/>
-            <a:ext cx="5485680" cy="3085560"/>
-          </a:xfrm>
-          <a:prstGeom prst="rect">
-            <a:avLst/>
-          </a:prstGeom>
-          <a:ln w="0">
-            <a:noFill/>
-          </a:ln>
-        </p:spPr>
-      </p:sp>
-      <p:sp>
-        <p:nvSpPr>
-          <p:cNvPr id="312" name="PlaceHolder 2"/>
+            <a:ext cx="5484960" cy="3084840"/>
+          </a:xfrm>
+          <a:prstGeom prst="rect">
+            <a:avLst/>
+          </a:prstGeom>
+          <a:ln w="0">
+            <a:noFill/>
+          </a:ln>
+        </p:spPr>
+      </p:sp>
+      <p:sp>
+        <p:nvSpPr>
+          <p:cNvPr id="338" name="PlaceHolder 2"/>
           <p:cNvSpPr>
             <a:spLocks noGrp="1"/>
           </p:cNvSpPr>
@@ -1971,7 +1995,7 @@
         <p:spPr>
           <a:xfrm>
             <a:off x="685800" y="4400640"/>
-            <a:ext cx="5485680" cy="3599640"/>
+            <a:ext cx="5484960" cy="3598920"/>
           </a:xfrm>
           <a:prstGeom prst="rect">
             <a:avLst/>
@@ -2002,7 +2026,7 @@
       </p:sp>
       <p:sp>
         <p:nvSpPr>
-          <p:cNvPr id="313" name="PlaceHolder 3"/>
+          <p:cNvPr id="339" name="PlaceHolder 3"/>
           <p:cNvSpPr>
             <a:spLocks noGrp="1"/>
           </p:cNvSpPr>
@@ -2013,7 +2037,7 @@
         <p:spPr>
           <a:xfrm>
             <a:off x="3884760" y="8685360"/>
-            <a:ext cx="2971080" cy="457920"/>
+            <a:ext cx="2970360" cy="457200"/>
           </a:xfrm>
           <a:prstGeom prst="rect">
             <a:avLst/>
@@ -2057,7 +2081,7 @@
                 <a:tab pos="0" algn="l"/>
               </a:tabLst>
             </a:pPr>
-            <a:fld id="{2C4CB60E-8163-42B1-B458-9D5F5B965578}" type="slidenum">
+            <a:fld id="{FB45FE8E-BB14-4F75-B119-9AB6235F2353}" type="slidenum">
               <a:rPr lang="en-US" sz="1200" b="0" u="none" strike="noStrike">
                 <a:solidFill>
                   <a:schemeClr val="dk1"/>
@@ -2104,7 +2128,7 @@
       </p:grpSpPr>
       <p:sp>
         <p:nvSpPr>
-          <p:cNvPr id="314" name="PlaceHolder 1"/>
+          <p:cNvPr id="340" name="PlaceHolder 1"/>
           <p:cNvSpPr>
             <a:spLocks noGrp="1"/>
           </p:cNvSpPr>
@@ -2115,19 +2139,19 @@
         <p:spPr>
           <a:xfrm>
             <a:off x="685800" y="1143000"/>
-            <a:ext cx="5485680" cy="3085560"/>
-          </a:xfrm>
-          <a:prstGeom prst="rect">
-            <a:avLst/>
-          </a:prstGeom>
-          <a:ln w="0">
-            <a:noFill/>
-          </a:ln>
-        </p:spPr>
-      </p:sp>
-      <p:sp>
-        <p:nvSpPr>
-          <p:cNvPr id="315" name="PlaceHolder 2"/>
+            <a:ext cx="5484960" cy="3084840"/>
+          </a:xfrm>
+          <a:prstGeom prst="rect">
+            <a:avLst/>
+          </a:prstGeom>
+          <a:ln w="0">
+            <a:noFill/>
+          </a:ln>
+        </p:spPr>
+      </p:sp>
+      <p:sp>
+        <p:nvSpPr>
+          <p:cNvPr id="341" name="PlaceHolder 2"/>
           <p:cNvSpPr>
             <a:spLocks noGrp="1"/>
           </p:cNvSpPr>
@@ -2138,7 +2162,7 @@
         <p:spPr>
           <a:xfrm>
             <a:off x="685800" y="4400640"/>
-            <a:ext cx="5485680" cy="3599640"/>
+            <a:ext cx="5484960" cy="3598920"/>
           </a:xfrm>
           <a:prstGeom prst="rect">
             <a:avLst/>
@@ -2169,7 +2193,7 @@
       </p:sp>
       <p:sp>
         <p:nvSpPr>
-          <p:cNvPr id="316" name="PlaceHolder 3"/>
+          <p:cNvPr id="342" name="PlaceHolder 3"/>
           <p:cNvSpPr>
             <a:spLocks noGrp="1"/>
           </p:cNvSpPr>
@@ -2180,7 +2204,7 @@
         <p:spPr>
           <a:xfrm>
             <a:off x="3884760" y="8685360"/>
-            <a:ext cx="2971080" cy="457920"/>
+            <a:ext cx="2970360" cy="457200"/>
           </a:xfrm>
           <a:prstGeom prst="rect">
             <a:avLst/>
@@ -2224,7 +2248,7 @@
                 <a:tab pos="0" algn="l"/>
               </a:tabLst>
             </a:pPr>
-            <a:fld id="{CAE59E42-3905-440C-A024-E84453A55A17}" type="slidenum">
+            <a:fld id="{A37F4914-35F2-46AE-96D8-8F8999120F73}" type="slidenum">
               <a:rPr lang="en-US" sz="1200" b="0" u="none" strike="noStrike">
                 <a:solidFill>
                   <a:schemeClr val="dk1"/>
@@ -2271,7 +2295,7 @@
       </p:grpSpPr>
       <p:sp>
         <p:nvSpPr>
-          <p:cNvPr id="263" name="PlaceHolder 1"/>
+          <p:cNvPr id="289" name="PlaceHolder 1"/>
           <p:cNvSpPr>
             <a:spLocks noGrp="1"/>
           </p:cNvSpPr>
@@ -2282,19 +2306,19 @@
         <p:spPr>
           <a:xfrm>
             <a:off x="685800" y="1143000"/>
-            <a:ext cx="5485680" cy="3085560"/>
-          </a:xfrm>
-          <a:prstGeom prst="rect">
-            <a:avLst/>
-          </a:prstGeom>
-          <a:ln w="0">
-            <a:noFill/>
-          </a:ln>
-        </p:spPr>
-      </p:sp>
-      <p:sp>
-        <p:nvSpPr>
-          <p:cNvPr id="264" name="PlaceHolder 2"/>
+            <a:ext cx="5484960" cy="3084840"/>
+          </a:xfrm>
+          <a:prstGeom prst="rect">
+            <a:avLst/>
+          </a:prstGeom>
+          <a:ln w="0">
+            <a:noFill/>
+          </a:ln>
+        </p:spPr>
+      </p:sp>
+      <p:sp>
+        <p:nvSpPr>
+          <p:cNvPr id="290" name="PlaceHolder 2"/>
           <p:cNvSpPr>
             <a:spLocks noGrp="1"/>
           </p:cNvSpPr>
@@ -2305,7 +2329,7 @@
         <p:spPr>
           <a:xfrm>
             <a:off x="685800" y="4400640"/>
-            <a:ext cx="5485680" cy="3599640"/>
+            <a:ext cx="5484960" cy="3598920"/>
           </a:xfrm>
           <a:prstGeom prst="rect">
             <a:avLst/>
@@ -2336,7 +2360,7 @@
       </p:sp>
       <p:sp>
         <p:nvSpPr>
-          <p:cNvPr id="265" name="PlaceHolder 3"/>
+          <p:cNvPr id="291" name="PlaceHolder 3"/>
           <p:cNvSpPr>
             <a:spLocks noGrp="1"/>
           </p:cNvSpPr>
@@ -2347,7 +2371,7 @@
         <p:spPr>
           <a:xfrm>
             <a:off x="3884760" y="8685360"/>
-            <a:ext cx="2971080" cy="457920"/>
+            <a:ext cx="2970360" cy="457200"/>
           </a:xfrm>
           <a:prstGeom prst="rect">
             <a:avLst/>
@@ -2391,7 +2415,7 @@
                 <a:tab pos="0" algn="l"/>
               </a:tabLst>
             </a:pPr>
-            <a:fld id="{6C8196F5-C7E7-4C0A-B62F-56FEDCBC6B44}" type="slidenum">
+            <a:fld id="{88D27B51-87E2-4AFC-A807-176811AEB0FA}" type="slidenum">
               <a:rPr lang="en-US" sz="1200" b="0" u="none" strike="noStrike">
                 <a:solidFill>
                   <a:schemeClr val="dk1"/>
@@ -2401,7 +2425,7 @@
                 <a:latin typeface="+mn-lt"/>
                 <a:ea typeface="+mn-ea"/>
               </a:rPr>
-              <a:t>1</a:t>
+              <a:t>&lt;numéro&gt;</a:t>
             </a:fld>
             <a:endParaRPr lang="fr-FR" sz="1200" b="0" u="none" strike="noStrike">
               <a:solidFill>
@@ -2438,7 +2462,7 @@
       </p:grpSpPr>
       <p:sp>
         <p:nvSpPr>
-          <p:cNvPr id="317" name="PlaceHolder 1"/>
+          <p:cNvPr id="343" name="PlaceHolder 1"/>
           <p:cNvSpPr>
             <a:spLocks noGrp="1"/>
           </p:cNvSpPr>
@@ -2449,19 +2473,19 @@
         <p:spPr>
           <a:xfrm>
             <a:off x="685800" y="1143000"/>
-            <a:ext cx="5485680" cy="3085560"/>
-          </a:xfrm>
-          <a:prstGeom prst="rect">
-            <a:avLst/>
-          </a:prstGeom>
-          <a:ln w="0">
-            <a:noFill/>
-          </a:ln>
-        </p:spPr>
-      </p:sp>
-      <p:sp>
-        <p:nvSpPr>
-          <p:cNvPr id="318" name="PlaceHolder 2"/>
+            <a:ext cx="5484960" cy="3084840"/>
+          </a:xfrm>
+          <a:prstGeom prst="rect">
+            <a:avLst/>
+          </a:prstGeom>
+          <a:ln w="0">
+            <a:noFill/>
+          </a:ln>
+        </p:spPr>
+      </p:sp>
+      <p:sp>
+        <p:nvSpPr>
+          <p:cNvPr id="344" name="PlaceHolder 2"/>
           <p:cNvSpPr>
             <a:spLocks noGrp="1"/>
           </p:cNvSpPr>
@@ -2472,7 +2496,7 @@
         <p:spPr>
           <a:xfrm>
             <a:off x="685800" y="4400640"/>
-            <a:ext cx="5485680" cy="3599640"/>
+            <a:ext cx="5484960" cy="3598920"/>
           </a:xfrm>
           <a:prstGeom prst="rect">
             <a:avLst/>
@@ -2503,7 +2527,7 @@
       </p:sp>
       <p:sp>
         <p:nvSpPr>
-          <p:cNvPr id="319" name="PlaceHolder 3"/>
+          <p:cNvPr id="345" name="PlaceHolder 3"/>
           <p:cNvSpPr>
             <a:spLocks noGrp="1"/>
           </p:cNvSpPr>
@@ -2514,7 +2538,7 @@
         <p:spPr>
           <a:xfrm>
             <a:off x="3884760" y="8685360"/>
-            <a:ext cx="2971080" cy="457920"/>
+            <a:ext cx="2970360" cy="457200"/>
           </a:xfrm>
           <a:prstGeom prst="rect">
             <a:avLst/>
@@ -2558,7 +2582,7 @@
                 <a:tab pos="0" algn="l"/>
               </a:tabLst>
             </a:pPr>
-            <a:fld id="{52ED550E-C7F3-4244-A64D-784911EF0C61}" type="slidenum">
+            <a:fld id="{39B4C15A-E3C9-49C3-835A-D031B9E30F86}" type="slidenum">
               <a:rPr lang="en-US" sz="1200" b="0" u="none" strike="noStrike">
                 <a:solidFill>
                   <a:schemeClr val="dk1"/>
@@ -2605,7 +2629,7 @@
       </p:grpSpPr>
       <p:sp>
         <p:nvSpPr>
-          <p:cNvPr id="320" name="PlaceHolder 1"/>
+          <p:cNvPr id="346" name="PlaceHolder 1"/>
           <p:cNvSpPr>
             <a:spLocks noGrp="1"/>
           </p:cNvSpPr>
@@ -2616,19 +2640,19 @@
         <p:spPr>
           <a:xfrm>
             <a:off x="685800" y="1143000"/>
-            <a:ext cx="5485680" cy="3085560"/>
-          </a:xfrm>
-          <a:prstGeom prst="rect">
-            <a:avLst/>
-          </a:prstGeom>
-          <a:ln w="0">
-            <a:noFill/>
-          </a:ln>
-        </p:spPr>
-      </p:sp>
-      <p:sp>
-        <p:nvSpPr>
-          <p:cNvPr id="321" name="PlaceHolder 2"/>
+            <a:ext cx="5484960" cy="3084840"/>
+          </a:xfrm>
+          <a:prstGeom prst="rect">
+            <a:avLst/>
+          </a:prstGeom>
+          <a:ln w="0">
+            <a:noFill/>
+          </a:ln>
+        </p:spPr>
+      </p:sp>
+      <p:sp>
+        <p:nvSpPr>
+          <p:cNvPr id="347" name="PlaceHolder 2"/>
           <p:cNvSpPr>
             <a:spLocks noGrp="1"/>
           </p:cNvSpPr>
@@ -2639,7 +2663,7 @@
         <p:spPr>
           <a:xfrm>
             <a:off x="685800" y="4400640"/>
-            <a:ext cx="5485680" cy="3599640"/>
+            <a:ext cx="5484960" cy="3598920"/>
           </a:xfrm>
           <a:prstGeom prst="rect">
             <a:avLst/>
@@ -2670,7 +2694,7 @@
       </p:sp>
       <p:sp>
         <p:nvSpPr>
-          <p:cNvPr id="322" name="PlaceHolder 3"/>
+          <p:cNvPr id="348" name="PlaceHolder 3"/>
           <p:cNvSpPr>
             <a:spLocks noGrp="1"/>
           </p:cNvSpPr>
@@ -2681,7 +2705,7 @@
         <p:spPr>
           <a:xfrm>
             <a:off x="3884760" y="8685360"/>
-            <a:ext cx="2971080" cy="457920"/>
+            <a:ext cx="2970360" cy="457200"/>
           </a:xfrm>
           <a:prstGeom prst="rect">
             <a:avLst/>
@@ -2725,7 +2749,7 @@
                 <a:tab pos="0" algn="l"/>
               </a:tabLst>
             </a:pPr>
-            <a:fld id="{443C5A98-00C6-4672-B1AB-621A39B414D1}" type="slidenum">
+            <a:fld id="{A1376014-2F0B-4126-BEBB-A007409602EB}" type="slidenum">
               <a:rPr lang="en-US" sz="1200" b="0" u="none" strike="noStrike">
                 <a:solidFill>
                   <a:schemeClr val="dk1"/>
@@ -2772,7 +2796,7 @@
       </p:grpSpPr>
       <p:sp>
         <p:nvSpPr>
-          <p:cNvPr id="323" name="PlaceHolder 1"/>
+          <p:cNvPr id="349" name="PlaceHolder 1"/>
           <p:cNvSpPr>
             <a:spLocks noGrp="1"/>
           </p:cNvSpPr>
@@ -2783,19 +2807,19 @@
         <p:spPr>
           <a:xfrm>
             <a:off x="685800" y="1143000"/>
-            <a:ext cx="5485680" cy="3085560"/>
-          </a:xfrm>
-          <a:prstGeom prst="rect">
-            <a:avLst/>
-          </a:prstGeom>
-          <a:ln w="0">
-            <a:noFill/>
-          </a:ln>
-        </p:spPr>
-      </p:sp>
-      <p:sp>
-        <p:nvSpPr>
-          <p:cNvPr id="324" name="PlaceHolder 2"/>
+            <a:ext cx="5484960" cy="3084840"/>
+          </a:xfrm>
+          <a:prstGeom prst="rect">
+            <a:avLst/>
+          </a:prstGeom>
+          <a:ln w="0">
+            <a:noFill/>
+          </a:ln>
+        </p:spPr>
+      </p:sp>
+      <p:sp>
+        <p:nvSpPr>
+          <p:cNvPr id="350" name="PlaceHolder 2"/>
           <p:cNvSpPr>
             <a:spLocks noGrp="1"/>
           </p:cNvSpPr>
@@ -2806,7 +2830,7 @@
         <p:spPr>
           <a:xfrm>
             <a:off x="685800" y="4400640"/>
-            <a:ext cx="5485680" cy="3599640"/>
+            <a:ext cx="5484960" cy="3598920"/>
           </a:xfrm>
           <a:prstGeom prst="rect">
             <a:avLst/>
@@ -2837,7 +2861,7 @@
       </p:sp>
       <p:sp>
         <p:nvSpPr>
-          <p:cNvPr id="325" name="PlaceHolder 3"/>
+          <p:cNvPr id="351" name="PlaceHolder 3"/>
           <p:cNvSpPr>
             <a:spLocks noGrp="1"/>
           </p:cNvSpPr>
@@ -2848,7 +2872,7 @@
         <p:spPr>
           <a:xfrm>
             <a:off x="3884760" y="8685360"/>
-            <a:ext cx="2971080" cy="457920"/>
+            <a:ext cx="2970360" cy="457200"/>
           </a:xfrm>
           <a:prstGeom prst="rect">
             <a:avLst/>
@@ -2892,7 +2916,7 @@
                 <a:tab pos="0" algn="l"/>
               </a:tabLst>
             </a:pPr>
-            <a:fld id="{53808BAC-E8B4-408C-B1D9-498A54A8DC1B}" type="slidenum">
+            <a:fld id="{0FB5734E-6624-47E7-92DB-1264C33F62CB}" type="slidenum">
               <a:rPr lang="en-US" sz="1200" b="0" u="none" strike="noStrike">
                 <a:solidFill>
                   <a:schemeClr val="dk1"/>
@@ -2939,7 +2963,7 @@
       </p:grpSpPr>
       <p:sp>
         <p:nvSpPr>
-          <p:cNvPr id="326" name="PlaceHolder 1"/>
+          <p:cNvPr id="352" name="PlaceHolder 1"/>
           <p:cNvSpPr>
             <a:spLocks noGrp="1"/>
           </p:cNvSpPr>
@@ -2950,19 +2974,19 @@
         <p:spPr>
           <a:xfrm>
             <a:off x="685800" y="1143000"/>
-            <a:ext cx="5485680" cy="3085560"/>
-          </a:xfrm>
-          <a:prstGeom prst="rect">
-            <a:avLst/>
-          </a:prstGeom>
-          <a:ln w="0">
-            <a:noFill/>
-          </a:ln>
-        </p:spPr>
-      </p:sp>
-      <p:sp>
-        <p:nvSpPr>
-          <p:cNvPr id="327" name="PlaceHolder 2"/>
+            <a:ext cx="5484960" cy="3084840"/>
+          </a:xfrm>
+          <a:prstGeom prst="rect">
+            <a:avLst/>
+          </a:prstGeom>
+          <a:ln w="0">
+            <a:noFill/>
+          </a:ln>
+        </p:spPr>
+      </p:sp>
+      <p:sp>
+        <p:nvSpPr>
+          <p:cNvPr id="353" name="PlaceHolder 2"/>
           <p:cNvSpPr>
             <a:spLocks noGrp="1"/>
           </p:cNvSpPr>
@@ -2973,7 +2997,7 @@
         <p:spPr>
           <a:xfrm>
             <a:off x="685800" y="4400640"/>
-            <a:ext cx="5485680" cy="3599640"/>
+            <a:ext cx="5484960" cy="3598920"/>
           </a:xfrm>
           <a:prstGeom prst="rect">
             <a:avLst/>
@@ -3004,7 +3028,7 @@
       </p:sp>
       <p:sp>
         <p:nvSpPr>
-          <p:cNvPr id="328" name="PlaceHolder 3"/>
+          <p:cNvPr id="354" name="PlaceHolder 3"/>
           <p:cNvSpPr>
             <a:spLocks noGrp="1"/>
           </p:cNvSpPr>
@@ -3015,7 +3039,7 @@
         <p:spPr>
           <a:xfrm>
             <a:off x="3884760" y="8685360"/>
-            <a:ext cx="2971080" cy="457920"/>
+            <a:ext cx="2970360" cy="457200"/>
           </a:xfrm>
           <a:prstGeom prst="rect">
             <a:avLst/>
@@ -3059,7 +3083,7 @@
                 <a:tab pos="0" algn="l"/>
               </a:tabLst>
             </a:pPr>
-            <a:fld id="{7A82E6A6-C5D5-4C10-979B-1F0462DD6211}" type="slidenum">
+            <a:fld id="{8788F904-3509-4619-8D54-C2EB00D74BF3}" type="slidenum">
               <a:rPr lang="en-US" sz="1200" b="0" u="none" strike="noStrike">
                 <a:solidFill>
                   <a:schemeClr val="dk1"/>
@@ -3106,7 +3130,7 @@
       </p:grpSpPr>
       <p:sp>
         <p:nvSpPr>
-          <p:cNvPr id="329" name="PlaceHolder 1"/>
+          <p:cNvPr id="355" name="PlaceHolder 1"/>
           <p:cNvSpPr>
             <a:spLocks noGrp="1"/>
           </p:cNvSpPr>
@@ -3117,19 +3141,19 @@
         <p:spPr>
           <a:xfrm>
             <a:off x="685800" y="1143000"/>
-            <a:ext cx="5485680" cy="3085560"/>
-          </a:xfrm>
-          <a:prstGeom prst="rect">
-            <a:avLst/>
-          </a:prstGeom>
-          <a:ln w="0">
-            <a:noFill/>
-          </a:ln>
-        </p:spPr>
-      </p:sp>
-      <p:sp>
-        <p:nvSpPr>
-          <p:cNvPr id="330" name="PlaceHolder 2"/>
+            <a:ext cx="5484960" cy="3084840"/>
+          </a:xfrm>
+          <a:prstGeom prst="rect">
+            <a:avLst/>
+          </a:prstGeom>
+          <a:ln w="0">
+            <a:noFill/>
+          </a:ln>
+        </p:spPr>
+      </p:sp>
+      <p:sp>
+        <p:nvSpPr>
+          <p:cNvPr id="356" name="PlaceHolder 2"/>
           <p:cNvSpPr>
             <a:spLocks noGrp="1"/>
           </p:cNvSpPr>
@@ -3140,7 +3164,7 @@
         <p:spPr>
           <a:xfrm>
             <a:off x="685800" y="4400640"/>
-            <a:ext cx="5485680" cy="3599640"/>
+            <a:ext cx="5484960" cy="3598920"/>
           </a:xfrm>
           <a:prstGeom prst="rect">
             <a:avLst/>
@@ -3171,7 +3195,7 @@
       </p:sp>
       <p:sp>
         <p:nvSpPr>
-          <p:cNvPr id="331" name="PlaceHolder 3"/>
+          <p:cNvPr id="357" name="PlaceHolder 3"/>
           <p:cNvSpPr>
             <a:spLocks noGrp="1"/>
           </p:cNvSpPr>
@@ -3182,7 +3206,7 @@
         <p:spPr>
           <a:xfrm>
             <a:off x="3884760" y="8685360"/>
-            <a:ext cx="2971080" cy="457920"/>
+            <a:ext cx="2970360" cy="457200"/>
           </a:xfrm>
           <a:prstGeom prst="rect">
             <a:avLst/>
@@ -3226,7 +3250,341 @@
                 <a:tab pos="0" algn="l"/>
               </a:tabLst>
             </a:pPr>
-            <a:fld id="{6001CACE-53D2-430D-AB55-1432B3B77F53}" type="slidenum">
+            <a:fld id="{E6BB5F50-26A0-4537-A329-1D4D62F2565B}" type="slidenum">
+              <a:rPr lang="en-US" sz="1200" b="0" u="none" strike="noStrike">
+                <a:solidFill>
+                  <a:schemeClr val="dk1"/>
+                </a:solidFill>
+                <a:effectLst/>
+                <a:uFillTx/>
+                <a:latin typeface="+mn-lt"/>
+                <a:ea typeface="+mn-ea"/>
+              </a:rPr>
+              <a:t>&lt;numéro&gt;</a:t>
+            </a:fld>
+            <a:endParaRPr lang="fr-FR" sz="1200" b="0" u="none" strike="noStrike">
+              <a:solidFill>
+                <a:srgbClr val="000000"/>
+              </a:solidFill>
+              <a:effectLst/>
+              <a:uFillTx/>
+              <a:latin typeface="Times New Roman"/>
+            </a:endParaRPr>
+          </a:p>
+        </p:txBody>
+      </p:sp>
+    </p:spTree>
+  </p:cSld>
+</p:notes>
+</file>
+
+<file path=ppt/notesSlides/notesSlide25.xml><?xml version="1.0" encoding="utf-8"?>
+<p:notes xmlns:a="http://schemas.openxmlformats.org/drawingml/2006/main" xmlns:p="http://schemas.openxmlformats.org/presentationml/2006/main" xmlns:r="http://schemas.openxmlformats.org/officeDocument/2006/relationships" xmlns:p14="http://schemas.microsoft.com/office/powerpoint/2010/main" xmlns:p15="http://schemas.microsoft.com/office/powerpoint/2012/main" xmlns:mc="http://schemas.openxmlformats.org/markup-compatibility/2006">
+  <p:cSld>
+    <p:spTree>
+      <p:nvGrpSpPr>
+        <p:cNvPr id="1" name=""/>
+        <p:cNvGrpSpPr/>
+        <p:nvPr/>
+      </p:nvGrpSpPr>
+      <p:grpSpPr>
+        <a:xfrm>
+          <a:off x="0" y="0"/>
+          <a:ext cx="0" cy="0"/>
+          <a:chOff x="0" y="0"/>
+          <a:chExt cx="0" cy="0"/>
+        </a:xfrm>
+      </p:grpSpPr>
+      <p:sp>
+        <p:nvSpPr>
+          <p:cNvPr id="358" name="PlaceHolder 1"/>
+          <p:cNvSpPr>
+            <a:spLocks noGrp="1"/>
+          </p:cNvSpPr>
+          <p:nvPr>
+            <p:ph type="sldImg"/>
+          </p:nvPr>
+        </p:nvSpPr>
+        <p:spPr>
+          <a:xfrm>
+            <a:off x="685800" y="1143000"/>
+            <a:ext cx="5484960" cy="3084840"/>
+          </a:xfrm>
+          <a:prstGeom prst="rect">
+            <a:avLst/>
+          </a:prstGeom>
+          <a:ln w="0">
+            <a:noFill/>
+          </a:ln>
+        </p:spPr>
+      </p:sp>
+      <p:sp>
+        <p:nvSpPr>
+          <p:cNvPr id="359" name="PlaceHolder 2"/>
+          <p:cNvSpPr>
+            <a:spLocks noGrp="1"/>
+          </p:cNvSpPr>
+          <p:nvPr>
+            <p:ph type="body"/>
+          </p:nvPr>
+        </p:nvSpPr>
+        <p:spPr>
+          <a:xfrm>
+            <a:off x="685800" y="4400640"/>
+            <a:ext cx="5484960" cy="3598920"/>
+          </a:xfrm>
+          <a:prstGeom prst="rect">
+            <a:avLst/>
+          </a:prstGeom>
+          <a:noFill/>
+          <a:ln w="0">
+            <a:noFill/>
+          </a:ln>
+        </p:spPr>
+        <p:txBody>
+          <a:bodyPr lIns="91440" tIns="45720" rIns="91440" bIns="45720" anchor="t">
+            <a:noAutofit/>
+          </a:bodyPr>
+          <a:p>
+            <a:pPr indent="0" algn="l">
+              <a:buNone/>
+            </a:pPr>
+            <a:endParaRPr lang="fr-FR" sz="1800" b="0" u="none" strike="noStrike">
+              <a:solidFill>
+                <a:srgbClr val="000000"/>
+              </a:solidFill>
+              <a:effectLst/>
+              <a:uFillTx/>
+              <a:latin typeface="Arial"/>
+            </a:endParaRPr>
+          </a:p>
+        </p:txBody>
+      </p:sp>
+      <p:sp>
+        <p:nvSpPr>
+          <p:cNvPr id="360" name="PlaceHolder 3"/>
+          <p:cNvSpPr>
+            <a:spLocks noGrp="1"/>
+          </p:cNvSpPr>
+          <p:nvPr>
+            <p:ph type="sldNum" idx="28"/>
+          </p:nvPr>
+        </p:nvSpPr>
+        <p:spPr>
+          <a:xfrm>
+            <a:off x="3884760" y="8685360"/>
+            <a:ext cx="2970360" cy="457200"/>
+          </a:xfrm>
+          <a:prstGeom prst="rect">
+            <a:avLst/>
+          </a:prstGeom>
+          <a:noFill/>
+          <a:ln w="0">
+            <a:noFill/>
+          </a:ln>
+        </p:spPr>
+        <p:txBody>
+          <a:bodyPr lIns="91440" tIns="45720" rIns="91440" bIns="45720" anchor="b">
+            <a:noAutofit/>
+          </a:bodyPr>
+          <a:lstStyle>
+            <a:lvl1pPr indent="0" algn="r" defTabSz="914400">
+              <a:lnSpc>
+                <a:spcPct val="100000"/>
+              </a:lnSpc>
+              <a:buNone/>
+              <a:tabLst>
+                <a:tab pos="0" algn="l"/>
+              </a:tabLst>
+              <a:defRPr lang="en-US" sz="1200" b="0" u="none" strike="noStrike">
+                <a:solidFill>
+                  <a:schemeClr val="dk1"/>
+                </a:solidFill>
+                <a:effectLst/>
+                <a:uFillTx/>
+                <a:latin typeface="+mn-lt"/>
+                <a:ea typeface="+mn-ea"/>
+              </a:defRPr>
+            </a:lvl1pPr>
+          </a:lstStyle>
+          <a:p>
+            <a:pPr indent="0" algn="r" defTabSz="914400">
+              <a:lnSpc>
+                <a:spcPct val="100000"/>
+              </a:lnSpc>
+              <a:buNone/>
+              <a:tabLst>
+                <a:tab pos="0" algn="l"/>
+              </a:tabLst>
+            </a:pPr>
+            <a:fld id="{CCBD7A2F-615B-42E9-940C-D7349E512A60}" type="slidenum">
+              <a:rPr lang="en-US" sz="1200" b="0" u="none" strike="noStrike">
+                <a:solidFill>
+                  <a:schemeClr val="dk1"/>
+                </a:solidFill>
+                <a:effectLst/>
+                <a:uFillTx/>
+                <a:latin typeface="+mn-lt"/>
+                <a:ea typeface="+mn-ea"/>
+              </a:rPr>
+              <a:t>&lt;numéro&gt;</a:t>
+            </a:fld>
+            <a:endParaRPr lang="fr-FR" sz="1200" b="0" u="none" strike="noStrike">
+              <a:solidFill>
+                <a:srgbClr val="000000"/>
+              </a:solidFill>
+              <a:effectLst/>
+              <a:uFillTx/>
+              <a:latin typeface="Times New Roman"/>
+            </a:endParaRPr>
+          </a:p>
+        </p:txBody>
+      </p:sp>
+    </p:spTree>
+  </p:cSld>
+</p:notes>
+</file>
+
+<file path=ppt/notesSlides/notesSlide26.xml><?xml version="1.0" encoding="utf-8"?>
+<p:notes xmlns:a="http://schemas.openxmlformats.org/drawingml/2006/main" xmlns:p="http://schemas.openxmlformats.org/presentationml/2006/main" xmlns:r="http://schemas.openxmlformats.org/officeDocument/2006/relationships" xmlns:p14="http://schemas.microsoft.com/office/powerpoint/2010/main" xmlns:p15="http://schemas.microsoft.com/office/powerpoint/2012/main" xmlns:mc="http://schemas.openxmlformats.org/markup-compatibility/2006">
+  <p:cSld>
+    <p:spTree>
+      <p:nvGrpSpPr>
+        <p:cNvPr id="1" name=""/>
+        <p:cNvGrpSpPr/>
+        <p:nvPr/>
+      </p:nvGrpSpPr>
+      <p:grpSpPr>
+        <a:xfrm>
+          <a:off x="0" y="0"/>
+          <a:ext cx="0" cy="0"/>
+          <a:chOff x="0" y="0"/>
+          <a:chExt cx="0" cy="0"/>
+        </a:xfrm>
+      </p:grpSpPr>
+      <p:sp>
+        <p:nvSpPr>
+          <p:cNvPr id="361" name="PlaceHolder 1"/>
+          <p:cNvSpPr>
+            <a:spLocks noGrp="1"/>
+          </p:cNvSpPr>
+          <p:nvPr>
+            <p:ph type="sldImg"/>
+          </p:nvPr>
+        </p:nvSpPr>
+        <p:spPr>
+          <a:xfrm>
+            <a:off x="685800" y="1143000"/>
+            <a:ext cx="5484960" cy="3084840"/>
+          </a:xfrm>
+          <a:prstGeom prst="rect">
+            <a:avLst/>
+          </a:prstGeom>
+          <a:ln w="0">
+            <a:noFill/>
+          </a:ln>
+        </p:spPr>
+      </p:sp>
+      <p:sp>
+        <p:nvSpPr>
+          <p:cNvPr id="362" name="PlaceHolder 2"/>
+          <p:cNvSpPr>
+            <a:spLocks noGrp="1"/>
+          </p:cNvSpPr>
+          <p:nvPr>
+            <p:ph type="body"/>
+          </p:nvPr>
+        </p:nvSpPr>
+        <p:spPr>
+          <a:xfrm>
+            <a:off x="685800" y="4400640"/>
+            <a:ext cx="5484960" cy="3598920"/>
+          </a:xfrm>
+          <a:prstGeom prst="rect">
+            <a:avLst/>
+          </a:prstGeom>
+          <a:noFill/>
+          <a:ln w="0">
+            <a:noFill/>
+          </a:ln>
+        </p:spPr>
+        <p:txBody>
+          <a:bodyPr lIns="91440" tIns="45720" rIns="91440" bIns="45720" anchor="t">
+            <a:noAutofit/>
+          </a:bodyPr>
+          <a:p>
+            <a:pPr indent="0" algn="l">
+              <a:buNone/>
+            </a:pPr>
+            <a:endParaRPr lang="fr-FR" sz="1800" b="0" u="none" strike="noStrike">
+              <a:solidFill>
+                <a:srgbClr val="000000"/>
+              </a:solidFill>
+              <a:effectLst/>
+              <a:uFillTx/>
+              <a:latin typeface="Arial"/>
+            </a:endParaRPr>
+          </a:p>
+        </p:txBody>
+      </p:sp>
+      <p:sp>
+        <p:nvSpPr>
+          <p:cNvPr id="363" name="PlaceHolder 3"/>
+          <p:cNvSpPr>
+            <a:spLocks noGrp="1"/>
+          </p:cNvSpPr>
+          <p:nvPr>
+            <p:ph type="sldNum" idx="29"/>
+          </p:nvPr>
+        </p:nvSpPr>
+        <p:spPr>
+          <a:xfrm>
+            <a:off x="3884760" y="8685360"/>
+            <a:ext cx="2970360" cy="457200"/>
+          </a:xfrm>
+          <a:prstGeom prst="rect">
+            <a:avLst/>
+          </a:prstGeom>
+          <a:noFill/>
+          <a:ln w="0">
+            <a:noFill/>
+          </a:ln>
+        </p:spPr>
+        <p:txBody>
+          <a:bodyPr lIns="91440" tIns="45720" rIns="91440" bIns="45720" anchor="b">
+            <a:noAutofit/>
+          </a:bodyPr>
+          <a:lstStyle>
+            <a:lvl1pPr indent="0" algn="r" defTabSz="914400">
+              <a:lnSpc>
+                <a:spcPct val="100000"/>
+              </a:lnSpc>
+              <a:buNone/>
+              <a:tabLst>
+                <a:tab pos="0" algn="l"/>
+              </a:tabLst>
+              <a:defRPr lang="en-US" sz="1200" b="0" u="none" strike="noStrike">
+                <a:solidFill>
+                  <a:schemeClr val="dk1"/>
+                </a:solidFill>
+                <a:effectLst/>
+                <a:uFillTx/>
+                <a:latin typeface="+mn-lt"/>
+                <a:ea typeface="+mn-ea"/>
+              </a:defRPr>
+            </a:lvl1pPr>
+          </a:lstStyle>
+          <a:p>
+            <a:pPr indent="0" algn="r" defTabSz="914400">
+              <a:lnSpc>
+                <a:spcPct val="100000"/>
+              </a:lnSpc>
+              <a:buNone/>
+              <a:tabLst>
+                <a:tab pos="0" algn="l"/>
+              </a:tabLst>
+            </a:pPr>
+            <a:fld id="{28BB330E-1E98-4E55-9677-D91F1000A1E7}" type="slidenum">
               <a:rPr lang="en-US" sz="1200" b="0" u="none" strike="noStrike">
                 <a:solidFill>
                   <a:schemeClr val="dk1"/>
@@ -3273,7 +3631,7 @@
       </p:grpSpPr>
       <p:sp>
         <p:nvSpPr>
-          <p:cNvPr id="266" name="PlaceHolder 1"/>
+          <p:cNvPr id="292" name="PlaceHolder 1"/>
           <p:cNvSpPr>
             <a:spLocks noGrp="1"/>
           </p:cNvSpPr>
@@ -3284,19 +3642,19 @@
         <p:spPr>
           <a:xfrm>
             <a:off x="685800" y="1143000"/>
-            <a:ext cx="5485680" cy="3085560"/>
-          </a:xfrm>
-          <a:prstGeom prst="rect">
-            <a:avLst/>
-          </a:prstGeom>
-          <a:ln w="0">
-            <a:noFill/>
-          </a:ln>
-        </p:spPr>
-      </p:sp>
-      <p:sp>
-        <p:nvSpPr>
-          <p:cNvPr id="267" name="PlaceHolder 2"/>
+            <a:ext cx="5484960" cy="3084840"/>
+          </a:xfrm>
+          <a:prstGeom prst="rect">
+            <a:avLst/>
+          </a:prstGeom>
+          <a:ln w="0">
+            <a:noFill/>
+          </a:ln>
+        </p:spPr>
+      </p:sp>
+      <p:sp>
+        <p:nvSpPr>
+          <p:cNvPr id="293" name="PlaceHolder 2"/>
           <p:cNvSpPr>
             <a:spLocks noGrp="1"/>
           </p:cNvSpPr>
@@ -3307,7 +3665,7 @@
         <p:spPr>
           <a:xfrm>
             <a:off x="685800" y="4400640"/>
-            <a:ext cx="5485680" cy="3599640"/>
+            <a:ext cx="5484960" cy="3598920"/>
           </a:xfrm>
           <a:prstGeom prst="rect">
             <a:avLst/>
@@ -3338,7 +3696,7 @@
       </p:sp>
       <p:sp>
         <p:nvSpPr>
-          <p:cNvPr id="268" name="PlaceHolder 3"/>
+          <p:cNvPr id="294" name="PlaceHolder 3"/>
           <p:cNvSpPr>
             <a:spLocks noGrp="1"/>
           </p:cNvSpPr>
@@ -3349,7 +3707,7 @@
         <p:spPr>
           <a:xfrm>
             <a:off x="3884760" y="8685360"/>
-            <a:ext cx="2971080" cy="457920"/>
+            <a:ext cx="2970360" cy="457200"/>
           </a:xfrm>
           <a:prstGeom prst="rect">
             <a:avLst/>
@@ -3393,7 +3751,7 @@
                 <a:tab pos="0" algn="l"/>
               </a:tabLst>
             </a:pPr>
-            <a:fld id="{DFBB2698-35B5-4C10-9859-DDAFEFEC7BB8}" type="slidenum">
+            <a:fld id="{5B565272-E37A-46A9-BF79-6395DA57FC3A}" type="slidenum">
               <a:rPr lang="en-US" sz="1200" b="0" u="none" strike="noStrike">
                 <a:solidFill>
                   <a:schemeClr val="dk1"/>
@@ -3403,7 +3761,7 @@
                 <a:latin typeface="+mn-lt"/>
                 <a:ea typeface="+mn-ea"/>
               </a:rPr>
-              <a:t>1</a:t>
+              <a:t>&lt;numéro&gt;</a:t>
             </a:fld>
             <a:endParaRPr lang="fr-FR" sz="1200" b="0" u="none" strike="noStrike">
               <a:solidFill>
@@ -3440,7 +3798,7 @@
       </p:grpSpPr>
       <p:sp>
         <p:nvSpPr>
-          <p:cNvPr id="269" name="PlaceHolder 1"/>
+          <p:cNvPr id="295" name="PlaceHolder 1"/>
           <p:cNvSpPr>
             <a:spLocks noGrp="1"/>
           </p:cNvSpPr>
@@ -3451,19 +3809,19 @@
         <p:spPr>
           <a:xfrm>
             <a:off x="685800" y="1143000"/>
-            <a:ext cx="5485680" cy="3085560"/>
-          </a:xfrm>
-          <a:prstGeom prst="rect">
-            <a:avLst/>
-          </a:prstGeom>
-          <a:ln w="0">
-            <a:noFill/>
-          </a:ln>
-        </p:spPr>
-      </p:sp>
-      <p:sp>
-        <p:nvSpPr>
-          <p:cNvPr id="270" name="PlaceHolder 2"/>
+            <a:ext cx="5484960" cy="3084840"/>
+          </a:xfrm>
+          <a:prstGeom prst="rect">
+            <a:avLst/>
+          </a:prstGeom>
+          <a:ln w="0">
+            <a:noFill/>
+          </a:ln>
+        </p:spPr>
+      </p:sp>
+      <p:sp>
+        <p:nvSpPr>
+          <p:cNvPr id="296" name="PlaceHolder 2"/>
           <p:cNvSpPr>
             <a:spLocks noGrp="1"/>
           </p:cNvSpPr>
@@ -3474,7 +3832,7 @@
         <p:spPr>
           <a:xfrm>
             <a:off x="685800" y="4400640"/>
-            <a:ext cx="5485680" cy="3599640"/>
+            <a:ext cx="5484960" cy="3598920"/>
           </a:xfrm>
           <a:prstGeom prst="rect">
             <a:avLst/>
@@ -3505,7 +3863,7 @@
       </p:sp>
       <p:sp>
         <p:nvSpPr>
-          <p:cNvPr id="271" name="PlaceHolder 3"/>
+          <p:cNvPr id="297" name="PlaceHolder 3"/>
           <p:cNvSpPr>
             <a:spLocks noGrp="1"/>
           </p:cNvSpPr>
@@ -3516,7 +3874,7 @@
         <p:spPr>
           <a:xfrm>
             <a:off x="3884760" y="8685360"/>
-            <a:ext cx="2971080" cy="457920"/>
+            <a:ext cx="2970360" cy="457200"/>
           </a:xfrm>
           <a:prstGeom prst="rect">
             <a:avLst/>
@@ -3560,7 +3918,7 @@
                 <a:tab pos="0" algn="l"/>
               </a:tabLst>
             </a:pPr>
-            <a:fld id="{18637419-2581-451B-BF2C-CE486361277E}" type="slidenum">
+            <a:fld id="{64A99D43-6163-44D8-8516-C5EB450C0DD4}" type="slidenum">
               <a:rPr lang="en-US" sz="1200" b="0" u="none" strike="noStrike">
                 <a:solidFill>
                   <a:schemeClr val="dk1"/>
@@ -3570,7 +3928,7 @@
                 <a:latin typeface="+mn-lt"/>
                 <a:ea typeface="+mn-ea"/>
               </a:rPr>
-              <a:t>1</a:t>
+              <a:t>&lt;numéro&gt;</a:t>
             </a:fld>
             <a:endParaRPr lang="fr-FR" sz="1200" b="0" u="none" strike="noStrike">
               <a:solidFill>
@@ -3607,7 +3965,7 @@
       </p:grpSpPr>
       <p:sp>
         <p:nvSpPr>
-          <p:cNvPr id="272" name="PlaceHolder 1"/>
+          <p:cNvPr id="298" name="PlaceHolder 1"/>
           <p:cNvSpPr>
             <a:spLocks noGrp="1"/>
           </p:cNvSpPr>
@@ -3618,19 +3976,19 @@
         <p:spPr>
           <a:xfrm>
             <a:off x="685800" y="1143000"/>
-            <a:ext cx="5485680" cy="3085560"/>
-          </a:xfrm>
-          <a:prstGeom prst="rect">
-            <a:avLst/>
-          </a:prstGeom>
-          <a:ln w="0">
-            <a:noFill/>
-          </a:ln>
-        </p:spPr>
-      </p:sp>
-      <p:sp>
-        <p:nvSpPr>
-          <p:cNvPr id="273" name="PlaceHolder 2"/>
+            <a:ext cx="5484960" cy="3084840"/>
+          </a:xfrm>
+          <a:prstGeom prst="rect">
+            <a:avLst/>
+          </a:prstGeom>
+          <a:ln w="0">
+            <a:noFill/>
+          </a:ln>
+        </p:spPr>
+      </p:sp>
+      <p:sp>
+        <p:nvSpPr>
+          <p:cNvPr id="299" name="PlaceHolder 2"/>
           <p:cNvSpPr>
             <a:spLocks noGrp="1"/>
           </p:cNvSpPr>
@@ -3641,7 +3999,7 @@
         <p:spPr>
           <a:xfrm>
             <a:off x="685800" y="4400640"/>
-            <a:ext cx="5485680" cy="3599640"/>
+            <a:ext cx="5484960" cy="3598920"/>
           </a:xfrm>
           <a:prstGeom prst="rect">
             <a:avLst/>
@@ -3672,7 +4030,7 @@
       </p:sp>
       <p:sp>
         <p:nvSpPr>
-          <p:cNvPr id="274" name="PlaceHolder 3"/>
+          <p:cNvPr id="300" name="PlaceHolder 3"/>
           <p:cNvSpPr>
             <a:spLocks noGrp="1"/>
           </p:cNvSpPr>
@@ -3683,7 +4041,7 @@
         <p:spPr>
           <a:xfrm>
             <a:off x="3884760" y="8685360"/>
-            <a:ext cx="2971080" cy="457920"/>
+            <a:ext cx="2970360" cy="457200"/>
           </a:xfrm>
           <a:prstGeom prst="rect">
             <a:avLst/>
@@ -3727,7 +4085,7 @@
                 <a:tab pos="0" algn="l"/>
               </a:tabLst>
             </a:pPr>
-            <a:fld id="{54C188F0-02C8-4753-8576-C16532A567E5}" type="slidenum">
+            <a:fld id="{8B01D1AC-BECB-4443-846B-931ECD2FC64A}" type="slidenum">
               <a:rPr lang="en-US" sz="1200" b="0" u="none" strike="noStrike">
                 <a:solidFill>
                   <a:schemeClr val="dk1"/>
@@ -3737,7 +4095,7 @@
                 <a:latin typeface="+mn-lt"/>
                 <a:ea typeface="+mn-ea"/>
               </a:rPr>
-              <a:t>1</a:t>
+              <a:t>&lt;numéro&gt;</a:t>
             </a:fld>
             <a:endParaRPr lang="fr-FR" sz="1200" b="0" u="none" strike="noStrike">
               <a:solidFill>
@@ -3774,7 +4132,7 @@
       </p:grpSpPr>
       <p:sp>
         <p:nvSpPr>
-          <p:cNvPr id="275" name="PlaceHolder 1"/>
+          <p:cNvPr id="301" name="PlaceHolder 1"/>
           <p:cNvSpPr>
             <a:spLocks noGrp="1"/>
           </p:cNvSpPr>
@@ -3785,19 +4143,19 @@
         <p:spPr>
           <a:xfrm>
             <a:off x="685800" y="1143000"/>
-            <a:ext cx="5485680" cy="3085560"/>
-          </a:xfrm>
-          <a:prstGeom prst="rect">
-            <a:avLst/>
-          </a:prstGeom>
-          <a:ln w="0">
-            <a:noFill/>
-          </a:ln>
-        </p:spPr>
-      </p:sp>
-      <p:sp>
-        <p:nvSpPr>
-          <p:cNvPr id="276" name="PlaceHolder 2"/>
+            <a:ext cx="5484960" cy="3084840"/>
+          </a:xfrm>
+          <a:prstGeom prst="rect">
+            <a:avLst/>
+          </a:prstGeom>
+          <a:ln w="0">
+            <a:noFill/>
+          </a:ln>
+        </p:spPr>
+      </p:sp>
+      <p:sp>
+        <p:nvSpPr>
+          <p:cNvPr id="302" name="PlaceHolder 2"/>
           <p:cNvSpPr>
             <a:spLocks noGrp="1"/>
           </p:cNvSpPr>
@@ -3808,7 +4166,7 @@
         <p:spPr>
           <a:xfrm>
             <a:off x="685800" y="4400640"/>
-            <a:ext cx="5485680" cy="3599640"/>
+            <a:ext cx="5484960" cy="3598920"/>
           </a:xfrm>
           <a:prstGeom prst="rect">
             <a:avLst/>
@@ -3839,7 +4197,7 @@
       </p:sp>
       <p:sp>
         <p:nvSpPr>
-          <p:cNvPr id="277" name="PlaceHolder 3"/>
+          <p:cNvPr id="303" name="PlaceHolder 3"/>
           <p:cNvSpPr>
             <a:spLocks noGrp="1"/>
           </p:cNvSpPr>
@@ -3850,7 +4208,7 @@
         <p:spPr>
           <a:xfrm>
             <a:off x="3884760" y="8685360"/>
-            <a:ext cx="2971080" cy="457920"/>
+            <a:ext cx="2970360" cy="457200"/>
           </a:xfrm>
           <a:prstGeom prst="rect">
             <a:avLst/>
@@ -3894,7 +4252,7 @@
                 <a:tab pos="0" algn="l"/>
               </a:tabLst>
             </a:pPr>
-            <a:fld id="{98C72D56-4D69-4422-8A14-B2146437332C}" type="slidenum">
+            <a:fld id="{AE8D0AD1-AEC8-4551-85BF-60AE9541936C}" type="slidenum">
               <a:rPr lang="en-US" sz="1200" b="0" u="none" strike="noStrike">
                 <a:solidFill>
                   <a:schemeClr val="dk1"/>
@@ -3904,7 +4262,7 @@
                 <a:latin typeface="+mn-lt"/>
                 <a:ea typeface="+mn-ea"/>
               </a:rPr>
-              <a:t>1</a:t>
+              <a:t>&lt;numéro&gt;</a:t>
             </a:fld>
             <a:endParaRPr lang="fr-FR" sz="1200" b="0" u="none" strike="noStrike">
               <a:solidFill>
@@ -3941,7 +4299,7 @@
       </p:grpSpPr>
       <p:sp>
         <p:nvSpPr>
-          <p:cNvPr id="278" name="PlaceHolder 1"/>
+          <p:cNvPr id="304" name="PlaceHolder 1"/>
           <p:cNvSpPr>
             <a:spLocks noGrp="1"/>
           </p:cNvSpPr>
@@ -3952,19 +4310,19 @@
         <p:spPr>
           <a:xfrm>
             <a:off x="685800" y="1143000"/>
-            <a:ext cx="5485680" cy="3085560"/>
-          </a:xfrm>
-          <a:prstGeom prst="rect">
-            <a:avLst/>
-          </a:prstGeom>
-          <a:ln w="0">
-            <a:noFill/>
-          </a:ln>
-        </p:spPr>
-      </p:sp>
-      <p:sp>
-        <p:nvSpPr>
-          <p:cNvPr id="279" name="PlaceHolder 2"/>
+            <a:ext cx="5484960" cy="3084840"/>
+          </a:xfrm>
+          <a:prstGeom prst="rect">
+            <a:avLst/>
+          </a:prstGeom>
+          <a:ln w="0">
+            <a:noFill/>
+          </a:ln>
+        </p:spPr>
+      </p:sp>
+      <p:sp>
+        <p:nvSpPr>
+          <p:cNvPr id="305" name="PlaceHolder 2"/>
           <p:cNvSpPr>
             <a:spLocks noGrp="1"/>
           </p:cNvSpPr>
@@ -3975,7 +4333,7 @@
         <p:spPr>
           <a:xfrm>
             <a:off x="685800" y="4400640"/>
-            <a:ext cx="5485680" cy="3599640"/>
+            <a:ext cx="5484960" cy="3598920"/>
           </a:xfrm>
           <a:prstGeom prst="rect">
             <a:avLst/>
@@ -4006,7 +4364,7 @@
       </p:sp>
       <p:sp>
         <p:nvSpPr>
-          <p:cNvPr id="280" name="PlaceHolder 3"/>
+          <p:cNvPr id="306" name="PlaceHolder 3"/>
           <p:cNvSpPr>
             <a:spLocks noGrp="1"/>
           </p:cNvSpPr>
@@ -4017,7 +4375,7 @@
         <p:spPr>
           <a:xfrm>
             <a:off x="3884760" y="8685360"/>
-            <a:ext cx="2971080" cy="457920"/>
+            <a:ext cx="2970360" cy="457200"/>
           </a:xfrm>
           <a:prstGeom prst="rect">
             <a:avLst/>
@@ -4061,7 +4419,7 @@
                 <a:tab pos="0" algn="l"/>
               </a:tabLst>
             </a:pPr>
-            <a:fld id="{32912E28-DA29-4992-B2A5-04A909785AE8}" type="slidenum">
+            <a:fld id="{A11D44AB-FBEF-46F7-8BF3-621451A11076}" type="slidenum">
               <a:rPr lang="en-US" sz="1200" b="0" u="none" strike="noStrike">
                 <a:solidFill>
                   <a:schemeClr val="dk1"/>
@@ -4071,7 +4429,7 @@
                 <a:latin typeface="+mn-lt"/>
                 <a:ea typeface="+mn-ea"/>
               </a:rPr>
-              <a:t>1</a:t>
+              <a:t>&lt;numéro&gt;</a:t>
             </a:fld>
             <a:endParaRPr lang="fr-FR" sz="1200" b="0" u="none" strike="noStrike">
               <a:solidFill>
@@ -4108,7 +4466,7 @@
       </p:grpSpPr>
       <p:sp>
         <p:nvSpPr>
-          <p:cNvPr id="281" name="PlaceHolder 1"/>
+          <p:cNvPr id="307" name="PlaceHolder 1"/>
           <p:cNvSpPr>
             <a:spLocks noGrp="1"/>
           </p:cNvSpPr>
@@ -4119,19 +4477,19 @@
         <p:spPr>
           <a:xfrm>
             <a:off x="685800" y="1143000"/>
-            <a:ext cx="5485680" cy="3085560"/>
-          </a:xfrm>
-          <a:prstGeom prst="rect">
-            <a:avLst/>
-          </a:prstGeom>
-          <a:ln w="0">
-            <a:noFill/>
-          </a:ln>
-        </p:spPr>
-      </p:sp>
-      <p:sp>
-        <p:nvSpPr>
-          <p:cNvPr id="282" name="PlaceHolder 2"/>
+            <a:ext cx="5484960" cy="3084840"/>
+          </a:xfrm>
+          <a:prstGeom prst="rect">
+            <a:avLst/>
+          </a:prstGeom>
+          <a:ln w="0">
+            <a:noFill/>
+          </a:ln>
+        </p:spPr>
+      </p:sp>
+      <p:sp>
+        <p:nvSpPr>
+          <p:cNvPr id="308" name="PlaceHolder 2"/>
           <p:cNvSpPr>
             <a:spLocks noGrp="1"/>
           </p:cNvSpPr>
@@ -4142,7 +4500,7 @@
         <p:spPr>
           <a:xfrm>
             <a:off x="685800" y="4400640"/>
-            <a:ext cx="5485680" cy="3599640"/>
+            <a:ext cx="5484960" cy="3598920"/>
           </a:xfrm>
           <a:prstGeom prst="rect">
             <a:avLst/>
@@ -4173,7 +4531,7 @@
       </p:sp>
       <p:sp>
         <p:nvSpPr>
-          <p:cNvPr id="283" name="PlaceHolder 3"/>
+          <p:cNvPr id="309" name="PlaceHolder 3"/>
           <p:cNvSpPr>
             <a:spLocks noGrp="1"/>
           </p:cNvSpPr>
@@ -4184,7 +4542,7 @@
         <p:spPr>
           <a:xfrm>
             <a:off x="3884760" y="8685360"/>
-            <a:ext cx="2971080" cy="457920"/>
+            <a:ext cx="2970360" cy="457200"/>
           </a:xfrm>
           <a:prstGeom prst="rect">
             <a:avLst/>
@@ -4228,7 +4586,7 @@
                 <a:tab pos="0" algn="l"/>
               </a:tabLst>
             </a:pPr>
-            <a:fld id="{5EFCAEF7-B631-4F8C-AC95-7876D4892E8C}" type="slidenum">
+            <a:fld id="{95104034-EB7E-4372-A209-0EAA2CC1D12C}" type="slidenum">
               <a:rPr lang="en-US" sz="1200" b="0" u="none" strike="noStrike">
                 <a:solidFill>
                   <a:schemeClr val="dk1"/>
@@ -4238,7 +4596,7 @@
                 <a:latin typeface="+mn-lt"/>
                 <a:ea typeface="+mn-ea"/>
               </a:rPr>
-              <a:t>1</a:t>
+              <a:t>&lt;numéro&gt;</a:t>
             </a:fld>
             <a:endParaRPr lang="fr-FR" sz="1200" b="0" u="none" strike="noStrike">
               <a:solidFill>
@@ -4275,7 +4633,7 @@
       </p:grpSpPr>
       <p:sp>
         <p:nvSpPr>
-          <p:cNvPr id="284" name="PlaceHolder 1"/>
+          <p:cNvPr id="310" name="PlaceHolder 1"/>
           <p:cNvSpPr>
             <a:spLocks noGrp="1"/>
           </p:cNvSpPr>
@@ -4286,19 +4644,19 @@
         <p:spPr>
           <a:xfrm>
             <a:off x="685800" y="1143000"/>
-            <a:ext cx="5485680" cy="3085560"/>
-          </a:xfrm>
-          <a:prstGeom prst="rect">
-            <a:avLst/>
-          </a:prstGeom>
-          <a:ln w="0">
-            <a:noFill/>
-          </a:ln>
-        </p:spPr>
-      </p:sp>
-      <p:sp>
-        <p:nvSpPr>
-          <p:cNvPr id="285" name="PlaceHolder 2"/>
+            <a:ext cx="5484960" cy="3084840"/>
+          </a:xfrm>
+          <a:prstGeom prst="rect">
+            <a:avLst/>
+          </a:prstGeom>
+          <a:ln w="0">
+            <a:noFill/>
+          </a:ln>
+        </p:spPr>
+      </p:sp>
+      <p:sp>
+        <p:nvSpPr>
+          <p:cNvPr id="311" name="PlaceHolder 2"/>
           <p:cNvSpPr>
             <a:spLocks noGrp="1"/>
           </p:cNvSpPr>
@@ -4309,7 +4667,7 @@
         <p:spPr>
           <a:xfrm>
             <a:off x="685800" y="4400640"/>
-            <a:ext cx="5485680" cy="3599640"/>
+            <a:ext cx="5484960" cy="3598920"/>
           </a:xfrm>
           <a:prstGeom prst="rect">
             <a:avLst/>
@@ -4340,7 +4698,7 @@
       </p:sp>
       <p:sp>
         <p:nvSpPr>
-          <p:cNvPr id="286" name="PlaceHolder 3"/>
+          <p:cNvPr id="312" name="PlaceHolder 3"/>
           <p:cNvSpPr>
             <a:spLocks noGrp="1"/>
           </p:cNvSpPr>
@@ -4351,7 +4709,7 @@
         <p:spPr>
           <a:xfrm>
             <a:off x="3884760" y="8685360"/>
-            <a:ext cx="2971080" cy="457920"/>
+            <a:ext cx="2970360" cy="457200"/>
           </a:xfrm>
           <a:prstGeom prst="rect">
             <a:avLst/>
@@ -4395,7 +4753,7 @@
                 <a:tab pos="0" algn="l"/>
               </a:tabLst>
             </a:pPr>
-            <a:fld id="{D433CBF9-9DF1-4775-8670-93A3E5D3EB77}" type="slidenum">
+            <a:fld id="{2B6F9078-2320-4519-9D35-1DE0452C20F9}" type="slidenum">
               <a:rPr lang="en-US" sz="1200" b="0" u="none" strike="noStrike">
                 <a:solidFill>
                   <a:schemeClr val="dk1"/>
@@ -4528,7 +4886,18 @@
                 <a:uFillTx/>
                 <a:latin typeface="Calibri"/>
               </a:rPr>
-              <a:t>Cliquez pour éditer le format du texte-titre</a:t>
+              <a:t>Cliquez pour éditer le </a:t>
+            </a:r>
+            <a:r>
+              <a:rPr lang="fr-FR" sz="1800" b="0" u="none" strike="noStrike">
+                <a:solidFill>
+                  <a:schemeClr val="dk1"/>
+                </a:solidFill>
+                <a:effectLst/>
+                <a:uFillTx/>
+                <a:latin typeface="Calibri"/>
+              </a:rPr>
+              <a:t>format du texte-titre</a:t>
             </a:r>
             <a:endParaRPr lang="fr-FR" sz="1800" b="0" u="none" strike="noStrike">
               <a:solidFill>
@@ -4971,7 +5340,7 @@
         <p:spPr>
           <a:xfrm>
             <a:off x="0" y="0"/>
-            <a:ext cx="136440" cy="5142960"/>
+            <a:ext cx="135720" cy="5142240"/>
           </a:xfrm>
           <a:prstGeom prst="rect">
             <a:avLst/>
@@ -4990,7 +5359,7 @@
           <a:fontRef idx="minor"/>
         </p:style>
         <p:txBody>
-          <a:bodyPr lIns="68400" tIns="45000" rIns="68400" bIns="45000" anchor="t">
+          <a:bodyPr lIns="68040" tIns="45000" rIns="68040" bIns="45000" anchor="t">
             <a:noAutofit/>
           </a:bodyPr>
           <a:p>
@@ -5014,7 +5383,7 @@
         <p:spPr>
           <a:xfrm>
             <a:off x="137160" y="2240280"/>
-            <a:ext cx="9006120" cy="54000"/>
+            <a:ext cx="9005400" cy="53280"/>
           </a:xfrm>
           <a:prstGeom prst="rect">
             <a:avLst/>
@@ -5057,7 +5426,7 @@
         <p:spPr>
           <a:xfrm>
             <a:off x="457200" y="1097280"/>
-            <a:ext cx="8411760" cy="1279440"/>
+            <a:ext cx="8411040" cy="1278720"/>
           </a:xfrm>
           <a:prstGeom prst="rect">
             <a:avLst/>
@@ -5118,7 +5487,7 @@
         <p:spPr>
           <a:xfrm>
             <a:off x="457200" y="2514600"/>
-            <a:ext cx="8411760" cy="730800"/>
+            <a:ext cx="8411040" cy="730080"/>
           </a:xfrm>
           <a:prstGeom prst="rect">
             <a:avLst/>
@@ -5179,7 +5548,7 @@
         <p:spPr>
           <a:xfrm>
             <a:off x="457200" y="3383280"/>
-            <a:ext cx="8411760" cy="456480"/>
+            <a:ext cx="8411040" cy="455760"/>
           </a:xfrm>
           <a:prstGeom prst="rect">
             <a:avLst/>
@@ -5257,7 +5626,7 @@
         <p:spPr>
           <a:xfrm>
             <a:off x="0" y="0"/>
-            <a:ext cx="9143280" cy="685080"/>
+            <a:ext cx="9142560" cy="684360"/>
           </a:xfrm>
           <a:prstGeom prst="rect">
             <a:avLst/>
@@ -5300,7 +5669,7 @@
         <p:spPr>
           <a:xfrm>
             <a:off x="274320" y="45720"/>
-            <a:ext cx="8594640" cy="593640"/>
+            <a:ext cx="8593920" cy="592920"/>
           </a:xfrm>
           <a:prstGeom prst="rect">
             <a:avLst/>
@@ -5361,7 +5730,7 @@
         <p:spPr>
           <a:xfrm>
             <a:off x="0" y="685800"/>
-            <a:ext cx="72360" cy="4457160"/>
+            <a:ext cx="71640" cy="4456440"/>
           </a:xfrm>
           <a:prstGeom prst="rect">
             <a:avLst/>
@@ -5380,7 +5749,7 @@
           <a:fontRef idx="minor"/>
         </p:style>
         <p:txBody>
-          <a:bodyPr lIns="36360" tIns="45000" rIns="36360" bIns="45000" anchor="t">
+          <a:bodyPr lIns="36000" tIns="45000" rIns="36000" bIns="45000" anchor="t">
             <a:noAutofit/>
           </a:bodyPr>
           <a:p>
@@ -5404,7 +5773,7 @@
         <p:spPr>
           <a:xfrm>
             <a:off x="201240" y="822960"/>
-            <a:ext cx="2742480" cy="456480"/>
+            <a:ext cx="2741760" cy="455760"/>
           </a:xfrm>
           <a:prstGeom prst="rect">
             <a:avLst/>
@@ -5447,7 +5816,7 @@
         <p:spPr>
           <a:xfrm>
             <a:off x="201240" y="822960"/>
-            <a:ext cx="2742480" cy="456480"/>
+            <a:ext cx="2741760" cy="455760"/>
           </a:xfrm>
           <a:prstGeom prst="rect">
             <a:avLst/>
@@ -5508,7 +5877,7 @@
         <p:spPr>
           <a:xfrm>
             <a:off x="292680" y="1325880"/>
-            <a:ext cx="2559600" cy="2285280"/>
+            <a:ext cx="2558880" cy="2284560"/>
           </a:xfrm>
           <a:prstGeom prst="rect">
             <a:avLst/>
@@ -5644,7 +6013,7 @@
         <p:spPr>
           <a:xfrm>
             <a:off x="3173040" y="822960"/>
-            <a:ext cx="2742480" cy="456480"/>
+            <a:ext cx="2741760" cy="455760"/>
           </a:xfrm>
           <a:prstGeom prst="rect">
             <a:avLst/>
@@ -5687,7 +6056,7 @@
         <p:spPr>
           <a:xfrm>
             <a:off x="3173040" y="822960"/>
-            <a:ext cx="2742480" cy="456480"/>
+            <a:ext cx="2741760" cy="455760"/>
           </a:xfrm>
           <a:prstGeom prst="rect">
             <a:avLst/>
@@ -5748,7 +6117,7 @@
         <p:spPr>
           <a:xfrm>
             <a:off x="3264480" y="1325880"/>
-            <a:ext cx="2559600" cy="2285280"/>
+            <a:ext cx="2558880" cy="2284560"/>
           </a:xfrm>
           <a:prstGeom prst="rect">
             <a:avLst/>
@@ -5884,7 +6253,7 @@
         <p:spPr>
           <a:xfrm>
             <a:off x="6144840" y="822960"/>
-            <a:ext cx="2742480" cy="456480"/>
+            <a:ext cx="2741760" cy="455760"/>
           </a:xfrm>
           <a:prstGeom prst="rect">
             <a:avLst/>
@@ -5927,7 +6296,7 @@
         <p:spPr>
           <a:xfrm>
             <a:off x="6144840" y="822960"/>
-            <a:ext cx="2742480" cy="456480"/>
+            <a:ext cx="2741760" cy="455760"/>
           </a:xfrm>
           <a:prstGeom prst="rect">
             <a:avLst/>
@@ -5988,7 +6357,7 @@
         <p:spPr>
           <a:xfrm>
             <a:off x="6236280" y="1325880"/>
-            <a:ext cx="2559600" cy="2285280"/>
+            <a:ext cx="2558880" cy="2284560"/>
           </a:xfrm>
           <a:prstGeom prst="rect">
             <a:avLst/>
@@ -6124,7 +6493,7 @@
         <p:spPr>
           <a:xfrm>
             <a:off x="274320" y="4389120"/>
-            <a:ext cx="8594640" cy="456480"/>
+            <a:ext cx="8593920" cy="455760"/>
           </a:xfrm>
           <a:prstGeom prst="rect">
             <a:avLst/>
@@ -6222,7 +6591,7 @@
         <p:spPr>
           <a:xfrm>
             <a:off x="0" y="0"/>
-            <a:ext cx="9143280" cy="90720"/>
+            <a:ext cx="9142560" cy="90000"/>
           </a:xfrm>
           <a:prstGeom prst="rect">
             <a:avLst/>
@@ -6265,7 +6634,7 @@
         <p:spPr>
           <a:xfrm>
             <a:off x="0" y="5052240"/>
-            <a:ext cx="9143280" cy="90720"/>
+            <a:ext cx="9142560" cy="90000"/>
           </a:xfrm>
           <a:prstGeom prst="rect">
             <a:avLst/>
@@ -6308,7 +6677,7 @@
         <p:spPr>
           <a:xfrm>
             <a:off x="457200" y="1645920"/>
-            <a:ext cx="8228880" cy="1828080"/>
+            <a:ext cx="8228160" cy="1827360"/>
           </a:xfrm>
           <a:prstGeom prst="rect">
             <a:avLst/>
@@ -6406,7 +6775,7 @@
         <p:spPr>
           <a:xfrm>
             <a:off x="0" y="0"/>
-            <a:ext cx="9143280" cy="685080"/>
+            <a:ext cx="9142560" cy="684360"/>
           </a:xfrm>
           <a:prstGeom prst="rect">
             <a:avLst/>
@@ -6449,7 +6818,7 @@
         <p:spPr>
           <a:xfrm>
             <a:off x="274320" y="45720"/>
-            <a:ext cx="8594640" cy="593640"/>
+            <a:ext cx="8593920" cy="592920"/>
           </a:xfrm>
           <a:prstGeom prst="rect">
             <a:avLst/>
@@ -6510,7 +6879,7 @@
         <p:spPr>
           <a:xfrm>
             <a:off x="0" y="685800"/>
-            <a:ext cx="72360" cy="4457160"/>
+            <a:ext cx="71640" cy="4456440"/>
           </a:xfrm>
           <a:prstGeom prst="rect">
             <a:avLst/>
@@ -6529,7 +6898,7 @@
           <a:fontRef idx="minor"/>
         </p:style>
         <p:txBody>
-          <a:bodyPr lIns="36360" tIns="45000" rIns="36360" bIns="45000" anchor="t">
+          <a:bodyPr lIns="36000" tIns="45000" rIns="36000" bIns="45000" anchor="t">
             <a:noAutofit/>
           </a:bodyPr>
           <a:p>
@@ -6553,7 +6922,7 @@
         <p:spPr>
           <a:xfrm>
             <a:off x="228600" y="777240"/>
-            <a:ext cx="4114080" cy="410760"/>
+            <a:ext cx="4113360" cy="410040"/>
           </a:xfrm>
           <a:prstGeom prst="rect">
             <a:avLst/>
@@ -6596,7 +6965,7 @@
         <p:spPr>
           <a:xfrm>
             <a:off x="228600" y="777240"/>
-            <a:ext cx="4114080" cy="410760"/>
+            <a:ext cx="4113360" cy="410040"/>
           </a:xfrm>
           <a:prstGeom prst="rect">
             <a:avLst/>
@@ -6657,7 +7026,7 @@
         <p:spPr>
           <a:xfrm>
             <a:off x="228600" y="1234440"/>
-            <a:ext cx="4114080" cy="2010960"/>
+            <a:ext cx="4113360" cy="2010240"/>
           </a:xfrm>
           <a:prstGeom prst="rect">
             <a:avLst/>
@@ -6793,7 +7162,7 @@
         <p:spPr>
           <a:xfrm>
             <a:off x="4800600" y="777240"/>
-            <a:ext cx="4114080" cy="410760"/>
+            <a:ext cx="4113360" cy="410040"/>
           </a:xfrm>
           <a:prstGeom prst="rect">
             <a:avLst/>
@@ -6836,7 +7205,7 @@
         <p:spPr>
           <a:xfrm>
             <a:off x="4800600" y="777240"/>
-            <a:ext cx="4114080" cy="410760"/>
+            <a:ext cx="4113360" cy="410040"/>
           </a:xfrm>
           <a:prstGeom prst="rect">
             <a:avLst/>
@@ -6897,7 +7266,7 @@
         <p:spPr>
           <a:xfrm>
             <a:off x="4800600" y="1234440"/>
-            <a:ext cx="4114080" cy="2010960"/>
+            <a:ext cx="4113360" cy="2010240"/>
           </a:xfrm>
           <a:prstGeom prst="rect">
             <a:avLst/>
@@ -7033,7 +7402,7 @@
         <p:spPr>
           <a:xfrm>
             <a:off x="228600" y="3429000"/>
-            <a:ext cx="8686080" cy="1370880"/>
+            <a:ext cx="8685360" cy="1370160"/>
           </a:xfrm>
           <a:prstGeom prst="rect">
             <a:avLst/>
@@ -7076,7 +7445,7 @@
         <p:spPr>
           <a:xfrm>
             <a:off x="365760" y="3493080"/>
-            <a:ext cx="8411760" cy="1233720"/>
+            <a:ext cx="8411040" cy="1233000"/>
           </a:xfrm>
           <a:prstGeom prst="rect">
             <a:avLst/>
@@ -7204,7 +7573,7 @@
         <p:spPr>
           <a:xfrm>
             <a:off x="0" y="0"/>
-            <a:ext cx="9143280" cy="685080"/>
+            <a:ext cx="9142560" cy="684360"/>
           </a:xfrm>
           <a:prstGeom prst="rect">
             <a:avLst/>
@@ -7247,7 +7616,7 @@
         <p:spPr>
           <a:xfrm>
             <a:off x="274320" y="45720"/>
-            <a:ext cx="8594640" cy="593640"/>
+            <a:ext cx="8593920" cy="592920"/>
           </a:xfrm>
           <a:prstGeom prst="rect">
             <a:avLst/>
@@ -7308,7 +7677,7 @@
         <p:spPr>
           <a:xfrm>
             <a:off x="0" y="685800"/>
-            <a:ext cx="72360" cy="4457160"/>
+            <a:ext cx="71640" cy="4456440"/>
           </a:xfrm>
           <a:prstGeom prst="rect">
             <a:avLst/>
@@ -7327,7 +7696,7 @@
           <a:fontRef idx="minor"/>
         </p:style>
         <p:txBody>
-          <a:bodyPr lIns="36360" tIns="45000" rIns="36360" bIns="45000" anchor="t">
+          <a:bodyPr lIns="36000" tIns="45000" rIns="36000" bIns="45000" anchor="t">
             <a:noAutofit/>
           </a:bodyPr>
           <a:p>
@@ -7351,7 +7720,7 @@
         <p:spPr>
           <a:xfrm>
             <a:off x="228600" y="777240"/>
-            <a:ext cx="4114080" cy="410760"/>
+            <a:ext cx="4113360" cy="410040"/>
           </a:xfrm>
           <a:prstGeom prst="rect">
             <a:avLst/>
@@ -7394,7 +7763,7 @@
         <p:spPr>
           <a:xfrm>
             <a:off x="228600" y="777240"/>
-            <a:ext cx="4114080" cy="410760"/>
+            <a:ext cx="4113360" cy="410040"/>
           </a:xfrm>
           <a:prstGeom prst="rect">
             <a:avLst/>
@@ -7455,7 +7824,7 @@
         <p:spPr>
           <a:xfrm>
             <a:off x="228600" y="1234440"/>
-            <a:ext cx="4114080" cy="2010960"/>
+            <a:ext cx="4113360" cy="2010240"/>
           </a:xfrm>
           <a:prstGeom prst="rect">
             <a:avLst/>
@@ -7626,7 +7995,7 @@
         <p:spPr>
           <a:xfrm>
             <a:off x="4800600" y="777240"/>
-            <a:ext cx="4114080" cy="410760"/>
+            <a:ext cx="4113360" cy="410040"/>
           </a:xfrm>
           <a:prstGeom prst="rect">
             <a:avLst/>
@@ -7669,7 +8038,7 @@
         <p:spPr>
           <a:xfrm>
             <a:off x="4800600" y="777240"/>
-            <a:ext cx="4114080" cy="410760"/>
+            <a:ext cx="4113360" cy="410040"/>
           </a:xfrm>
           <a:prstGeom prst="rect">
             <a:avLst/>
@@ -7730,7 +8099,7 @@
         <p:spPr>
           <a:xfrm>
             <a:off x="4800600" y="1234440"/>
-            <a:ext cx="4114080" cy="2010960"/>
+            <a:ext cx="4113360" cy="2010240"/>
           </a:xfrm>
           <a:prstGeom prst="rect">
             <a:avLst/>
@@ -7866,7 +8235,7 @@
         <p:spPr>
           <a:xfrm>
             <a:off x="228600" y="3429000"/>
-            <a:ext cx="8686080" cy="1370880"/>
+            <a:ext cx="8685360" cy="1370160"/>
           </a:xfrm>
           <a:prstGeom prst="rect">
             <a:avLst/>
@@ -7909,7 +8278,7 @@
         <p:spPr>
           <a:xfrm>
             <a:off x="365760" y="3493080"/>
-            <a:ext cx="8411760" cy="1233720"/>
+            <a:ext cx="8411040" cy="1233000"/>
           </a:xfrm>
           <a:prstGeom prst="rect">
             <a:avLst/>
@@ -8037,7 +8406,7 @@
         <p:spPr>
           <a:xfrm>
             <a:off x="0" y="0"/>
-            <a:ext cx="9143280" cy="685080"/>
+            <a:ext cx="9142560" cy="684360"/>
           </a:xfrm>
           <a:prstGeom prst="rect">
             <a:avLst/>
@@ -8080,7 +8449,7 @@
         <p:spPr>
           <a:xfrm>
             <a:off x="274320" y="45720"/>
-            <a:ext cx="8594640" cy="593640"/>
+            <a:ext cx="8593920" cy="592920"/>
           </a:xfrm>
           <a:prstGeom prst="rect">
             <a:avLst/>
@@ -8141,7 +8510,7 @@
         <p:spPr>
           <a:xfrm>
             <a:off x="0" y="685800"/>
-            <a:ext cx="72360" cy="4457160"/>
+            <a:ext cx="71640" cy="4456440"/>
           </a:xfrm>
           <a:prstGeom prst="rect">
             <a:avLst/>
@@ -8160,7 +8529,7 @@
           <a:fontRef idx="minor"/>
         </p:style>
         <p:txBody>
-          <a:bodyPr lIns="36360" tIns="45000" rIns="36360" bIns="45000" anchor="t">
+          <a:bodyPr lIns="36000" tIns="45000" rIns="36000" bIns="45000" anchor="t">
             <a:noAutofit/>
           </a:bodyPr>
           <a:p>
@@ -8184,7 +8553,7 @@
         <p:spPr>
           <a:xfrm>
             <a:off x="274320" y="777240"/>
-            <a:ext cx="1279440" cy="365040"/>
+            <a:ext cx="1278720" cy="364320"/>
           </a:xfrm>
           <a:prstGeom prst="rect">
             <a:avLst/>
@@ -8227,7 +8596,7 @@
         <p:spPr>
           <a:xfrm>
             <a:off x="274320" y="777240"/>
-            <a:ext cx="1279440" cy="365040"/>
+            <a:ext cx="1278720" cy="364320"/>
           </a:xfrm>
           <a:prstGeom prst="rect">
             <a:avLst/>
@@ -8332,7 +8701,7 @@
         <p:spPr>
           <a:xfrm>
             <a:off x="2103120" y="777240"/>
-            <a:ext cx="1279440" cy="365040"/>
+            <a:ext cx="1278720" cy="364320"/>
           </a:xfrm>
           <a:prstGeom prst="rect">
             <a:avLst/>
@@ -8375,7 +8744,7 @@
         <p:spPr>
           <a:xfrm>
             <a:off x="2103120" y="777240"/>
-            <a:ext cx="1279440" cy="365040"/>
+            <a:ext cx="1278720" cy="364320"/>
           </a:xfrm>
           <a:prstGeom prst="rect">
             <a:avLst/>
@@ -8480,7 +8849,7 @@
         <p:spPr>
           <a:xfrm>
             <a:off x="3931920" y="777240"/>
-            <a:ext cx="1279440" cy="365040"/>
+            <a:ext cx="1278720" cy="364320"/>
           </a:xfrm>
           <a:prstGeom prst="rect">
             <a:avLst/>
@@ -8523,7 +8892,7 @@
         <p:spPr>
           <a:xfrm>
             <a:off x="3931920" y="777240"/>
-            <a:ext cx="1279440" cy="365040"/>
+            <a:ext cx="1278720" cy="364320"/>
           </a:xfrm>
           <a:prstGeom prst="rect">
             <a:avLst/>
@@ -8628,7 +8997,7 @@
         <p:spPr>
           <a:xfrm>
             <a:off x="5760720" y="777240"/>
-            <a:ext cx="1279440" cy="365040"/>
+            <a:ext cx="1278720" cy="364320"/>
           </a:xfrm>
           <a:prstGeom prst="rect">
             <a:avLst/>
@@ -8671,7 +9040,7 @@
         <p:spPr>
           <a:xfrm>
             <a:off x="5760720" y="777240"/>
-            <a:ext cx="1279440" cy="365040"/>
+            <a:ext cx="1278720" cy="364320"/>
           </a:xfrm>
           <a:prstGeom prst="rect">
             <a:avLst/>
@@ -8776,7 +9145,7 @@
         <p:spPr>
           <a:xfrm>
             <a:off x="7589520" y="777240"/>
-            <a:ext cx="1279440" cy="365040"/>
+            <a:ext cx="1278720" cy="364320"/>
           </a:xfrm>
           <a:prstGeom prst="rect">
             <a:avLst/>
@@ -8819,7 +9188,7 @@
         <p:spPr>
           <a:xfrm>
             <a:off x="7589520" y="777240"/>
-            <a:ext cx="1279440" cy="365040"/>
+            <a:ext cx="1278720" cy="364320"/>
           </a:xfrm>
           <a:prstGeom prst="rect">
             <a:avLst/>
@@ -8924,7 +9293,7 @@
         <p:spPr>
           <a:xfrm>
             <a:off x="45720" y="1234440"/>
-            <a:ext cx="639360" cy="639360"/>
+            <a:ext cx="638640" cy="638640"/>
           </a:xfrm>
           <a:prstGeom prst="rect">
             <a:avLst/>
@@ -9114,7 +9483,7 @@
         <p:spPr>
           <a:xfrm>
             <a:off x="1280160" y="1161360"/>
-            <a:ext cx="1096560" cy="227880"/>
+            <a:ext cx="1095840" cy="227160"/>
           </a:xfrm>
           <a:prstGeom prst="rect">
             <a:avLst/>
@@ -9304,7 +9673,7 @@
         <p:spPr>
           <a:xfrm>
             <a:off x="2194560" y="1389960"/>
-            <a:ext cx="1096560" cy="227880"/>
+            <a:ext cx="1095840" cy="227160"/>
           </a:xfrm>
           <a:prstGeom prst="rect">
             <a:avLst/>
@@ -9494,7 +9863,7 @@
         <p:spPr>
           <a:xfrm>
             <a:off x="3108960" y="1618560"/>
-            <a:ext cx="1096560" cy="227880"/>
+            <a:ext cx="1095840" cy="227160"/>
           </a:xfrm>
           <a:prstGeom prst="rect">
             <a:avLst/>
@@ -9684,7 +10053,7 @@
         <p:spPr>
           <a:xfrm>
             <a:off x="1280160" y="1984320"/>
-            <a:ext cx="1096560" cy="227880"/>
+            <a:ext cx="1095840" cy="227160"/>
           </a:xfrm>
           <a:prstGeom prst="rect">
             <a:avLst/>
@@ -9874,7 +10243,7 @@
         <p:spPr>
           <a:xfrm>
             <a:off x="2194560" y="2212920"/>
-            <a:ext cx="1096560" cy="227880"/>
+            <a:ext cx="1095840" cy="227160"/>
           </a:xfrm>
           <a:prstGeom prst="rect">
             <a:avLst/>
@@ -10064,7 +10433,7 @@
         <p:spPr>
           <a:xfrm>
             <a:off x="3108960" y="2441520"/>
-            <a:ext cx="1096560" cy="227880"/>
+            <a:ext cx="1095840" cy="227160"/>
           </a:xfrm>
           <a:prstGeom prst="rect">
             <a:avLst/>
@@ -10125,7 +10494,7 @@
         <p:spPr>
           <a:xfrm>
             <a:off x="45720" y="2834640"/>
-            <a:ext cx="639360" cy="639360"/>
+            <a:ext cx="638640" cy="638640"/>
           </a:xfrm>
           <a:prstGeom prst="rect">
             <a:avLst/>
@@ -10315,7 +10684,7 @@
         <p:spPr>
           <a:xfrm>
             <a:off x="1280160" y="2807280"/>
-            <a:ext cx="1096560" cy="227880"/>
+            <a:ext cx="1095840" cy="227160"/>
           </a:xfrm>
           <a:prstGeom prst="rect">
             <a:avLst/>
@@ -10505,7 +10874,7 @@
         <p:spPr>
           <a:xfrm>
             <a:off x="2194560" y="3035880"/>
-            <a:ext cx="1096560" cy="227880"/>
+            <a:ext cx="1095840" cy="227160"/>
           </a:xfrm>
           <a:prstGeom prst="rect">
             <a:avLst/>
@@ -10695,7 +11064,7 @@
         <p:spPr>
           <a:xfrm>
             <a:off x="3108960" y="3264480"/>
-            <a:ext cx="1096560" cy="227880"/>
+            <a:ext cx="1095840" cy="227160"/>
           </a:xfrm>
           <a:prstGeom prst="rect">
             <a:avLst/>
@@ -10756,7 +11125,7 @@
         <p:spPr>
           <a:xfrm>
             <a:off x="45720" y="3840480"/>
-            <a:ext cx="639360" cy="456480"/>
+            <a:ext cx="638640" cy="455760"/>
           </a:xfrm>
           <a:prstGeom prst="rect">
             <a:avLst/>
@@ -10946,7 +11315,7 @@
         <p:spPr>
           <a:xfrm>
             <a:off x="4937760" y="3767400"/>
-            <a:ext cx="1096560" cy="227880"/>
+            <a:ext cx="1095840" cy="227160"/>
           </a:xfrm>
           <a:prstGeom prst="rect">
             <a:avLst/>
@@ -11136,7 +11505,7 @@
         <p:spPr>
           <a:xfrm>
             <a:off x="5852160" y="3950280"/>
-            <a:ext cx="1096560" cy="227880"/>
+            <a:ext cx="1095840" cy="227160"/>
           </a:xfrm>
           <a:prstGeom prst="rect">
             <a:avLst/>
@@ -11234,7 +11603,7 @@
         <p:spPr>
           <a:xfrm>
             <a:off x="0" y="0"/>
-            <a:ext cx="9143280" cy="90720"/>
+            <a:ext cx="9142560" cy="90000"/>
           </a:xfrm>
           <a:prstGeom prst="rect">
             <a:avLst/>
@@ -11277,7 +11646,7 @@
         <p:spPr>
           <a:xfrm>
             <a:off x="0" y="5052240"/>
-            <a:ext cx="9143280" cy="90720"/>
+            <a:ext cx="9142560" cy="90000"/>
           </a:xfrm>
           <a:prstGeom prst="rect">
             <a:avLst/>
@@ -11320,7 +11689,7 @@
         <p:spPr>
           <a:xfrm>
             <a:off x="457200" y="1645920"/>
-            <a:ext cx="8228880" cy="1828080"/>
+            <a:ext cx="8228160" cy="1827360"/>
           </a:xfrm>
           <a:prstGeom prst="rect">
             <a:avLst/>
@@ -11418,7 +11787,7 @@
         <p:spPr>
           <a:xfrm>
             <a:off x="0" y="0"/>
-            <a:ext cx="9143280" cy="685080"/>
+            <a:ext cx="9142560" cy="684360"/>
           </a:xfrm>
           <a:prstGeom prst="rect">
             <a:avLst/>
@@ -11461,7 +11830,7 @@
         <p:spPr>
           <a:xfrm>
             <a:off x="274320" y="45720"/>
-            <a:ext cx="8594640" cy="593640"/>
+            <a:ext cx="8593920" cy="592920"/>
           </a:xfrm>
           <a:prstGeom prst="rect">
             <a:avLst/>
@@ -11522,7 +11891,7 @@
         <p:spPr>
           <a:xfrm>
             <a:off x="0" y="685800"/>
-            <a:ext cx="72360" cy="4457160"/>
+            <a:ext cx="71640" cy="4456440"/>
           </a:xfrm>
           <a:prstGeom prst="rect">
             <a:avLst/>
@@ -11541,7 +11910,7 @@
           <a:fontRef idx="minor"/>
         </p:style>
         <p:txBody>
-          <a:bodyPr lIns="36360" tIns="45000" rIns="36360" bIns="45000" anchor="t">
+          <a:bodyPr lIns="36000" tIns="45000" rIns="36000" bIns="45000" anchor="t">
             <a:noAutofit/>
           </a:bodyPr>
           <a:p>
@@ -11565,7 +11934,7 @@
         <p:spPr>
           <a:xfrm>
             <a:off x="274320" y="822960"/>
-            <a:ext cx="3839760" cy="2742480"/>
+            <a:ext cx="3839040" cy="2741760"/>
           </a:xfrm>
           <a:prstGeom prst="rect">
             <a:avLst/>
@@ -11608,7 +11977,7 @@
         <p:spPr>
           <a:xfrm>
             <a:off x="274320" y="868680"/>
-            <a:ext cx="3839760" cy="502200"/>
+            <a:ext cx="3839040" cy="501480"/>
           </a:xfrm>
           <a:prstGeom prst="rect">
             <a:avLst/>
@@ -11669,7 +12038,7 @@
         <p:spPr>
           <a:xfrm>
             <a:off x="411480" y="1463040"/>
-            <a:ext cx="3565440" cy="1919520"/>
+            <a:ext cx="3564720" cy="1918800"/>
           </a:xfrm>
           <a:prstGeom prst="rect">
             <a:avLst/>
@@ -11805,7 +12174,7 @@
         <p:spPr>
           <a:xfrm>
             <a:off x="5029200" y="822960"/>
-            <a:ext cx="3839760" cy="2742480"/>
+            <a:ext cx="3839040" cy="2741760"/>
           </a:xfrm>
           <a:prstGeom prst="rect">
             <a:avLst/>
@@ -11848,7 +12217,7 @@
         <p:spPr>
           <a:xfrm>
             <a:off x="5029200" y="868680"/>
-            <a:ext cx="3839760" cy="502200"/>
+            <a:ext cx="3839040" cy="501480"/>
           </a:xfrm>
           <a:prstGeom prst="rect">
             <a:avLst/>
@@ -11909,7 +12278,7 @@
         <p:spPr>
           <a:xfrm>
             <a:off x="5166360" y="1463040"/>
-            <a:ext cx="3565440" cy="1919520"/>
+            <a:ext cx="3564720" cy="1918800"/>
           </a:xfrm>
           <a:prstGeom prst="rect">
             <a:avLst/>
@@ -12045,7 +12414,7 @@
         <p:spPr>
           <a:xfrm>
             <a:off x="274320" y="3794760"/>
-            <a:ext cx="8594640" cy="1096560"/>
+            <a:ext cx="8593920" cy="1095840"/>
           </a:xfrm>
           <a:prstGeom prst="rect">
             <a:avLst/>
@@ -12088,7 +12457,7 @@
         <p:spPr>
           <a:xfrm>
             <a:off x="411480" y="3858840"/>
-            <a:ext cx="8320320" cy="959400"/>
+            <a:ext cx="8319600" cy="958680"/>
           </a:xfrm>
           <a:prstGeom prst="rect">
             <a:avLst/>
@@ -12216,7 +12585,7 @@
         <p:spPr>
           <a:xfrm>
             <a:off x="0" y="0"/>
-            <a:ext cx="9143280" cy="90720"/>
+            <a:ext cx="9142560" cy="90000"/>
           </a:xfrm>
           <a:prstGeom prst="rect">
             <a:avLst/>
@@ -12259,7 +12628,7 @@
         <p:spPr>
           <a:xfrm>
             <a:off x="0" y="5052240"/>
-            <a:ext cx="9143280" cy="90720"/>
+            <a:ext cx="9142560" cy="90000"/>
           </a:xfrm>
           <a:prstGeom prst="rect">
             <a:avLst/>
@@ -12302,7 +12671,7 @@
         <p:spPr>
           <a:xfrm>
             <a:off x="457200" y="1645920"/>
-            <a:ext cx="8228880" cy="1828080"/>
+            <a:ext cx="8228160" cy="1827360"/>
           </a:xfrm>
           <a:prstGeom prst="rect">
             <a:avLst/>
@@ -12400,7 +12769,7 @@
         <p:spPr>
           <a:xfrm>
             <a:off x="0" y="0"/>
-            <a:ext cx="9143280" cy="685080"/>
+            <a:ext cx="9142560" cy="684360"/>
           </a:xfrm>
           <a:prstGeom prst="rect">
             <a:avLst/>
@@ -12443,7 +12812,7 @@
         <p:spPr>
           <a:xfrm>
             <a:off x="274320" y="45720"/>
-            <a:ext cx="8594640" cy="593640"/>
+            <a:ext cx="8593920" cy="592920"/>
           </a:xfrm>
           <a:prstGeom prst="rect">
             <a:avLst/>
@@ -12504,7 +12873,7 @@
         <p:spPr>
           <a:xfrm>
             <a:off x="0" y="685800"/>
-            <a:ext cx="72360" cy="4457160"/>
+            <a:ext cx="71640" cy="4456440"/>
           </a:xfrm>
           <a:prstGeom prst="rect">
             <a:avLst/>
@@ -12523,7 +12892,7 @@
           <a:fontRef idx="minor"/>
         </p:style>
         <p:txBody>
-          <a:bodyPr lIns="36360" tIns="45000" rIns="36360" bIns="45000" anchor="t">
+          <a:bodyPr lIns="36000" tIns="45000" rIns="36000" bIns="45000" anchor="t">
             <a:noAutofit/>
           </a:bodyPr>
           <a:p>
@@ -12547,7 +12916,7 @@
         <p:spPr>
           <a:xfrm>
             <a:off x="228600" y="914400"/>
-            <a:ext cx="4205520" cy="1142280"/>
+            <a:ext cx="4204800" cy="1141560"/>
           </a:xfrm>
           <a:prstGeom prst="rect">
             <a:avLst/>
@@ -12590,7 +12959,7 @@
         <p:spPr>
           <a:xfrm>
             <a:off x="228600" y="914400"/>
-            <a:ext cx="72360" cy="1142280"/>
+            <a:ext cx="71640" cy="1141560"/>
           </a:xfrm>
           <a:prstGeom prst="rect">
             <a:avLst/>
@@ -12609,7 +12978,7 @@
           <a:fontRef idx="minor"/>
         </p:style>
         <p:txBody>
-          <a:bodyPr lIns="36360" tIns="45000" rIns="36360" bIns="45000" anchor="t">
+          <a:bodyPr lIns="36000" tIns="45000" rIns="36000" bIns="45000" anchor="t">
             <a:noAutofit/>
           </a:bodyPr>
           <a:p>
@@ -12633,7 +13002,7 @@
         <p:spPr>
           <a:xfrm>
             <a:off x="411480" y="987480"/>
-            <a:ext cx="3931200" cy="346680"/>
+            <a:ext cx="3930480" cy="345960"/>
           </a:xfrm>
           <a:prstGeom prst="rect">
             <a:avLst/>
@@ -12694,7 +13063,7 @@
         <p:spPr>
           <a:xfrm>
             <a:off x="411480" y="1371600"/>
-            <a:ext cx="3931200" cy="593640"/>
+            <a:ext cx="3930480" cy="592920"/>
           </a:xfrm>
           <a:prstGeom prst="rect">
             <a:avLst/>
@@ -12755,7 +13124,7 @@
         <p:spPr>
           <a:xfrm>
             <a:off x="4663440" y="914400"/>
-            <a:ext cx="4205520" cy="1142280"/>
+            <a:ext cx="4204800" cy="1141560"/>
           </a:xfrm>
           <a:prstGeom prst="rect">
             <a:avLst/>
@@ -12798,7 +13167,7 @@
         <p:spPr>
           <a:xfrm>
             <a:off x="4663440" y="914400"/>
-            <a:ext cx="72360" cy="1142280"/>
+            <a:ext cx="71640" cy="1141560"/>
           </a:xfrm>
           <a:prstGeom prst="rect">
             <a:avLst/>
@@ -12817,7 +13186,7 @@
           <a:fontRef idx="minor"/>
         </p:style>
         <p:txBody>
-          <a:bodyPr lIns="36360" tIns="45000" rIns="36360" bIns="45000" anchor="t">
+          <a:bodyPr lIns="36000" tIns="45000" rIns="36000" bIns="45000" anchor="t">
             <a:noAutofit/>
           </a:bodyPr>
           <a:p>
@@ -12841,7 +13210,7 @@
         <p:spPr>
           <a:xfrm>
             <a:off x="4846320" y="987480"/>
-            <a:ext cx="3931200" cy="346680"/>
+            <a:ext cx="3930480" cy="345960"/>
           </a:xfrm>
           <a:prstGeom prst="rect">
             <a:avLst/>
@@ -12902,7 +13271,7 @@
         <p:spPr>
           <a:xfrm>
             <a:off x="4846320" y="1371600"/>
-            <a:ext cx="3931200" cy="593640"/>
+            <a:ext cx="3930480" cy="592920"/>
           </a:xfrm>
           <a:prstGeom prst="rect">
             <a:avLst/>
@@ -12963,7 +13332,7 @@
         <p:spPr>
           <a:xfrm>
             <a:off x="228600" y="2194560"/>
-            <a:ext cx="4205520" cy="1142280"/>
+            <a:ext cx="4204800" cy="1141560"/>
           </a:xfrm>
           <a:prstGeom prst="rect">
             <a:avLst/>
@@ -13006,7 +13375,7 @@
         <p:spPr>
           <a:xfrm>
             <a:off x="228600" y="2194560"/>
-            <a:ext cx="72360" cy="1142280"/>
+            <a:ext cx="71640" cy="1141560"/>
           </a:xfrm>
           <a:prstGeom prst="rect">
             <a:avLst/>
@@ -13025,7 +13394,7 @@
           <a:fontRef idx="minor"/>
         </p:style>
         <p:txBody>
-          <a:bodyPr lIns="36360" tIns="45000" rIns="36360" bIns="45000" anchor="t">
+          <a:bodyPr lIns="36000" tIns="45000" rIns="36000" bIns="45000" anchor="t">
             <a:noAutofit/>
           </a:bodyPr>
           <a:p>
@@ -13049,7 +13418,7 @@
         <p:spPr>
           <a:xfrm>
             <a:off x="411480" y="2267640"/>
-            <a:ext cx="3931200" cy="346680"/>
+            <a:ext cx="3930480" cy="345960"/>
           </a:xfrm>
           <a:prstGeom prst="rect">
             <a:avLst/>
@@ -13110,7 +13479,7 @@
         <p:spPr>
           <a:xfrm>
             <a:off x="411480" y="2651760"/>
-            <a:ext cx="3931200" cy="593640"/>
+            <a:ext cx="3930480" cy="592920"/>
           </a:xfrm>
           <a:prstGeom prst="rect">
             <a:avLst/>
@@ -13171,7 +13540,7 @@
         <p:spPr>
           <a:xfrm>
             <a:off x="4663440" y="2194560"/>
-            <a:ext cx="4205520" cy="1142280"/>
+            <a:ext cx="4204800" cy="1141560"/>
           </a:xfrm>
           <a:prstGeom prst="rect">
             <a:avLst/>
@@ -13214,7 +13583,7 @@
         <p:spPr>
           <a:xfrm>
             <a:off x="4663440" y="2194560"/>
-            <a:ext cx="72360" cy="1142280"/>
+            <a:ext cx="71640" cy="1141560"/>
           </a:xfrm>
           <a:prstGeom prst="rect">
             <a:avLst/>
@@ -13233,7 +13602,7 @@
           <a:fontRef idx="minor"/>
         </p:style>
         <p:txBody>
-          <a:bodyPr lIns="36360" tIns="45000" rIns="36360" bIns="45000" anchor="t">
+          <a:bodyPr lIns="36000" tIns="45000" rIns="36000" bIns="45000" anchor="t">
             <a:noAutofit/>
           </a:bodyPr>
           <a:p>
@@ -13257,7 +13626,7 @@
         <p:spPr>
           <a:xfrm>
             <a:off x="4846320" y="2267640"/>
-            <a:ext cx="3931200" cy="346680"/>
+            <a:ext cx="3930480" cy="345960"/>
           </a:xfrm>
           <a:prstGeom prst="rect">
             <a:avLst/>
@@ -13318,7 +13687,7 @@
         <p:spPr>
           <a:xfrm>
             <a:off x="4846320" y="2651760"/>
-            <a:ext cx="3931200" cy="593640"/>
+            <a:ext cx="3930480" cy="592920"/>
           </a:xfrm>
           <a:prstGeom prst="rect">
             <a:avLst/>
@@ -13379,7 +13748,7 @@
         <p:spPr>
           <a:xfrm>
             <a:off x="228600" y="3474720"/>
-            <a:ext cx="4205520" cy="1142280"/>
+            <a:ext cx="4204800" cy="1141560"/>
           </a:xfrm>
           <a:prstGeom prst="rect">
             <a:avLst/>
@@ -13422,7 +13791,7 @@
         <p:spPr>
           <a:xfrm>
             <a:off x="228600" y="3474720"/>
-            <a:ext cx="72360" cy="1142280"/>
+            <a:ext cx="71640" cy="1141560"/>
           </a:xfrm>
           <a:prstGeom prst="rect">
             <a:avLst/>
@@ -13441,7 +13810,7 @@
           <a:fontRef idx="minor"/>
         </p:style>
         <p:txBody>
-          <a:bodyPr lIns="36360" tIns="45000" rIns="36360" bIns="45000" anchor="t">
+          <a:bodyPr lIns="36000" tIns="45000" rIns="36000" bIns="45000" anchor="t">
             <a:noAutofit/>
           </a:bodyPr>
           <a:p>
@@ -13465,7 +13834,7 @@
         <p:spPr>
           <a:xfrm>
             <a:off x="411480" y="3547800"/>
-            <a:ext cx="3931200" cy="346680"/>
+            <a:ext cx="3930480" cy="345960"/>
           </a:xfrm>
           <a:prstGeom prst="rect">
             <a:avLst/>
@@ -13526,7 +13895,7 @@
         <p:spPr>
           <a:xfrm>
             <a:off x="411480" y="3931920"/>
-            <a:ext cx="3931200" cy="593640"/>
+            <a:ext cx="3930480" cy="592920"/>
           </a:xfrm>
           <a:prstGeom prst="rect">
             <a:avLst/>
@@ -13587,7 +13956,7 @@
         <p:spPr>
           <a:xfrm>
             <a:off x="4663440" y="3474720"/>
-            <a:ext cx="4205520" cy="1142280"/>
+            <a:ext cx="4204800" cy="1141560"/>
           </a:xfrm>
           <a:prstGeom prst="rect">
             <a:avLst/>
@@ -13630,7 +13999,7 @@
         <p:spPr>
           <a:xfrm>
             <a:off x="4663440" y="3474720"/>
-            <a:ext cx="72360" cy="1142280"/>
+            <a:ext cx="71640" cy="1141560"/>
           </a:xfrm>
           <a:prstGeom prst="rect">
             <a:avLst/>
@@ -13649,7 +14018,7 @@
           <a:fontRef idx="minor"/>
         </p:style>
         <p:txBody>
-          <a:bodyPr lIns="36360" tIns="45000" rIns="36360" bIns="45000" anchor="t">
+          <a:bodyPr lIns="36000" tIns="45000" rIns="36000" bIns="45000" anchor="t">
             <a:noAutofit/>
           </a:bodyPr>
           <a:p>
@@ -13673,7 +14042,7 @@
         <p:spPr>
           <a:xfrm>
             <a:off x="4846320" y="3547800"/>
-            <a:ext cx="3931200" cy="346680"/>
+            <a:ext cx="3930480" cy="345960"/>
           </a:xfrm>
           <a:prstGeom prst="rect">
             <a:avLst/>
@@ -13734,7 +14103,7 @@
         <p:spPr>
           <a:xfrm>
             <a:off x="4846320" y="3931920"/>
-            <a:ext cx="3931200" cy="593640"/>
+            <a:ext cx="3930480" cy="592920"/>
           </a:xfrm>
           <a:prstGeom prst="rect">
             <a:avLst/>
@@ -13832,7 +14201,7 @@
         <p:spPr>
           <a:xfrm>
             <a:off x="0" y="0"/>
-            <a:ext cx="9143280" cy="685080"/>
+            <a:ext cx="9142560" cy="684360"/>
           </a:xfrm>
           <a:prstGeom prst="rect">
             <a:avLst/>
@@ -13875,7 +14244,7 @@
         <p:spPr>
           <a:xfrm>
             <a:off x="274320" y="45720"/>
-            <a:ext cx="8594640" cy="593640"/>
+            <a:ext cx="8593920" cy="592920"/>
           </a:xfrm>
           <a:prstGeom prst="rect">
             <a:avLst/>
@@ -13936,7 +14305,7 @@
         <p:spPr>
           <a:xfrm>
             <a:off x="0" y="685800"/>
-            <a:ext cx="72360" cy="4457160"/>
+            <a:ext cx="71640" cy="4456440"/>
           </a:xfrm>
           <a:prstGeom prst="rect">
             <a:avLst/>
@@ -13955,7 +14324,7 @@
           <a:fontRef idx="minor"/>
         </p:style>
         <p:txBody>
-          <a:bodyPr lIns="36360" tIns="45000" rIns="36360" bIns="45000" anchor="t">
+          <a:bodyPr lIns="36000" tIns="45000" rIns="36000" bIns="45000" anchor="t">
             <a:noAutofit/>
           </a:bodyPr>
           <a:p>
@@ -14976,7 +15345,7 @@
         <p:spPr>
           <a:xfrm>
             <a:off x="0" y="0"/>
-            <a:ext cx="9143280" cy="685080"/>
+            <a:ext cx="9142560" cy="684360"/>
           </a:xfrm>
           <a:prstGeom prst="rect">
             <a:avLst/>
@@ -15019,7 +15388,7 @@
         <p:spPr>
           <a:xfrm>
             <a:off x="274320" y="45720"/>
-            <a:ext cx="8594640" cy="593640"/>
+            <a:ext cx="8593920" cy="592920"/>
           </a:xfrm>
           <a:prstGeom prst="rect">
             <a:avLst/>
@@ -15058,7 +15427,7 @@
                 <a:latin typeface="Calibri"/>
                 <a:ea typeface="Calibri"/>
               </a:rPr>
-              <a:t>Plan de la présentation</a:t>
+              <a:t>Sommaire</a:t>
             </a:r>
             <a:endParaRPr lang="fr-FR" sz="2200" b="0" u="none" strike="noStrike">
               <a:solidFill>
@@ -15080,7 +15449,7 @@
         <p:spPr>
           <a:xfrm>
             <a:off x="0" y="685800"/>
-            <a:ext cx="72360" cy="4457160"/>
+            <a:ext cx="71640" cy="4456440"/>
           </a:xfrm>
           <a:prstGeom prst="rect">
             <a:avLst/>
@@ -15099,7 +15468,7 @@
           <a:fontRef idx="minor"/>
         </p:style>
         <p:txBody>
-          <a:bodyPr lIns="36360" tIns="45000" rIns="36360" bIns="45000" anchor="t">
+          <a:bodyPr lIns="36000" tIns="45000" rIns="36000" bIns="45000" anchor="t">
             <a:noAutofit/>
           </a:bodyPr>
           <a:p>
@@ -15123,7 +15492,7 @@
         <p:spPr>
           <a:xfrm>
             <a:off x="320040" y="868680"/>
-            <a:ext cx="8503200" cy="4022640"/>
+            <a:ext cx="8502480" cy="4021920"/>
           </a:xfrm>
           <a:prstGeom prst="rect">
             <a:avLst/>
@@ -15447,7 +15816,77 @@
                 <a:latin typeface="Calibri"/>
                 <a:ea typeface="Calibri"/>
               </a:rPr>
-              <a:t>9.  Exercice</a:t>
+              <a:t>9. Les limites de Paxos</a:t>
+            </a:r>
+            <a:endParaRPr lang="fr-FR" sz="1600" b="0" u="none" strike="noStrike">
+              <a:solidFill>
+                <a:srgbClr val="000000"/>
+              </a:solidFill>
+              <a:effectLst/>
+              <a:uFillTx/>
+              <a:latin typeface="Arial"/>
+            </a:endParaRPr>
+          </a:p>
+          <a:p>
+            <a:pPr marL="343080" indent="-343080" defTabSz="914400">
+              <a:lnSpc>
+                <a:spcPct val="100000"/>
+              </a:lnSpc>
+              <a:spcAft>
+                <a:spcPts val="499"/>
+              </a:spcAft>
+              <a:buClr>
+                <a:srgbClr val="1A237E"/>
+              </a:buClr>
+              <a:buFont typeface="Symbol" charset="2"/>
+              <a:buChar char=""/>
+            </a:pPr>
+            <a:r>
+              <a:rPr lang="en-US" sz="1600" b="0" u="none" strike="noStrike">
+                <a:solidFill>
+                  <a:srgbClr val="1A237E"/>
+                </a:solidFill>
+                <a:effectLst/>
+                <a:uFillTx/>
+                <a:latin typeface="Calibri"/>
+                <a:ea typeface="Calibri"/>
+              </a:rPr>
+              <a:t>10.  Exercice</a:t>
+            </a:r>
+            <a:endParaRPr lang="fr-FR" sz="1600" b="0" u="none" strike="noStrike">
+              <a:solidFill>
+                <a:srgbClr val="000000"/>
+              </a:solidFill>
+              <a:effectLst/>
+              <a:uFillTx/>
+              <a:latin typeface="Arial"/>
+            </a:endParaRPr>
+          </a:p>
+          <a:p>
+            <a:pPr marL="343080" indent="-343080" defTabSz="914400">
+              <a:lnSpc>
+                <a:spcPct val="100000"/>
+              </a:lnSpc>
+              <a:spcAft>
+                <a:spcPts val="499"/>
+              </a:spcAft>
+              <a:buClr>
+                <a:srgbClr val="1A237E"/>
+              </a:buClr>
+              <a:buFont typeface="Symbol" charset="2"/>
+              <a:buChar char=""/>
+            </a:pPr>
+            <a:r>
+              <a:rPr lang="en-US" sz="1600" b="0" u="none" strike="noStrike">
+                <a:solidFill>
+                  <a:srgbClr val="1A237E"/>
+                </a:solidFill>
+                <a:effectLst/>
+                <a:uFillTx/>
+                <a:latin typeface="Calibri"/>
+                <a:ea typeface="Calibri"/>
+              </a:rPr>
+              <a:t>11. Paxos en une phrase</a:t>
             </a:r>
             <a:endParaRPr lang="fr-FR" sz="1600" b="0" u="none" strike="noStrike">
               <a:solidFill>
@@ -15506,7 +15945,7 @@
         <p:spPr>
           <a:xfrm>
             <a:off x="0" y="0"/>
-            <a:ext cx="9143280" cy="90720"/>
+            <a:ext cx="9142560" cy="90000"/>
           </a:xfrm>
           <a:prstGeom prst="rect">
             <a:avLst/>
@@ -15549,7 +15988,7 @@
         <p:spPr>
           <a:xfrm>
             <a:off x="0" y="5052240"/>
-            <a:ext cx="9143280" cy="90720"/>
+            <a:ext cx="9142560" cy="90000"/>
           </a:xfrm>
           <a:prstGeom prst="rect">
             <a:avLst/>
@@ -15592,7 +16031,7 @@
         <p:spPr>
           <a:xfrm>
             <a:off x="457200" y="1645920"/>
-            <a:ext cx="8228880" cy="1828080"/>
+            <a:ext cx="8228160" cy="1827360"/>
           </a:xfrm>
           <a:prstGeom prst="rect">
             <a:avLst/>
@@ -15690,7 +16129,7 @@
         <p:spPr>
           <a:xfrm>
             <a:off x="0" y="0"/>
-            <a:ext cx="9143280" cy="685080"/>
+            <a:ext cx="9142560" cy="684360"/>
           </a:xfrm>
           <a:prstGeom prst="rect">
             <a:avLst/>
@@ -15733,7 +16172,7 @@
         <p:spPr>
           <a:xfrm>
             <a:off x="274320" y="45720"/>
-            <a:ext cx="8594640" cy="593640"/>
+            <a:ext cx="8593920" cy="592920"/>
           </a:xfrm>
           <a:prstGeom prst="rect">
             <a:avLst/>
@@ -15794,7 +16233,7 @@
         <p:spPr>
           <a:xfrm>
             <a:off x="0" y="685800"/>
-            <a:ext cx="72360" cy="4457160"/>
+            <a:ext cx="71640" cy="4456440"/>
           </a:xfrm>
           <a:prstGeom prst="rect">
             <a:avLst/>
@@ -15813,7 +16252,7 @@
           <a:fontRef idx="minor"/>
         </p:style>
         <p:txBody>
-          <a:bodyPr lIns="36360" tIns="45000" rIns="36360" bIns="45000" anchor="t">
+          <a:bodyPr lIns="36000" tIns="45000" rIns="36000" bIns="45000" anchor="t">
             <a:noAutofit/>
           </a:bodyPr>
           <a:p>
@@ -17060,7 +17499,7 @@
         <p:spPr>
           <a:xfrm>
             <a:off x="274320" y="4663440"/>
-            <a:ext cx="8594640" cy="319320"/>
+            <a:ext cx="8593920" cy="318600"/>
           </a:xfrm>
           <a:prstGeom prst="rect">
             <a:avLst/>
@@ -17158,7 +17597,7 @@
         <p:spPr>
           <a:xfrm>
             <a:off x="0" y="0"/>
-            <a:ext cx="9143280" cy="90720"/>
+            <a:ext cx="9142560" cy="90000"/>
           </a:xfrm>
           <a:prstGeom prst="rect">
             <a:avLst/>
@@ -17201,7 +17640,7 @@
         <p:spPr>
           <a:xfrm>
             <a:off x="0" y="5052240"/>
-            <a:ext cx="9143280" cy="90720"/>
+            <a:ext cx="9142560" cy="90000"/>
           </a:xfrm>
           <a:prstGeom prst="rect">
             <a:avLst/>
@@ -17244,7 +17683,7 @@
         <p:spPr>
           <a:xfrm>
             <a:off x="457200" y="1645920"/>
-            <a:ext cx="8228880" cy="1828080"/>
+            <a:ext cx="8228160" cy="1827360"/>
           </a:xfrm>
           <a:prstGeom prst="rect">
             <a:avLst/>
@@ -17283,7 +17722,7 @@
                 <a:latin typeface="Calibri"/>
                 <a:ea typeface="Calibri"/>
               </a:rPr>
-              <a:t>9. Exercice</a:t>
+              <a:t>9. Les limites de Paxos</a:t>
             </a:r>
             <a:endParaRPr lang="fr-FR" sz="3600" b="0" u="none" strike="noStrike">
               <a:solidFill>
@@ -17335,14 +17774,14 @@
       </p:grpSpPr>
       <p:sp>
         <p:nvSpPr>
-          <p:cNvPr id="236" name="Shape 0"/>
+          <p:cNvPr id="236" name="Shape 26"/>
           <p:cNvSpPr/>
           <p:nvPr/>
         </p:nvSpPr>
         <p:spPr>
           <a:xfrm>
             <a:off x="0" y="0"/>
-            <a:ext cx="9143280" cy="685080"/>
+            <a:ext cx="9142560" cy="684360"/>
           </a:xfrm>
           <a:prstGeom prst="rect">
             <a:avLst/>
@@ -17378,14 +17817,1470 @@
       </p:sp>
       <p:sp>
         <p:nvSpPr>
-          <p:cNvPr id="237" name="Text 1"/>
+          <p:cNvPr id="237" name="Text 20"/>
           <p:cNvSpPr/>
           <p:nvPr/>
         </p:nvSpPr>
         <p:spPr>
           <a:xfrm>
             <a:off x="274320" y="45720"/>
-            <a:ext cx="8594640" cy="593640"/>
+            <a:ext cx="8593920" cy="592920"/>
+          </a:xfrm>
+          <a:prstGeom prst="rect">
+            <a:avLst/>
+          </a:prstGeom>
+          <a:noFill/>
+          <a:ln w="0">
+            <a:noFill/>
+          </a:ln>
+        </p:spPr>
+        <p:style>
+          <a:lnRef idx="0"/>
+          <a:fillRef idx="0"/>
+          <a:effectRef idx="0"/>
+          <a:fontRef idx="minor"/>
+        </p:style>
+        <p:txBody>
+          <a:bodyPr lIns="0" tIns="0" rIns="0" bIns="0" anchor="ctr">
+            <a:noAutofit/>
+          </a:bodyPr>
+          <a:p>
+            <a:pPr defTabSz="914400">
+              <a:lnSpc>
+                <a:spcPct val="100000"/>
+              </a:lnSpc>
+              <a:tabLst>
+                <a:tab pos="0" algn="l"/>
+              </a:tabLst>
+            </a:pPr>
+            <a:r>
+              <a:rPr lang="en-US" sz="2200" b="1" u="none" strike="noStrike">
+                <a:solidFill>
+                  <a:srgbClr val="FFFFFF"/>
+                </a:solidFill>
+                <a:effectLst/>
+                <a:uFillTx/>
+                <a:latin typeface="Calibri"/>
+                <a:ea typeface="Calibri"/>
+              </a:rPr>
+              <a:t>Limites de Paxos</a:t>
+            </a:r>
+            <a:endParaRPr lang="fr-FR" sz="2200" b="0" u="none" strike="noStrike">
+              <a:solidFill>
+                <a:srgbClr val="000000"/>
+              </a:solidFill>
+              <a:effectLst/>
+              <a:uFillTx/>
+              <a:latin typeface="Arial"/>
+            </a:endParaRPr>
+          </a:p>
+        </p:txBody>
+      </p:sp>
+      <p:sp>
+        <p:nvSpPr>
+          <p:cNvPr id="238" name="Shape 30"/>
+          <p:cNvSpPr/>
+          <p:nvPr/>
+        </p:nvSpPr>
+        <p:spPr>
+          <a:xfrm>
+            <a:off x="0" y="685800"/>
+            <a:ext cx="71640" cy="4456440"/>
+          </a:xfrm>
+          <a:prstGeom prst="rect">
+            <a:avLst/>
+          </a:prstGeom>
+          <a:solidFill>
+            <a:srgbClr val="FFC107"/>
+          </a:solidFill>
+          <a:ln w="0">
+            <a:noFill/>
+          </a:ln>
+        </p:spPr>
+        <p:style>
+          <a:lnRef idx="0"/>
+          <a:fillRef idx="0"/>
+          <a:effectRef idx="0"/>
+          <a:fontRef idx="minor"/>
+        </p:style>
+        <p:txBody>
+          <a:bodyPr lIns="36000" tIns="45000" rIns="36000" bIns="45000" anchor="t">
+            <a:noAutofit/>
+          </a:bodyPr>
+          <a:p>
+            <a:endParaRPr lang="fr-FR" sz="1800" b="0" u="none" strike="noStrike">
+              <a:solidFill>
+                <a:srgbClr val="000000"/>
+              </a:solidFill>
+              <a:effectLst/>
+              <a:uFillTx/>
+              <a:latin typeface="Arial"/>
+            </a:endParaRPr>
+          </a:p>
+        </p:txBody>
+      </p:sp>
+      <p:sp>
+        <p:nvSpPr>
+          <p:cNvPr id="239" name="Shape 34"/>
+          <p:cNvSpPr/>
+          <p:nvPr/>
+        </p:nvSpPr>
+        <p:spPr>
+          <a:xfrm>
+            <a:off x="228600" y="914400"/>
+            <a:ext cx="4204800" cy="1141560"/>
+          </a:xfrm>
+          <a:prstGeom prst="rect">
+            <a:avLst/>
+          </a:prstGeom>
+          <a:solidFill>
+            <a:srgbClr val="0D1B2A"/>
+          </a:solidFill>
+          <a:ln w="0">
+            <a:noFill/>
+          </a:ln>
+        </p:spPr>
+        <p:style>
+          <a:lnRef idx="0"/>
+          <a:fillRef idx="0"/>
+          <a:effectRef idx="0"/>
+          <a:fontRef idx="minor"/>
+        </p:style>
+        <p:txBody>
+          <a:bodyPr lIns="90000" tIns="45000" rIns="90000" bIns="45000" anchor="t">
+            <a:noAutofit/>
+          </a:bodyPr>
+          <a:p>
+            <a:endParaRPr lang="fr-FR" sz="1800" b="0" u="none" strike="noStrike">
+              <a:solidFill>
+                <a:srgbClr val="FFFFFF"/>
+              </a:solidFill>
+              <a:effectLst/>
+              <a:uFillTx/>
+              <a:latin typeface="Arial"/>
+            </a:endParaRPr>
+          </a:p>
+        </p:txBody>
+      </p:sp>
+      <p:sp>
+        <p:nvSpPr>
+          <p:cNvPr id="240" name="Shape 38"/>
+          <p:cNvSpPr/>
+          <p:nvPr/>
+        </p:nvSpPr>
+        <p:spPr>
+          <a:xfrm>
+            <a:off x="228600" y="914400"/>
+            <a:ext cx="71640" cy="1141560"/>
+          </a:xfrm>
+          <a:prstGeom prst="rect">
+            <a:avLst/>
+          </a:prstGeom>
+          <a:solidFill>
+            <a:srgbClr val="FFC107"/>
+          </a:solidFill>
+          <a:ln w="0">
+            <a:noFill/>
+          </a:ln>
+        </p:spPr>
+        <p:style>
+          <a:lnRef idx="0"/>
+          <a:fillRef idx="0"/>
+          <a:effectRef idx="0"/>
+          <a:fontRef idx="minor"/>
+        </p:style>
+        <p:txBody>
+          <a:bodyPr lIns="36000" tIns="45000" rIns="36000" bIns="45000" anchor="t">
+            <a:noAutofit/>
+          </a:bodyPr>
+          <a:p>
+            <a:endParaRPr lang="fr-FR" sz="1800" b="0" u="none" strike="noStrike">
+              <a:solidFill>
+                <a:srgbClr val="000000"/>
+              </a:solidFill>
+              <a:effectLst/>
+              <a:uFillTx/>
+              <a:latin typeface="Arial"/>
+            </a:endParaRPr>
+          </a:p>
+        </p:txBody>
+      </p:sp>
+      <p:sp>
+        <p:nvSpPr>
+          <p:cNvPr id="241" name="Text 23"/>
+          <p:cNvSpPr/>
+          <p:nvPr/>
+        </p:nvSpPr>
+        <p:spPr>
+          <a:xfrm>
+            <a:off x="411480" y="987480"/>
+            <a:ext cx="3930480" cy="345960"/>
+          </a:xfrm>
+          <a:prstGeom prst="rect">
+            <a:avLst/>
+          </a:prstGeom>
+          <a:noFill/>
+          <a:ln w="0">
+            <a:noFill/>
+          </a:ln>
+        </p:spPr>
+        <p:style>
+          <a:lnRef idx="0"/>
+          <a:fillRef idx="0"/>
+          <a:effectRef idx="0"/>
+          <a:fontRef idx="minor"/>
+        </p:style>
+        <p:txBody>
+          <a:bodyPr lIns="90000" tIns="45000" rIns="90000" bIns="45000" anchor="ctr">
+            <a:noAutofit/>
+          </a:bodyPr>
+          <a:p>
+            <a:pPr defTabSz="914400">
+              <a:lnSpc>
+                <a:spcPct val="100000"/>
+              </a:lnSpc>
+              <a:spcBef>
+                <a:spcPts val="1191"/>
+              </a:spcBef>
+              <a:spcAft>
+                <a:spcPts val="992"/>
+              </a:spcAft>
+              <a:tabLst>
+                <a:tab pos="0" algn="l"/>
+              </a:tabLst>
+            </a:pPr>
+            <a:r>
+              <a:rPr lang="en-US" sz="1500" b="1" u="none" strike="noStrike">
+                <a:solidFill>
+                  <a:srgbClr val="2196F3"/>
+                </a:solidFill>
+                <a:effectLst/>
+                <a:uFillTx/>
+                <a:latin typeface="Calibri"/>
+                <a:ea typeface="Calibri"/>
+              </a:rPr>
+              <a:t>Complexité d'implémentation élevée </a:t>
+            </a:r>
+            <a:endParaRPr lang="fr-FR" sz="1500" b="0" u="none" strike="noStrike">
+              <a:solidFill>
+                <a:srgbClr val="000000"/>
+              </a:solidFill>
+              <a:effectLst/>
+              <a:uFillTx/>
+              <a:latin typeface="Arial"/>
+            </a:endParaRPr>
+          </a:p>
+        </p:txBody>
+      </p:sp>
+      <p:sp>
+        <p:nvSpPr>
+          <p:cNvPr id="242" name="Text 24"/>
+          <p:cNvSpPr/>
+          <p:nvPr/>
+        </p:nvSpPr>
+        <p:spPr>
+          <a:xfrm>
+            <a:off x="411480" y="1371600"/>
+            <a:ext cx="3930480" cy="592920"/>
+          </a:xfrm>
+          <a:prstGeom prst="rect">
+            <a:avLst/>
+          </a:prstGeom>
+          <a:noFill/>
+          <a:ln w="0">
+            <a:noFill/>
+          </a:ln>
+        </p:spPr>
+        <p:style>
+          <a:lnRef idx="0"/>
+          <a:fillRef idx="0"/>
+          <a:effectRef idx="0"/>
+          <a:fontRef idx="minor"/>
+        </p:style>
+        <p:txBody>
+          <a:bodyPr lIns="90000" tIns="45000" rIns="90000" bIns="45000" anchor="ctr">
+            <a:noAutofit/>
+          </a:bodyPr>
+          <a:p>
+            <a:pPr defTabSz="914400">
+              <a:lnSpc>
+                <a:spcPct val="100000"/>
+              </a:lnSpc>
+              <a:spcBef>
+                <a:spcPts val="1191"/>
+              </a:spcBef>
+              <a:spcAft>
+                <a:spcPts val="992"/>
+              </a:spcAft>
+              <a:tabLst>
+                <a:tab pos="0" algn="l"/>
+              </a:tabLst>
+            </a:pPr>
+            <a:r>
+              <a:rPr lang="en-US" sz="1300" b="0" u="none" strike="noStrike">
+                <a:solidFill>
+                  <a:srgbClr val="FFFFFF"/>
+                </a:solidFill>
+                <a:effectLst/>
+                <a:uFillTx/>
+                <a:latin typeface="Calibri"/>
+                <a:ea typeface="Calibri"/>
+              </a:rPr>
+              <a:t>Même les experts font des erreurs </a:t>
+            </a:r>
+            <a:endParaRPr lang="fr-FR" sz="1300" b="0" u="none" strike="noStrike">
+              <a:solidFill>
+                <a:srgbClr val="000000"/>
+              </a:solidFill>
+              <a:effectLst/>
+              <a:uFillTx/>
+              <a:latin typeface="Arial"/>
+            </a:endParaRPr>
+          </a:p>
+        </p:txBody>
+      </p:sp>
+      <p:sp>
+        <p:nvSpPr>
+          <p:cNvPr id="243" name="Shape 42"/>
+          <p:cNvSpPr/>
+          <p:nvPr/>
+        </p:nvSpPr>
+        <p:spPr>
+          <a:xfrm>
+            <a:off x="4663440" y="914400"/>
+            <a:ext cx="4204800" cy="1141560"/>
+          </a:xfrm>
+          <a:prstGeom prst="rect">
+            <a:avLst/>
+          </a:prstGeom>
+          <a:solidFill>
+            <a:srgbClr val="0D1B2A"/>
+          </a:solidFill>
+          <a:ln w="0">
+            <a:noFill/>
+          </a:ln>
+        </p:spPr>
+        <p:style>
+          <a:lnRef idx="0"/>
+          <a:fillRef idx="0"/>
+          <a:effectRef idx="0"/>
+          <a:fontRef idx="minor"/>
+        </p:style>
+        <p:txBody>
+          <a:bodyPr lIns="90000" tIns="45000" rIns="90000" bIns="45000" anchor="t">
+            <a:noAutofit/>
+          </a:bodyPr>
+          <a:p>
+            <a:endParaRPr lang="fr-FR" sz="1800" b="0" u="none" strike="noStrike">
+              <a:solidFill>
+                <a:srgbClr val="FFFFFF"/>
+              </a:solidFill>
+              <a:effectLst/>
+              <a:uFillTx/>
+              <a:latin typeface="Arial"/>
+            </a:endParaRPr>
+          </a:p>
+        </p:txBody>
+      </p:sp>
+      <p:sp>
+        <p:nvSpPr>
+          <p:cNvPr id="244" name="Shape 43"/>
+          <p:cNvSpPr/>
+          <p:nvPr/>
+        </p:nvSpPr>
+        <p:spPr>
+          <a:xfrm>
+            <a:off x="4663440" y="914400"/>
+            <a:ext cx="71640" cy="1141560"/>
+          </a:xfrm>
+          <a:prstGeom prst="rect">
+            <a:avLst/>
+          </a:prstGeom>
+          <a:solidFill>
+            <a:srgbClr val="FFC107"/>
+          </a:solidFill>
+          <a:ln w="0">
+            <a:noFill/>
+          </a:ln>
+        </p:spPr>
+        <p:style>
+          <a:lnRef idx="0"/>
+          <a:fillRef idx="0"/>
+          <a:effectRef idx="0"/>
+          <a:fontRef idx="minor"/>
+        </p:style>
+        <p:txBody>
+          <a:bodyPr lIns="36000" tIns="45000" rIns="36000" bIns="45000" anchor="t">
+            <a:noAutofit/>
+          </a:bodyPr>
+          <a:p>
+            <a:endParaRPr lang="fr-FR" sz="1800" b="0" u="none" strike="noStrike">
+              <a:solidFill>
+                <a:srgbClr val="000000"/>
+              </a:solidFill>
+              <a:effectLst/>
+              <a:uFillTx/>
+              <a:latin typeface="Arial"/>
+            </a:endParaRPr>
+          </a:p>
+        </p:txBody>
+      </p:sp>
+      <p:sp>
+        <p:nvSpPr>
+          <p:cNvPr id="245" name="Text 27"/>
+          <p:cNvSpPr/>
+          <p:nvPr/>
+        </p:nvSpPr>
+        <p:spPr>
+          <a:xfrm>
+            <a:off x="4846320" y="987480"/>
+            <a:ext cx="3930480" cy="345960"/>
+          </a:xfrm>
+          <a:prstGeom prst="rect">
+            <a:avLst/>
+          </a:prstGeom>
+          <a:noFill/>
+          <a:ln w="0">
+            <a:noFill/>
+          </a:ln>
+        </p:spPr>
+        <p:style>
+          <a:lnRef idx="0"/>
+          <a:fillRef idx="0"/>
+          <a:effectRef idx="0"/>
+          <a:fontRef idx="minor"/>
+        </p:style>
+        <p:txBody>
+          <a:bodyPr lIns="90000" tIns="45000" rIns="90000" bIns="45000" anchor="ctr">
+            <a:noAutofit/>
+          </a:bodyPr>
+          <a:p>
+            <a:pPr defTabSz="914400">
+              <a:lnSpc>
+                <a:spcPct val="100000"/>
+              </a:lnSpc>
+              <a:spcBef>
+                <a:spcPts val="1191"/>
+              </a:spcBef>
+              <a:spcAft>
+                <a:spcPts val="992"/>
+              </a:spcAft>
+              <a:tabLst>
+                <a:tab pos="0" algn="l"/>
+              </a:tabLst>
+            </a:pPr>
+            <a:r>
+              <a:rPr lang="en-US" sz="1500" b="1" u="none" strike="noStrike">
+                <a:solidFill>
+                  <a:srgbClr val="2196F3"/>
+                </a:solidFill>
+                <a:effectLst/>
+                <a:uFillTx/>
+                <a:latin typeface="Calibri"/>
+                <a:ea typeface="Calibri"/>
+              </a:rPr>
+              <a:t>Livelock possible </a:t>
+            </a:r>
+            <a:endParaRPr lang="fr-FR" sz="1500" b="0" u="none" strike="noStrike">
+              <a:solidFill>
+                <a:srgbClr val="000000"/>
+              </a:solidFill>
+              <a:effectLst/>
+              <a:uFillTx/>
+              <a:latin typeface="Arial"/>
+            </a:endParaRPr>
+          </a:p>
+        </p:txBody>
+      </p:sp>
+      <p:sp>
+        <p:nvSpPr>
+          <p:cNvPr id="246" name="Text 28"/>
+          <p:cNvSpPr/>
+          <p:nvPr/>
+        </p:nvSpPr>
+        <p:spPr>
+          <a:xfrm>
+            <a:off x="4846320" y="1371600"/>
+            <a:ext cx="3930480" cy="592920"/>
+          </a:xfrm>
+          <a:prstGeom prst="rect">
+            <a:avLst/>
+          </a:prstGeom>
+          <a:noFill/>
+          <a:ln w="0">
+            <a:noFill/>
+          </a:ln>
+        </p:spPr>
+        <p:style>
+          <a:lnRef idx="0"/>
+          <a:fillRef idx="0"/>
+          <a:effectRef idx="0"/>
+          <a:fontRef idx="minor"/>
+        </p:style>
+        <p:txBody>
+          <a:bodyPr lIns="90000" tIns="45000" rIns="90000" bIns="45000" anchor="ctr">
+            <a:noAutofit/>
+          </a:bodyPr>
+          <a:p>
+            <a:pPr defTabSz="914400">
+              <a:lnSpc>
+                <a:spcPct val="100000"/>
+              </a:lnSpc>
+              <a:spcBef>
+                <a:spcPts val="1191"/>
+              </a:spcBef>
+              <a:spcAft>
+                <a:spcPts val="992"/>
+              </a:spcAft>
+              <a:tabLst>
+                <a:tab pos="0" algn="l"/>
+              </a:tabLst>
+            </a:pPr>
+            <a:r>
+              <a:rPr lang="en-US" sz="1300" b="0" u="none" strike="noStrike">
+                <a:solidFill>
+                  <a:srgbClr val="FFFFFF"/>
+                </a:solidFill>
+                <a:effectLst/>
+                <a:uFillTx/>
+                <a:latin typeface="Calibri"/>
+                <a:ea typeface="Calibri"/>
+              </a:rPr>
+              <a:t>En cas de compétition entre proposers </a:t>
+            </a:r>
+            <a:endParaRPr lang="fr-FR" sz="1300" b="0" u="none" strike="noStrike">
+              <a:solidFill>
+                <a:srgbClr val="000000"/>
+              </a:solidFill>
+              <a:effectLst/>
+              <a:uFillTx/>
+              <a:latin typeface="Arial"/>
+            </a:endParaRPr>
+          </a:p>
+        </p:txBody>
+      </p:sp>
+      <p:sp>
+        <p:nvSpPr>
+          <p:cNvPr id="247" name="Shape 47"/>
+          <p:cNvSpPr/>
+          <p:nvPr/>
+        </p:nvSpPr>
+        <p:spPr>
+          <a:xfrm>
+            <a:off x="228600" y="2194560"/>
+            <a:ext cx="4204800" cy="1141560"/>
+          </a:xfrm>
+          <a:prstGeom prst="rect">
+            <a:avLst/>
+          </a:prstGeom>
+          <a:solidFill>
+            <a:srgbClr val="0D1B2A"/>
+          </a:solidFill>
+          <a:ln w="0">
+            <a:noFill/>
+          </a:ln>
+        </p:spPr>
+        <p:style>
+          <a:lnRef idx="0"/>
+          <a:fillRef idx="0"/>
+          <a:effectRef idx="0"/>
+          <a:fontRef idx="minor"/>
+        </p:style>
+        <p:txBody>
+          <a:bodyPr lIns="90000" tIns="45000" rIns="90000" bIns="45000" anchor="t">
+            <a:noAutofit/>
+          </a:bodyPr>
+          <a:p>
+            <a:endParaRPr lang="fr-FR" sz="1800" b="0" u="none" strike="noStrike">
+              <a:solidFill>
+                <a:srgbClr val="FFFFFF"/>
+              </a:solidFill>
+              <a:effectLst/>
+              <a:uFillTx/>
+              <a:latin typeface="Arial"/>
+            </a:endParaRPr>
+          </a:p>
+        </p:txBody>
+      </p:sp>
+      <p:sp>
+        <p:nvSpPr>
+          <p:cNvPr id="248" name="Shape 51"/>
+          <p:cNvSpPr/>
+          <p:nvPr/>
+        </p:nvSpPr>
+        <p:spPr>
+          <a:xfrm>
+            <a:off x="228600" y="2194560"/>
+            <a:ext cx="71640" cy="1141560"/>
+          </a:xfrm>
+          <a:prstGeom prst="rect">
+            <a:avLst/>
+          </a:prstGeom>
+          <a:solidFill>
+            <a:srgbClr val="FFC107"/>
+          </a:solidFill>
+          <a:ln w="0">
+            <a:noFill/>
+          </a:ln>
+        </p:spPr>
+        <p:style>
+          <a:lnRef idx="0"/>
+          <a:fillRef idx="0"/>
+          <a:effectRef idx="0"/>
+          <a:fontRef idx="minor"/>
+        </p:style>
+        <p:txBody>
+          <a:bodyPr lIns="36000" tIns="45000" rIns="36000" bIns="45000" anchor="t">
+            <a:noAutofit/>
+          </a:bodyPr>
+          <a:p>
+            <a:endParaRPr lang="fr-FR" sz="1800" b="0" u="none" strike="noStrike">
+              <a:solidFill>
+                <a:srgbClr val="000000"/>
+              </a:solidFill>
+              <a:effectLst/>
+              <a:uFillTx/>
+              <a:latin typeface="Arial"/>
+            </a:endParaRPr>
+          </a:p>
+        </p:txBody>
+      </p:sp>
+      <p:sp>
+        <p:nvSpPr>
+          <p:cNvPr id="249" name="Text 29"/>
+          <p:cNvSpPr/>
+          <p:nvPr/>
+        </p:nvSpPr>
+        <p:spPr>
+          <a:xfrm>
+            <a:off x="411480" y="2267640"/>
+            <a:ext cx="3930480" cy="345960"/>
+          </a:xfrm>
+          <a:prstGeom prst="rect">
+            <a:avLst/>
+          </a:prstGeom>
+          <a:noFill/>
+          <a:ln w="0">
+            <a:noFill/>
+          </a:ln>
+        </p:spPr>
+        <p:style>
+          <a:lnRef idx="0"/>
+          <a:fillRef idx="0"/>
+          <a:effectRef idx="0"/>
+          <a:fontRef idx="minor"/>
+        </p:style>
+        <p:txBody>
+          <a:bodyPr lIns="90000" tIns="45000" rIns="90000" bIns="45000" anchor="ctr">
+            <a:noAutofit/>
+          </a:bodyPr>
+          <a:p>
+            <a:pPr defTabSz="914400">
+              <a:lnSpc>
+                <a:spcPct val="100000"/>
+              </a:lnSpc>
+              <a:tabLst>
+                <a:tab pos="0" algn="l"/>
+              </a:tabLst>
+            </a:pPr>
+            <a:r>
+              <a:rPr lang="en-US" sz="1500" b="1" u="none" strike="noStrike">
+                <a:solidFill>
+                  <a:srgbClr val="2196F3"/>
+                </a:solidFill>
+                <a:effectLst/>
+                <a:uFillTx/>
+                <a:latin typeface="Calibri"/>
+                <a:ea typeface="Calibri"/>
+              </a:rPr>
+              <a:t>Ne gère pas les fautes byzantines</a:t>
+            </a:r>
+            <a:endParaRPr lang="fr-FR" sz="1500" b="0" u="none" strike="noStrike">
+              <a:solidFill>
+                <a:srgbClr val="000000"/>
+              </a:solidFill>
+              <a:effectLst/>
+              <a:uFillTx/>
+              <a:latin typeface="Arial"/>
+            </a:endParaRPr>
+          </a:p>
+        </p:txBody>
+      </p:sp>
+      <p:sp>
+        <p:nvSpPr>
+          <p:cNvPr id="250" name="Text 31"/>
+          <p:cNvSpPr/>
+          <p:nvPr/>
+        </p:nvSpPr>
+        <p:spPr>
+          <a:xfrm>
+            <a:off x="411480" y="2651760"/>
+            <a:ext cx="3930480" cy="592920"/>
+          </a:xfrm>
+          <a:prstGeom prst="rect">
+            <a:avLst/>
+          </a:prstGeom>
+          <a:noFill/>
+          <a:ln w="0">
+            <a:noFill/>
+          </a:ln>
+        </p:spPr>
+        <p:style>
+          <a:lnRef idx="0"/>
+          <a:fillRef idx="0"/>
+          <a:effectRef idx="0"/>
+          <a:fontRef idx="minor"/>
+        </p:style>
+        <p:txBody>
+          <a:bodyPr lIns="90000" tIns="45000" rIns="90000" bIns="45000" anchor="ctr">
+            <a:noAutofit/>
+          </a:bodyPr>
+          <a:p>
+            <a:pPr defTabSz="914400">
+              <a:lnSpc>
+                <a:spcPct val="100000"/>
+              </a:lnSpc>
+              <a:tabLst>
+                <a:tab pos="0" algn="l"/>
+              </a:tabLst>
+            </a:pPr>
+            <a:r>
+              <a:rPr lang="en-US" sz="1300" b="0" u="none" strike="noStrike">
+                <a:solidFill>
+                  <a:srgbClr val="FFFFFF"/>
+                </a:solidFill>
+                <a:effectLst/>
+                <a:uFillTx/>
+                <a:latin typeface="Calibri"/>
+                <a:ea typeface="Calibri"/>
+              </a:rPr>
+              <a:t>Dans la version classique</a:t>
+            </a:r>
+            <a:endParaRPr lang="fr-FR" sz="1300" b="0" u="none" strike="noStrike">
+              <a:solidFill>
+                <a:srgbClr val="000000"/>
+              </a:solidFill>
+              <a:effectLst/>
+              <a:uFillTx/>
+              <a:latin typeface="Arial"/>
+            </a:endParaRPr>
+          </a:p>
+        </p:txBody>
+      </p:sp>
+      <p:sp>
+        <p:nvSpPr>
+          <p:cNvPr id="251" name="Shape 55"/>
+          <p:cNvSpPr/>
+          <p:nvPr/>
+        </p:nvSpPr>
+        <p:spPr>
+          <a:xfrm>
+            <a:off x="4663440" y="2194560"/>
+            <a:ext cx="4204800" cy="1141560"/>
+          </a:xfrm>
+          <a:prstGeom prst="rect">
+            <a:avLst/>
+          </a:prstGeom>
+          <a:solidFill>
+            <a:srgbClr val="0D1B2A"/>
+          </a:solidFill>
+          <a:ln w="0">
+            <a:noFill/>
+          </a:ln>
+        </p:spPr>
+        <p:style>
+          <a:lnRef idx="0"/>
+          <a:fillRef idx="0"/>
+          <a:effectRef idx="0"/>
+          <a:fontRef idx="minor"/>
+        </p:style>
+        <p:txBody>
+          <a:bodyPr lIns="90000" tIns="45000" rIns="90000" bIns="45000" anchor="t">
+            <a:noAutofit/>
+          </a:bodyPr>
+          <a:p>
+            <a:endParaRPr lang="fr-FR" sz="1800" b="0" u="none" strike="noStrike">
+              <a:solidFill>
+                <a:srgbClr val="FFFFFF"/>
+              </a:solidFill>
+              <a:effectLst/>
+              <a:uFillTx/>
+              <a:latin typeface="Arial"/>
+            </a:endParaRPr>
+          </a:p>
+        </p:txBody>
+      </p:sp>
+      <p:sp>
+        <p:nvSpPr>
+          <p:cNvPr id="252" name="Shape 56"/>
+          <p:cNvSpPr/>
+          <p:nvPr/>
+        </p:nvSpPr>
+        <p:spPr>
+          <a:xfrm>
+            <a:off x="4663440" y="2194560"/>
+            <a:ext cx="71640" cy="1141560"/>
+          </a:xfrm>
+          <a:prstGeom prst="rect">
+            <a:avLst/>
+          </a:prstGeom>
+          <a:solidFill>
+            <a:srgbClr val="FFC107"/>
+          </a:solidFill>
+          <a:ln w="0">
+            <a:noFill/>
+          </a:ln>
+        </p:spPr>
+        <p:style>
+          <a:lnRef idx="0"/>
+          <a:fillRef idx="0"/>
+          <a:effectRef idx="0"/>
+          <a:fontRef idx="minor"/>
+        </p:style>
+        <p:txBody>
+          <a:bodyPr lIns="36000" tIns="45000" rIns="36000" bIns="45000" anchor="t">
+            <a:noAutofit/>
+          </a:bodyPr>
+          <a:p>
+            <a:endParaRPr lang="fr-FR" sz="1800" b="0" u="none" strike="noStrike">
+              <a:solidFill>
+                <a:srgbClr val="000000"/>
+              </a:solidFill>
+              <a:effectLst/>
+              <a:uFillTx/>
+              <a:latin typeface="Arial"/>
+            </a:endParaRPr>
+          </a:p>
+        </p:txBody>
+      </p:sp>
+      <p:sp>
+        <p:nvSpPr>
+          <p:cNvPr id="253" name="Text 32"/>
+          <p:cNvSpPr/>
+          <p:nvPr/>
+        </p:nvSpPr>
+        <p:spPr>
+          <a:xfrm>
+            <a:off x="4846320" y="2267640"/>
+            <a:ext cx="3930480" cy="345960"/>
+          </a:xfrm>
+          <a:prstGeom prst="rect">
+            <a:avLst/>
+          </a:prstGeom>
+          <a:noFill/>
+          <a:ln w="0">
+            <a:noFill/>
+          </a:ln>
+        </p:spPr>
+        <p:style>
+          <a:lnRef idx="0"/>
+          <a:fillRef idx="0"/>
+          <a:effectRef idx="0"/>
+          <a:fontRef idx="minor"/>
+        </p:style>
+        <p:txBody>
+          <a:bodyPr lIns="90000" tIns="45000" rIns="90000" bIns="45000" anchor="ctr">
+            <a:noAutofit/>
+          </a:bodyPr>
+          <a:p>
+            <a:pPr defTabSz="914400">
+              <a:lnSpc>
+                <a:spcPct val="100000"/>
+              </a:lnSpc>
+              <a:spcBef>
+                <a:spcPts val="1191"/>
+              </a:spcBef>
+              <a:spcAft>
+                <a:spcPts val="992"/>
+              </a:spcAft>
+              <a:tabLst>
+                <a:tab pos="0" algn="l"/>
+              </a:tabLst>
+            </a:pPr>
+            <a:r>
+              <a:rPr lang="en-US" sz="1500" b="1" u="none" strike="noStrike">
+                <a:solidFill>
+                  <a:srgbClr val="2196F3"/>
+                </a:solidFill>
+                <a:effectLst/>
+                <a:uFillTx/>
+                <a:latin typeface="Calibri"/>
+                <a:ea typeface="Calibri"/>
+              </a:rPr>
+              <a:t>Pas de gestion native du log</a:t>
+            </a:r>
+            <a:endParaRPr lang="fr-FR" sz="1500" b="0" u="none" strike="noStrike">
+              <a:solidFill>
+                <a:srgbClr val="000000"/>
+              </a:solidFill>
+              <a:effectLst/>
+              <a:uFillTx/>
+              <a:latin typeface="Arial"/>
+            </a:endParaRPr>
+          </a:p>
+        </p:txBody>
+      </p:sp>
+      <p:sp>
+        <p:nvSpPr>
+          <p:cNvPr id="254" name="Text 33"/>
+          <p:cNvSpPr/>
+          <p:nvPr/>
+        </p:nvSpPr>
+        <p:spPr>
+          <a:xfrm>
+            <a:off x="4846320" y="2651760"/>
+            <a:ext cx="3930480" cy="592920"/>
+          </a:xfrm>
+          <a:prstGeom prst="rect">
+            <a:avLst/>
+          </a:prstGeom>
+          <a:noFill/>
+          <a:ln w="0">
+            <a:noFill/>
+          </a:ln>
+        </p:spPr>
+        <p:style>
+          <a:lnRef idx="0"/>
+          <a:fillRef idx="0"/>
+          <a:effectRef idx="0"/>
+          <a:fontRef idx="minor"/>
+        </p:style>
+        <p:txBody>
+          <a:bodyPr lIns="90000" tIns="45000" rIns="90000" bIns="45000" anchor="ctr">
+            <a:noAutofit/>
+          </a:bodyPr>
+          <a:p>
+            <a:pPr defTabSz="914400">
+              <a:lnSpc>
+                <a:spcPct val="100000"/>
+              </a:lnSpc>
+              <a:spcBef>
+                <a:spcPts val="1191"/>
+              </a:spcBef>
+              <a:spcAft>
+                <a:spcPts val="992"/>
+              </a:spcAft>
+              <a:tabLst>
+                <a:tab pos="0" algn="l"/>
+              </a:tabLst>
+            </a:pPr>
+            <a:r>
+              <a:rPr lang="en-US" sz="1300" b="0" u="none" strike="noStrike">
+                <a:solidFill>
+                  <a:srgbClr val="FFFFFF"/>
+                </a:solidFill>
+                <a:effectLst/>
+                <a:uFillTx/>
+                <a:latin typeface="Calibri"/>
+                <a:ea typeface="Calibri"/>
+              </a:rPr>
+              <a:t>Nécessite Multi-Paxos</a:t>
+            </a:r>
+            <a:endParaRPr lang="fr-FR" sz="1300" b="0" u="none" strike="noStrike">
+              <a:solidFill>
+                <a:srgbClr val="000000"/>
+              </a:solidFill>
+              <a:effectLst/>
+              <a:uFillTx/>
+              <a:latin typeface="Arial"/>
+            </a:endParaRPr>
+          </a:p>
+        </p:txBody>
+      </p:sp>
+      <p:sp>
+        <p:nvSpPr>
+          <p:cNvPr id="255" name="Shape 60"/>
+          <p:cNvSpPr/>
+          <p:nvPr/>
+        </p:nvSpPr>
+        <p:spPr>
+          <a:xfrm>
+            <a:off x="228600" y="3474720"/>
+            <a:ext cx="8591400" cy="1141560"/>
+          </a:xfrm>
+          <a:prstGeom prst="rect">
+            <a:avLst/>
+          </a:prstGeom>
+          <a:solidFill>
+            <a:srgbClr val="0D1B2A"/>
+          </a:solidFill>
+          <a:ln w="0">
+            <a:noFill/>
+          </a:ln>
+        </p:spPr>
+        <p:style>
+          <a:lnRef idx="0"/>
+          <a:fillRef idx="0"/>
+          <a:effectRef idx="0"/>
+          <a:fontRef idx="minor"/>
+        </p:style>
+        <p:txBody>
+          <a:bodyPr lIns="90000" tIns="45000" rIns="90000" bIns="45000" anchor="t">
+            <a:noAutofit/>
+          </a:bodyPr>
+          <a:p>
+            <a:endParaRPr lang="fr-FR" sz="1800" b="0" u="none" strike="noStrike">
+              <a:solidFill>
+                <a:srgbClr val="FFFFFF"/>
+              </a:solidFill>
+              <a:effectLst/>
+              <a:uFillTx/>
+              <a:latin typeface="Arial"/>
+            </a:endParaRPr>
+          </a:p>
+        </p:txBody>
+      </p:sp>
+      <p:sp>
+        <p:nvSpPr>
+          <p:cNvPr id="256" name="Shape 64"/>
+          <p:cNvSpPr/>
+          <p:nvPr/>
+        </p:nvSpPr>
+        <p:spPr>
+          <a:xfrm>
+            <a:off x="228600" y="3474720"/>
+            <a:ext cx="71640" cy="1141560"/>
+          </a:xfrm>
+          <a:prstGeom prst="rect">
+            <a:avLst/>
+          </a:prstGeom>
+          <a:solidFill>
+            <a:srgbClr val="FFC107"/>
+          </a:solidFill>
+          <a:ln w="0">
+            <a:noFill/>
+          </a:ln>
+        </p:spPr>
+        <p:style>
+          <a:lnRef idx="0"/>
+          <a:fillRef idx="0"/>
+          <a:effectRef idx="0"/>
+          <a:fontRef idx="minor"/>
+        </p:style>
+        <p:txBody>
+          <a:bodyPr lIns="36000" tIns="45000" rIns="36000" bIns="45000" anchor="t">
+            <a:noAutofit/>
+          </a:bodyPr>
+          <a:p>
+            <a:endParaRPr lang="fr-FR" sz="1800" b="0" u="none" strike="noStrike">
+              <a:solidFill>
+                <a:srgbClr val="000000"/>
+              </a:solidFill>
+              <a:effectLst/>
+              <a:uFillTx/>
+              <a:latin typeface="Arial"/>
+            </a:endParaRPr>
+          </a:p>
+        </p:txBody>
+      </p:sp>
+      <p:sp>
+        <p:nvSpPr>
+          <p:cNvPr id="257" name="Text 35"/>
+          <p:cNvSpPr/>
+          <p:nvPr/>
+        </p:nvSpPr>
+        <p:spPr>
+          <a:xfrm>
+            <a:off x="411480" y="3547800"/>
+            <a:ext cx="8228520" cy="345960"/>
+          </a:xfrm>
+          <a:prstGeom prst="rect">
+            <a:avLst/>
+          </a:prstGeom>
+          <a:noFill/>
+          <a:ln w="0">
+            <a:noFill/>
+          </a:ln>
+        </p:spPr>
+        <p:style>
+          <a:lnRef idx="0"/>
+          <a:fillRef idx="0"/>
+          <a:effectRef idx="0"/>
+          <a:fontRef idx="minor"/>
+        </p:style>
+        <p:txBody>
+          <a:bodyPr lIns="90000" tIns="45000" rIns="90000" bIns="45000" anchor="ctr">
+            <a:noAutofit/>
+          </a:bodyPr>
+          <a:p>
+            <a:pPr defTabSz="914400">
+              <a:lnSpc>
+                <a:spcPct val="100000"/>
+              </a:lnSpc>
+              <a:spcBef>
+                <a:spcPts val="1191"/>
+              </a:spcBef>
+              <a:spcAft>
+                <a:spcPts val="992"/>
+              </a:spcAft>
+              <a:tabLst>
+                <a:tab pos="0" algn="l"/>
+              </a:tabLst>
+            </a:pPr>
+            <a:r>
+              <a:rPr lang="en-US" sz="1500" b="1" u="none" strike="noStrike">
+                <a:solidFill>
+                  <a:srgbClr val="2196F3"/>
+                </a:solidFill>
+                <a:effectLst/>
+                <a:uFillTx/>
+                <a:latin typeface="Calibri"/>
+                <a:ea typeface="Calibri"/>
+              </a:rPr>
+              <a:t>Pas supporté nativement par les navigateurs web </a:t>
+            </a:r>
+            <a:endParaRPr lang="fr-FR" sz="1500" b="0" u="none" strike="noStrike">
+              <a:solidFill>
+                <a:srgbClr val="000000"/>
+              </a:solidFill>
+              <a:effectLst/>
+              <a:uFillTx/>
+              <a:latin typeface="Arial"/>
+            </a:endParaRPr>
+          </a:p>
+        </p:txBody>
+      </p:sp>
+      <p:sp>
+        <p:nvSpPr>
+          <p:cNvPr id="258" name="Text 36"/>
+          <p:cNvSpPr/>
+          <p:nvPr/>
+        </p:nvSpPr>
+        <p:spPr>
+          <a:xfrm>
+            <a:off x="411480" y="3931920"/>
+            <a:ext cx="3930480" cy="592920"/>
+          </a:xfrm>
+          <a:prstGeom prst="rect">
+            <a:avLst/>
+          </a:prstGeom>
+          <a:noFill/>
+          <a:ln w="0">
+            <a:noFill/>
+          </a:ln>
+        </p:spPr>
+        <p:style>
+          <a:lnRef idx="0"/>
+          <a:fillRef idx="0"/>
+          <a:effectRef idx="0"/>
+          <a:fontRef idx="minor"/>
+        </p:style>
+        <p:txBody>
+          <a:bodyPr lIns="90000" tIns="45000" rIns="90000" bIns="45000" anchor="ctr">
+            <a:noAutofit/>
+          </a:bodyPr>
+          <a:p>
+            <a:pPr defTabSz="914400">
+              <a:lnSpc>
+                <a:spcPct val="100000"/>
+              </a:lnSpc>
+              <a:spcBef>
+                <a:spcPts val="1191"/>
+              </a:spcBef>
+              <a:spcAft>
+                <a:spcPts val="992"/>
+              </a:spcAft>
+              <a:tabLst>
+                <a:tab pos="0" algn="l"/>
+              </a:tabLst>
+            </a:pPr>
+            <a:r>
+              <a:rPr lang="en-US" sz="1300" b="0" u="none" strike="noStrike">
+                <a:solidFill>
+                  <a:srgbClr val="FFFFFF"/>
+                </a:solidFill>
+                <a:effectLst/>
+                <a:uFillTx/>
+                <a:latin typeface="Calibri"/>
+                <a:ea typeface="Calibri"/>
+              </a:rPr>
+              <a:t>Ni facilement traversable via NAT </a:t>
+            </a:r>
+            <a:endParaRPr lang="fr-FR" sz="1300" b="0" u="none" strike="noStrike">
+              <a:solidFill>
+                <a:srgbClr val="000000"/>
+              </a:solidFill>
+              <a:effectLst/>
+              <a:uFillTx/>
+              <a:latin typeface="Arial"/>
+            </a:endParaRPr>
+          </a:p>
+        </p:txBody>
+      </p:sp>
+    </p:spTree>
+  </p:cSld>
+  <mc:AlternateContent>
+    <mc:Choice Requires="p14">
+      <p:transition spd="slow" p14:dur="2000"/>
+    </mc:Choice>
+    <mc:Fallback>
+      <p:transition spd="slow"/>
+    </mc:Fallback>
+  </mc:AlternateContent>
+</p:sld>
+</file>
+
+<file path=ppt/slides/slide24.xml><?xml version="1.0" encoding="utf-8"?>
+<p:sld xmlns:a="http://schemas.openxmlformats.org/drawingml/2006/main" xmlns:p="http://schemas.openxmlformats.org/presentationml/2006/main" xmlns:r="http://schemas.openxmlformats.org/officeDocument/2006/relationships" xmlns:p14="http://schemas.microsoft.com/office/powerpoint/2010/main" xmlns:p15="http://schemas.microsoft.com/office/powerpoint/2012/main" xmlns:mc="http://schemas.openxmlformats.org/markup-compatibility/2006">
+  <p:cSld>
+    <p:bg>
+      <p:bgPr>
+        <a:solidFill>
+          <a:srgbClr val="1565C0"/>
+        </a:solidFill>
+      </p:bgPr>
+    </p:bg>
+    <p:spTree>
+      <p:nvGrpSpPr>
+        <p:cNvPr id="1" name=""/>
+        <p:cNvGrpSpPr/>
+        <p:nvPr/>
+      </p:nvGrpSpPr>
+      <p:grpSpPr>
+        <a:xfrm>
+          <a:off x="0" y="0"/>
+          <a:ext cx="0" cy="0"/>
+          <a:chOff x="0" y="0"/>
+          <a:chExt cx="0" cy="0"/>
+        </a:xfrm>
+      </p:grpSpPr>
+      <p:sp>
+        <p:nvSpPr>
+          <p:cNvPr id="259" name="Shape 18"/>
+          <p:cNvSpPr/>
+          <p:nvPr/>
+        </p:nvSpPr>
+        <p:spPr>
+          <a:xfrm>
+            <a:off x="0" y="0"/>
+            <a:ext cx="9142560" cy="90000"/>
+          </a:xfrm>
+          <a:prstGeom prst="rect">
+            <a:avLst/>
+          </a:prstGeom>
+          <a:solidFill>
+            <a:srgbClr val="FFC107"/>
+          </a:solidFill>
+          <a:ln w="0">
+            <a:noFill/>
+          </a:ln>
+        </p:spPr>
+        <p:style>
+          <a:lnRef idx="0"/>
+          <a:fillRef idx="0"/>
+          <a:effectRef idx="0"/>
+          <a:fontRef idx="minor"/>
+        </p:style>
+        <p:txBody>
+          <a:bodyPr lIns="90000" tIns="45000" rIns="90000" bIns="45000" anchor="t">
+            <a:noAutofit/>
+          </a:bodyPr>
+          <a:p>
+            <a:endParaRPr lang="fr-FR" sz="1800" b="0" u="none" strike="noStrike">
+              <a:solidFill>
+                <a:srgbClr val="000000"/>
+              </a:solidFill>
+              <a:effectLst/>
+              <a:uFillTx/>
+              <a:latin typeface="Arial"/>
+            </a:endParaRPr>
+          </a:p>
+        </p:txBody>
+      </p:sp>
+      <p:sp>
+        <p:nvSpPr>
+          <p:cNvPr id="260" name="Shape 22"/>
+          <p:cNvSpPr/>
+          <p:nvPr/>
+        </p:nvSpPr>
+        <p:spPr>
+          <a:xfrm>
+            <a:off x="0" y="5052240"/>
+            <a:ext cx="9142560" cy="90000"/>
+          </a:xfrm>
+          <a:prstGeom prst="rect">
+            <a:avLst/>
+          </a:prstGeom>
+          <a:solidFill>
+            <a:srgbClr val="FFC107"/>
+          </a:solidFill>
+          <a:ln w="0">
+            <a:noFill/>
+          </a:ln>
+        </p:spPr>
+        <p:style>
+          <a:lnRef idx="0"/>
+          <a:fillRef idx="0"/>
+          <a:effectRef idx="0"/>
+          <a:fontRef idx="minor"/>
+        </p:style>
+        <p:txBody>
+          <a:bodyPr lIns="90000" tIns="45000" rIns="90000" bIns="45000" anchor="t">
+            <a:noAutofit/>
+          </a:bodyPr>
+          <a:p>
+            <a:endParaRPr lang="fr-FR" sz="1800" b="0" u="none" strike="noStrike">
+              <a:solidFill>
+                <a:srgbClr val="000000"/>
+              </a:solidFill>
+              <a:effectLst/>
+              <a:uFillTx/>
+              <a:latin typeface="Arial"/>
+            </a:endParaRPr>
+          </a:p>
+        </p:txBody>
+      </p:sp>
+      <p:sp>
+        <p:nvSpPr>
+          <p:cNvPr id="261" name="Text 19"/>
+          <p:cNvSpPr/>
+          <p:nvPr/>
+        </p:nvSpPr>
+        <p:spPr>
+          <a:xfrm>
+            <a:off x="457200" y="1645920"/>
+            <a:ext cx="8228160" cy="1827360"/>
+          </a:xfrm>
+          <a:prstGeom prst="rect">
+            <a:avLst/>
+          </a:prstGeom>
+          <a:noFill/>
+          <a:ln w="0">
+            <a:noFill/>
+          </a:ln>
+        </p:spPr>
+        <p:style>
+          <a:lnRef idx="0"/>
+          <a:fillRef idx="0"/>
+          <a:effectRef idx="0"/>
+          <a:fontRef idx="minor"/>
+        </p:style>
+        <p:txBody>
+          <a:bodyPr lIns="90000" tIns="45000" rIns="90000" bIns="45000" anchor="ctr">
+            <a:noAutofit/>
+          </a:bodyPr>
+          <a:p>
+            <a:pPr algn="ctr" defTabSz="914400">
+              <a:lnSpc>
+                <a:spcPct val="100000"/>
+              </a:lnSpc>
+              <a:tabLst>
+                <a:tab pos="0" algn="l"/>
+              </a:tabLst>
+            </a:pPr>
+            <a:r>
+              <a:rPr lang="en-US" sz="3600" b="1" u="none" strike="noStrike">
+                <a:solidFill>
+                  <a:srgbClr val="FFFFFF"/>
+                </a:solidFill>
+                <a:effectLst/>
+                <a:uFillTx/>
+                <a:latin typeface="Calibri"/>
+                <a:ea typeface="Calibri"/>
+              </a:rPr>
+              <a:t>10. Exercice</a:t>
+            </a:r>
+            <a:endParaRPr lang="fr-FR" sz="3600" b="0" u="none" strike="noStrike">
+              <a:solidFill>
+                <a:srgbClr val="FFFFFF"/>
+              </a:solidFill>
+              <a:effectLst/>
+              <a:uFillTx/>
+              <a:latin typeface="Arial"/>
+            </a:endParaRPr>
+          </a:p>
+        </p:txBody>
+      </p:sp>
+    </p:spTree>
+  </p:cSld>
+  <mc:AlternateContent>
+    <mc:Choice Requires="p14">
+      <p:transition spd="slow" p14:dur="2000"/>
+    </mc:Choice>
+    <mc:Fallback>
+      <p:transition spd="slow"/>
+    </mc:Fallback>
+  </mc:AlternateContent>
+</p:sld>
+</file>
+
+<file path=ppt/slides/slide25.xml><?xml version="1.0" encoding="utf-8"?>
+<p:sld xmlns:a="http://schemas.openxmlformats.org/drawingml/2006/main" xmlns:p="http://schemas.openxmlformats.org/presentationml/2006/main" xmlns:r="http://schemas.openxmlformats.org/officeDocument/2006/relationships" xmlns:p14="http://schemas.microsoft.com/office/powerpoint/2010/main" xmlns:p15="http://schemas.microsoft.com/office/powerpoint/2012/main" xmlns:mc="http://schemas.openxmlformats.org/markup-compatibility/2006">
+  <p:cSld>
+    <p:bg>
+      <p:bgPr>
+        <a:solidFill>
+          <a:srgbClr val="F0F4FA"/>
+        </a:solidFill>
+      </p:bgPr>
+    </p:bg>
+    <p:spTree>
+      <p:nvGrpSpPr>
+        <p:cNvPr id="1" name=""/>
+        <p:cNvGrpSpPr/>
+        <p:nvPr/>
+      </p:nvGrpSpPr>
+      <p:grpSpPr>
+        <a:xfrm>
+          <a:off x="0" y="0"/>
+          <a:ext cx="0" cy="0"/>
+          <a:chOff x="0" y="0"/>
+          <a:chExt cx="0" cy="0"/>
+        </a:xfrm>
+      </p:grpSpPr>
+      <p:sp>
+        <p:nvSpPr>
+          <p:cNvPr id="262" name="Shape 0"/>
+          <p:cNvSpPr/>
+          <p:nvPr/>
+        </p:nvSpPr>
+        <p:spPr>
+          <a:xfrm>
+            <a:off x="0" y="0"/>
+            <a:ext cx="9142560" cy="684360"/>
+          </a:xfrm>
+          <a:prstGeom prst="rect">
+            <a:avLst/>
+          </a:prstGeom>
+          <a:solidFill>
+            <a:srgbClr val="1565C0"/>
+          </a:solidFill>
+          <a:ln w="0">
+            <a:noFill/>
+          </a:ln>
+        </p:spPr>
+        <p:style>
+          <a:lnRef idx="0"/>
+          <a:fillRef idx="0"/>
+          <a:effectRef idx="0"/>
+          <a:fontRef idx="minor"/>
+        </p:style>
+        <p:txBody>
+          <a:bodyPr lIns="90000" tIns="45000" rIns="90000" bIns="45000" anchor="t">
+            <a:noAutofit/>
+          </a:bodyPr>
+          <a:p>
+            <a:endParaRPr lang="fr-FR" sz="1800" b="0" u="none" strike="noStrike">
+              <a:solidFill>
+                <a:srgbClr val="FFFFFF"/>
+              </a:solidFill>
+              <a:effectLst/>
+              <a:uFillTx/>
+              <a:latin typeface="Arial"/>
+            </a:endParaRPr>
+          </a:p>
+        </p:txBody>
+      </p:sp>
+      <p:sp>
+        <p:nvSpPr>
+          <p:cNvPr id="263" name="Text 1"/>
+          <p:cNvSpPr/>
+          <p:nvPr/>
+        </p:nvSpPr>
+        <p:spPr>
+          <a:xfrm>
+            <a:off x="274320" y="45720"/>
+            <a:ext cx="8593920" cy="592920"/>
           </a:xfrm>
           <a:prstGeom prst="rect">
             <a:avLst/>
@@ -17439,14 +19334,14 @@
       </p:sp>
       <p:sp>
         <p:nvSpPr>
-          <p:cNvPr id="238" name="Shape 2"/>
+          <p:cNvPr id="264" name="Shape 2"/>
           <p:cNvSpPr/>
           <p:nvPr/>
         </p:nvSpPr>
         <p:spPr>
           <a:xfrm>
             <a:off x="0" y="685800"/>
-            <a:ext cx="72360" cy="4457160"/>
+            <a:ext cx="71640" cy="4456440"/>
           </a:xfrm>
           <a:prstGeom prst="rect">
             <a:avLst/>
@@ -17465,7 +19360,7 @@
           <a:fontRef idx="minor"/>
         </p:style>
         <p:txBody>
-          <a:bodyPr lIns="36360" tIns="45000" rIns="36360" bIns="45000" anchor="t">
+          <a:bodyPr lIns="36000" tIns="45000" rIns="36000" bIns="45000" anchor="t">
             <a:noAutofit/>
           </a:bodyPr>
           <a:p>
@@ -17482,14 +19377,14 @@
       </p:sp>
       <p:sp>
         <p:nvSpPr>
-          <p:cNvPr id="239" name="Text 3"/>
+          <p:cNvPr id="265" name="Text 3"/>
           <p:cNvSpPr/>
           <p:nvPr/>
         </p:nvSpPr>
         <p:spPr>
           <a:xfrm>
             <a:off x="274320" y="914400"/>
-            <a:ext cx="5485680" cy="365040"/>
+            <a:ext cx="5484960" cy="364320"/>
           </a:xfrm>
           <a:prstGeom prst="rect">
             <a:avLst/>
@@ -17543,14 +19438,14 @@
       </p:sp>
       <p:sp>
         <p:nvSpPr>
-          <p:cNvPr id="240" name="Shape 4"/>
+          <p:cNvPr id="266" name="Shape 4"/>
           <p:cNvSpPr/>
           <p:nvPr/>
         </p:nvSpPr>
         <p:spPr>
           <a:xfrm>
             <a:off x="5943600" y="914400"/>
-            <a:ext cx="2925360" cy="365040"/>
+            <a:ext cx="2924640" cy="364320"/>
           </a:xfrm>
           <a:prstGeom prst="rect">
             <a:avLst/>
@@ -17591,14 +19486,14 @@
       </p:sp>
       <p:sp>
         <p:nvSpPr>
-          <p:cNvPr id="241" name="Text 5"/>
+          <p:cNvPr id="267" name="Text 5"/>
           <p:cNvSpPr/>
           <p:nvPr/>
         </p:nvSpPr>
         <p:spPr>
           <a:xfrm>
             <a:off x="5989320" y="914400"/>
-            <a:ext cx="2833920" cy="365040"/>
+            <a:ext cx="2833200" cy="364320"/>
           </a:xfrm>
           <a:prstGeom prst="rect">
             <a:avLst/>
@@ -17652,14 +19547,14 @@
       </p:sp>
       <p:sp>
         <p:nvSpPr>
-          <p:cNvPr id="242" name="Text 6"/>
+          <p:cNvPr id="268" name="Text 6"/>
           <p:cNvSpPr/>
           <p:nvPr/>
         </p:nvSpPr>
         <p:spPr>
           <a:xfrm>
             <a:off x="274320" y="1737360"/>
-            <a:ext cx="5485680" cy="365040"/>
+            <a:ext cx="5484960" cy="364320"/>
           </a:xfrm>
           <a:prstGeom prst="rect">
             <a:avLst/>
@@ -17713,14 +19608,14 @@
       </p:sp>
       <p:sp>
         <p:nvSpPr>
-          <p:cNvPr id="243" name="Shape 7"/>
+          <p:cNvPr id="269" name="Shape 7"/>
           <p:cNvSpPr/>
           <p:nvPr/>
         </p:nvSpPr>
         <p:spPr>
           <a:xfrm>
             <a:off x="5943600" y="1737360"/>
-            <a:ext cx="2925360" cy="365040"/>
+            <a:ext cx="2924640" cy="364320"/>
           </a:xfrm>
           <a:prstGeom prst="rect">
             <a:avLst/>
@@ -17761,14 +19656,14 @@
       </p:sp>
       <p:sp>
         <p:nvSpPr>
-          <p:cNvPr id="244" name="Text 8"/>
+          <p:cNvPr id="270" name="Text 8"/>
           <p:cNvSpPr/>
           <p:nvPr/>
         </p:nvSpPr>
         <p:spPr>
           <a:xfrm>
             <a:off x="5989320" y="1737360"/>
-            <a:ext cx="2833920" cy="365040"/>
+            <a:ext cx="2833200" cy="364320"/>
           </a:xfrm>
           <a:prstGeom prst="rect">
             <a:avLst/>
@@ -17822,14 +19717,14 @@
       </p:sp>
       <p:sp>
         <p:nvSpPr>
-          <p:cNvPr id="245" name="Text 9"/>
+          <p:cNvPr id="271" name="Text 9"/>
           <p:cNvSpPr/>
           <p:nvPr/>
         </p:nvSpPr>
         <p:spPr>
           <a:xfrm>
             <a:off x="274320" y="2560320"/>
-            <a:ext cx="5485680" cy="365040"/>
+            <a:ext cx="5484960" cy="364320"/>
           </a:xfrm>
           <a:prstGeom prst="rect">
             <a:avLst/>
@@ -17883,14 +19778,14 @@
       </p:sp>
       <p:sp>
         <p:nvSpPr>
-          <p:cNvPr id="246" name="Shape 10"/>
+          <p:cNvPr id="272" name="Shape 10"/>
           <p:cNvSpPr/>
           <p:nvPr/>
         </p:nvSpPr>
         <p:spPr>
           <a:xfrm>
             <a:off x="5943600" y="2488320"/>
-            <a:ext cx="2925360" cy="499320"/>
+            <a:ext cx="2924640" cy="498600"/>
           </a:xfrm>
           <a:prstGeom prst="rect">
             <a:avLst/>
@@ -17931,14 +19826,14 @@
       </p:sp>
       <p:sp>
         <p:nvSpPr>
-          <p:cNvPr id="247" name="Text 11"/>
+          <p:cNvPr id="273" name="Text 11"/>
           <p:cNvSpPr/>
           <p:nvPr/>
         </p:nvSpPr>
         <p:spPr>
           <a:xfrm>
             <a:off x="5989320" y="2560320"/>
-            <a:ext cx="2833920" cy="365040"/>
+            <a:ext cx="2833200" cy="364320"/>
           </a:xfrm>
           <a:prstGeom prst="rect">
             <a:avLst/>
@@ -17992,14 +19887,14 @@
       </p:sp>
       <p:sp>
         <p:nvSpPr>
-          <p:cNvPr id="248" name="Text 12"/>
+          <p:cNvPr id="274" name="Text 12"/>
           <p:cNvSpPr/>
           <p:nvPr/>
         </p:nvSpPr>
         <p:spPr>
           <a:xfrm>
             <a:off x="274320" y="3383280"/>
-            <a:ext cx="5485680" cy="365040"/>
+            <a:ext cx="5484960" cy="364320"/>
           </a:xfrm>
           <a:prstGeom prst="rect">
             <a:avLst/>
@@ -18053,14 +19948,14 @@
       </p:sp>
       <p:sp>
         <p:nvSpPr>
-          <p:cNvPr id="249" name="Shape 13"/>
+          <p:cNvPr id="275" name="Shape 13"/>
           <p:cNvSpPr/>
           <p:nvPr/>
         </p:nvSpPr>
         <p:spPr>
           <a:xfrm>
             <a:off x="5943600" y="3383280"/>
-            <a:ext cx="2925360" cy="365040"/>
+            <a:ext cx="2924640" cy="364320"/>
           </a:xfrm>
           <a:prstGeom prst="rect">
             <a:avLst/>
@@ -18101,14 +19996,14 @@
       </p:sp>
       <p:sp>
         <p:nvSpPr>
-          <p:cNvPr id="250" name="Text 14"/>
+          <p:cNvPr id="276" name="Text 14"/>
           <p:cNvSpPr/>
           <p:nvPr/>
         </p:nvSpPr>
         <p:spPr>
           <a:xfrm>
             <a:off x="5989320" y="3383280"/>
-            <a:ext cx="2833920" cy="365040"/>
+            <a:ext cx="2833200" cy="364320"/>
           </a:xfrm>
           <a:prstGeom prst="rect">
             <a:avLst/>
@@ -18162,14 +20057,14 @@
       </p:sp>
       <p:sp>
         <p:nvSpPr>
-          <p:cNvPr id="251" name="Text 15"/>
+          <p:cNvPr id="277" name="Text 15"/>
           <p:cNvSpPr/>
           <p:nvPr/>
         </p:nvSpPr>
         <p:spPr>
           <a:xfrm>
             <a:off x="274320" y="4206240"/>
-            <a:ext cx="5485680" cy="365040"/>
+            <a:ext cx="5484960" cy="364320"/>
           </a:xfrm>
           <a:prstGeom prst="rect">
             <a:avLst/>
@@ -18223,14 +20118,14 @@
       </p:sp>
       <p:sp>
         <p:nvSpPr>
-          <p:cNvPr id="252" name="Shape 16"/>
+          <p:cNvPr id="278" name="Shape 16"/>
           <p:cNvSpPr/>
           <p:nvPr/>
         </p:nvSpPr>
         <p:spPr>
           <a:xfrm>
             <a:off x="5943600" y="4206240"/>
-            <a:ext cx="2925360" cy="365040"/>
+            <a:ext cx="2924640" cy="364320"/>
           </a:xfrm>
           <a:prstGeom prst="rect">
             <a:avLst/>
@@ -18271,14 +20166,14 @@
       </p:sp>
       <p:sp>
         <p:nvSpPr>
-          <p:cNvPr id="253" name="Text 17"/>
+          <p:cNvPr id="279" name="Text 17"/>
           <p:cNvSpPr/>
           <p:nvPr/>
         </p:nvSpPr>
         <p:spPr>
           <a:xfrm>
             <a:off x="5989320" y="4206240"/>
-            <a:ext cx="2833920" cy="365040"/>
+            <a:ext cx="2833200" cy="364320"/>
           </a:xfrm>
           <a:prstGeom prst="rect">
             <a:avLst/>
@@ -18374,7 +20269,7 @@
                                           </p:stCondLst>
                                         </p:cTn>
                                         <p:tgtEl>
-                                          <p:spTgt spid="240"/>
+                                          <p:spTgt spid="266"/>
                                         </p:tgtEl>
                                         <p:attrNameLst>
                                           <p:attrName>style.visibility</p:attrName>
@@ -18392,7 +20287,7 @@
                                           </p:stCondLst>
                                         </p:cTn>
                                         <p:tgtEl>
-                                          <p:spTgt spid="240"/>
+                                          <p:spTgt spid="266"/>
                                         </p:tgtEl>
                                       </p:cBhvr>
                                     </p:animEffect>
@@ -18404,7 +20299,7 @@
                                           </p:stCondLst>
                                         </p:cTn>
                                         <p:tgtEl>
-                                          <p:spTgt spid="240"/>
+                                          <p:spTgt spid="266"/>
                                         </p:tgtEl>
                                         <p:attrNameLst>
                                           <p:attrName>ppt_x</p:attrName>
@@ -18431,7 +20326,7 @@
                                           </p:stCondLst>
                                         </p:cTn>
                                         <p:tgtEl>
-                                          <p:spTgt spid="240"/>
+                                          <p:spTgt spid="266"/>
                                         </p:tgtEl>
                                         <p:attrNameLst>
                                           <p:attrName>ppt_y</p:attrName>
@@ -18458,7 +20353,7 @@
                                           </p:stCondLst>
                                         </p:cTn>
                                         <p:tgtEl>
-                                          <p:spTgt spid="240"/>
+                                          <p:spTgt spid="266"/>
                                         </p:tgtEl>
                                         <p:attrNameLst>
                                           <p:attrName>ppt_y</p:attrName>
@@ -18485,7 +20380,7 @@
                                           </p:stCondLst>
                                         </p:cTn>
                                         <p:tgtEl>
-                                          <p:spTgt spid="240"/>
+                                          <p:spTgt spid="266"/>
                                         </p:tgtEl>
                                         <p:attrNameLst>
                                           <p:attrName>ppt_y</p:attrName>
@@ -18512,7 +20407,7 @@
                                           </p:stCondLst>
                                         </p:cTn>
                                         <p:tgtEl>
-                                          <p:spTgt spid="240"/>
+                                          <p:spTgt spid="266"/>
                                         </p:tgtEl>
                                         <p:attrNameLst>
                                           <p:attrName>ppt_y</p:attrName>
@@ -18539,7 +20434,7 @@
                                           </p:stCondLst>
                                         </p:cTn>
                                         <p:tgtEl>
-                                          <p:spTgt spid="240"/>
+                                          <p:spTgt spid="266"/>
                                         </p:tgtEl>
                                       </p:cBhvr>
                                       <p:to x="100000" y="60000"/>
@@ -18552,7 +20447,7 @@
                                           </p:stCondLst>
                                         </p:cTn>
                                         <p:tgtEl>
-                                          <p:spTgt spid="240"/>
+                                          <p:spTgt spid="266"/>
                                         </p:tgtEl>
                                       </p:cBhvr>
                                       <p:to x="100000" y="100000"/>
@@ -18565,7 +20460,7 @@
                                           </p:stCondLst>
                                         </p:cTn>
                                         <p:tgtEl>
-                                          <p:spTgt spid="240"/>
+                                          <p:spTgt spid="266"/>
                                         </p:tgtEl>
                                       </p:cBhvr>
                                       <p:to x="100000" y="80000"/>
@@ -18578,7 +20473,7 @@
                                           </p:stCondLst>
                                         </p:cTn>
                                         <p:tgtEl>
-                                          <p:spTgt spid="240"/>
+                                          <p:spTgt spid="266"/>
                                         </p:tgtEl>
                                       </p:cBhvr>
                                       <p:to x="100000" y="100000"/>
@@ -18591,7 +20486,7 @@
                                           </p:stCondLst>
                                         </p:cTn>
                                         <p:tgtEl>
-                                          <p:spTgt spid="240"/>
+                                          <p:spTgt spid="266"/>
                                         </p:tgtEl>
                                       </p:cBhvr>
                                       <p:to x="100000" y="90000"/>
@@ -18604,7 +20499,7 @@
                                           </p:stCondLst>
                                         </p:cTn>
                                         <p:tgtEl>
-                                          <p:spTgt spid="240"/>
+                                          <p:spTgt spid="266"/>
                                         </p:tgtEl>
                                       </p:cBhvr>
                                       <p:to x="100000" y="100000"/>
@@ -18617,7 +20512,7 @@
                                           </p:stCondLst>
                                         </p:cTn>
                                         <p:tgtEl>
-                                          <p:spTgt spid="240"/>
+                                          <p:spTgt spid="266"/>
                                         </p:tgtEl>
                                       </p:cBhvr>
                                       <p:to x="100000" y="95000"/>
@@ -18630,7 +20525,7 @@
                                           </p:stCondLst>
                                         </p:cTn>
                                         <p:tgtEl>
-                                          <p:spTgt spid="240"/>
+                                          <p:spTgt spid="266"/>
                                         </p:tgtEl>
                                       </p:cBhvr>
                                       <p:to x="100000" y="100000"/>
@@ -18652,7 +20547,7 @@
                                           </p:stCondLst>
                                         </p:cTn>
                                         <p:tgtEl>
-                                          <p:spTgt spid="241"/>
+                                          <p:spTgt spid="267"/>
                                         </p:tgtEl>
                                         <p:attrNameLst>
                                           <p:attrName>style.visibility</p:attrName>
@@ -18670,7 +20565,7 @@
                                           </p:stCondLst>
                                         </p:cTn>
                                         <p:tgtEl>
-                                          <p:spTgt spid="241"/>
+                                          <p:spTgt spid="267"/>
                                         </p:tgtEl>
                                       </p:cBhvr>
                                     </p:animEffect>
@@ -18682,7 +20577,7 @@
                                           </p:stCondLst>
                                         </p:cTn>
                                         <p:tgtEl>
-                                          <p:spTgt spid="241"/>
+                                          <p:spTgt spid="267"/>
                                         </p:tgtEl>
                                         <p:attrNameLst>
                                           <p:attrName>ppt_x</p:attrName>
@@ -18709,7 +20604,7 @@
                                           </p:stCondLst>
                                         </p:cTn>
                                         <p:tgtEl>
-                                          <p:spTgt spid="241"/>
+                                          <p:spTgt spid="267"/>
                                         </p:tgtEl>
                                         <p:attrNameLst>
                                           <p:attrName>ppt_y</p:attrName>
@@ -18736,7 +20631,7 @@
                                           </p:stCondLst>
                                         </p:cTn>
                                         <p:tgtEl>
-                                          <p:spTgt spid="241"/>
+                                          <p:spTgt spid="267"/>
                                         </p:tgtEl>
                                         <p:attrNameLst>
                                           <p:attrName>ppt_y</p:attrName>
@@ -18763,7 +20658,7 @@
                                           </p:stCondLst>
                                         </p:cTn>
                                         <p:tgtEl>
-                                          <p:spTgt spid="241"/>
+                                          <p:spTgt spid="267"/>
                                         </p:tgtEl>
                                         <p:attrNameLst>
                                           <p:attrName>ppt_y</p:attrName>
@@ -18790,7 +20685,7 @@
                                           </p:stCondLst>
                                         </p:cTn>
                                         <p:tgtEl>
-                                          <p:spTgt spid="241"/>
+                                          <p:spTgt spid="267"/>
                                         </p:tgtEl>
                                         <p:attrNameLst>
                                           <p:attrName>ppt_y</p:attrName>
@@ -18817,7 +20712,7 @@
                                           </p:stCondLst>
                                         </p:cTn>
                                         <p:tgtEl>
-                                          <p:spTgt spid="241"/>
+                                          <p:spTgt spid="267"/>
                                         </p:tgtEl>
                                       </p:cBhvr>
                                       <p:to x="100000" y="60000"/>
@@ -18830,7 +20725,7 @@
                                           </p:stCondLst>
                                         </p:cTn>
                                         <p:tgtEl>
-                                          <p:spTgt spid="241"/>
+                                          <p:spTgt spid="267"/>
                                         </p:tgtEl>
                                       </p:cBhvr>
                                       <p:to x="100000" y="100000"/>
@@ -18843,7 +20738,7 @@
                                           </p:stCondLst>
                                         </p:cTn>
                                         <p:tgtEl>
-                                          <p:spTgt spid="241"/>
+                                          <p:spTgt spid="267"/>
                                         </p:tgtEl>
                                       </p:cBhvr>
                                       <p:to x="100000" y="80000"/>
@@ -18856,7 +20751,7 @@
                                           </p:stCondLst>
                                         </p:cTn>
                                         <p:tgtEl>
-                                          <p:spTgt spid="241"/>
+                                          <p:spTgt spid="267"/>
                                         </p:tgtEl>
                                       </p:cBhvr>
                                       <p:to x="100000" y="100000"/>
@@ -18869,7 +20764,7 @@
                                           </p:stCondLst>
                                         </p:cTn>
                                         <p:tgtEl>
-                                          <p:spTgt spid="241"/>
+                                          <p:spTgt spid="267"/>
                                         </p:tgtEl>
                                       </p:cBhvr>
                                       <p:to x="100000" y="90000"/>
@@ -18882,7 +20777,7 @@
                                           </p:stCondLst>
                                         </p:cTn>
                                         <p:tgtEl>
-                                          <p:spTgt spid="241"/>
+                                          <p:spTgt spid="267"/>
                                         </p:tgtEl>
                                       </p:cBhvr>
                                       <p:to x="100000" y="100000"/>
@@ -18895,7 +20790,7 @@
                                           </p:stCondLst>
                                         </p:cTn>
                                         <p:tgtEl>
-                                          <p:spTgt spid="241"/>
+                                          <p:spTgt spid="267"/>
                                         </p:tgtEl>
                                       </p:cBhvr>
                                       <p:to x="100000" y="95000"/>
@@ -18908,7 +20803,7 @@
                                           </p:stCondLst>
                                         </p:cTn>
                                         <p:tgtEl>
-                                          <p:spTgt spid="241"/>
+                                          <p:spTgt spid="267"/>
                                         </p:tgtEl>
                                       </p:cBhvr>
                                       <p:to x="100000" y="100000"/>
@@ -18948,7 +20843,7 @@
                                           </p:stCondLst>
                                         </p:cTn>
                                         <p:tgtEl>
-                                          <p:spTgt spid="243"/>
+                                          <p:spTgt spid="269"/>
                                         </p:tgtEl>
                                         <p:attrNameLst>
                                           <p:attrName>style.visibility</p:attrName>
@@ -18966,7 +20861,7 @@
                                           </p:stCondLst>
                                         </p:cTn>
                                         <p:tgtEl>
-                                          <p:spTgt spid="243"/>
+                                          <p:spTgt spid="269"/>
                                         </p:tgtEl>
                                       </p:cBhvr>
                                     </p:animEffect>
@@ -18978,7 +20873,7 @@
                                           </p:stCondLst>
                                         </p:cTn>
                                         <p:tgtEl>
-                                          <p:spTgt spid="243"/>
+                                          <p:spTgt spid="269"/>
                                         </p:tgtEl>
                                         <p:attrNameLst>
                                           <p:attrName>ppt_x</p:attrName>
@@ -19005,7 +20900,7 @@
                                           </p:stCondLst>
                                         </p:cTn>
                                         <p:tgtEl>
-                                          <p:spTgt spid="243"/>
+                                          <p:spTgt spid="269"/>
                                         </p:tgtEl>
                                         <p:attrNameLst>
                                           <p:attrName>ppt_y</p:attrName>
@@ -19032,7 +20927,7 @@
                                           </p:stCondLst>
                                         </p:cTn>
                                         <p:tgtEl>
-                                          <p:spTgt spid="243"/>
+                                          <p:spTgt spid="269"/>
                                         </p:tgtEl>
                                         <p:attrNameLst>
                                           <p:attrName>ppt_y</p:attrName>
@@ -19059,7 +20954,7 @@
                                           </p:stCondLst>
                                         </p:cTn>
                                         <p:tgtEl>
-                                          <p:spTgt spid="243"/>
+                                          <p:spTgt spid="269"/>
                                         </p:tgtEl>
                                         <p:attrNameLst>
                                           <p:attrName>ppt_y</p:attrName>
@@ -19086,7 +20981,7 @@
                                           </p:stCondLst>
                                         </p:cTn>
                                         <p:tgtEl>
-                                          <p:spTgt spid="243"/>
+                                          <p:spTgt spid="269"/>
                                         </p:tgtEl>
                                         <p:attrNameLst>
                                           <p:attrName>ppt_y</p:attrName>
@@ -19113,7 +21008,7 @@
                                           </p:stCondLst>
                                         </p:cTn>
                                         <p:tgtEl>
-                                          <p:spTgt spid="243"/>
+                                          <p:spTgt spid="269"/>
                                         </p:tgtEl>
                                       </p:cBhvr>
                                       <p:to x="100000" y="60000"/>
@@ -19126,7 +21021,7 @@
                                           </p:stCondLst>
                                         </p:cTn>
                                         <p:tgtEl>
-                                          <p:spTgt spid="243"/>
+                                          <p:spTgt spid="269"/>
                                         </p:tgtEl>
                                       </p:cBhvr>
                                       <p:to x="100000" y="100000"/>
@@ -19139,7 +21034,7 @@
                                           </p:stCondLst>
                                         </p:cTn>
                                         <p:tgtEl>
-                                          <p:spTgt spid="243"/>
+                                          <p:spTgt spid="269"/>
                                         </p:tgtEl>
                                       </p:cBhvr>
                                       <p:to x="100000" y="80000"/>
@@ -19152,7 +21047,7 @@
                                           </p:stCondLst>
                                         </p:cTn>
                                         <p:tgtEl>
-                                          <p:spTgt spid="243"/>
+                                          <p:spTgt spid="269"/>
                                         </p:tgtEl>
                                       </p:cBhvr>
                                       <p:to x="100000" y="100000"/>
@@ -19165,7 +21060,7 @@
                                           </p:stCondLst>
                                         </p:cTn>
                                         <p:tgtEl>
-                                          <p:spTgt spid="243"/>
+                                          <p:spTgt spid="269"/>
                                         </p:tgtEl>
                                       </p:cBhvr>
                                       <p:to x="100000" y="90000"/>
@@ -19178,7 +21073,7 @@
                                           </p:stCondLst>
                                         </p:cTn>
                                         <p:tgtEl>
-                                          <p:spTgt spid="243"/>
+                                          <p:spTgt spid="269"/>
                                         </p:tgtEl>
                                       </p:cBhvr>
                                       <p:to x="100000" y="100000"/>
@@ -19191,7 +21086,7 @@
                                           </p:stCondLst>
                                         </p:cTn>
                                         <p:tgtEl>
-                                          <p:spTgt spid="243"/>
+                                          <p:spTgt spid="269"/>
                                         </p:tgtEl>
                                       </p:cBhvr>
                                       <p:to x="100000" y="95000"/>
@@ -19204,7 +21099,7 @@
                                           </p:stCondLst>
                                         </p:cTn>
                                         <p:tgtEl>
-                                          <p:spTgt spid="243"/>
+                                          <p:spTgt spid="269"/>
                                         </p:tgtEl>
                                       </p:cBhvr>
                                       <p:to x="100000" y="100000"/>
@@ -19226,7 +21121,7 @@
                                           </p:stCondLst>
                                         </p:cTn>
                                         <p:tgtEl>
-                                          <p:spTgt spid="244"/>
+                                          <p:spTgt spid="270"/>
                                         </p:tgtEl>
                                         <p:attrNameLst>
                                           <p:attrName>style.visibility</p:attrName>
@@ -19244,7 +21139,7 @@
                                           </p:stCondLst>
                                         </p:cTn>
                                         <p:tgtEl>
-                                          <p:spTgt spid="244"/>
+                                          <p:spTgt spid="270"/>
                                         </p:tgtEl>
                                       </p:cBhvr>
                                     </p:animEffect>
@@ -19256,7 +21151,7 @@
                                           </p:stCondLst>
                                         </p:cTn>
                                         <p:tgtEl>
-                                          <p:spTgt spid="244"/>
+                                          <p:spTgt spid="270"/>
                                         </p:tgtEl>
                                         <p:attrNameLst>
                                           <p:attrName>ppt_x</p:attrName>
@@ -19283,7 +21178,7 @@
                                           </p:stCondLst>
                                         </p:cTn>
                                         <p:tgtEl>
-                                          <p:spTgt spid="244"/>
+                                          <p:spTgt spid="270"/>
                                         </p:tgtEl>
                                         <p:attrNameLst>
                                           <p:attrName>ppt_y</p:attrName>
@@ -19310,7 +21205,7 @@
                                           </p:stCondLst>
                                         </p:cTn>
                                         <p:tgtEl>
-                                          <p:spTgt spid="244"/>
+                                          <p:spTgt spid="270"/>
                                         </p:tgtEl>
                                         <p:attrNameLst>
                                           <p:attrName>ppt_y</p:attrName>
@@ -19337,7 +21232,7 @@
                                           </p:stCondLst>
                                         </p:cTn>
                                         <p:tgtEl>
-                                          <p:spTgt spid="244"/>
+                                          <p:spTgt spid="270"/>
                                         </p:tgtEl>
                                         <p:attrNameLst>
                                           <p:attrName>ppt_y</p:attrName>
@@ -19364,7 +21259,7 @@
                                           </p:stCondLst>
                                         </p:cTn>
                                         <p:tgtEl>
-                                          <p:spTgt spid="244"/>
+                                          <p:spTgt spid="270"/>
                                         </p:tgtEl>
                                         <p:attrNameLst>
                                           <p:attrName>ppt_y</p:attrName>
@@ -19391,7 +21286,7 @@
                                           </p:stCondLst>
                                         </p:cTn>
                                         <p:tgtEl>
-                                          <p:spTgt spid="244"/>
+                                          <p:spTgt spid="270"/>
                                         </p:tgtEl>
                                       </p:cBhvr>
                                       <p:to x="100000" y="60000"/>
@@ -19404,7 +21299,7 @@
                                           </p:stCondLst>
                                         </p:cTn>
                                         <p:tgtEl>
-                                          <p:spTgt spid="244"/>
+                                          <p:spTgt spid="270"/>
                                         </p:tgtEl>
                                       </p:cBhvr>
                                       <p:to x="100000" y="100000"/>
@@ -19417,7 +21312,7 @@
                                           </p:stCondLst>
                                         </p:cTn>
                                         <p:tgtEl>
-                                          <p:spTgt spid="244"/>
+                                          <p:spTgt spid="270"/>
                                         </p:tgtEl>
                                       </p:cBhvr>
                                       <p:to x="100000" y="80000"/>
@@ -19430,7 +21325,7 @@
                                           </p:stCondLst>
                                         </p:cTn>
                                         <p:tgtEl>
-                                          <p:spTgt spid="244"/>
+                                          <p:spTgt spid="270"/>
                                         </p:tgtEl>
                                       </p:cBhvr>
                                       <p:to x="100000" y="100000"/>
@@ -19443,7 +21338,7 @@
                                           </p:stCondLst>
                                         </p:cTn>
                                         <p:tgtEl>
-                                          <p:spTgt spid="244"/>
+                                          <p:spTgt spid="270"/>
                                         </p:tgtEl>
                                       </p:cBhvr>
                                       <p:to x="100000" y="90000"/>
@@ -19456,7 +21351,7 @@
                                           </p:stCondLst>
                                         </p:cTn>
                                         <p:tgtEl>
-                                          <p:spTgt spid="244"/>
+                                          <p:spTgt spid="270"/>
                                         </p:tgtEl>
                                       </p:cBhvr>
                                       <p:to x="100000" y="100000"/>
@@ -19469,7 +21364,7 @@
                                           </p:stCondLst>
                                         </p:cTn>
                                         <p:tgtEl>
-                                          <p:spTgt spid="244"/>
+                                          <p:spTgt spid="270"/>
                                         </p:tgtEl>
                                       </p:cBhvr>
                                       <p:to x="100000" y="95000"/>
@@ -19482,7 +21377,7 @@
                                           </p:stCondLst>
                                         </p:cTn>
                                         <p:tgtEl>
-                                          <p:spTgt spid="244"/>
+                                          <p:spTgt spid="270"/>
                                         </p:tgtEl>
                                       </p:cBhvr>
                                       <p:to x="100000" y="100000"/>
@@ -19522,7 +21417,7 @@
                                           </p:stCondLst>
                                         </p:cTn>
                                         <p:tgtEl>
-                                          <p:spTgt spid="246"/>
+                                          <p:spTgt spid="272"/>
                                         </p:tgtEl>
                                         <p:attrNameLst>
                                           <p:attrName>style.visibility</p:attrName>
@@ -19540,7 +21435,7 @@
                                           </p:stCondLst>
                                         </p:cTn>
                                         <p:tgtEl>
-                                          <p:spTgt spid="246"/>
+                                          <p:spTgt spid="272"/>
                                         </p:tgtEl>
                                       </p:cBhvr>
                                     </p:animEffect>
@@ -19552,7 +21447,7 @@
                                           </p:stCondLst>
                                         </p:cTn>
                                         <p:tgtEl>
-                                          <p:spTgt spid="246"/>
+                                          <p:spTgt spid="272"/>
                                         </p:tgtEl>
                                         <p:attrNameLst>
                                           <p:attrName>ppt_x</p:attrName>
@@ -19579,7 +21474,7 @@
                                           </p:stCondLst>
                                         </p:cTn>
                                         <p:tgtEl>
-                                          <p:spTgt spid="246"/>
+                                          <p:spTgt spid="272"/>
                                         </p:tgtEl>
                                         <p:attrNameLst>
                                           <p:attrName>ppt_y</p:attrName>
@@ -19606,7 +21501,7 @@
                                           </p:stCondLst>
                                         </p:cTn>
                                         <p:tgtEl>
-                                          <p:spTgt spid="246"/>
+                                          <p:spTgt spid="272"/>
                                         </p:tgtEl>
                                         <p:attrNameLst>
                                           <p:attrName>ppt_y</p:attrName>
@@ -19633,7 +21528,7 @@
                                           </p:stCondLst>
                                         </p:cTn>
                                         <p:tgtEl>
-                                          <p:spTgt spid="246"/>
+                                          <p:spTgt spid="272"/>
                                         </p:tgtEl>
                                         <p:attrNameLst>
                                           <p:attrName>ppt_y</p:attrName>
@@ -19660,7 +21555,7 @@
                                           </p:stCondLst>
                                         </p:cTn>
                                         <p:tgtEl>
-                                          <p:spTgt spid="246"/>
+                                          <p:spTgt spid="272"/>
                                         </p:tgtEl>
                                         <p:attrNameLst>
                                           <p:attrName>ppt_y</p:attrName>
@@ -19687,7 +21582,7 @@
                                           </p:stCondLst>
                                         </p:cTn>
                                         <p:tgtEl>
-                                          <p:spTgt spid="246"/>
+                                          <p:spTgt spid="272"/>
                                         </p:tgtEl>
                                       </p:cBhvr>
                                       <p:to x="100000" y="60000"/>
@@ -19700,7 +21595,7 @@
                                           </p:stCondLst>
                                         </p:cTn>
                                         <p:tgtEl>
-                                          <p:spTgt spid="246"/>
+                                          <p:spTgt spid="272"/>
                                         </p:tgtEl>
                                       </p:cBhvr>
                                       <p:to x="100000" y="100000"/>
@@ -19713,7 +21608,7 @@
                                           </p:stCondLst>
                                         </p:cTn>
                                         <p:tgtEl>
-                                          <p:spTgt spid="246"/>
+                                          <p:spTgt spid="272"/>
                                         </p:tgtEl>
                                       </p:cBhvr>
                                       <p:to x="100000" y="80000"/>
@@ -19726,7 +21621,7 @@
                                           </p:stCondLst>
                                         </p:cTn>
                                         <p:tgtEl>
-                                          <p:spTgt spid="246"/>
+                                          <p:spTgt spid="272"/>
                                         </p:tgtEl>
                                       </p:cBhvr>
                                       <p:to x="100000" y="100000"/>
@@ -19739,7 +21634,7 @@
                                           </p:stCondLst>
                                         </p:cTn>
                                         <p:tgtEl>
-                                          <p:spTgt spid="246"/>
+                                          <p:spTgt spid="272"/>
                                         </p:tgtEl>
                                       </p:cBhvr>
                                       <p:to x="100000" y="90000"/>
@@ -19752,7 +21647,7 @@
                                           </p:stCondLst>
                                         </p:cTn>
                                         <p:tgtEl>
-                                          <p:spTgt spid="246"/>
+                                          <p:spTgt spid="272"/>
                                         </p:tgtEl>
                                       </p:cBhvr>
                                       <p:to x="100000" y="100000"/>
@@ -19765,7 +21660,7 @@
                                           </p:stCondLst>
                                         </p:cTn>
                                         <p:tgtEl>
-                                          <p:spTgt spid="246"/>
+                                          <p:spTgt spid="272"/>
                                         </p:tgtEl>
                                       </p:cBhvr>
                                       <p:to x="100000" y="95000"/>
@@ -19778,7 +21673,7 @@
                                           </p:stCondLst>
                                         </p:cTn>
                                         <p:tgtEl>
-                                          <p:spTgt spid="246"/>
+                                          <p:spTgt spid="272"/>
                                         </p:tgtEl>
                                       </p:cBhvr>
                                       <p:to x="100000" y="100000"/>
@@ -19800,7 +21695,7 @@
                                           </p:stCondLst>
                                         </p:cTn>
                                         <p:tgtEl>
-                                          <p:spTgt spid="247"/>
+                                          <p:spTgt spid="273"/>
                                         </p:tgtEl>
                                         <p:attrNameLst>
                                           <p:attrName>style.visibility</p:attrName>
@@ -19818,7 +21713,7 @@
                                           </p:stCondLst>
                                         </p:cTn>
                                         <p:tgtEl>
-                                          <p:spTgt spid="247"/>
+                                          <p:spTgt spid="273"/>
                                         </p:tgtEl>
                                       </p:cBhvr>
                                     </p:animEffect>
@@ -19830,7 +21725,7 @@
                                           </p:stCondLst>
                                         </p:cTn>
                                         <p:tgtEl>
-                                          <p:spTgt spid="247"/>
+                                          <p:spTgt spid="273"/>
                                         </p:tgtEl>
                                         <p:attrNameLst>
                                           <p:attrName>ppt_x</p:attrName>
@@ -19857,7 +21752,7 @@
                                           </p:stCondLst>
                                         </p:cTn>
                                         <p:tgtEl>
-                                          <p:spTgt spid="247"/>
+                                          <p:spTgt spid="273"/>
                                         </p:tgtEl>
                                         <p:attrNameLst>
                                           <p:attrName>ppt_y</p:attrName>
@@ -19884,7 +21779,7 @@
                                           </p:stCondLst>
                                         </p:cTn>
                                         <p:tgtEl>
-                                          <p:spTgt spid="247"/>
+                                          <p:spTgt spid="273"/>
                                         </p:tgtEl>
                                         <p:attrNameLst>
                                           <p:attrName>ppt_y</p:attrName>
@@ -19911,7 +21806,7 @@
                                           </p:stCondLst>
                                         </p:cTn>
                                         <p:tgtEl>
-                                          <p:spTgt spid="247"/>
+                                          <p:spTgt spid="273"/>
                                         </p:tgtEl>
                                         <p:attrNameLst>
                                           <p:attrName>ppt_y</p:attrName>
@@ -19938,7 +21833,7 @@
                                           </p:stCondLst>
                                         </p:cTn>
                                         <p:tgtEl>
-                                          <p:spTgt spid="247"/>
+                                          <p:spTgt spid="273"/>
                                         </p:tgtEl>
                                         <p:attrNameLst>
                                           <p:attrName>ppt_y</p:attrName>
@@ -19965,7 +21860,7 @@
                                           </p:stCondLst>
                                         </p:cTn>
                                         <p:tgtEl>
-                                          <p:spTgt spid="247"/>
+                                          <p:spTgt spid="273"/>
                                         </p:tgtEl>
                                       </p:cBhvr>
                                       <p:to x="100000" y="60000"/>
@@ -19978,7 +21873,7 @@
                                           </p:stCondLst>
                                         </p:cTn>
                                         <p:tgtEl>
-                                          <p:spTgt spid="247"/>
+                                          <p:spTgt spid="273"/>
                                         </p:tgtEl>
                                       </p:cBhvr>
                                       <p:to x="100000" y="100000"/>
@@ -19991,7 +21886,7 @@
                                           </p:stCondLst>
                                         </p:cTn>
                                         <p:tgtEl>
-                                          <p:spTgt spid="247"/>
+                                          <p:spTgt spid="273"/>
                                         </p:tgtEl>
                                       </p:cBhvr>
                                       <p:to x="100000" y="80000"/>
@@ -20004,7 +21899,7 @@
                                           </p:stCondLst>
                                         </p:cTn>
                                         <p:tgtEl>
-                                          <p:spTgt spid="247"/>
+                                          <p:spTgt spid="273"/>
                                         </p:tgtEl>
                                       </p:cBhvr>
                                       <p:to x="100000" y="100000"/>
@@ -20017,7 +21912,7 @@
                                           </p:stCondLst>
                                         </p:cTn>
                                         <p:tgtEl>
-                                          <p:spTgt spid="247"/>
+                                          <p:spTgt spid="273"/>
                                         </p:tgtEl>
                                       </p:cBhvr>
                                       <p:to x="100000" y="90000"/>
@@ -20030,7 +21925,7 @@
                                           </p:stCondLst>
                                         </p:cTn>
                                         <p:tgtEl>
-                                          <p:spTgt spid="247"/>
+                                          <p:spTgt spid="273"/>
                                         </p:tgtEl>
                                       </p:cBhvr>
                                       <p:to x="100000" y="100000"/>
@@ -20043,7 +21938,7 @@
                                           </p:stCondLst>
                                         </p:cTn>
                                         <p:tgtEl>
-                                          <p:spTgt spid="247"/>
+                                          <p:spTgt spid="273"/>
                                         </p:tgtEl>
                                       </p:cBhvr>
                                       <p:to x="100000" y="95000"/>
@@ -20056,7 +21951,7 @@
                                           </p:stCondLst>
                                         </p:cTn>
                                         <p:tgtEl>
-                                          <p:spTgt spid="247"/>
+                                          <p:spTgt spid="273"/>
                                         </p:tgtEl>
                                       </p:cBhvr>
                                       <p:to x="100000" y="100000"/>
@@ -20096,7 +21991,7 @@
                                           </p:stCondLst>
                                         </p:cTn>
                                         <p:tgtEl>
-                                          <p:spTgt spid="249"/>
+                                          <p:spTgt spid="275"/>
                                         </p:tgtEl>
                                         <p:attrNameLst>
                                           <p:attrName>style.visibility</p:attrName>
@@ -20114,7 +22009,7 @@
                                           </p:stCondLst>
                                         </p:cTn>
                                         <p:tgtEl>
-                                          <p:spTgt spid="249"/>
+                                          <p:spTgt spid="275"/>
                                         </p:tgtEl>
                                       </p:cBhvr>
                                     </p:animEffect>
@@ -20126,7 +22021,7 @@
                                           </p:stCondLst>
                                         </p:cTn>
                                         <p:tgtEl>
-                                          <p:spTgt spid="249"/>
+                                          <p:spTgt spid="275"/>
                                         </p:tgtEl>
                                         <p:attrNameLst>
                                           <p:attrName>ppt_x</p:attrName>
@@ -20153,7 +22048,7 @@
                                           </p:stCondLst>
                                         </p:cTn>
                                         <p:tgtEl>
-                                          <p:spTgt spid="249"/>
+                                          <p:spTgt spid="275"/>
                                         </p:tgtEl>
                                         <p:attrNameLst>
                                           <p:attrName>ppt_y</p:attrName>
@@ -20180,7 +22075,7 @@
                                           </p:stCondLst>
                                         </p:cTn>
                                         <p:tgtEl>
-                                          <p:spTgt spid="249"/>
+                                          <p:spTgt spid="275"/>
                                         </p:tgtEl>
                                         <p:attrNameLst>
                                           <p:attrName>ppt_y</p:attrName>
@@ -20207,7 +22102,7 @@
                                           </p:stCondLst>
                                         </p:cTn>
                                         <p:tgtEl>
-                                          <p:spTgt spid="249"/>
+                                          <p:spTgt spid="275"/>
                                         </p:tgtEl>
                                         <p:attrNameLst>
                                           <p:attrName>ppt_y</p:attrName>
@@ -20234,7 +22129,7 @@
                                           </p:stCondLst>
                                         </p:cTn>
                                         <p:tgtEl>
-                                          <p:spTgt spid="249"/>
+                                          <p:spTgt spid="275"/>
                                         </p:tgtEl>
                                         <p:attrNameLst>
                                           <p:attrName>ppt_y</p:attrName>
@@ -20261,7 +22156,7 @@
                                           </p:stCondLst>
                                         </p:cTn>
                                         <p:tgtEl>
-                                          <p:spTgt spid="249"/>
+                                          <p:spTgt spid="275"/>
                                         </p:tgtEl>
                                       </p:cBhvr>
                                       <p:to x="100000" y="60000"/>
@@ -20274,7 +22169,7 @@
                                           </p:stCondLst>
                                         </p:cTn>
                                         <p:tgtEl>
-                                          <p:spTgt spid="249"/>
+                                          <p:spTgt spid="275"/>
                                         </p:tgtEl>
                                       </p:cBhvr>
                                       <p:to x="100000" y="100000"/>
@@ -20287,7 +22182,7 @@
                                           </p:stCondLst>
                                         </p:cTn>
                                         <p:tgtEl>
-                                          <p:spTgt spid="249"/>
+                                          <p:spTgt spid="275"/>
                                         </p:tgtEl>
                                       </p:cBhvr>
                                       <p:to x="100000" y="80000"/>
@@ -20300,7 +22195,7 @@
                                           </p:stCondLst>
                                         </p:cTn>
                                         <p:tgtEl>
-                                          <p:spTgt spid="249"/>
+                                          <p:spTgt spid="275"/>
                                         </p:tgtEl>
                                       </p:cBhvr>
                                       <p:to x="100000" y="100000"/>
@@ -20313,7 +22208,7 @@
                                           </p:stCondLst>
                                         </p:cTn>
                                         <p:tgtEl>
-                                          <p:spTgt spid="249"/>
+                                          <p:spTgt spid="275"/>
                                         </p:tgtEl>
                                       </p:cBhvr>
                                       <p:to x="100000" y="90000"/>
@@ -20326,7 +22221,7 @@
                                           </p:stCondLst>
                                         </p:cTn>
                                         <p:tgtEl>
-                                          <p:spTgt spid="249"/>
+                                          <p:spTgt spid="275"/>
                                         </p:tgtEl>
                                       </p:cBhvr>
                                       <p:to x="100000" y="100000"/>
@@ -20339,7 +22234,7 @@
                                           </p:stCondLst>
                                         </p:cTn>
                                         <p:tgtEl>
-                                          <p:spTgt spid="249"/>
+                                          <p:spTgt spid="275"/>
                                         </p:tgtEl>
                                       </p:cBhvr>
                                       <p:to x="100000" y="95000"/>
@@ -20352,7 +22247,7 @@
                                           </p:stCondLst>
                                         </p:cTn>
                                         <p:tgtEl>
-                                          <p:spTgt spid="249"/>
+                                          <p:spTgt spid="275"/>
                                         </p:tgtEl>
                                       </p:cBhvr>
                                       <p:to x="100000" y="100000"/>
@@ -20374,7 +22269,7 @@
                                           </p:stCondLst>
                                         </p:cTn>
                                         <p:tgtEl>
-                                          <p:spTgt spid="250"/>
+                                          <p:spTgt spid="276"/>
                                         </p:tgtEl>
                                         <p:attrNameLst>
                                           <p:attrName>style.visibility</p:attrName>
@@ -20392,7 +22287,7 @@
                                           </p:stCondLst>
                                         </p:cTn>
                                         <p:tgtEl>
-                                          <p:spTgt spid="250"/>
+                                          <p:spTgt spid="276"/>
                                         </p:tgtEl>
                                       </p:cBhvr>
                                     </p:animEffect>
@@ -20404,7 +22299,7 @@
                                           </p:stCondLst>
                                         </p:cTn>
                                         <p:tgtEl>
-                                          <p:spTgt spid="250"/>
+                                          <p:spTgt spid="276"/>
                                         </p:tgtEl>
                                         <p:attrNameLst>
                                           <p:attrName>ppt_x</p:attrName>
@@ -20431,7 +22326,7 @@
                                           </p:stCondLst>
                                         </p:cTn>
                                         <p:tgtEl>
-                                          <p:spTgt spid="250"/>
+                                          <p:spTgt spid="276"/>
                                         </p:tgtEl>
                                         <p:attrNameLst>
                                           <p:attrName>ppt_y</p:attrName>
@@ -20458,7 +22353,7 @@
                                           </p:stCondLst>
                                         </p:cTn>
                                         <p:tgtEl>
-                                          <p:spTgt spid="250"/>
+                                          <p:spTgt spid="276"/>
                                         </p:tgtEl>
                                         <p:attrNameLst>
                                           <p:attrName>ppt_y</p:attrName>
@@ -20485,7 +22380,7 @@
                                           </p:stCondLst>
                                         </p:cTn>
                                         <p:tgtEl>
-                                          <p:spTgt spid="250"/>
+                                          <p:spTgt spid="276"/>
                                         </p:tgtEl>
                                         <p:attrNameLst>
                                           <p:attrName>ppt_y</p:attrName>
@@ -20512,7 +22407,7 @@
                                           </p:stCondLst>
                                         </p:cTn>
                                         <p:tgtEl>
-                                          <p:spTgt spid="250"/>
+                                          <p:spTgt spid="276"/>
                                         </p:tgtEl>
                                         <p:attrNameLst>
                                           <p:attrName>ppt_y</p:attrName>
@@ -20539,7 +22434,7 @@
                                           </p:stCondLst>
                                         </p:cTn>
                                         <p:tgtEl>
-                                          <p:spTgt spid="250"/>
+                                          <p:spTgt spid="276"/>
                                         </p:tgtEl>
                                       </p:cBhvr>
                                       <p:to x="100000" y="60000"/>
@@ -20552,7 +22447,7 @@
                                           </p:stCondLst>
                                         </p:cTn>
                                         <p:tgtEl>
-                                          <p:spTgt spid="250"/>
+                                          <p:spTgt spid="276"/>
                                         </p:tgtEl>
                                       </p:cBhvr>
                                       <p:to x="100000" y="100000"/>
@@ -20565,7 +22460,7 @@
                                           </p:stCondLst>
                                         </p:cTn>
                                         <p:tgtEl>
-                                          <p:spTgt spid="250"/>
+                                          <p:spTgt spid="276"/>
                                         </p:tgtEl>
                                       </p:cBhvr>
                                       <p:to x="100000" y="80000"/>
@@ -20578,7 +22473,7 @@
                                           </p:stCondLst>
                                         </p:cTn>
                                         <p:tgtEl>
-                                          <p:spTgt spid="250"/>
+                                          <p:spTgt spid="276"/>
                                         </p:tgtEl>
                                       </p:cBhvr>
                                       <p:to x="100000" y="100000"/>
@@ -20591,7 +22486,7 @@
                                           </p:stCondLst>
                                         </p:cTn>
                                         <p:tgtEl>
-                                          <p:spTgt spid="250"/>
+                                          <p:spTgt spid="276"/>
                                         </p:tgtEl>
                                       </p:cBhvr>
                                       <p:to x="100000" y="90000"/>
@@ -20604,7 +22499,7 @@
                                           </p:stCondLst>
                                         </p:cTn>
                                         <p:tgtEl>
-                                          <p:spTgt spid="250"/>
+                                          <p:spTgt spid="276"/>
                                         </p:tgtEl>
                                       </p:cBhvr>
                                       <p:to x="100000" y="100000"/>
@@ -20617,7 +22512,7 @@
                                           </p:stCondLst>
                                         </p:cTn>
                                         <p:tgtEl>
-                                          <p:spTgt spid="250"/>
+                                          <p:spTgt spid="276"/>
                                         </p:tgtEl>
                                       </p:cBhvr>
                                       <p:to x="100000" y="95000"/>
@@ -20630,7 +22525,7 @@
                                           </p:stCondLst>
                                         </p:cTn>
                                         <p:tgtEl>
-                                          <p:spTgt spid="250"/>
+                                          <p:spTgt spid="276"/>
                                         </p:tgtEl>
                                       </p:cBhvr>
                                       <p:to x="100000" y="100000"/>
@@ -20670,7 +22565,7 @@
                                           </p:stCondLst>
                                         </p:cTn>
                                         <p:tgtEl>
-                                          <p:spTgt spid="252"/>
+                                          <p:spTgt spid="278"/>
                                         </p:tgtEl>
                                         <p:attrNameLst>
                                           <p:attrName>style.visibility</p:attrName>
@@ -20688,7 +22583,7 @@
                                           </p:stCondLst>
                                         </p:cTn>
                                         <p:tgtEl>
-                                          <p:spTgt spid="252"/>
+                                          <p:spTgt spid="278"/>
                                         </p:tgtEl>
                                       </p:cBhvr>
                                     </p:animEffect>
@@ -20700,7 +22595,7 @@
                                           </p:stCondLst>
                                         </p:cTn>
                                         <p:tgtEl>
-                                          <p:spTgt spid="252"/>
+                                          <p:spTgt spid="278"/>
                                         </p:tgtEl>
                                         <p:attrNameLst>
                                           <p:attrName>ppt_x</p:attrName>
@@ -20727,7 +22622,7 @@
                                           </p:stCondLst>
                                         </p:cTn>
                                         <p:tgtEl>
-                                          <p:spTgt spid="252"/>
+                                          <p:spTgt spid="278"/>
                                         </p:tgtEl>
                                         <p:attrNameLst>
                                           <p:attrName>ppt_y</p:attrName>
@@ -20754,7 +22649,7 @@
                                           </p:stCondLst>
                                         </p:cTn>
                                         <p:tgtEl>
-                                          <p:spTgt spid="252"/>
+                                          <p:spTgt spid="278"/>
                                         </p:tgtEl>
                                         <p:attrNameLst>
                                           <p:attrName>ppt_y</p:attrName>
@@ -20781,7 +22676,7 @@
                                           </p:stCondLst>
                                         </p:cTn>
                                         <p:tgtEl>
-                                          <p:spTgt spid="252"/>
+                                          <p:spTgt spid="278"/>
                                         </p:tgtEl>
                                         <p:attrNameLst>
                                           <p:attrName>ppt_y</p:attrName>
@@ -20808,7 +22703,7 @@
                                           </p:stCondLst>
                                         </p:cTn>
                                         <p:tgtEl>
-                                          <p:spTgt spid="252"/>
+                                          <p:spTgt spid="278"/>
                                         </p:tgtEl>
                                         <p:attrNameLst>
                                           <p:attrName>ppt_y</p:attrName>
@@ -20835,7 +22730,7 @@
                                           </p:stCondLst>
                                         </p:cTn>
                                         <p:tgtEl>
-                                          <p:spTgt spid="252"/>
+                                          <p:spTgt spid="278"/>
                                         </p:tgtEl>
                                       </p:cBhvr>
                                       <p:to x="100000" y="60000"/>
@@ -20848,7 +22743,7 @@
                                           </p:stCondLst>
                                         </p:cTn>
                                         <p:tgtEl>
-                                          <p:spTgt spid="252"/>
+                                          <p:spTgt spid="278"/>
                                         </p:tgtEl>
                                       </p:cBhvr>
                                       <p:to x="100000" y="100000"/>
@@ -20861,7 +22756,7 @@
                                           </p:stCondLst>
                                         </p:cTn>
                                         <p:tgtEl>
-                                          <p:spTgt spid="252"/>
+                                          <p:spTgt spid="278"/>
                                         </p:tgtEl>
                                       </p:cBhvr>
                                       <p:to x="100000" y="80000"/>
@@ -20874,7 +22769,7 @@
                                           </p:stCondLst>
                                         </p:cTn>
                                         <p:tgtEl>
-                                          <p:spTgt spid="252"/>
+                                          <p:spTgt spid="278"/>
                                         </p:tgtEl>
                                       </p:cBhvr>
                                       <p:to x="100000" y="100000"/>
@@ -20887,7 +22782,7 @@
                                           </p:stCondLst>
                                         </p:cTn>
                                         <p:tgtEl>
-                                          <p:spTgt spid="252"/>
+                                          <p:spTgt spid="278"/>
                                         </p:tgtEl>
                                       </p:cBhvr>
                                       <p:to x="100000" y="90000"/>
@@ -20900,7 +22795,7 @@
                                           </p:stCondLst>
                                         </p:cTn>
                                         <p:tgtEl>
-                                          <p:spTgt spid="252"/>
+                                          <p:spTgt spid="278"/>
                                         </p:tgtEl>
                                       </p:cBhvr>
                                       <p:to x="100000" y="100000"/>
@@ -20913,7 +22808,7 @@
                                           </p:stCondLst>
                                         </p:cTn>
                                         <p:tgtEl>
-                                          <p:spTgt spid="252"/>
+                                          <p:spTgt spid="278"/>
                                         </p:tgtEl>
                                       </p:cBhvr>
                                       <p:to x="100000" y="95000"/>
@@ -20926,7 +22821,7 @@
                                           </p:stCondLst>
                                         </p:cTn>
                                         <p:tgtEl>
-                                          <p:spTgt spid="252"/>
+                                          <p:spTgt spid="278"/>
                                         </p:tgtEl>
                                       </p:cBhvr>
                                       <p:to x="100000" y="100000"/>
@@ -20948,7 +22843,7 @@
                                           </p:stCondLst>
                                         </p:cTn>
                                         <p:tgtEl>
-                                          <p:spTgt spid="253"/>
+                                          <p:spTgt spid="279"/>
                                         </p:tgtEl>
                                         <p:attrNameLst>
                                           <p:attrName>style.visibility</p:attrName>
@@ -20966,7 +22861,7 @@
                                           </p:stCondLst>
                                         </p:cTn>
                                         <p:tgtEl>
-                                          <p:spTgt spid="253"/>
+                                          <p:spTgt spid="279"/>
                                         </p:tgtEl>
                                       </p:cBhvr>
                                     </p:animEffect>
@@ -20978,7 +22873,7 @@
                                           </p:stCondLst>
                                         </p:cTn>
                                         <p:tgtEl>
-                                          <p:spTgt spid="253"/>
+                                          <p:spTgt spid="279"/>
                                         </p:tgtEl>
                                         <p:attrNameLst>
                                           <p:attrName>ppt_x</p:attrName>
@@ -21005,7 +22900,7 @@
                                           </p:stCondLst>
                                         </p:cTn>
                                         <p:tgtEl>
-                                          <p:spTgt spid="253"/>
+                                          <p:spTgt spid="279"/>
                                         </p:tgtEl>
                                         <p:attrNameLst>
                                           <p:attrName>ppt_y</p:attrName>
@@ -21032,7 +22927,7 @@
                                           </p:stCondLst>
                                         </p:cTn>
                                         <p:tgtEl>
-                                          <p:spTgt spid="253"/>
+                                          <p:spTgt spid="279"/>
                                         </p:tgtEl>
                                         <p:attrNameLst>
                                           <p:attrName>ppt_y</p:attrName>
@@ -21059,7 +22954,7 @@
                                           </p:stCondLst>
                                         </p:cTn>
                                         <p:tgtEl>
-                                          <p:spTgt spid="253"/>
+                                          <p:spTgt spid="279"/>
                                         </p:tgtEl>
                                         <p:attrNameLst>
                                           <p:attrName>ppt_y</p:attrName>
@@ -21086,7 +22981,7 @@
                                           </p:stCondLst>
                                         </p:cTn>
                                         <p:tgtEl>
-                                          <p:spTgt spid="253"/>
+                                          <p:spTgt spid="279"/>
                                         </p:tgtEl>
                                         <p:attrNameLst>
                                           <p:attrName>ppt_y</p:attrName>
@@ -21113,7 +23008,7 @@
                                           </p:stCondLst>
                                         </p:cTn>
                                         <p:tgtEl>
-                                          <p:spTgt spid="253"/>
+                                          <p:spTgt spid="279"/>
                                         </p:tgtEl>
                                       </p:cBhvr>
                                       <p:to x="100000" y="60000"/>
@@ -21126,7 +23021,7 @@
                                           </p:stCondLst>
                                         </p:cTn>
                                         <p:tgtEl>
-                                          <p:spTgt spid="253"/>
+                                          <p:spTgt spid="279"/>
                                         </p:tgtEl>
                                       </p:cBhvr>
                                       <p:to x="100000" y="100000"/>
@@ -21139,7 +23034,7 @@
                                           </p:stCondLst>
                                         </p:cTn>
                                         <p:tgtEl>
-                                          <p:spTgt spid="253"/>
+                                          <p:spTgt spid="279"/>
                                         </p:tgtEl>
                                       </p:cBhvr>
                                       <p:to x="100000" y="80000"/>
@@ -21152,7 +23047,7 @@
                                           </p:stCondLst>
                                         </p:cTn>
                                         <p:tgtEl>
-                                          <p:spTgt spid="253"/>
+                                          <p:spTgt spid="279"/>
                                         </p:tgtEl>
                                       </p:cBhvr>
                                       <p:to x="100000" y="100000"/>
@@ -21165,7 +23060,7 @@
                                           </p:stCondLst>
                                         </p:cTn>
                                         <p:tgtEl>
-                                          <p:spTgt spid="253"/>
+                                          <p:spTgt spid="279"/>
                                         </p:tgtEl>
                                       </p:cBhvr>
                                       <p:to x="100000" y="90000"/>
@@ -21178,7 +23073,7 @@
                                           </p:stCondLst>
                                         </p:cTn>
                                         <p:tgtEl>
-                                          <p:spTgt spid="253"/>
+                                          <p:spTgt spid="279"/>
                                         </p:tgtEl>
                                       </p:cBhvr>
                                       <p:to x="100000" y="100000"/>
@@ -21191,7 +23086,7 @@
                                           </p:stCondLst>
                                         </p:cTn>
                                         <p:tgtEl>
-                                          <p:spTgt spid="253"/>
+                                          <p:spTgt spid="279"/>
                                         </p:tgtEl>
                                       </p:cBhvr>
                                       <p:to x="100000" y="95000"/>
@@ -21204,7 +23099,7 @@
                                           </p:stCondLst>
                                         </p:cTn>
                                         <p:tgtEl>
-                                          <p:spTgt spid="253"/>
+                                          <p:spTgt spid="279"/>
                                         </p:tgtEl>
                                       </p:cBhvr>
                                       <p:to x="100000" y="100000"/>
@@ -21243,7 +23138,7 @@
 </p:sld>
 </file>
 
-<file path=ppt/slides/slide24.xml><?xml version="1.0" encoding="utf-8"?>
+<file path=ppt/slides/slide26.xml><?xml version="1.0" encoding="utf-8"?>
 <p:sld xmlns:a="http://schemas.openxmlformats.org/drawingml/2006/main" xmlns:p="http://schemas.openxmlformats.org/presentationml/2006/main" xmlns:r="http://schemas.openxmlformats.org/officeDocument/2006/relationships" xmlns:p14="http://schemas.microsoft.com/office/powerpoint/2010/main" xmlns:p15="http://schemas.microsoft.com/office/powerpoint/2012/main" xmlns:mc="http://schemas.openxmlformats.org/markup-compatibility/2006">
   <p:cSld>
     <p:bg>
@@ -21269,14 +23164,14 @@
       </p:grpSpPr>
       <p:sp>
         <p:nvSpPr>
-          <p:cNvPr id="254" name="Shape 0"/>
+          <p:cNvPr id="280" name="Shape 0"/>
           <p:cNvSpPr/>
           <p:nvPr/>
         </p:nvSpPr>
         <p:spPr>
           <a:xfrm>
             <a:off x="0" y="0"/>
-            <a:ext cx="136440" cy="5142960"/>
+            <a:ext cx="135720" cy="5142240"/>
           </a:xfrm>
           <a:prstGeom prst="rect">
             <a:avLst/>
@@ -21295,7 +23190,7 @@
           <a:fontRef idx="minor"/>
         </p:style>
         <p:txBody>
-          <a:bodyPr lIns="68400" tIns="45000" rIns="68400" bIns="45000" anchor="t">
+          <a:bodyPr lIns="68040" tIns="45000" rIns="68040" bIns="45000" anchor="t">
             <a:noAutofit/>
           </a:bodyPr>
           <a:p>
@@ -21312,14 +23207,14 @@
       </p:sp>
       <p:sp>
         <p:nvSpPr>
-          <p:cNvPr id="255" name="Shape 1"/>
+          <p:cNvPr id="281" name="Shape 1"/>
           <p:cNvSpPr/>
           <p:nvPr/>
         </p:nvSpPr>
         <p:spPr>
           <a:xfrm>
             <a:off x="137160" y="2240280"/>
-            <a:ext cx="9006120" cy="54000"/>
+            <a:ext cx="9005400" cy="53280"/>
           </a:xfrm>
           <a:prstGeom prst="rect">
             <a:avLst/>
@@ -21355,14 +23250,14 @@
       </p:sp>
       <p:sp>
         <p:nvSpPr>
-          <p:cNvPr id="256" name="Text 2"/>
+          <p:cNvPr id="282" name="Text 2"/>
           <p:cNvSpPr/>
           <p:nvPr/>
         </p:nvSpPr>
         <p:spPr>
           <a:xfrm>
             <a:off x="457200" y="-126720"/>
-            <a:ext cx="8411760" cy="1279440"/>
+            <a:ext cx="8411040" cy="1278720"/>
           </a:xfrm>
           <a:prstGeom prst="rect">
             <a:avLst/>
@@ -21416,14 +23311,14 @@
       </p:sp>
       <p:sp>
         <p:nvSpPr>
-          <p:cNvPr id="257" name="Text 3"/>
+          <p:cNvPr id="283" name="Text 3"/>
           <p:cNvSpPr/>
           <p:nvPr/>
         </p:nvSpPr>
         <p:spPr>
           <a:xfrm>
             <a:off x="457200" y="1371600"/>
-            <a:ext cx="8228880" cy="3199680"/>
+            <a:ext cx="8228160" cy="3198960"/>
           </a:xfrm>
           <a:prstGeom prst="rect">
             <a:avLst/>
@@ -21615,14 +23510,14 @@
       </p:sp>
       <p:sp>
         <p:nvSpPr>
-          <p:cNvPr id="258" name="Shape 4"/>
+          <p:cNvPr id="284" name="Shape 4"/>
           <p:cNvSpPr/>
           <p:nvPr/>
         </p:nvSpPr>
         <p:spPr>
           <a:xfrm>
             <a:off x="457200" y="4206240"/>
-            <a:ext cx="8228880" cy="639360"/>
+            <a:ext cx="8228160" cy="638640"/>
           </a:xfrm>
           <a:prstGeom prst="rect">
             <a:avLst/>
@@ -21658,14 +23553,14 @@
       </p:sp>
       <p:sp>
         <p:nvSpPr>
-          <p:cNvPr id="259" name="Text 5"/>
+          <p:cNvPr id="285" name="Text 5"/>
           <p:cNvSpPr/>
           <p:nvPr/>
         </p:nvSpPr>
         <p:spPr>
           <a:xfrm>
             <a:off x="548640" y="4251960"/>
-            <a:ext cx="8046000" cy="547920"/>
+            <a:ext cx="8045280" cy="547200"/>
           </a:xfrm>
           <a:prstGeom prst="rect">
             <a:avLst/>
@@ -21763,7 +23658,7 @@
         <p:spPr>
           <a:xfrm>
             <a:off x="0" y="0"/>
-            <a:ext cx="9143280" cy="90720"/>
+            <a:ext cx="9142560" cy="90000"/>
           </a:xfrm>
           <a:prstGeom prst="rect">
             <a:avLst/>
@@ -21806,7 +23701,7 @@
         <p:spPr>
           <a:xfrm>
             <a:off x="0" y="5052240"/>
-            <a:ext cx="9143280" cy="90720"/>
+            <a:ext cx="9142560" cy="90000"/>
           </a:xfrm>
           <a:prstGeom prst="rect">
             <a:avLst/>
@@ -21849,7 +23744,7 @@
         <p:spPr>
           <a:xfrm>
             <a:off x="457200" y="1645920"/>
-            <a:ext cx="8228880" cy="1828080"/>
+            <a:ext cx="8228160" cy="1827360"/>
           </a:xfrm>
           <a:prstGeom prst="rect">
             <a:avLst/>
@@ -21947,7 +23842,7 @@
         <p:spPr>
           <a:xfrm>
             <a:off x="0" y="0"/>
-            <a:ext cx="9143280" cy="685080"/>
+            <a:ext cx="9142560" cy="684360"/>
           </a:xfrm>
           <a:prstGeom prst="rect">
             <a:avLst/>
@@ -21990,7 +23885,7 @@
         <p:spPr>
           <a:xfrm>
             <a:off x="274320" y="45720"/>
-            <a:ext cx="8594640" cy="593640"/>
+            <a:ext cx="8593920" cy="592920"/>
           </a:xfrm>
           <a:prstGeom prst="rect">
             <a:avLst/>
@@ -22051,7 +23946,7 @@
         <p:spPr>
           <a:xfrm>
             <a:off x="0" y="685800"/>
-            <a:ext cx="72360" cy="4457160"/>
+            <a:ext cx="71640" cy="4456440"/>
           </a:xfrm>
           <a:prstGeom prst="rect">
             <a:avLst/>
@@ -22070,7 +23965,7 @@
           <a:fontRef idx="minor"/>
         </p:style>
         <p:txBody>
-          <a:bodyPr lIns="36360" tIns="45000" rIns="36360" bIns="45000" anchor="t">
+          <a:bodyPr lIns="36000" tIns="45000" rIns="36000" bIns="45000" anchor="t">
             <a:noAutofit/>
           </a:bodyPr>
           <a:p>
@@ -22094,7 +23989,7 @@
         <p:spPr>
           <a:xfrm>
             <a:off x="274320" y="914400"/>
-            <a:ext cx="4114080" cy="365040"/>
+            <a:ext cx="4113360" cy="364320"/>
           </a:xfrm>
           <a:prstGeom prst="rect">
             <a:avLst/>
@@ -22155,7 +24050,7 @@
         <p:spPr>
           <a:xfrm>
             <a:off x="274320" y="1280160"/>
-            <a:ext cx="4114080" cy="2742480"/>
+            <a:ext cx="4113360" cy="2741760"/>
           </a:xfrm>
           <a:prstGeom prst="rect">
             <a:avLst/>
@@ -22326,7 +24221,7 @@
         <p:spPr>
           <a:xfrm>
             <a:off x="4754880" y="914400"/>
-            <a:ext cx="4114080" cy="3474000"/>
+            <a:ext cx="4113360" cy="3473280"/>
           </a:xfrm>
           <a:prstGeom prst="rect">
             <a:avLst/>
@@ -22376,7 +24271,7 @@
         <p:spPr>
           <a:xfrm>
             <a:off x="4846320" y="1005840"/>
-            <a:ext cx="3931200" cy="2559600"/>
+            <a:ext cx="3930480" cy="2558880"/>
           </a:xfrm>
           <a:prstGeom prst="rect">
             <a:avLst/>
@@ -22527,7 +24422,7 @@
         <p:spPr>
           <a:xfrm>
             <a:off x="4846320" y="3657600"/>
-            <a:ext cx="3931200" cy="547920"/>
+            <a:ext cx="3930480" cy="547200"/>
           </a:xfrm>
           <a:prstGeom prst="rect">
             <a:avLst/>
@@ -22625,7 +24520,7 @@
         <p:spPr>
           <a:xfrm>
             <a:off x="0" y="0"/>
-            <a:ext cx="9143280" cy="90720"/>
+            <a:ext cx="9142560" cy="90000"/>
           </a:xfrm>
           <a:prstGeom prst="rect">
             <a:avLst/>
@@ -22668,7 +24563,7 @@
         <p:spPr>
           <a:xfrm>
             <a:off x="0" y="5052240"/>
-            <a:ext cx="9143280" cy="90720"/>
+            <a:ext cx="9142560" cy="90000"/>
           </a:xfrm>
           <a:prstGeom prst="rect">
             <a:avLst/>
@@ -22711,7 +24606,7 @@
         <p:spPr>
           <a:xfrm>
             <a:off x="457200" y="1645920"/>
-            <a:ext cx="8228880" cy="1828080"/>
+            <a:ext cx="8228160" cy="1827360"/>
           </a:xfrm>
           <a:prstGeom prst="rect">
             <a:avLst/>
@@ -22809,7 +24704,7 @@
         <p:spPr>
           <a:xfrm>
             <a:off x="0" y="0"/>
-            <a:ext cx="9143280" cy="685080"/>
+            <a:ext cx="9142560" cy="684360"/>
           </a:xfrm>
           <a:prstGeom prst="rect">
             <a:avLst/>
@@ -22852,7 +24747,7 @@
         <p:spPr>
           <a:xfrm>
             <a:off x="274320" y="45720"/>
-            <a:ext cx="8594640" cy="593640"/>
+            <a:ext cx="8593920" cy="592920"/>
           </a:xfrm>
           <a:prstGeom prst="rect">
             <a:avLst/>
@@ -22913,7 +24808,7 @@
         <p:spPr>
           <a:xfrm>
             <a:off x="0" y="685800"/>
-            <a:ext cx="72360" cy="4457160"/>
+            <a:ext cx="71640" cy="4456440"/>
           </a:xfrm>
           <a:prstGeom prst="rect">
             <a:avLst/>
@@ -22932,7 +24827,7 @@
           <a:fontRef idx="minor"/>
         </p:style>
         <p:txBody>
-          <a:bodyPr lIns="36360" tIns="45000" rIns="36360" bIns="45000" anchor="t">
+          <a:bodyPr lIns="36000" tIns="45000" rIns="36000" bIns="45000" anchor="t">
             <a:noAutofit/>
           </a:bodyPr>
           <a:p>
@@ -22956,7 +24851,7 @@
         <p:spPr>
           <a:xfrm>
             <a:off x="1002960" y="2377440"/>
-            <a:ext cx="7846560" cy="45000"/>
+            <a:ext cx="7845840" cy="44280"/>
           </a:xfrm>
           <a:prstGeom prst="rect">
             <a:avLst/>
@@ -22999,7 +24894,7 @@
         <p:spPr>
           <a:xfrm>
             <a:off x="966960" y="2258640"/>
-            <a:ext cx="236880" cy="236880"/>
+            <a:ext cx="236160" cy="236160"/>
           </a:xfrm>
           <a:prstGeom prst="ellipse">
             <a:avLst/>
@@ -23042,7 +24937,7 @@
         <p:spPr>
           <a:xfrm>
             <a:off x="609120" y="1828800"/>
-            <a:ext cx="1096560" cy="319320"/>
+            <a:ext cx="1095840" cy="318600"/>
           </a:xfrm>
           <a:prstGeom prst="rect">
             <a:avLst/>
@@ -23103,7 +24998,7 @@
         <p:spPr>
           <a:xfrm>
             <a:off x="380520" y="2596320"/>
-            <a:ext cx="1553760" cy="2102400"/>
+            <a:ext cx="1553040" cy="2101680"/>
           </a:xfrm>
           <a:prstGeom prst="rect">
             <a:avLst/>
@@ -23164,7 +25059,7 @@
         <p:spPr>
           <a:xfrm>
             <a:off x="2730600" y="2258640"/>
-            <a:ext cx="236880" cy="236880"/>
+            <a:ext cx="236160" cy="236160"/>
           </a:xfrm>
           <a:prstGeom prst="ellipse">
             <a:avLst/>
@@ -23207,7 +25102,7 @@
         <p:spPr>
           <a:xfrm>
             <a:off x="2300760" y="1828800"/>
-            <a:ext cx="1096560" cy="319320"/>
+            <a:ext cx="1095840" cy="318600"/>
           </a:xfrm>
           <a:prstGeom prst="rect">
             <a:avLst/>
@@ -23268,7 +25163,7 @@
         <p:spPr>
           <a:xfrm>
             <a:off x="2144160" y="2632320"/>
-            <a:ext cx="1553760" cy="2102400"/>
+            <a:ext cx="1553040" cy="2101680"/>
           </a:xfrm>
           <a:prstGeom prst="rect">
             <a:avLst/>
@@ -23329,7 +25224,7 @@
         <p:spPr>
           <a:xfrm>
             <a:off x="4206240" y="2258640"/>
-            <a:ext cx="236880" cy="236880"/>
+            <a:ext cx="236160" cy="236160"/>
           </a:xfrm>
           <a:prstGeom prst="ellipse">
             <a:avLst/>
@@ -23372,7 +25267,7 @@
         <p:spPr>
           <a:xfrm>
             <a:off x="3776400" y="1828800"/>
-            <a:ext cx="1096560" cy="319320"/>
+            <a:ext cx="1095840" cy="318600"/>
           </a:xfrm>
           <a:prstGeom prst="rect">
             <a:avLst/>
@@ -23433,7 +25328,7 @@
         <p:spPr>
           <a:xfrm>
             <a:off x="3655800" y="2632320"/>
-            <a:ext cx="1553760" cy="2102400"/>
+            <a:ext cx="1553040" cy="2101680"/>
           </a:xfrm>
           <a:prstGeom prst="rect">
             <a:avLst/>
@@ -23494,7 +25389,7 @@
         <p:spPr>
           <a:xfrm>
             <a:off x="5789880" y="2258640"/>
-            <a:ext cx="236880" cy="236880"/>
+            <a:ext cx="236160" cy="236160"/>
           </a:xfrm>
           <a:prstGeom prst="ellipse">
             <a:avLst/>
@@ -23537,7 +25432,7 @@
         <p:spPr>
           <a:xfrm>
             <a:off x="5360040" y="1828800"/>
-            <a:ext cx="1096560" cy="319320"/>
+            <a:ext cx="1095840" cy="318600"/>
           </a:xfrm>
           <a:prstGeom prst="rect">
             <a:avLst/>
@@ -23598,7 +25493,7 @@
         <p:spPr>
           <a:xfrm>
             <a:off x="5203440" y="2560320"/>
-            <a:ext cx="1553760" cy="2102400"/>
+            <a:ext cx="1553040" cy="2101680"/>
           </a:xfrm>
           <a:prstGeom prst="rect">
             <a:avLst/>
@@ -23659,7 +25554,7 @@
         <p:spPr>
           <a:xfrm>
             <a:off x="7625520" y="2258640"/>
-            <a:ext cx="236880" cy="236880"/>
+            <a:ext cx="236160" cy="236160"/>
           </a:xfrm>
           <a:prstGeom prst="ellipse">
             <a:avLst/>
@@ -23702,7 +25597,7 @@
         <p:spPr>
           <a:xfrm>
             <a:off x="7231680" y="1828800"/>
-            <a:ext cx="1096560" cy="319320"/>
+            <a:ext cx="1095840" cy="318600"/>
           </a:xfrm>
           <a:prstGeom prst="rect">
             <a:avLst/>
@@ -23763,7 +25658,7 @@
         <p:spPr>
           <a:xfrm>
             <a:off x="6921720" y="2659680"/>
-            <a:ext cx="1553760" cy="2102400"/>
+            <a:ext cx="1553040" cy="2101680"/>
           </a:xfrm>
           <a:prstGeom prst="rect">
             <a:avLst/>
@@ -23861,7 +25756,7 @@
         <p:spPr>
           <a:xfrm>
             <a:off x="0" y="0"/>
-            <a:ext cx="9143280" cy="90720"/>
+            <a:ext cx="9142560" cy="90000"/>
           </a:xfrm>
           <a:prstGeom prst="rect">
             <a:avLst/>
@@ -23904,7 +25799,7 @@
         <p:spPr>
           <a:xfrm>
             <a:off x="0" y="5052240"/>
-            <a:ext cx="9143280" cy="90720"/>
+            <a:ext cx="9142560" cy="90000"/>
           </a:xfrm>
           <a:prstGeom prst="rect">
             <a:avLst/>
@@ -23947,7 +25842,7 @@
         <p:spPr>
           <a:xfrm>
             <a:off x="457200" y="1645920"/>
-            <a:ext cx="8228880" cy="1828080"/>
+            <a:ext cx="8228160" cy="1827360"/>
           </a:xfrm>
           <a:prstGeom prst="rect">
             <a:avLst/>
@@ -24045,7 +25940,7 @@
         <p:spPr>
           <a:xfrm>
             <a:off x="0" y="0"/>
-            <a:ext cx="9143280" cy="685080"/>
+            <a:ext cx="9142560" cy="684360"/>
           </a:xfrm>
           <a:prstGeom prst="rect">
             <a:avLst/>
@@ -24088,7 +25983,7 @@
         <p:spPr>
           <a:xfrm>
             <a:off x="274320" y="45720"/>
-            <a:ext cx="8594640" cy="593640"/>
+            <a:ext cx="8593920" cy="592920"/>
           </a:xfrm>
           <a:prstGeom prst="rect">
             <a:avLst/>
@@ -24149,7 +26044,7 @@
         <p:spPr>
           <a:xfrm>
             <a:off x="0" y="685800"/>
-            <a:ext cx="72360" cy="4457160"/>
+            <a:ext cx="71640" cy="4456440"/>
           </a:xfrm>
           <a:prstGeom prst="rect">
             <a:avLst/>
@@ -24168,7 +26063,7 @@
           <a:fontRef idx="minor"/>
         </p:style>
         <p:txBody>
-          <a:bodyPr lIns="36360" tIns="45000" rIns="36360" bIns="45000" anchor="t">
+          <a:bodyPr lIns="36000" tIns="45000" rIns="36000" bIns="45000" anchor="t">
             <a:noAutofit/>
           </a:bodyPr>
           <a:p>
@@ -24192,7 +26087,7 @@
         <p:spPr>
           <a:xfrm>
             <a:off x="228600" y="914400"/>
-            <a:ext cx="2742480" cy="3474000"/>
+            <a:ext cx="2741760" cy="3473280"/>
           </a:xfrm>
           <a:prstGeom prst="rect">
             <a:avLst/>
@@ -24242,7 +26137,7 @@
         <p:spPr>
           <a:xfrm>
             <a:off x="228600" y="1005840"/>
-            <a:ext cx="2742480" cy="639360"/>
+            <a:ext cx="2741760" cy="638640"/>
           </a:xfrm>
           <a:prstGeom prst="rect">
             <a:avLst/>
@@ -24303,7 +26198,7 @@
         <p:spPr>
           <a:xfrm>
             <a:off x="228600" y="1691640"/>
-            <a:ext cx="2742480" cy="456480"/>
+            <a:ext cx="2741760" cy="455760"/>
           </a:xfrm>
           <a:prstGeom prst="rect">
             <a:avLst/>
@@ -24364,7 +26259,7 @@
         <p:spPr>
           <a:xfrm>
             <a:off x="365760" y="2194560"/>
-            <a:ext cx="2468160" cy="2010960"/>
+            <a:ext cx="2467440" cy="2010240"/>
           </a:xfrm>
           <a:prstGeom prst="rect">
             <a:avLst/>
@@ -24425,7 +26320,7 @@
         <p:spPr>
           <a:xfrm>
             <a:off x="3200400" y="914400"/>
-            <a:ext cx="2742480" cy="3474000"/>
+            <a:ext cx="2741760" cy="3473280"/>
           </a:xfrm>
           <a:prstGeom prst="rect">
             <a:avLst/>
@@ -24475,7 +26370,7 @@
         <p:spPr>
           <a:xfrm>
             <a:off x="3200400" y="1005840"/>
-            <a:ext cx="2742480" cy="639360"/>
+            <a:ext cx="2741760" cy="638640"/>
           </a:xfrm>
           <a:prstGeom prst="rect">
             <a:avLst/>
@@ -24536,7 +26431,7 @@
         <p:spPr>
           <a:xfrm>
             <a:off x="3200400" y="1691640"/>
-            <a:ext cx="2742480" cy="456480"/>
+            <a:ext cx="2741760" cy="455760"/>
           </a:xfrm>
           <a:prstGeom prst="rect">
             <a:avLst/>
@@ -24597,7 +26492,7 @@
         <p:spPr>
           <a:xfrm>
             <a:off x="3337560" y="2194560"/>
-            <a:ext cx="2468160" cy="2010960"/>
+            <a:ext cx="2467440" cy="2010240"/>
           </a:xfrm>
           <a:prstGeom prst="rect">
             <a:avLst/>
@@ -24658,7 +26553,7 @@
         <p:spPr>
           <a:xfrm>
             <a:off x="6172200" y="914400"/>
-            <a:ext cx="2742480" cy="3474000"/>
+            <a:ext cx="2741760" cy="3473280"/>
           </a:xfrm>
           <a:prstGeom prst="rect">
             <a:avLst/>
@@ -24708,7 +26603,7 @@
         <p:spPr>
           <a:xfrm>
             <a:off x="6172200" y="1005840"/>
-            <a:ext cx="2742480" cy="639360"/>
+            <a:ext cx="2741760" cy="638640"/>
           </a:xfrm>
           <a:prstGeom prst="rect">
             <a:avLst/>
@@ -24769,7 +26664,7 @@
         <p:spPr>
           <a:xfrm>
             <a:off x="6172200" y="1691640"/>
-            <a:ext cx="2742480" cy="456480"/>
+            <a:ext cx="2741760" cy="455760"/>
           </a:xfrm>
           <a:prstGeom prst="rect">
             <a:avLst/>
@@ -24830,7 +26725,7 @@
         <p:spPr>
           <a:xfrm>
             <a:off x="6309360" y="2194560"/>
-            <a:ext cx="2468160" cy="2010960"/>
+            <a:ext cx="2467440" cy="2010240"/>
           </a:xfrm>
           <a:prstGeom prst="rect">
             <a:avLst/>
@@ -24891,7 +26786,7 @@
         <p:spPr>
           <a:xfrm>
             <a:off x="182880" y="4663440"/>
-            <a:ext cx="8777520" cy="319320"/>
+            <a:ext cx="8776800" cy="318600"/>
           </a:xfrm>
           <a:prstGeom prst="rect">
             <a:avLst/>
@@ -24989,7 +26884,7 @@
         <p:spPr>
           <a:xfrm>
             <a:off x="0" y="0"/>
-            <a:ext cx="9143280" cy="90720"/>
+            <a:ext cx="9142560" cy="90000"/>
           </a:xfrm>
           <a:prstGeom prst="rect">
             <a:avLst/>
@@ -25032,7 +26927,7 @@
         <p:spPr>
           <a:xfrm>
             <a:off x="0" y="5052240"/>
-            <a:ext cx="9143280" cy="90720"/>
+            <a:ext cx="9142560" cy="90000"/>
           </a:xfrm>
           <a:prstGeom prst="rect">
             <a:avLst/>
@@ -25075,7 +26970,7 @@
         <p:spPr>
           <a:xfrm>
             <a:off x="457200" y="1645920"/>
-            <a:ext cx="8228880" cy="1828080"/>
+            <a:ext cx="8228160" cy="1827360"/>
           </a:xfrm>
           <a:prstGeom prst="rect">
             <a:avLst/>
